--- a/Claude_Code.pptx
+++ b/Claude_Code.pptx
@@ -516,7 +516,7 @@
             <a:r>
               <a:rPr lang="en-US" dirty="0"/>
               <a:t>Deschiderea: ăsta e un brief intern, nu o prezentare de vânzare. Acoperim ce e Claude Code, vocabularul de reținut (MCP, Skills, Subagents), ce face bine și comenzile pe care merită să le ții minte.
-Audiența e mixtă — engineeri ȘI non-engineeri (PM-i, design). Scopul e înțelegere comună, nu evangelizare. La final, toată lumea să știe ce înseamnă când un coleg zice „am folosit Claude Code să fac refactor la auth layer".
+Audiența: engineeri. Scopul e înțelegere comună a vocabularului și capabilităților, nu evangelizare. La final, toată lumea să aibă referințe clare când apare Claude Code într-o discuție tehnică.
 Durata: ~15-20 min cu discuție. Pauze pentru întrebări după slide-urile de concepte (MCP, Skills, Subagents) — alea sunt cele mai dense.</a:t>
             </a:r>
             <a:endParaRPr lang="en-US" dirty="0"/>
@@ -611,7 +611,7 @@
 • Etapa 3 (Act) — unde se duce majoritatea timpului. Depinde de mărimea task-ului.
 • Etapa 4 (Verify) — automată când există teste care rulează rapid.
 Dacă planul din etapa 2 nu se aliniază cu ce ai vrut, poți întrerupe cu Ctrl+C și reformula. Nu e necesar să lași bucla să se execute dacă direcția e greșită — devine parte din flow-ul iterativ.
-Pentru audiența non-tech: ce trebuie reținut nu sunt detaliile tehnice. E că Claude afișează ce face la fiecare etapă. Procesul e vizibil și întreruptibil — nu e o cutie neagră.
+Procesul e observabil step-by-step — util pentru debugging când ceva iese prost. Dacă verify-ul eșuează, vezi exact la ce etapă și cu ce context a luat decizia greșită.
 Exemplu similar poate fi folosit ca demo live — mic task pe un proiect local.</a:t>
             </a:r>
             <a:endParaRPr lang="en-US" dirty="0"/>
@@ -707,7 +707,7 @@
 • JetBrains — plugin cu funcționalitate similară, pentru IntelliJ, PyCharm, WebStorm.
 • Desktop app — versiune nativă pentru macOS/Windows.
 • Web (claude.ai/code) — rulează în cloud, fără setup local. Util pentru task-uri lungi care pot rula în background.
-• iOS — permite începerea unui task de pe telefon, cu rezultatele accesibile ulterior.
+• Mobile — apps native iOS (din oct 2025) și Android (din martie 2026). Permite începerea unui task de pe telefon, cu rezultatele accesibile ulterior.
 GitHub Actions e singurul surface non-interactiv — se invocă prin tag-uirea @claude în PR-uri sau issue-uri, util pentru automatizare CI.
 Toate surface-urile împart același cont și configurare — aceleași skills, aceleași MCP servers, aceeași ierarhie CLAUDE.md.</a:t>
             </a:r>
@@ -803,8 +803,7 @@
 1. Understand code — read-only, fără modificări. Util pentru familiarizare cu un proiect necunoscut.
 2. Fix a bug — scope focalizat, verificabil prin teste.
 3. Build a feature — modificări multiple, necesită review atent al diff-ului.
-Notă de prompting: specificitatea constraint-urilor influențează calitatea rezultatului. „Adaugă paginare" e vag. „Adaugă paginare cursor-based la /users cu page size 20, urmând pattern-ul de error-handling din /posts" e specific și produce rezultate mai bine aliniate cu proiectul.
-Pentru cineva care nu știe vocabularul tehnic: descrierea problemei în limba normală e suficientă. Claude pune întrebări de clarificare când are nevoie.</a:t>
+Notă de prompting: specificitatea constraint-urilor influențează calitatea rezultatului. „Adaugă paginare" e vag. „Adaugă paginare cursor-based la /users cu page size 20, urmând pattern-ul de error-handling din /posts" e specific și produce rezultate mai bine aliniate cu proiectul.</a:t>
             </a:r>
             <a:endParaRPr lang="en-US" dirty="0"/>
           </a:p>
@@ -901,6 +900,7 @@
 • `claude -p "..."` — mod non-interactiv. Rulează un prompt, afișează răspunsul, iese. Folosit în shell scripts și pipeline-uri CI.
 • `--permission-mode acceptEdits` — auto-aprobă modificările de fișiere. Util după ce workflow-ul e familiar.
 • `@` — referință la un fișier în prompt, ex: „explică @src/auth.ts".
+• `/memory` — vizualizează și editează memoria auto-salvată între sesiuni (v2.1.59+).
 Notă: Claude Code funcționează fără să memorezi aceste comenzi. Sunt shortcut-uri pentru folosire frecventă.</a:t>
             </a:r>
             <a:endParaRPr lang="en-US" dirty="0"/>
@@ -990,13 +990,9 @@
             <a:r>
               <a:rPr lang="en-US" dirty="0"/>
               <a:t>Pași concreți de încheiere:
-Pentru engineeri:
 1. Instalarea Claude Code (instrucțiuni pe docs.claude.com).
 2. Scrierea unui CLAUDE.md pentru proiectul principal — convenții, comenzi uzuale, pattern-uri de urmărit.
 3. Încercarea unui task concret: explicarea unui modul, fix la un bug, sau adăugarea unui test.
-Pentru PM-i / design:
-1. Accesarea claude.ai/code în browser — fără instalare.
-2. Încercarea pe un task specific muncii: sumar al unui repo, review pe un PR, draft pentru un spec tehnic.
 Pentru echipă (discuție ulterioară):
 1. Identificarea MCP servers care s-ar potrivi cu workflow-ul nostru (ex: GitHub, Jira).
 2. Discutarea experienței pe canalul de echipă.
@@ -1183,7 +1179,6 @@
               <a:rPr lang="en-US" dirty="0"/>
               <a:t>„Agentic" înseamnă un sistem cu un scop, acces la tool-uri, și autonomia să continue până termină task-ul sau cere input.
 Cele patru etape (Understand → Plan → Act → Verify) sunt un model mental simplificat, nu o taxonomie oficială din docs. Pentru task-uri complexe, bucla se execută de mai multe ori — Claude încearcă ceva, realizează că-i lipsește context, mai citește fișiere, re-planifică, acționează din nou.
-Pentru audiența non-tech: AI-ul tradițional răspunde la întrebări. AI-ul agentic execută sarcini — primește un obiectiv, decide singur pașii, folosește tool-uri (citire fișiere, rulare comenzi), verifică rezultatul.
 Claude cere permisiune înainte de acțiuni semnificative (rulare comenzi, editări de fișiere). Autonomia e limitată prin permisiuni — tu rămâi la butoane.</a:t>
             </a:r>
             <a:endParaRPr lang="en-US" dirty="0"/>
@@ -6117,7 +6112,7 @@
                 <a:ea typeface="Calibri" pitchFamily="34" charset="-122"/>
                 <a:cs typeface="Calibri" pitchFamily="34" charset="-120"/>
               </a:rPr>
-              <a:t>Toggle plan mode</a:t>
+              <a:t>Cycle modes</a:t>
             </a:r>
             <a:endParaRPr lang="en-US" sz="1050" dirty="0"/>
           </a:p>

--- a/Claude_Code.pptx
+++ b/Claude_Code.pptx
@@ -8165,7 +8165,7 @@
                 <a:ea typeface="Calibri" pitchFamily="34" charset="-122"/>
                 <a:cs typeface="Calibri" pitchFamily="34" charset="-120"/>
               </a:rPr>
-              <a:t>Not autocomplete. An agent plans, takes actions with tools, observes the result, and keeps going until the task is done.</a:t>
+              <a:t>An agent has a goal, access to tools, and the autonomy to plan, act, observe the result, and keep going until the task is done.</a:t>
             </a:r>
             <a:endParaRPr lang="en-US" sz="1400" dirty="0"/>
           </a:p>

--- a/Claude_Code.pptx
+++ b/Claude_Code.pptx
@@ -18,6 +18,7 @@
     <p:sldId id="266" r:id="rId12"/>
     <p:sldId id="267" r:id="rId13"/>
     <p:sldId id="268" r:id="rId14"/>
+    <p:sldId id="270" r:id="rId21"/>
     <p:sldId id="269" r:id="rId15"/>
   </p:sldIdLst>
   <p:notesMasterIdLst>
@@ -1022,6 +1023,99 @@
             <a:fld id="{F7021451-1387-4CA6-816F-3879F97B5CBC}" type="slidenum">
               <a:rPr lang="en-US"/>
               <a:t>14</a:t>
+            </a:fld>
+            <a:endParaRPr lang="en-US"/>
+          </a:p>
+        </p:txBody>
+      </p:sp>
+    </p:spTree>
+    <p:extLst>
+      <p:ext uri="{BB962C8B-B14F-4D97-AF65-F5344CB8AC3E}">
+        <p14:creationId xmlns:p14="http://schemas.microsoft.com/office/powerpoint/2010/main" val="1024086991"/>
+      </p:ext>
+    </p:extLst>
+  </p:cSld>
+  <p:clrMapOvr>
+    <a:masterClrMapping/>
+  </p:clrMapOvr>
+</p:notes>
+</file>
+
+<file path=ppt/notesSlides/notesSlide15.xml><?xml version="1.0" encoding="utf-8"?>
+<p:notes xmlns:a="http://schemas.openxmlformats.org/drawingml/2006/main" xmlns:r="http://schemas.openxmlformats.org/officeDocument/2006/relationships" xmlns:p="http://schemas.openxmlformats.org/presentationml/2006/main">
+  <p:cSld>
+    <p:spTree>
+      <p:nvGrpSpPr>
+        <p:cNvPr id="1" name=""/>
+        <p:cNvGrpSpPr/>
+        <p:nvPr/>
+      </p:nvGrpSpPr>
+      <p:grpSpPr>
+        <a:xfrm>
+          <a:off x="0" y="0"/>
+          <a:ext cx="0" cy="0"/>
+          <a:chOff x="0" y="0"/>
+          <a:chExt cx="0" cy="0"/>
+        </a:xfrm>
+      </p:grpSpPr>
+      <p:sp>
+        <p:nvSpPr>
+          <p:cNvPr id="2" name="Slide Image Placeholder 1"/>
+          <p:cNvSpPr>
+            <a:spLocks noGrp="1" noRot="1" noChangeAspect="1"/>
+          </p:cNvSpPr>
+          <p:nvPr>
+            <p:ph type="sldImg"/>
+          </p:nvPr>
+        </p:nvSpPr>
+        <p:spPr/>
+      </p:sp>
+      <p:sp>
+        <p:nvSpPr>
+          <p:cNvPr id="3" name="Notes Placeholder 2"/>
+          <p:cNvSpPr>
+            <a:spLocks noGrp="1"/>
+          </p:cNvSpPr>
+          <p:nvPr>
+            <p:ph type="body" idx="1"/>
+          </p:nvPr>
+        </p:nvSpPr>
+        <p:spPr/>
+        <p:txBody>
+          <a:bodyPr/>
+          <a:lstStyle/>
+          <a:p>
+            <a:r>
+              <a:rPr lang="en-US" dirty="0"/>
+              <a:t>Acest slide e pentru onestitate și pentru a pregăti audiența să recunoască aceste tipare în practică. Niciuna dintre limitări nu e blocantă; toate sunt gestionabile cu review atent.
+• Context dropped: apare la sesiuni lungi, fișiere mari, sau zeci de tool calls. Claude poate să uite o decizie luată la începutul sesiunii. /clear resetează, /compact rezumă, @ aduce conținut la zi în context.
+• Plausible but wrong: cel mai insidios tip de eșec — codul compilează, testele trec, sintaxa e ok, dar comportamentul e greșit. Apare când API-ul real diferă de ce Claude presupune. Verifică cu documentația oficială sau rulări concrete, nu doar cu lint.
+• Hidden state: orice nu e în cod e invizibil pentru Claude — variabile de mediu, feature flags, convenții ne-scrise, comportamentul unui API extern. Dacă task-ul depinde de așa ceva, spune-i explicit: „backend-ul așteaptă camelCase” sau „feature flag X e on în prod”.
+• Own the diff: regula de bază. Claude e un contributor, nu un owner. Citește fiecare hunk ca și cum ar veni de la un coleg nou: nu presupune că înțelege convențiile proiectului la fel de bine ca tine. Green CI nu înseamnă corect.
+Mențiune: nu sunt toate limitările — doar cele mai des întâlnite în munca zilnică. Altele (matematică, rază de acțiune, latență) sunt contextuale și merită discutate separat.</a:t>
+            </a:r>
+            <a:endParaRPr lang="en-US" dirty="0"/>
+          </a:p>
+        </p:txBody>
+      </p:sp>
+      <p:sp>
+        <p:nvSpPr>
+          <p:cNvPr id="4" name="Slide Number Placeholder 3"/>
+          <p:cNvSpPr>
+            <a:spLocks noGrp="1"/>
+          </p:cNvSpPr>
+          <p:nvPr>
+            <p:ph type="sldNum" sz="quarter" idx="10"/>
+          </p:nvPr>
+        </p:nvSpPr>
+        <p:spPr/>
+        <p:txBody>
+          <a:bodyPr/>
+          <a:lstStyle/>
+          <a:p>
+            <a:fld id="{F7021451-1387-4CA6-816F-3879F97B5CBC}" type="slidenum">
+              <a:rPr lang="en-US"/>
+              <a:t>4</a:t>
             </a:fld>
             <a:endParaRPr lang="en-US"/>
           </a:p>
@@ -4721,7 +4815,7 @@
                 <a:ea typeface="Consolas" pitchFamily="34" charset="-122"/>
                 <a:cs typeface="Consolas" pitchFamily="34" charset="-120"/>
               </a:rPr>
-              <a:t>"Build a new API endpoint that returns user profiles and write the tests for it."</a:t>
+              <a:t>"Add GET /users/:id returning name, email, created_at. Match the error-handling in routes/posts.js. Include tests."</a:t>
             </a:r>
             <a:endParaRPr lang="en-US" sz="1100" dirty="0"/>
           </a:p>
@@ -4934,7 +5028,7 @@
                 <a:ea typeface="Consolas" pitchFamily="34" charset="-122"/>
                 <a:cs typeface="Consolas" pitchFamily="34" charset="-120"/>
               </a:rPr>
-              <a:t>"I'm getting this error on startup. Find the cause in the codebase and fix it."</a:t>
+              <a:t>"Startup throws 'Cannot read property X of undefined' from services/auth.ts:42. Find the cause and fix it."</a:t>
             </a:r>
             <a:endParaRPr lang="en-US" sz="1100" dirty="0"/>
           </a:p>
@@ -5147,7 +5241,7 @@
                 <a:ea typeface="Consolas" pitchFamily="34" charset="-122"/>
                 <a:cs typeface="Consolas" pitchFamily="34" charset="-120"/>
               </a:rPr>
-              <a:t>"Walk me through how our authentication system works. Show the important files."</a:t>
+              <a:t>"Walk me through auth end-to-end. Start at the login endpoint; call out the token validation path."</a:t>
             </a:r>
             <a:endParaRPr lang="en-US" sz="1100" dirty="0"/>
           </a:p>
@@ -6988,7 +7082,7 @@
                 <a:ea typeface="Calibri" pitchFamily="34" charset="-122"/>
                 <a:cs typeface="Calibri" pitchFamily="34" charset="-120"/>
               </a:rPr>
-              <a:t>Start with /clear and Shift+Tab — those two cover 80% of day-to-day session control.</a:t>
+              <a:t>Start with /clear and Shift+Tab — the two you'll use most often.</a:t>
             </a:r>
             <a:endParaRPr lang="en-US" sz="1000" dirty="0"/>
           </a:p>
@@ -7458,6 +7552,986 @@
                 <a:ea typeface="Calibri" pitchFamily="34" charset="-122"/>
                 <a:cs typeface="Calibri" pitchFamily="34" charset="-120"/>
               </a:rPr>
+              <a:t>15</a:t>
+            </a:r>
+            <a:endParaRPr lang="en-US" sz="1000" dirty="0"/>
+          </a:p>
+        </p:txBody>
+      </p:sp>
+    </p:spTree>
+  </p:cSld>
+  <p:clrMapOvr>
+    <a:masterClrMapping/>
+  </p:clrMapOvr>
+</p:sld>
+</file>
+
+<file path=ppt/slides/slide15.xml><?xml version="1.0" encoding="utf-8"?>
+<p:sld xmlns:a="http://schemas.openxmlformats.org/drawingml/2006/main" xmlns:r="http://schemas.openxmlformats.org/officeDocument/2006/relationships" xmlns:p="http://schemas.openxmlformats.org/presentationml/2006/main">
+  <p:cSld name="Slide 15">
+    <p:bg>
+      <p:bgPr>
+        <a:solidFill>
+          <a:srgbClr val="F7F5F0"/>
+        </a:solidFill>
+      </p:bgPr>
+    </p:bg>
+    <p:spTree>
+      <p:nvGrpSpPr>
+        <p:cNvPr id="1" name=""/>
+        <p:cNvGrpSpPr/>
+        <p:nvPr/>
+      </p:nvGrpSpPr>
+      <p:grpSpPr>
+        <a:xfrm>
+          <a:off x="0" y="0"/>
+          <a:ext cx="0" cy="0"/>
+          <a:chOff x="0" y="0"/>
+          <a:chExt cx="0" cy="0"/>
+        </a:xfrm>
+      </p:grpSpPr>
+      <p:sp>
+        <p:nvSpPr>
+          <p:cNvPr id="2" name="Text 0"/>
+          <p:cNvSpPr/>
+          <p:nvPr/>
+        </p:nvSpPr>
+        <p:spPr>
+          <a:xfrm>
+            <a:off x="502920" y="411480"/>
+            <a:ext cx="6400800" cy="274320"/>
+          </a:xfrm>
+          <a:prstGeom prst="rect">
+            <a:avLst/>
+          </a:prstGeom>
+          <a:noFill/>
+          <a:ln/>
+        </p:spPr>
+        <p:txBody>
+          <a:bodyPr wrap="square" lIns="0" tIns="0" rIns="0" bIns="0" rtlCol="0" anchor="ctr"/>
+          <a:lstStyle/>
+          <a:p>
+            <a:pPr indent="0" marL="0">
+              <a:buNone/>
+            </a:pPr>
+            <a:r>
+              <a:rPr lang="en-US" sz="1000" b="1" spc="400" kern="0" dirty="0">
+                <a:solidFill>
+                  <a:srgbClr val="CC785C"/>
+                </a:solidFill>
+                <a:latin typeface="Calibri" pitchFamily="34" charset="0"/>
+                <a:ea typeface="Calibri" pitchFamily="34" charset="-122"/>
+                <a:cs typeface="Calibri" pitchFamily="34" charset="-120"/>
+              </a:rPr>
+              <a:t>13  —  LIMITATIONS</a:t>
+            </a:r>
+            <a:endParaRPr lang="en-US" sz="1000" dirty="0"/>
+          </a:p>
+        </p:txBody>
+      </p:sp>
+      <p:sp>
+        <p:nvSpPr>
+          <p:cNvPr id="3" name="Text 1"/>
+          <p:cNvSpPr/>
+          <p:nvPr/>
+        </p:nvSpPr>
+        <p:spPr>
+          <a:xfrm>
+            <a:off x="502920" y="731520"/>
+            <a:ext cx="8229600" cy="685800"/>
+          </a:xfrm>
+          <a:prstGeom prst="rect">
+            <a:avLst/>
+          </a:prstGeom>
+          <a:noFill/>
+          <a:ln/>
+        </p:spPr>
+        <p:txBody>
+          <a:bodyPr wrap="square" lIns="0" tIns="0" rIns="0" bIns="0" rtlCol="0" anchor="ctr"/>
+          <a:lstStyle/>
+          <a:p>
+            <a:pPr indent="0" marL="0">
+              <a:buNone/>
+            </a:pPr>
+            <a:r>
+              <a:rPr lang="en-US" sz="3600" b="1" dirty="0">
+                <a:solidFill>
+                  <a:srgbClr val="1A1B1F"/>
+                </a:solidFill>
+                <a:latin typeface="Georgia" pitchFamily="34" charset="0"/>
+                <a:ea typeface="Georgia" pitchFamily="34" charset="-122"/>
+                <a:cs typeface="Georgia" pitchFamily="34" charset="-120"/>
+              </a:rPr>
+              <a:t>Where it falls short</a:t>
+            </a:r>
+            <a:endParaRPr lang="en-US" sz="3600" dirty="0"/>
+          </a:p>
+        </p:txBody>
+      </p:sp>
+      <p:sp>
+        <p:nvSpPr>
+          <p:cNvPr id="4" name="Text 2"/>
+          <p:cNvSpPr/>
+          <p:nvPr/>
+        </p:nvSpPr>
+        <p:spPr>
+          <a:xfrm>
+            <a:off x="502920" y="1417320"/>
+            <a:ext cx="8229600" cy="365760"/>
+          </a:xfrm>
+          <a:prstGeom prst="rect">
+            <a:avLst/>
+          </a:prstGeom>
+          <a:noFill/>
+          <a:ln/>
+        </p:spPr>
+        <p:txBody>
+          <a:bodyPr wrap="square" lIns="0" tIns="0" rIns="0" bIns="0" rtlCol="0" anchor="ctr"/>
+          <a:lstStyle/>
+          <a:p>
+            <a:pPr indent="0" marL="0">
+              <a:buNone/>
+            </a:pPr>
+            <a:r>
+              <a:rPr lang="en-US" sz="1300" i="1" dirty="0">
+                <a:solidFill>
+                  <a:srgbClr val="6B6A66"/>
+                </a:solidFill>
+                <a:latin typeface="Calibri" pitchFamily="34" charset="0"/>
+                <a:ea typeface="Calibri" pitchFamily="34" charset="-122"/>
+                <a:cs typeface="Calibri" pitchFamily="34" charset="-120"/>
+              </a:rPr>
+              <a:t>Knowing the failure modes makes you faster at catching them. Always read the diff.</a:t>
+            </a:r>
+            <a:endParaRPr lang="en-US" sz="1300" dirty="0"/>
+          </a:p>
+        </p:txBody>
+      </p:sp>
+      <p:sp>
+        <p:nvSpPr>
+          <p:cNvPr id="5" name="Shape 3"/>
+          <p:cNvSpPr/>
+          <p:nvPr/>
+        </p:nvSpPr>
+        <p:spPr>
+          <a:xfrm>
+            <a:off x="502920" y="1965960"/>
+            <a:ext cx="4023360" cy="1371600"/>
+          </a:xfrm>
+          <a:prstGeom prst="rect">
+            <a:avLst/>
+          </a:prstGeom>
+          <a:solidFill>
+            <a:srgbClr val="FFFFFF"/>
+          </a:solidFill>
+          <a:ln w="9525">
+            <a:solidFill>
+              <a:srgbClr val="E3DFD7"/>
+            </a:solidFill>
+            <a:prstDash val="solid"/>
+          </a:ln>
+          <a:effectLst>
+            <a:outerShdw sx="100000" sy="100000" kx="0" ky="0" algn="bl" rotWithShape="0" blurRad="127000" dist="25400" dir="5400000">
+              <a:srgbClr val="000000">
+                <a:alpha val="8000"/>
+              </a:srgbClr>
+            </a:outerShdw>
+          </a:effectLst>
+        </p:spPr>
+      </p:sp>
+      <p:sp>
+        <p:nvSpPr>
+          <p:cNvPr id="6" name="Shape 4"/>
+          <p:cNvSpPr/>
+          <p:nvPr/>
+        </p:nvSpPr>
+        <p:spPr>
+          <a:xfrm>
+            <a:off x="502920" y="1965960"/>
+            <a:ext cx="64008" cy="1371600"/>
+          </a:xfrm>
+          <a:prstGeom prst="rect">
+            <a:avLst/>
+          </a:prstGeom>
+          <a:solidFill>
+            <a:srgbClr val="CC785C"/>
+          </a:solidFill>
+          <a:ln w="12700">
+            <a:solidFill>
+              <a:srgbClr val="CC785C"/>
+            </a:solidFill>
+            <a:prstDash val="solid"/>
+          </a:ln>
+        </p:spPr>
+      </p:sp>
+      <p:pic>
+        <p:nvPicPr>
+          <p:cNvPr id="7" name="Image 0" descr="preencoded.png">    </p:cNvPr>
+          <p:cNvPicPr>
+            <a:picLocks noChangeAspect="1"/>
+          </p:cNvPicPr>
+          <p:nvPr/>
+        </p:nvPicPr>
+        <p:blipFill>
+          <a:blip r:embed="rId1"/>
+          <a:stretch>
+            <a:fillRect/>
+          </a:stretch>
+        </p:blipFill>
+        <p:spPr>
+          <a:xfrm>
+            <a:off x="758952" y="2194560"/>
+            <a:ext cx="320040" cy="320040"/>
+          </a:xfrm>
+          <a:prstGeom prst="rect">
+            <a:avLst/>
+          </a:prstGeom>
+        </p:spPr>
+      </p:pic>
+      <p:sp>
+        <p:nvSpPr>
+          <p:cNvPr id="8" name="Text 5"/>
+          <p:cNvSpPr/>
+          <p:nvPr/>
+        </p:nvSpPr>
+        <p:spPr>
+          <a:xfrm>
+            <a:off x="1188720" y="2130552"/>
+            <a:ext cx="3200400" cy="320040"/>
+          </a:xfrm>
+          <a:prstGeom prst="rect">
+            <a:avLst/>
+          </a:prstGeom>
+          <a:noFill/>
+          <a:ln/>
+        </p:spPr>
+        <p:txBody>
+          <a:bodyPr wrap="square" lIns="0" tIns="0" rIns="0" bIns="0" rtlCol="0" anchor="ctr"/>
+          <a:lstStyle/>
+          <a:p>
+            <a:pPr indent="0" marL="0">
+              <a:buNone/>
+            </a:pPr>
+            <a:r>
+              <a:rPr lang="en-US" sz="1800" b="1" dirty="0">
+                <a:solidFill>
+                  <a:srgbClr val="1A1B1F"/>
+                </a:solidFill>
+                <a:latin typeface="Georgia" pitchFamily="34" charset="0"/>
+                <a:ea typeface="Georgia" pitchFamily="34" charset="-122"/>
+                <a:cs typeface="Georgia" pitchFamily="34" charset="-120"/>
+              </a:rPr>
+              <a:t>Context</a:t>
+            </a:r>
+            <a:endParaRPr lang="en-US" sz="1800" dirty="0"/>
+          </a:p>
+        </p:txBody>
+      </p:sp>
+      <p:sp>
+        <p:nvSpPr>
+          <p:cNvPr id="9" name="Text 6"/>
+          <p:cNvSpPr/>
+          <p:nvPr/>
+        </p:nvSpPr>
+        <p:spPr>
+          <a:xfrm>
+            <a:off x="1188720" y="2423160"/>
+            <a:ext cx="3200400" cy="219456"/>
+          </a:xfrm>
+          <a:prstGeom prst="rect">
+            <a:avLst/>
+          </a:prstGeom>
+          <a:noFill/>
+          <a:ln/>
+        </p:spPr>
+        <p:txBody>
+          <a:bodyPr wrap="square" lIns="0" tIns="0" rIns="0" bIns="0" rtlCol="0" anchor="ctr"/>
+          <a:lstStyle/>
+          <a:p>
+            <a:pPr indent="0" marL="0">
+              <a:buNone/>
+            </a:pPr>
+            <a:r>
+              <a:rPr lang="en-US" sz="1000" b="1" spc="200" kern="0" dirty="0">
+                <a:solidFill>
+                  <a:srgbClr val="CC785C"/>
+                </a:solidFill>
+                <a:latin typeface="Calibri" pitchFamily="34" charset="0"/>
+                <a:ea typeface="Calibri" pitchFamily="34" charset="-122"/>
+                <a:cs typeface="Calibri" pitchFamily="34" charset="-120"/>
+              </a:rPr>
+              <a:t>Dropped details</a:t>
+            </a:r>
+            <a:endParaRPr lang="en-US" sz="1000" dirty="0"/>
+          </a:p>
+        </p:txBody>
+      </p:sp>
+      <p:sp>
+        <p:nvSpPr>
+          <p:cNvPr id="10" name="Text 7"/>
+          <p:cNvSpPr/>
+          <p:nvPr/>
+        </p:nvSpPr>
+        <p:spPr>
+          <a:xfrm>
+            <a:off x="758952" y="2697480"/>
+            <a:ext cx="3611880" cy="594360"/>
+          </a:xfrm>
+          <a:prstGeom prst="rect">
+            <a:avLst/>
+          </a:prstGeom>
+          <a:noFill/>
+          <a:ln/>
+        </p:spPr>
+        <p:txBody>
+          <a:bodyPr wrap="square" lIns="0" tIns="0" rIns="0" bIns="0" rtlCol="0" anchor="ctr"/>
+          <a:lstStyle/>
+          <a:p>
+            <a:pPr indent="0" marL="0">
+              <a:buNone/>
+            </a:pPr>
+            <a:r>
+              <a:rPr lang="en-US" sz="1100" dirty="0">
+                <a:solidFill>
+                  <a:srgbClr val="6B6A66"/>
+                </a:solidFill>
+                <a:latin typeface="Calibri" pitchFamily="34" charset="0"/>
+                <a:ea typeface="Calibri" pitchFamily="34" charset="-122"/>
+                <a:cs typeface="Calibri" pitchFamily="34" charset="-120"/>
+              </a:rPr>
+              <a:t>Long sessions and huge files strain the context window; earlier details get dropped. Reset with /clear, trim with /compact, point with @.</a:t>
+            </a:r>
+            <a:endParaRPr lang="en-US" sz="1100" dirty="0"/>
+          </a:p>
+        </p:txBody>
+      </p:sp>
+      <p:sp>
+        <p:nvSpPr>
+          <p:cNvPr id="11" name="Shape 8"/>
+          <p:cNvSpPr/>
+          <p:nvPr/>
+        </p:nvSpPr>
+        <p:spPr>
+          <a:xfrm>
+            <a:off x="4617720" y="1965960"/>
+            <a:ext cx="4023360" cy="1371600"/>
+          </a:xfrm>
+          <a:prstGeom prst="rect">
+            <a:avLst/>
+          </a:prstGeom>
+          <a:solidFill>
+            <a:srgbClr val="FFFFFF"/>
+          </a:solidFill>
+          <a:ln w="9525">
+            <a:solidFill>
+              <a:srgbClr val="E3DFD7"/>
+            </a:solidFill>
+            <a:prstDash val="solid"/>
+          </a:ln>
+          <a:effectLst>
+            <a:outerShdw sx="100000" sy="100000" kx="0" ky="0" algn="bl" rotWithShape="0" blurRad="127000" dist="25400" dir="5400000">
+              <a:srgbClr val="000000">
+                <a:alpha val="8000"/>
+              </a:srgbClr>
+            </a:outerShdw>
+          </a:effectLst>
+        </p:spPr>
+      </p:sp>
+      <p:sp>
+        <p:nvSpPr>
+          <p:cNvPr id="12" name="Shape 9"/>
+          <p:cNvSpPr/>
+          <p:nvPr/>
+        </p:nvSpPr>
+        <p:spPr>
+          <a:xfrm>
+            <a:off x="4617720" y="1965960"/>
+            <a:ext cx="64008" cy="1371600"/>
+          </a:xfrm>
+          <a:prstGeom prst="rect">
+            <a:avLst/>
+          </a:prstGeom>
+          <a:solidFill>
+            <a:srgbClr val="CC785C"/>
+          </a:solidFill>
+          <a:ln w="12700">
+            <a:solidFill>
+              <a:srgbClr val="CC785C"/>
+            </a:solidFill>
+            <a:prstDash val="solid"/>
+          </a:ln>
+        </p:spPr>
+      </p:sp>
+      <p:pic>
+        <p:nvPicPr>
+          <p:cNvPr id="13" name="Image 1" descr="preencoded.png">    </p:cNvPr>
+          <p:cNvPicPr>
+            <a:picLocks noChangeAspect="1"/>
+          </p:cNvPicPr>
+          <p:nvPr/>
+        </p:nvPicPr>
+        <p:blipFill>
+          <a:blip r:embed="rId2"/>
+          <a:stretch>
+            <a:fillRect/>
+          </a:stretch>
+        </p:blipFill>
+        <p:spPr>
+          <a:xfrm>
+            <a:off x="4873752" y="2194560"/>
+            <a:ext cx="320040" cy="320040"/>
+          </a:xfrm>
+          <a:prstGeom prst="rect">
+            <a:avLst/>
+          </a:prstGeom>
+        </p:spPr>
+      </p:pic>
+      <p:sp>
+        <p:nvSpPr>
+          <p:cNvPr id="14" name="Text 10"/>
+          <p:cNvSpPr/>
+          <p:nvPr/>
+        </p:nvSpPr>
+        <p:spPr>
+          <a:xfrm>
+            <a:off x="5303520" y="2130552"/>
+            <a:ext cx="3200400" cy="320040"/>
+          </a:xfrm>
+          <a:prstGeom prst="rect">
+            <a:avLst/>
+          </a:prstGeom>
+          <a:noFill/>
+          <a:ln/>
+        </p:spPr>
+        <p:txBody>
+          <a:bodyPr wrap="square" lIns="0" tIns="0" rIns="0" bIns="0" rtlCol="0" anchor="ctr"/>
+          <a:lstStyle/>
+          <a:p>
+            <a:pPr indent="0" marL="0">
+              <a:buNone/>
+            </a:pPr>
+            <a:r>
+              <a:rPr lang="en-US" sz="1800" b="1" dirty="0">
+                <a:solidFill>
+                  <a:srgbClr val="1A1B1F"/>
+                </a:solidFill>
+                <a:latin typeface="Georgia" pitchFamily="34" charset="0"/>
+                <a:ea typeface="Georgia" pitchFamily="34" charset="-122"/>
+                <a:cs typeface="Georgia" pitchFamily="34" charset="-120"/>
+              </a:rPr>
+              <a:t>Hallucinations</a:t>
+            </a:r>
+            <a:endParaRPr lang="en-US" sz="1800" dirty="0"/>
+          </a:p>
+        </p:txBody>
+      </p:sp>
+      <p:sp>
+        <p:nvSpPr>
+          <p:cNvPr id="15" name="Text 11"/>
+          <p:cNvSpPr/>
+          <p:nvPr/>
+        </p:nvSpPr>
+        <p:spPr>
+          <a:xfrm>
+            <a:off x="5303520" y="2423160"/>
+            <a:ext cx="3200400" cy="219456"/>
+          </a:xfrm>
+          <a:prstGeom prst="rect">
+            <a:avLst/>
+          </a:prstGeom>
+          <a:noFill/>
+          <a:ln/>
+        </p:spPr>
+        <p:txBody>
+          <a:bodyPr wrap="square" lIns="0" tIns="0" rIns="0" bIns="0" rtlCol="0" anchor="ctr"/>
+          <a:lstStyle/>
+          <a:p>
+            <a:pPr indent="0" marL="0">
+              <a:buNone/>
+            </a:pPr>
+            <a:r>
+              <a:rPr lang="en-US" sz="1000" b="1" spc="200" kern="0" dirty="0">
+                <a:solidFill>
+                  <a:srgbClr val="CC785C"/>
+                </a:solidFill>
+                <a:latin typeface="Calibri" pitchFamily="34" charset="0"/>
+                <a:ea typeface="Calibri" pitchFamily="34" charset="-122"/>
+                <a:cs typeface="Calibri" pitchFamily="34" charset="-120"/>
+              </a:rPr>
+              <a:t>Plausible but wrong</a:t>
+            </a:r>
+            <a:endParaRPr lang="en-US" sz="1000" dirty="0"/>
+          </a:p>
+        </p:txBody>
+      </p:sp>
+      <p:sp>
+        <p:nvSpPr>
+          <p:cNvPr id="16" name="Text 12"/>
+          <p:cNvSpPr/>
+          <p:nvPr/>
+        </p:nvSpPr>
+        <p:spPr>
+          <a:xfrm>
+            <a:off x="4873752" y="2697480"/>
+            <a:ext cx="3611880" cy="594360"/>
+          </a:xfrm>
+          <a:prstGeom prst="rect">
+            <a:avLst/>
+          </a:prstGeom>
+          <a:noFill/>
+          <a:ln/>
+        </p:spPr>
+        <p:txBody>
+          <a:bodyPr wrap="square" lIns="0" tIns="0" rIns="0" bIns="0" rtlCol="0" anchor="ctr"/>
+          <a:lstStyle/>
+          <a:p>
+            <a:pPr indent="0" marL="0">
+              <a:buNone/>
+            </a:pPr>
+            <a:r>
+              <a:rPr lang="en-US" sz="1100" dirty="0">
+                <a:solidFill>
+                  <a:srgbClr val="6B6A66"/>
+                </a:solidFill>
+                <a:latin typeface="Calibri" pitchFamily="34" charset="0"/>
+                <a:ea typeface="Calibri" pitchFamily="34" charset="-122"/>
+                <a:cs typeface="Calibri" pitchFamily="34" charset="-120"/>
+              </a:rPr>
+              <a:t>When evidence is thin, Claude still answers assertively. Verify behavior and APIs — not just that the code compiles.</a:t>
+            </a:r>
+            <a:endParaRPr lang="en-US" sz="1100" dirty="0"/>
+          </a:p>
+        </p:txBody>
+      </p:sp>
+      <p:sp>
+        <p:nvSpPr>
+          <p:cNvPr id="17" name="Shape 13"/>
+          <p:cNvSpPr/>
+          <p:nvPr/>
+        </p:nvSpPr>
+        <p:spPr>
+          <a:xfrm>
+            <a:off x="502920" y="3429000"/>
+            <a:ext cx="4023360" cy="1371600"/>
+          </a:xfrm>
+          <a:prstGeom prst="rect">
+            <a:avLst/>
+          </a:prstGeom>
+          <a:solidFill>
+            <a:srgbClr val="FFFFFF"/>
+          </a:solidFill>
+          <a:ln w="9525">
+            <a:solidFill>
+              <a:srgbClr val="E3DFD7"/>
+            </a:solidFill>
+            <a:prstDash val="solid"/>
+          </a:ln>
+          <a:effectLst>
+            <a:outerShdw sx="100000" sy="100000" kx="0" ky="0" algn="bl" rotWithShape="0" blurRad="127000" dist="25400" dir="5400000">
+              <a:srgbClr val="000000">
+                <a:alpha val="8000"/>
+              </a:srgbClr>
+            </a:outerShdw>
+          </a:effectLst>
+        </p:spPr>
+      </p:sp>
+      <p:sp>
+        <p:nvSpPr>
+          <p:cNvPr id="18" name="Shape 14"/>
+          <p:cNvSpPr/>
+          <p:nvPr/>
+        </p:nvSpPr>
+        <p:spPr>
+          <a:xfrm>
+            <a:off x="502920" y="3429000"/>
+            <a:ext cx="64008" cy="1371600"/>
+          </a:xfrm>
+          <a:prstGeom prst="rect">
+            <a:avLst/>
+          </a:prstGeom>
+          <a:solidFill>
+            <a:srgbClr val="CC785C"/>
+          </a:solidFill>
+          <a:ln w="12700">
+            <a:solidFill>
+              <a:srgbClr val="CC785C"/>
+            </a:solidFill>
+            <a:prstDash val="solid"/>
+          </a:ln>
+        </p:spPr>
+      </p:sp>
+      <p:pic>
+        <p:nvPicPr>
+          <p:cNvPr id="19" name="Image 2" descr="preencoded.png">    </p:cNvPr>
+          <p:cNvPicPr>
+            <a:picLocks noChangeAspect="1"/>
+          </p:cNvPicPr>
+          <p:nvPr/>
+        </p:nvPicPr>
+        <p:blipFill>
+          <a:blip r:embed="rId3"/>
+          <a:stretch>
+            <a:fillRect/>
+          </a:stretch>
+        </p:blipFill>
+        <p:spPr>
+          <a:xfrm>
+            <a:off x="758952" y="3657600"/>
+            <a:ext cx="320040" cy="320040"/>
+          </a:xfrm>
+          <a:prstGeom prst="rect">
+            <a:avLst/>
+          </a:prstGeom>
+        </p:spPr>
+      </p:pic>
+      <p:sp>
+        <p:nvSpPr>
+          <p:cNvPr id="20" name="Text 15"/>
+          <p:cNvSpPr/>
+          <p:nvPr/>
+        </p:nvSpPr>
+        <p:spPr>
+          <a:xfrm>
+            <a:off x="1188720" y="3593592"/>
+            <a:ext cx="3200400" cy="320040"/>
+          </a:xfrm>
+          <a:prstGeom prst="rect">
+            <a:avLst/>
+          </a:prstGeom>
+          <a:noFill/>
+          <a:ln/>
+        </p:spPr>
+        <p:txBody>
+          <a:bodyPr wrap="square" lIns="0" tIns="0" rIns="0" bIns="0" rtlCol="0" anchor="ctr"/>
+          <a:lstStyle/>
+          <a:p>
+            <a:pPr indent="0" marL="0">
+              <a:buNone/>
+            </a:pPr>
+            <a:r>
+              <a:rPr lang="en-US" sz="1800" b="1" dirty="0">
+                <a:solidFill>
+                  <a:srgbClr val="1A1B1F"/>
+                </a:solidFill>
+                <a:latin typeface="Georgia" pitchFamily="34" charset="0"/>
+                <a:ea typeface="Georgia" pitchFamily="34" charset="-122"/>
+                <a:cs typeface="Georgia" pitchFamily="34" charset="-120"/>
+              </a:rPr>
+              <a:t>Hidden state</a:t>
+            </a:r>
+            <a:endParaRPr lang="en-US" sz="1800" dirty="0"/>
+          </a:p>
+        </p:txBody>
+      </p:sp>
+      <p:sp>
+        <p:nvSpPr>
+          <p:cNvPr id="21" name="Text 16"/>
+          <p:cNvSpPr/>
+          <p:nvPr/>
+        </p:nvSpPr>
+        <p:spPr>
+          <a:xfrm>
+            <a:off x="1188720" y="3886200"/>
+            <a:ext cx="3200400" cy="219456"/>
+          </a:xfrm>
+          <a:prstGeom prst="rect">
+            <a:avLst/>
+          </a:prstGeom>
+          <a:noFill/>
+          <a:ln/>
+        </p:spPr>
+        <p:txBody>
+          <a:bodyPr wrap="square" lIns="0" tIns="0" rIns="0" bIns="0" rtlCol="0" anchor="ctr"/>
+          <a:lstStyle/>
+          <a:p>
+            <a:pPr indent="0" marL="0">
+              <a:buNone/>
+            </a:pPr>
+            <a:r>
+              <a:rPr lang="en-US" sz="1000" b="1" spc="200" kern="0" dirty="0">
+                <a:solidFill>
+                  <a:srgbClr val="CC785C"/>
+                </a:solidFill>
+                <a:latin typeface="Calibri" pitchFamily="34" charset="0"/>
+                <a:ea typeface="Calibri" pitchFamily="34" charset="-122"/>
+                <a:cs typeface="Calibri" pitchFamily="34" charset="-120"/>
+              </a:rPr>
+              <a:t>Invisible to the code</a:t>
+            </a:r>
+            <a:endParaRPr lang="en-US" sz="1000" dirty="0"/>
+          </a:p>
+        </p:txBody>
+      </p:sp>
+      <p:sp>
+        <p:nvSpPr>
+          <p:cNvPr id="22" name="Text 17"/>
+          <p:cNvSpPr/>
+          <p:nvPr/>
+        </p:nvSpPr>
+        <p:spPr>
+          <a:xfrm>
+            <a:off x="758952" y="4160520"/>
+            <a:ext cx="3611880" cy="594360"/>
+          </a:xfrm>
+          <a:prstGeom prst="rect">
+            <a:avLst/>
+          </a:prstGeom>
+          <a:noFill/>
+          <a:ln/>
+        </p:spPr>
+        <p:txBody>
+          <a:bodyPr wrap="square" lIns="0" tIns="0" rIns="0" bIns="0" rtlCol="0" anchor="ctr"/>
+          <a:lstStyle/>
+          <a:p>
+            <a:pPr indent="0" marL="0">
+              <a:buNone/>
+            </a:pPr>
+            <a:r>
+              <a:rPr lang="en-US" sz="1100" dirty="0">
+                <a:solidFill>
+                  <a:srgbClr val="6B6A66"/>
+                </a:solidFill>
+                <a:latin typeface="Calibri" pitchFamily="34" charset="0"/>
+                <a:ea typeface="Calibri" pitchFamily="34" charset="-122"/>
+                <a:cs typeface="Calibri" pitchFamily="34" charset="-120"/>
+              </a:rPr>
+              <a:t>External APIs, runtime config, feature flags, and team conventions don't live in the code. Point Claude at them explicitly.</a:t>
+            </a:r>
+            <a:endParaRPr lang="en-US" sz="1100" dirty="0"/>
+          </a:p>
+        </p:txBody>
+      </p:sp>
+      <p:sp>
+        <p:nvSpPr>
+          <p:cNvPr id="23" name="Shape 18"/>
+          <p:cNvSpPr/>
+          <p:nvPr/>
+        </p:nvSpPr>
+        <p:spPr>
+          <a:xfrm>
+            <a:off x="4617720" y="3429000"/>
+            <a:ext cx="4023360" cy="1371600"/>
+          </a:xfrm>
+          <a:prstGeom prst="rect">
+            <a:avLst/>
+          </a:prstGeom>
+          <a:solidFill>
+            <a:srgbClr val="FFFFFF"/>
+          </a:solidFill>
+          <a:ln w="9525">
+            <a:solidFill>
+              <a:srgbClr val="E3DFD7"/>
+            </a:solidFill>
+            <a:prstDash val="solid"/>
+          </a:ln>
+          <a:effectLst>
+            <a:outerShdw sx="100000" sy="100000" kx="0" ky="0" algn="bl" rotWithShape="0" blurRad="127000" dist="25400" dir="5400000">
+              <a:srgbClr val="000000">
+                <a:alpha val="8000"/>
+              </a:srgbClr>
+            </a:outerShdw>
+          </a:effectLst>
+        </p:spPr>
+      </p:sp>
+      <p:sp>
+        <p:nvSpPr>
+          <p:cNvPr id="24" name="Shape 19"/>
+          <p:cNvSpPr/>
+          <p:nvPr/>
+        </p:nvSpPr>
+        <p:spPr>
+          <a:xfrm>
+            <a:off x="4617720" y="3429000"/>
+            <a:ext cx="64008" cy="1371600"/>
+          </a:xfrm>
+          <a:prstGeom prst="rect">
+            <a:avLst/>
+          </a:prstGeom>
+          <a:solidFill>
+            <a:srgbClr val="CC785C"/>
+          </a:solidFill>
+          <a:ln w="12700">
+            <a:solidFill>
+              <a:srgbClr val="CC785C"/>
+            </a:solidFill>
+            <a:prstDash val="solid"/>
+          </a:ln>
+        </p:spPr>
+      </p:sp>
+      <p:pic>
+        <p:nvPicPr>
+          <p:cNvPr id="25" name="Image 3" descr="preencoded.png">    </p:cNvPr>
+          <p:cNvPicPr>
+            <a:picLocks noChangeAspect="1"/>
+          </p:cNvPicPr>
+          <p:nvPr/>
+        </p:nvPicPr>
+        <p:blipFill>
+          <a:blip r:embed="rId4"/>
+          <a:stretch>
+            <a:fillRect/>
+          </a:stretch>
+        </p:blipFill>
+        <p:spPr>
+          <a:xfrm>
+            <a:off x="4873752" y="3657600"/>
+            <a:ext cx="320040" cy="320040"/>
+          </a:xfrm>
+          <a:prstGeom prst="rect">
+            <a:avLst/>
+          </a:prstGeom>
+        </p:spPr>
+      </p:pic>
+      <p:sp>
+        <p:nvSpPr>
+          <p:cNvPr id="26" name="Text 20"/>
+          <p:cNvSpPr/>
+          <p:nvPr/>
+        </p:nvSpPr>
+        <p:spPr>
+          <a:xfrm>
+            <a:off x="5303520" y="3593592"/>
+            <a:ext cx="3200400" cy="320040"/>
+          </a:xfrm>
+          <a:prstGeom prst="rect">
+            <a:avLst/>
+          </a:prstGeom>
+          <a:noFill/>
+          <a:ln/>
+        </p:spPr>
+        <p:txBody>
+          <a:bodyPr wrap="square" lIns="0" tIns="0" rIns="0" bIns="0" rtlCol="0" anchor="ctr"/>
+          <a:lstStyle/>
+          <a:p>
+            <a:pPr indent="0" marL="0">
+              <a:buNone/>
+            </a:pPr>
+            <a:r>
+              <a:rPr lang="en-US" sz="1800" b="1" dirty="0">
+                <a:solidFill>
+                  <a:srgbClr val="1A1B1F"/>
+                </a:solidFill>
+                <a:latin typeface="Georgia" pitchFamily="34" charset="0"/>
+                <a:ea typeface="Georgia" pitchFamily="34" charset="-122"/>
+                <a:cs typeface="Georgia" pitchFamily="34" charset="-120"/>
+              </a:rPr>
+              <a:t>Review</a:t>
+            </a:r>
+            <a:endParaRPr lang="en-US" sz="1800" dirty="0"/>
+          </a:p>
+        </p:txBody>
+      </p:sp>
+      <p:sp>
+        <p:nvSpPr>
+          <p:cNvPr id="27" name="Text 21"/>
+          <p:cNvSpPr/>
+          <p:nvPr/>
+        </p:nvSpPr>
+        <p:spPr>
+          <a:xfrm>
+            <a:off x="5303520" y="3886200"/>
+            <a:ext cx="3200400" cy="219456"/>
+          </a:xfrm>
+          <a:prstGeom prst="rect">
+            <a:avLst/>
+          </a:prstGeom>
+          <a:noFill/>
+          <a:ln/>
+        </p:spPr>
+        <p:txBody>
+          <a:bodyPr wrap="square" lIns="0" tIns="0" rIns="0" bIns="0" rtlCol="0" anchor="ctr"/>
+          <a:lstStyle/>
+          <a:p>
+            <a:pPr indent="0" marL="0">
+              <a:buNone/>
+            </a:pPr>
+            <a:r>
+              <a:rPr lang="en-US" sz="1000" b="1" spc="200" kern="0" dirty="0">
+                <a:solidFill>
+                  <a:srgbClr val="CC785C"/>
+                </a:solidFill>
+                <a:latin typeface="Calibri" pitchFamily="34" charset="0"/>
+                <a:ea typeface="Calibri" pitchFamily="34" charset="-122"/>
+                <a:cs typeface="Calibri" pitchFamily="34" charset="-120"/>
+              </a:rPr>
+              <a:t>You own the diff</a:t>
+            </a:r>
+            <a:endParaRPr lang="en-US" sz="1000" dirty="0"/>
+          </a:p>
+        </p:txBody>
+      </p:sp>
+      <p:sp>
+        <p:nvSpPr>
+          <p:cNvPr id="28" name="Text 22"/>
+          <p:cNvSpPr/>
+          <p:nvPr/>
+        </p:nvSpPr>
+        <p:spPr>
+          <a:xfrm>
+            <a:off x="4873752" y="4160520"/>
+            <a:ext cx="3611880" cy="594360"/>
+          </a:xfrm>
+          <a:prstGeom prst="rect">
+            <a:avLst/>
+          </a:prstGeom>
+          <a:noFill/>
+          <a:ln/>
+        </p:spPr>
+        <p:txBody>
+          <a:bodyPr wrap="square" lIns="0" tIns="0" rIns="0" bIns="0" rtlCol="0" anchor="ctr"/>
+          <a:lstStyle/>
+          <a:p>
+            <a:pPr indent="0" marL="0">
+              <a:buNone/>
+            </a:pPr>
+            <a:r>
+              <a:rPr lang="en-US" sz="1100" dirty="0">
+                <a:solidFill>
+                  <a:srgbClr val="6B6A66"/>
+                </a:solidFill>
+                <a:latin typeface="Calibri" pitchFamily="34" charset="0"/>
+                <a:ea typeface="Calibri" pitchFamily="34" charset="-122"/>
+                <a:cs typeface="Calibri" pitchFamily="34" charset="-120"/>
+              </a:rPr>
+              <a:t>Tests can pass on wrong code; commit messages can misstate intent. Read every hunk before merging — Claude is a contributor, not an owner.</a:t>
+            </a:r>
+            <a:endParaRPr lang="en-US" sz="1100" dirty="0"/>
+          </a:p>
+        </p:txBody>
+      </p:sp>
+      <p:sp>
+        <p:nvSpPr>
+          <p:cNvPr id="29" name="Text 23"/>
+          <p:cNvSpPr/>
+          <p:nvPr/>
+        </p:nvSpPr>
+        <p:spPr>
+          <a:xfrm>
+            <a:off x="8321040" y="4709160"/>
+            <a:ext cx="365760" cy="228600"/>
+          </a:xfrm>
+          <a:prstGeom prst="rect">
+            <a:avLst/>
+          </a:prstGeom>
+          <a:noFill/>
+          <a:ln/>
+        </p:spPr>
+        <p:txBody>
+          <a:bodyPr wrap="square" lIns="0" tIns="0" rIns="0" bIns="0" rtlCol="0" anchor="ctr"/>
+          <a:lstStyle/>
+          <a:p>
+            <a:pPr algn="r" indent="0" marL="0">
+              <a:buNone/>
+            </a:pPr>
+            <a:r>
+              <a:rPr lang="en-US" sz="1000" dirty="0">
+                <a:solidFill>
+                  <a:srgbClr val="6B6A66"/>
+                </a:solidFill>
+                <a:latin typeface="Calibri" pitchFamily="34" charset="0"/>
+                <a:ea typeface="Calibri" pitchFamily="34" charset="-122"/>
+                <a:cs typeface="Calibri" pitchFamily="34" charset="-120"/>
+              </a:rPr>
               <a:t>14</a:t>
             </a:r>
             <a:endParaRPr lang="en-US" sz="1000" dirty="0"/>
@@ -7607,7 +8681,7 @@
                 <a:ea typeface="Calibri" pitchFamily="34" charset="-122"/>
                 <a:cs typeface="Calibri" pitchFamily="34" charset="-120"/>
               </a:rPr>
-              <a:t>Claude Code is Anthropic's agentic coding assistant. It understands your codebase and works across files, tools, and terminals — through natural language.</a:t>
+              <a:t>Claude Code is Anthropic's agentic coding assistant. It reads your codebase, reasons over it, and works across files, tools, and terminals — through natural language.</a:t>
             </a:r>
             <a:endParaRPr lang="en-US" sz="1500" dirty="0"/>
           </a:p>
@@ -13695,7 +14769,7 @@
                 <a:ea typeface="Calibri" pitchFamily="34" charset="-122"/>
                 <a:cs typeface="Calibri" pitchFamily="34" charset="-120"/>
               </a:rPr>
-              <a:t>Give each subagent only the tools it needs. A reviewer can't run bash.</a:t>
+              <a:t>Give each subagent only the tools it needs — a reviewer doesn't need Bash.</a:t>
             </a:r>
             <a:endParaRPr lang="en-US" sz="1100" dirty="0"/>
           </a:p>
@@ -14537,7 +15611,7 @@
                 <a:ea typeface="Calibri" pitchFamily="34" charset="-122"/>
                 <a:cs typeface="Calibri" pitchFamily="34" charset="-120"/>
               </a:rPr>
-              <a:t>The work Claude Code takes off your plate — from first commit to production release.</a:t>
+              <a:t>Common categories of work people hand to Claude Code. You review the diff before it lands.</a:t>
             </a:r>
             <a:endParaRPr lang="en-US" sz="1300" dirty="0"/>
           </a:p>
@@ -14696,7 +15770,7 @@
                 <a:ea typeface="Calibri" pitchFamily="34" charset="-122"/>
                 <a:cs typeface="Calibri" pitchFamily="34" charset="-120"/>
               </a:rPr>
-              <a:t>Plans across files, writes code, and verifies it works.</a:t>
+              <a:t>Plans across files, writes code and tests, runs the suite.</a:t>
             </a:r>
             <a:endParaRPr lang="en-US" sz="1100" dirty="0"/>
           </a:p>
@@ -14855,7 +15929,7 @@
                 <a:ea typeface="Calibri" pitchFamily="34" charset="-122"/>
                 <a:cs typeface="Calibri" pitchFamily="34" charset="-120"/>
               </a:rPr>
-              <a:t>Traces errors to root cause and implements the fix.</a:t>
+              <a:t>Reads the stack trace, traces the cause, proposes a patch.</a:t>
             </a:r>
             <a:endParaRPr lang="en-US" sz="1100" dirty="0"/>
           </a:p>
@@ -15014,7 +16088,7 @@
                 <a:ea typeface="Calibri" pitchFamily="34" charset="-122"/>
                 <a:cs typeface="Calibri" pitchFamily="34" charset="-120"/>
               </a:rPr>
-              <a:t>Multi-file refactors at scale — safely and consistently.</a:t>
+              <a:t>Renames, restructures, or extracts across many files at once.</a:t>
             </a:r>
             <a:endParaRPr lang="en-US" sz="1100" dirty="0"/>
           </a:p>
@@ -15173,7 +16247,7 @@
                 <a:ea typeface="Calibri" pitchFamily="34" charset="-122"/>
                 <a:cs typeface="Calibri" pitchFamily="34" charset="-120"/>
               </a:rPr>
-              <a:t>Generates tests, runs the suite, iterates until green.</a:t>
+              <a:t>Generates tests, runs the suite, iterates on failures.</a:t>
             </a:r>
             <a:endParaRPr lang="en-US" sz="1100" dirty="0"/>
           </a:p>
@@ -15332,7 +16406,7 @@
                 <a:ea typeface="Calibri" pitchFamily="34" charset="-122"/>
                 <a:cs typeface="Calibri" pitchFamily="34" charset="-120"/>
               </a:rPr>
-              <a:t>Walks you through unfamiliar systems and dependencies.</a:t>
+              <a:t>Reads an unfamiliar system and walks you through it.</a:t>
             </a:r>
             <a:endParaRPr lang="en-US" sz="1100" dirty="0"/>
           </a:p>
@@ -15491,7 +16565,7 @@
                 <a:ea typeface="Calibri" pitchFamily="34" charset="-122"/>
                 <a:cs typeface="Calibri" pitchFamily="34" charset="-120"/>
               </a:rPr>
-              <a:t>Branches, commits, PRs, merge conflicts — all handled.</a:t>
+              <a:t>Drafts commits, resolves conflicts, opens PRs.</a:t>
             </a:r>
             <a:endParaRPr lang="en-US" sz="1100" dirty="0"/>
           </a:p>

--- a/Claude_Code.pptx
+++ b/Claude_Code.pptx
@@ -516,9 +516,10 @@
           <a:p>
             <a:r>
               <a:rPr lang="en-US" dirty="0"/>
-              <a:t>Deschiderea: ăsta e un brief intern, nu o prezentare de vânzare. Acoperim ce e Claude Code, vocabularul de reținut (MCP, Skills, Subagents), ce face bine și comenzile pe care merită să le ții minte.
-Audiența: engineeri. Scopul e înțelegere comună a vocabularului și capabilităților, nu evangelizare. La final, toată lumea să aibă referințe clare când apare Claude Code într-o discuție tehnică.
-Durata: ~15-20 min cu discuție. Pauze pentru întrebări după slide-urile de concepte (MCP, Skills, Subagents) — alea sunt cele mai dense.</a:t>
+              <a:t>Deschidere. Brief intern, nu vânzare.
+Parcurgem: ce este Claude Code, vocabularul (MCP, Skills, Subagents, CLAUDE.md), ce face bine, unde eșuează, comenzile de bază.
+Audiența e de engineeri. Scopul e înțelegere comună, nu evangelizare.
+Durata: ~15-20 min cu discuție. Pauze după slide-urile de concepte (MCP, Skills, Subagents) — sunt cele mai dense.</a:t>
             </a:r>
             <a:endParaRPr lang="en-US" dirty="0"/>
           </a:p>
@@ -606,14 +607,14 @@
           <a:p>
             <a:r>
               <a:rPr lang="en-US" dirty="0"/>
-              <a:t>Bucla abstractă din slide-ul 3, aplicată pe un task concret — „adaugă rate limiting la API".
-Timing aproximativ în practică:
-• Etapele 1-2 (Understand, Plan) — de obicei secunde, Claude citește câteva fișiere cheie.
-• Etapa 3 (Act) — unde se duce majoritatea timpului. Depinde de mărimea task-ului.
-• Etapa 4 (Verify) — automată când există teste care rulează rapid.
-Dacă planul din etapa 2 nu se aliniază cu ce ai vrut, poți întrerupe cu Ctrl+C și reformula. Nu e necesar să lași bucla să se execute dacă direcția e greșită — devine parte din flow-ul iterativ.
-Procesul e observabil step-by-step — util pentru debugging când ceva iese prost. Dacă verify-ul eșuează, vezi exact la ce etapă și cu ce context a luat decizia greșită.
-Exemplu similar poate fi folosit ca demo live — mic task pe un proiect local.</a:t>
+              <a:t>Bucla din slide 3, aplicată pe un task concret.
+Timing tipic:
+• Understand + Plan — secunde, câteva file reads
+• Act — majoritatea timpului, depinde de scope
+• Verify — automat dacă există teste rapide
+Dacă planul de la etapa 2 nu e bun, Ctrl+C și reformulare. Fără ceremonie.
+Procesul e observabil step-by-step — util pentru debugging când ceva iese prost. Dacă verify eșuează, vezi la ce etapă și cu ce context s-a greșit.
+Demo live posibil aici — task mic pe un proiect local.</a:t>
             </a:r>
             <a:endParaRPr lang="en-US" dirty="0"/>
           </a:p>
@@ -702,15 +703,14 @@
             <a:r>
               <a:rPr lang="en-US" dirty="0"/>
               <a:t>Același agent, interfețe diferite. Alegerea depinde de workflow.
-Orientare pentru echipă:
-• Terminal CLI — toate feature-urile disponibile, comenzi complete.
-• Extensia VS Code — diff viewer integrat, @-mentions în editor.
-• JetBrains — plugin cu funcționalitate similară, pentru IntelliJ, PyCharm, WebStorm.
-• Desktop app — versiune nativă pentru macOS/Windows.
-• Web (claude.ai/code) — rulează în cloud, fără setup local. Util pentru task-uri lungi care pot rula în background.
-• Mobile — apps native iOS (din oct 2025) și Android (din martie 2026). Permite începerea unui task de pe telefon, cu rezultatele accesibile ulterior.
-GitHub Actions e singurul surface non-interactiv — se invocă prin tag-uirea @claude în PR-uri sau issue-uri, util pentru automatizare CI.
-Toate surface-urile împart același cont și configurare — aceleași skills, aceleași MCP servers, aceeași ierarhie CLAUDE.md.</a:t>
+• Terminal CLI — toate feature-urile
+• VS Code — diff viewer integrat, @-mentions
+• JetBrains — plugin similar (IntelliJ, PyCharm, WebStorm)
+• Desktop — macOS/Windows nativ
+• Web (claude.ai/code) — cloud, fără setup local. Bun pentru task-uri lungi în background
+• Mobile — iOS (oct 2025), Android (mar 2026)
+GitHub Actions — singurul non-interactiv. Invocat prin tag `@claude` în PR-uri/issues. Util pentru automatizare.
+Toate împart același cont și configurare: aceleași skills, MCP servers, CLAUDE.md.</a:t>
             </a:r>
             <a:endParaRPr lang="en-US" dirty="0"/>
           </a:p>
@@ -798,13 +798,13 @@
           <a:p>
             <a:r>
               <a:rPr lang="en-US" dirty="0"/>
-              <a:t>Trei prompturi template care acoperă tipologii comune de folosire.
-Ce au în comun: descriu rezultate, nu pași de execuție. Formulare de tipul „deschide fișierul X, modifică linia Y, salvează" e mai puțin eficientă decât formularea la nivel de obiectiv. Claude decide singur pașii pe baza contextului.
-Ordinea în care sunt de încercat (de la cel mai puțin intruziv la cel mai mult):
-1. Understand code — read-only, fără modificări. Util pentru familiarizare cu un proiect necunoscut.
-2. Fix a bug — scope focalizat, verificabil prin teste.
-3. Build a feature — modificări multiple, necesită review atent al diff-ului.
-Notă de prompting: specificitatea constraint-urilor influențează calitatea rezultatului. „Adaugă paginare" e vag. „Adaugă paginare cursor-based la /users cu page size 20, urmând pattern-ul de error-handling din /posts" e specific și produce rezultate mai bine aliniate cu proiectul.</a:t>
+              <a:t>Trei tipologii frecvente.
+Ce au în comun prompturile de pe slide: descriu rezultate + constraint-uri specifice (fișiere, pattern-uri, erori concrete). Nu descriu pași de execuție.
+Ordinea de încercat (ascendent în risc):
+1. Understand — read-only, zero risk
+2. Fix bug — scope focalizat, verificabil prin teste
+3. Build feature — modificări multiple, review atent al diff-ului
+Regula de prompting e vizibilă în exemple: referință la cod existent și la pattern-uri deja în proiect. „Adaugă paginare" e vag. Exemplele de pe slide sunt specifice — de asta funcționează.</a:t>
             </a:r>
             <a:endParaRPr lang="en-US" dirty="0"/>
           </a:p>
@@ -892,17 +892,17 @@
           <a:p>
             <a:r>
               <a:rPr lang="en-US" dirty="0"/>
-              <a:t>Slide-ul ăsta e pentru referință. Nu e necesar de parcurs comandă cu comandă în prezentare — e util post-sesiune.
-Cele două care apar cel mai des în folosirea zilnică:
-• /clear — resetare a istoricului conversației când se trece la un task nou. Previne aglomerarea context-ului cu informații din task-uri anterioare.
-• Shift+Tab — ciclează prin permission modes (Normal → Auto-Accept → Plan). Util când vrei Plan Mode înainte de execuție.
-Alte comenzi utile:
-• /compact — rezumă history-ul păstrând firul conversației. Alternativă la /clear când vrei să păstrezi contextul.
-• `claude -p "..."` — mod non-interactiv. Rulează un prompt, afișează răspunsul, iese. Folosit în shell scripts și pipeline-uri CI.
-• `--permission-mode acceptEdits` — auto-aprobă modificările de fișiere. Util după ce workflow-ul e familiar.
-• `@` — referință la un fișier în prompt, ex: „explică @src/auth.ts".
-• `/memory` — vizualizează și editează memoria auto-salvată între sesiuni (v2.1.59+).
-Notă: Claude Code funcționează fără să memorezi aceste comenzi. Sunt shortcut-uri pentru folosire frecventă.</a:t>
+              <a:t>Slide de referință. Nu de parcurs comandă cu comandă — util post-sesiune.
+Cele două folosite zilnic:
+• /clear — reset când se trece la task nou
+• Shift+Tab — ciclează prin permission modes (Normal → Auto-Accept → Plan)
+Restul, când devin relevante:
+• /compact — rezumă history, păstrează firul
+• /memory — vede și editează memoria auto-salvată
+• `claude -p "..."` — non-interactiv, pentru scripts și CI
+• `--permission-mode acceptEdits` — auto-aprobă modificări de fișiere
+• `@file` — referință la un fișier în prompt (ex: „explică @src/auth.ts")
+Plain English funcționează singur. Astea sunt shortcut-uri pentru folosire frecventă.</a:t>
             </a:r>
             <a:endParaRPr lang="en-US" dirty="0"/>
           </a:p>
@@ -990,15 +990,16 @@
           <a:p>
             <a:r>
               <a:rPr lang="en-US" dirty="0"/>
-              <a:t>Pași concreți de încheiere:
-1. Instalarea Claude Code (instrucțiuni pe docs.claude.com).
-2. Scrierea unui CLAUDE.md pentru proiectul principal — convenții, comenzi uzuale, pattern-uri de urmărit.
-3. Încercarea unui task concret: explicarea unui modul, fix la un bug, sau adăugarea unui test.
-Pentru echipă (discuție ulterioară):
-1. Identificarea MCP servers care s-ar potrivi cu workflow-ul nostru (ex: GitHub, Jira).
-2. Discutarea experienței pe canalul de echipă.
-3. Identificarea pattern-urilor repetitive care ar putea deveni Skills partajate.
-Resurse oficiale: docs.claude.com/en/docs/claude-code. Changelog: docs.claude.com/en/release-notes/claude-code. Exemple de skills în repo-ul public anthropics/skills.
+              <a:t>Închidere + discuție.
+Pași pentru cineva care începe azi:
+1. Instalare (docs.claude.com)
+2. Scrierea unui CLAUDE.md pentru proiectul principal — convenții, comenzi uzuale, pattern-uri
+3. Un task concret: explicare modul, fix la un bug, sau adăugare test
+Pentru echipă (follow-up):
+• Ce MCP servers se potrivesc cu workflow-ul nostru (GitHub, Jira)
+• Unde discutăm experiența (canal dedicat?)
+• Ce pattern-uri repetitive ar putea deveni Skills partajate
+Resurse oficiale: docs.claude.com/en/docs/claude-code. Changelog: /en/release-notes/claude-code. Exemple de skills: github.com/anthropics/skills.
 Întrebări.</a:t>
             </a:r>
             <a:endParaRPr lang="en-US" dirty="0"/>
@@ -1087,12 +1088,12 @@
           <a:p>
             <a:r>
               <a:rPr lang="en-US" dirty="0"/>
-              <a:t>Acest slide e pentru onestitate și pentru a pregăti audiența să recunoască aceste tipare în practică. Niciuna dintre limitări nu e blocantă; toate sunt gestionabile cu review atent.
-• Context dropped: apare la sesiuni lungi, fișiere mari, sau zeci de tool calls. Claude poate să uite o decizie luată la începutul sesiunii. /clear resetează, /compact rezumă, @ aduce conținut la zi în context.
-• Plausible but wrong: cel mai insidios tip de eșec — codul compilează, testele trec, sintaxa e ok, dar comportamentul e greșit. Apare când API-ul real diferă de ce Claude presupune. Verifică cu documentația oficială sau rulări concrete, nu doar cu lint.
-• Hidden state: orice nu e în cod e invizibil pentru Claude — variabile de mediu, feature flags, convenții ne-scrise, comportamentul unui API extern. Dacă task-ul depinde de așa ceva, spune-i explicit: „backend-ul așteaptă camelCase” sau „feature flag X e on în prod”.
-• Own the diff: regula de bază. Claude e un contributor, nu un owner. Citește fiecare hunk ca și cum ar veni de la un coleg nou: nu presupune că înțelege convențiile proiectului la fel de bine ca tine. Green CI nu înseamnă corect.
-Mențiune: nu sunt toate limitările — doar cele mai des întâlnite în munca zilnică. Altele (matematică, rază de acțiune, latență) sunt contextuale și merită discutate separat.</a:t>
+              <a:t>Slide de onestitate. Niciuna dintre limitări nu e blocantă; toate sunt gestionabile cu review atent.
+Context dropped — sesiuni lungi, fișiere mari, zeci de tool calls. Claude poate uita o decizie luată la început. Mitigare: /clear, /compact, @file.
+Plausible but wrong — cel mai insidios. Codul compilează, testele trec, dar comportamentul e greșit. Apare când API-ul real diferă de ce presupune. Mitigare: docs oficiale + rulări concrete, nu doar lint.
+Hidden state — variabile de mediu, feature flags, convenții ne-scrise, API-uri externe. Dacă task-ul depinde de ele, le spui explicit: „backend-ul așteaptă camelCase", „feature flag X e on în prod".
+Own the diff — regula de bază. Claude e contributor, nu owner. Read each hunk. Green CI ≠ corect.
+Alte limitări (matematică, rază, latență) sunt contextuale. Menționate la întrebări, dacă apar.</a:t>
             </a:r>
             <a:endParaRPr lang="en-US" dirty="0"/>
           </a:p>
@@ -1180,10 +1181,9 @@
           <a:p>
             <a:r>
               <a:rPr lang="en-US" dirty="0"/>
-              <a:t>Claude Code e tool-ul de coding agentic al Anthropic, lansat în 2025.
-Ideea centrală: descrii un obiectiv în limba normală, Claude citește context-ul relevant din proiect, face un plan, editează fișiere, rulează comenzi (inclusiv teste), iterează dacă ceva nu merge, și îți prezintă rezultatul pentru review.
-Terminal-ul din dreapta e un flow real cu un singur prompt: o cerere („adaugă paginare"), mai multe modificări de fișiere, test run, rezultat gata pentru commit. Round-trip-ul ăsta complet — de la intenție la schimbare verificată — e ce descriem prin „agentic" (detaliat pe slide-ul următor).
-Notă tehnică: binarul CLI se cheamă literalmente `claude`. Produsul e numit după model.</a:t>
+              <a:t>Aici este un loop complet, de la prompt la diff verificat.
+Pe terminalul din dreapta: un singur prompt („adaugă paginare"), fișiere modificate, teste rulate, gata pentru commit. Ăsta e round-trip-ul — intenție → schimbare verificată. Asta înseamnă „agentic" (detalii pe slide 3).
+Binarul se cheamă `claude`. Produsul poartă numele modelului.</a:t>
             </a:r>
             <a:endParaRPr lang="en-US" dirty="0"/>
           </a:p>
@@ -1271,9 +1271,9 @@
           <a:p>
             <a:r>
               <a:rPr lang="en-US" dirty="0"/>
-              <a:t>„Agentic" înseamnă un sistem cu un scop, acces la tool-uri, și autonomia să continue până termină task-ul sau cere input.
-Cele patru etape (Understand → Plan → Act → Verify) sunt un model mental simplificat, nu o taxonomie oficială din docs. Pentru task-uri complexe, bucla se execută de mai multe ori — Claude încearcă ceva, realizează că-i lipsește context, mai citește fișiere, re-planifică, acționează din nou.
-Claude cere permisiune înainte de acțiuni semnificative (rulare comenzi, editări de fișiere). Autonomia e limitată prin permisiuni — tu rămâi la butoane.</a:t>
+              <a:t>Definiția simplă: agent = scop + tool-uri + autonomie să itereze.
+Cele patru etape (Understand → Plan → Act → Verify) sunt un model mental, nu taxonomie oficială. Pe task-uri reale, bucla se execută de mai multe ori — încearcă, vede că-i lipsește context, mai citește, re-planifică.
+Permisiunile limitează autonomia: cere aprobare înainte de acțiuni semnificative (rulare comenzi, editări). Tu rămâi la butoane.</a:t>
             </a:r>
             <a:endParaRPr lang="en-US" dirty="0"/>
           </a:p>
@@ -1361,13 +1361,13 @@
           <a:p>
             <a:r>
               <a:rPr lang="en-US" dirty="0"/>
-              <a:t>Aceste patru nume apar constant în documentația Claude Code. Slide-ul ăsta e glosarul — următoarele slide-uri le aprofundează pe fiecare.
-Ordinea în care le vei întâlni:
-• CLAUDE.md — din prima sesiune. E mecanismul prin care proiectul își transmite contextul la Claude.
-• MCP — când vrei ca Claude să acceseze sisteme externe (ticket-uri, documente, baze de date).
-• Skills — când începi să observi pattern-uri repetitive în ce îi ceri.
-• Subagents — cazuri avansate, când vrei să izolezi un task mare de contextul principal.
-Prioritate practică: CLAUDE.md e primul pe care merită să-l configurezi.</a:t>
+              <a:t>Glosar. Următoarele slide-uri detaliază fiecare concept.
+Ordinea în care apar în practică:
+• CLAUDE.md — din prima sesiune
+• MCP — când vrei acces la sisteme externe
+• Skills — când apar pattern-uri repetitive
+• Subagents — avansat, pentru izolat task-uri mari
+Prioritate: CLAUDE.md e primul de configurat într-un repo.</a:t>
             </a:r>
             <a:endParaRPr lang="en-US" dirty="0"/>
           </a:p>
@@ -1455,22 +1455,15 @@
           <a:p>
             <a:r>
               <a:rPr lang="en-US" dirty="0"/>
-              <a:t>Slide-ul ăsta e referință pentru unde trăiește configurarea.
-Puncte de acoperit:
-1. CLAUDE.md e fișierul principal de configurare. Se pune în root-ul repo-ului, se face commit, și Claude îl citește la fiecare sesiune. Docs-urile recomandă sub 200 de linii — fișierele mai lungi reduc cât de consistent le urmează Claude.
-2. Ierarhia CLAUDE.md are trei niveluri:
-   • ~/.claude/CLAUDE.md (global, aplicat peste toate proiectele)
-   • CLAUDE.md (proiect, în repo, partajat cu echipa)
-   • CLAUDE.local.md (personal, gitignored)
-Claude încarcă toate trei și le concatenează. Când există conflicte, tier-ul mai specific (local &gt; project &gt; global) câștigă.
-3. AGENTS.md: Claude Code nu citește direct AGENTS.md. Dacă repo-ul are deja un AGENTS.md (folosit de alte tool-uri AI), poți pune `@AGENTS.md` la începutul CLAUDE.md și conținutul va fi inclus.
-4. Folder-ul .claude/ conține restul configurării:
-   • skills/ — Skills custom (detaliate pe slide-ul următor)
-   • agents/ — definiții de subagents
-   • rules/ — reguli modulare cu scope pe path
-   • settings.json — permisiuni, hooks, configurare MCP servers
-5. Auto memory (v2.1.59+): Claude salvează și singur note între sesiuni, separat de CLAUDE.md manual. Vizualizare cu /memory.
-Comanda `/init` rulată în proiect generează un CLAUDE.md de bază pe care îl poți edita.</a:t>
+              <a:t>Slide de referință. Nu de parcurs în detaliu — e pentru când cineva întreabă „unde pun X".
+CLAUDE.md — rădăcina repo-ului, commit-at, auto-încărcat la fiecare sesiune. Docs recomandă sub 200 de linii — peste, e urmărit mai puțin consistent.
+Ierarhia (se concatenează, tier mai specific câștigă):
+1. ~/.claude/CLAUDE.md — global
+2. CLAUDE.md — proiect
+3. CLAUDE.local.md — personal, gitignored
+AGENTS.md nu e citit direct. Dacă există, se importă cu `@AGENTS.md` în CLAUDE.md.
+.claude/ conține skills/, agents/, rules/, settings.json. Auto memory (v2.1.59+) e accesibilă prin /memory.
+Comanda `/init` generează un CLAUDE.md de bază.</a:t>
             </a:r>
             <a:endParaRPr lang="en-US" dirty="0"/>
           </a:p>
@@ -1558,11 +1551,11 @@
           <a:p>
             <a:r>
               <a:rPr lang="en-US" dirty="0"/>
-              <a:t>MCP e un standard deschis. Nu e specific Anthropic — alte tool-uri AI (Cursor, tool-urile OpenAI, etc.) îl suportă și ele. Un server MCP definit o dată poate fi folosit de mai multe clienți.
-Cum funcționează: un server MCP expune un set de tool-uri și acces la date pentru un sistem extern. Claude se conectează la el și poate invoca tool-urile acelea în timpul sesiunii.
-Cele patru exemple de pe slide (Drive, Slack, Jira, Postgres) sunt servere disponibile public. Mai există multe altele: GitHub, Notion, Linear, Sentry, Datadog, AWS, Google Calendar. Registry-ul MCP public conține lista completă.
-Model de permisiuni: Claude cere aprobare prima dată când folosește un tool MCP într-o sesiune. Aprobarea e reținută pentru restul sesiunii.
-Pentru utilizarea inițială: serverele de GitHub sau Jira sunt exemple de conectori care dau valoare imediată — interogări de tipul „listează PR-urile deschise" sau „ce ticket-uri sunt asignate mie".</a:t>
+              <a:t>MCP e standard deschis — nu specific Anthropic. Cursor, OpenAI și altele îl suportă. Un server definit o dată, folosit de mai mulți clienți.
+Server-ul expune tool-uri + acces la date dintr-un sistem extern. Claude le invocă în sesiune.
+Servere publice relevante: GitHub, Jira, Notion, Linear, Sentry, Datadog, AWS, Postgres. Registry oficial cu lista completă.
+Permisiuni: prima folosire într-o sesiune cere aprobare, restul rulează pe aceeași aprobare.
+Primul experiment util: GitHub sau Jira — câștig imediat („listează PR-urile mele", „ce ticket-uri am").</a:t>
             </a:r>
             <a:endParaRPr lang="en-US" dirty="0"/>
           </a:p>
@@ -1650,15 +1643,17 @@
           <a:p>
             <a:r>
               <a:rPr lang="en-US" dirty="0"/>
-              <a:t>Skills au fost introduse la finalul lui 2025 ca standard deschis (spec-ul „Agent Skills"). Funcționează peste mai multe produse: Claude.ai, Claude Code, API-ul Anthropic.
-Mecanismul de invocare e automat. Claude citește descrierile tuturor skill-urilor instalate la startul sesiunii. Când prompt-ul user-ului se potrivește cu o descriere, Claude încarcă conținutul complet al skill-ului și îl urmează ca instrucțiuni. Câmpul description din YAML frontmatter determină match-ul, deci formularea lui contează.
-Skills sunt utile pentru a codifica proceduri pe care echipa le folosește recurent. Exemple:
-• Checklist de creare PR în formatul convenit
-• Procedura de deployment pentru un serviciu specific
+              <a:t>Skills — spec deschis „Agent Skills", finalul lui 2025. Funcționează peste Claude.ai, Claude Code, API.
+Invocare automată: Claude citește descrierile la start, încarcă skill-ul când prompt-ul se potrivește cu description-ul. Formularea description-ului contează.
+Utile pentru proceduri recurente:
+• Checklist de creare PR
+• Procedura de deploy pentru un serviciu
 • Reguli de security review
-• Pattern-uri de scriere a testelor
-Diferența față de CLAUDE.md: CLAUDE.md e încărcat la fiecare sesiune (context permanent). Skills se încarcă on-demand, doar când sunt relevante. Pentru context care e mereu aplicabil — CLAUDE.md. Pentru proceduri care apar situațional — Skills.
-Locații: `.claude/skills/` (per proiect, în repo, partajat cu echipa) sau `~/.claude/skills/` (personal, peste toate proiectele).</a:t>
+• Pattern de scriere teste
+Diferența față de CLAUDE.md:
+• CLAUDE.md — context permanent, fiecare sesiune
+• Skills — on-demand, doar când sunt relevante
+Locații: `.claude/skills/` (proiect, partajat) sau `~/.claude/skills/` (personal).</a:t>
             </a:r>
             <a:endParaRPr lang="en-US" dirty="0"/>
           </a:p>
@@ -1746,15 +1741,15 @@
           <a:p>
             <a:r>
               <a:rPr lang="en-US" dirty="0"/>
-              <a:t>Subagents rezolvă o problemă specifică: izolarea contextului. Când ai un task care produce mult output intermediar (review-uri, căutări, explorare de cod), acel output ar umple thread-ul principal. Un subagent e o instanță Claude separată, cu propriul context window și propriile tool-uri.
-Exemplu tipic: pentru un security review, delegi task-ul unui subagent. Acesta explorează codul, identifică probleme, și returnează doar un sumar. Thread-ul tău principal nu e poluat cu zecile de file reads pe care subagentul le-a făcut.
-Built-in subagents (documentate în docs oficial):
-• Explore — pentru căutare și analiză read-only de codebase
-• Plan — folosit în Plan Mode pentru culegerea de context
-• general-purpose — pentru task-uri care necesită și explorare, și modificare
-Custom subagents: definiți ca fișiere markdown cu YAML frontmatter în `.claude/agents/`. Câmpul `allowed-tools` restrânge ce poate folosi fiecare subagent (ex: un reviewer nu are acces la Bash, doar la Read/Grep).
-Paralelism: subagents pot rula concurent. Când rulează mai mulți simultan, output-urile lor sunt coordonate de agentul principal.
-Pentru echipa noastră: subagents sunt utile după ce workflow-ul de bază e stabilit. Recomandabil să ne obișnuim întâi cu CLAUDE.md, MCP și prompting-ul direct.</a:t>
+              <a:t>Problema rezolvată: izolarea contextului. Task-uri cu mult output intermediar (review, explorare, căutări) ar umple thread-ul principal. Un subagent rulează separat, returnează doar sumarul.
+Exemplu tipic: security review. Subagentul explorează codul, identifică probleme, răspunde cu un sumar. Thread-ul rămâne curat.
+Built-in:
+• Explore — căutare read-only
+• Plan — cules context în Plan Mode
+• general-purpose — explorare + modificare
+Custom: markdown cu YAML frontmatter în `.claude/agents/`. Câmpul `allowed-tools` restrânge tool-urile per agent.
+Paralelism: pot rula mai mulți simultan, coordonați de agentul principal.
+Ordinea practică de adoptare: CLAUDE.md → MCP → prompting bun → Skills → Subagents. Ultimele două sunt avansate.</a:t>
             </a:r>
             <a:endParaRPr lang="en-US" dirty="0"/>
           </a:p>
@@ -1842,15 +1837,14 @@
           <a:p>
             <a:r>
               <a:rPr lang="en-US" dirty="0"/>
-              <a:t>Slide-ul listează cele șase categorii de acțiuni pentru care Claude Code e folosit cel mai des. Fiecare poate avea un demo de sine stătător.
-Categorii de risc (util pentru echipa care începe):
-Risc minim, bune ca prim contact:
-• Explain code — operații read-only. Util când vrei să înțelegi un modul nou.
-• Fix bugs — scope focalizat, ușor de verificat prin teste.
-Risc mai mare, atenție la review:
-• Refactor — modificări care pot atinge multe fișiere. Diff-ul trebuie citit cu atenție.
-• Operații Git — verifică mesajul de commit și ce e în staging înainte să lași comanda să ruleze.
-Lucrul peste mai multe fișiere e util în particular pentru refactoruri și schimbări consistente — un exemplu: redenumirea unui concept peste tot în codebase.</a:t>
+              <a:t>Categorii frecvente. Fiecare poate avea demo separat dacă întreabă cineva.
+Risc mic (bune ca prim contact):
+• Explain code — read-only
+• Fix bugs — scope focalizat, verificabil
+Risc mare (review atent):
+• Refactor — poate atinge zeci de fișiere
+• Git ops — verifică staged și mesajul de commit înainte să lași comanda să ruleze
+Refactor-ul multi-file e unde valoarea e cea mai vizibilă — ex: redenumirea unui concept consistent în tot codebase-ul.</a:t>
             </a:r>
             <a:endParaRPr lang="en-US" dirty="0"/>
           </a:p>

--- a/Claude_Code.pptx
+++ b/Claude_Code.pptx
@@ -4,6 +4,9 @@
   <p:sldMasterIdLst>
     <p:sldMasterId id="2147483648" r:id="rId1"/>
   </p:sldMasterIdLst>
+  <p:notesMasterIdLst>
+    <p:notesMasterId r:id="rId17"/>
+  </p:notesMasterIdLst>
   <p:sldIdLst>
     <p:sldId id="256" r:id="rId2"/>
     <p:sldId id="257" r:id="rId3"/>
@@ -18,13 +21,10 @@
     <p:sldId id="266" r:id="rId12"/>
     <p:sldId id="267" r:id="rId13"/>
     <p:sldId id="268" r:id="rId14"/>
-    <p:sldId id="270" r:id="rId21"/>
-    <p:sldId id="269" r:id="rId15"/>
+    <p:sldId id="270" r:id="rId15"/>
+    <p:sldId id="269" r:id="rId16"/>
   </p:sldIdLst>
-  <p:notesMasterIdLst>
-    <p:notesMasterId r:id="rId16"/>
-  </p:notesMasterIdLst>
-  <p:sldSz cx="9144000" cy="5143500"/>
+  <p:sldSz cx="9144000" cy="5143500" type="screen16x9"/>
   <p:notesSz cx="5143500" cy="9144000"/>
   <p:defaultTextStyle>
     <a:lvl1pPr marL="0" algn="l" defTabSz="914400" rtl="0" eaLnBrk="1" latinLnBrk="0" hangingPunct="1">
@@ -118,6 +118,11 @@
       </a:defRPr>
     </a:lvl9pPr>
   </p:defaultTextStyle>
+  <p:extLst>
+    <p:ext uri="{EFAFB233-063F-42B5-8137-9DF3F51BA10A}">
+      <p15:sldGuideLst xmlns:p15="http://schemas.microsoft.com/office/powerpoint/2012/main"/>
+    </p:ext>
+  </p:extLst>
 </p:presentation>
 </file>
 
@@ -143,234 +148,10 @@
           <a:chExt cx="0" cy="0"/>
         </a:xfrm>
       </p:grpSpPr>
-      <p:sp>
-        <p:nvSpPr>
-          <p:cNvPr id="2" name="Header Placeholder 1"/>
-          <p:cNvSpPr>
-            <a:spLocks noGrp="1"/>
-          </p:cNvSpPr>
-          <p:nvPr>
-            <p:ph type="hdr" sz="quarter"/>
-          </p:nvPr>
-        </p:nvSpPr>
-        <p:spPr>
-          <a:xfrm>
-            <a:off x="0" y="0"/>
-            <a:ext cx="2971800" cy="458788"/>
-          </a:xfrm>
-          <a:prstGeom prst="rect">
-            <a:avLst/>
-          </a:prstGeom>
-        </p:spPr>
-        <p:txBody>
-          <a:bodyPr vert="horz" lIns="91440" tIns="45720" rIns="91440" bIns="45720" rtlCol="0"/>
-          <a:lstStyle>
-            <a:lvl1pPr algn="l">
-              <a:defRPr sz="1200"/>
-            </a:lvl1pPr>
-          </a:lstStyle>
-          <a:p>
-            <a:endParaRPr lang="en-US"/>
-          </a:p>
-        </p:txBody>
-      </p:sp>
-      <p:sp>
-        <p:nvSpPr>
-          <p:cNvPr id="3" name="Date Placeholder 2"/>
-          <p:cNvSpPr>
-            <a:spLocks noGrp="1"/>
-          </p:cNvSpPr>
-          <p:nvPr>
-            <p:ph type="dt" idx="1"/>
-          </p:nvPr>
-        </p:nvSpPr>
-        <p:spPr>
-          <a:xfrm>
-            <a:off x="3884613" y="0"/>
-            <a:ext cx="2971800" cy="458788"/>
-          </a:xfrm>
-          <a:prstGeom prst="rect">
-            <a:avLst/>
-          </a:prstGeom>
-        </p:spPr>
-        <p:txBody>
-          <a:bodyPr vert="horz" lIns="91440" tIns="45720" rIns="91440" bIns="45720" rtlCol="0"/>
-          <a:lstStyle>
-            <a:lvl1pPr algn="r">
-              <a:defRPr sz="1200"/>
-            </a:lvl1pPr>
-          </a:lstStyle>
-          <a:p>
-            <a:fld id="{5282F153-3F37-0F45-9E97-73ACFA13230C}" type="datetimeFigureOut">
-              <a:rPr lang="en-US"/>
-              <a:t>7/23/19</a:t>
-            </a:fld>
-            <a:endParaRPr lang="en-US"/>
-          </a:p>
-        </p:txBody>
-      </p:sp>
-      <p:sp>
-        <p:nvSpPr>
-          <p:cNvPr id="4" name="Slide Image Placeholder 3"/>
-          <p:cNvSpPr>
-            <a:spLocks noGrp="1" noRot="1" noChangeAspect="1"/>
-          </p:cNvSpPr>
-          <p:nvPr>
-            <p:ph type="sldImg" idx="2"/>
-          </p:nvPr>
-        </p:nvSpPr>
-        <p:spPr>
-          <a:xfrm>
-            <a:off x="685800" y="1143000"/>
-            <a:ext cx="5486400" cy="3086100"/>
-          </a:xfrm>
-          <a:prstGeom prst="rect">
-            <a:avLst/>
-          </a:prstGeom>
-          <a:noFill/>
-          <a:ln w="12700">
-            <a:solidFill>
-              <a:prstClr val="black"/>
-            </a:solidFill>
-          </a:ln>
-        </p:spPr>
-        <p:txBody>
-          <a:bodyPr vert="horz" lIns="91440" tIns="45720" rIns="91440" bIns="45720" rtlCol="0" anchor="ctr"/>
-          <a:lstStyle/>
-          <a:p>
-            <a:endParaRPr lang="en-US"/>
-          </a:p>
-        </p:txBody>
-      </p:sp>
-      <p:sp>
-        <p:nvSpPr>
-          <p:cNvPr id="5" name="Notes Placeholder 4"/>
-          <p:cNvSpPr>
-            <a:spLocks noGrp="1"/>
-          </p:cNvSpPr>
-          <p:nvPr>
-            <p:ph type="body" sz="quarter" idx="3"/>
-          </p:nvPr>
-        </p:nvSpPr>
-        <p:spPr>
-          <a:xfrm>
-            <a:off x="685800" y="4400550"/>
-            <a:ext cx="5486400" cy="3600450"/>
-          </a:xfrm>
-          <a:prstGeom prst="rect">
-            <a:avLst/>
-          </a:prstGeom>
-        </p:spPr>
-        <p:txBody>
-          <a:bodyPr vert="horz" lIns="91440" tIns="45720" rIns="91440" bIns="45720" rtlCol="0"/>
-          <a:lstStyle/>
-          <a:p>
-            <a:pPr lvl="0"/>
-            <a:r>
-              <a:rPr lang="en-US"/>
-              <a:t>Click to edit Master text styles</a:t>
-            </a:r>
-          </a:p>
-          <a:p>
-            <a:pPr lvl="1"/>
-            <a:r>
-              <a:rPr lang="en-US"/>
-              <a:t>Second level</a:t>
-            </a:r>
-          </a:p>
-          <a:p>
-            <a:pPr lvl="2"/>
-            <a:r>
-              <a:rPr lang="en-US"/>
-              <a:t>Third level</a:t>
-            </a:r>
-          </a:p>
-          <a:p>
-            <a:pPr lvl="3"/>
-            <a:r>
-              <a:rPr lang="en-US"/>
-              <a:t>Fourth level</a:t>
-            </a:r>
-          </a:p>
-          <a:p>
-            <a:pPr lvl="4"/>
-            <a:r>
-              <a:rPr lang="en-US"/>
-              <a:t>Fifth level</a:t>
-            </a:r>
-          </a:p>
-        </p:txBody>
-      </p:sp>
-      <p:sp>
-        <p:nvSpPr>
-          <p:cNvPr id="6" name="Footer Placeholder 5"/>
-          <p:cNvSpPr>
-            <a:spLocks noGrp="1"/>
-          </p:cNvSpPr>
-          <p:nvPr>
-            <p:ph type="ftr" sz="quarter" idx="4"/>
-          </p:nvPr>
-        </p:nvSpPr>
-        <p:spPr>
-          <a:xfrm>
-            <a:off x="0" y="8685213"/>
-            <a:ext cx="2971800" cy="458787"/>
-          </a:xfrm>
-          <a:prstGeom prst="rect">
-            <a:avLst/>
-          </a:prstGeom>
-        </p:spPr>
-        <p:txBody>
-          <a:bodyPr vert="horz" lIns="91440" tIns="45720" rIns="91440" bIns="45720" rtlCol="0" anchor="b"/>
-          <a:lstStyle>
-            <a:lvl1pPr algn="l">
-              <a:defRPr sz="1200"/>
-            </a:lvl1pPr>
-          </a:lstStyle>
-          <a:p>
-            <a:endParaRPr lang="en-US"/>
-          </a:p>
-        </p:txBody>
-      </p:sp>
-      <p:sp>
-        <p:nvSpPr>
-          <p:cNvPr id="7" name="Slide Number Placeholder 6"/>
-          <p:cNvSpPr>
-            <a:spLocks noGrp="1"/>
-          </p:cNvSpPr>
-          <p:nvPr>
-            <p:ph type="sldNum" sz="quarter" idx="5"/>
-          </p:nvPr>
-        </p:nvSpPr>
-        <p:spPr>
-          <a:xfrm>
-            <a:off x="3884613" y="8685213"/>
-            <a:ext cx="2971800" cy="458787"/>
-          </a:xfrm>
-          <a:prstGeom prst="rect">
-            <a:avLst/>
-          </a:prstGeom>
-        </p:spPr>
-        <p:txBody>
-          <a:bodyPr vert="horz" lIns="91440" tIns="45720" rIns="91440" bIns="45720" rtlCol="0" anchor="b"/>
-          <a:lstStyle>
-            <a:lvl1pPr algn="r">
-              <a:defRPr sz="1200"/>
-            </a:lvl1pPr>
-          </a:lstStyle>
-          <a:p>
-            <a:fld id="{CE5E9CC1-C706-0F49-92D6-E571CC5EEA8F}" type="slidenum">
-              <a:rPr lang="en-US"/>
-              <a:t>‹#›</a:t>
-            </a:fld>
-            <a:endParaRPr lang="en-US"/>
-          </a:p>
-        </p:txBody>
-      </p:sp>
     </p:spTree>
     <p:extLst>
       <p:ext uri="{BB962C8B-B14F-4D97-AF65-F5344CB8AC3E}">
-        <p14:creationId xmlns:p14="http://schemas.microsoft.com/office/powerpoint/2010/main" val="1024086991"/>
+        <p14:creationId xmlns:p14="http://schemas.microsoft.com/office/powerpoint/2010/main" val="2955128767"/>
       </p:ext>
     </p:extLst>
   </p:cSld>
@@ -516,12 +297,24 @@
           <a:p>
             <a:r>
               <a:rPr lang="en-US" dirty="0"/>
-              <a:t>Deschidere. Brief intern, nu vânzare.
-Parcurgem: ce este Claude Code, vocabularul (MCP, Skills, Subagents, CLAUDE.md), ce face bine, unde eșuează, comenzile de bază.
-Audiența e de engineeri. Scopul e înțelegere comună, nu evangelizare.
-Durata: ~15-20 min cu discuție. Pauze după slide-urile de concepte (MCP, Skills, Subagents) — sunt cele mai dense.</a:t>
-            </a:r>
-            <a:endParaRPr lang="en-US" dirty="0"/>
+              <a:t>Azi </a:t>
+            </a:r>
+            <a:r>
+              <a:rPr lang="en-US" dirty="0" err="1"/>
+              <a:t>vorbim</a:t>
+            </a:r>
+            <a:r>
+              <a:rPr lang="en-US" dirty="0"/>
+              <a:t> </a:t>
+            </a:r>
+            <a:r>
+              <a:rPr lang="en-US" dirty="0" err="1"/>
+              <a:t>despre</a:t>
+            </a:r>
+            <a:r>
+              <a:rPr lang="en-US" dirty="0"/>
+              <a:t> Claude Code. </a:t>
+            </a:r>
           </a:p>
         </p:txBody>
       </p:sp>
@@ -616,7 +409,6 @@
 Procesul e observabil step-by-step — util pentru debugging când ceva iese prost. Dacă verify eșuează, vezi la ce etapă și cu ce context s-a greșit.
 Demo live posibil aici — task mic pe un proiect local.</a:t>
             </a:r>
-            <a:endParaRPr lang="en-US" dirty="0"/>
           </a:p>
         </p:txBody>
       </p:sp>
@@ -712,7 +504,6 @@
 GitHub Actions — singurul non-interactiv. Invocat prin tag `@claude` în PR-uri/issues. Util pentru automatizare.
 Toate împart același cont și configurare: aceleași skills, MCP servers, CLAUDE.md.</a:t>
             </a:r>
-            <a:endParaRPr lang="en-US" dirty="0"/>
           </a:p>
         </p:txBody>
       </p:sp>
@@ -806,7 +597,6 @@
 3. Build feature — modificări multiple, review atent al diff-ului
 Regula de prompting e vizibilă în exemple: referință la cod existent și la pattern-uri deja în proiect. „Adaugă paginare" e vag. Exemplele de pe slide sunt specifice — de asta funcționează.</a:t>
             </a:r>
-            <a:endParaRPr lang="en-US" dirty="0"/>
           </a:p>
         </p:txBody>
       </p:sp>
@@ -895,7 +685,15 @@
               <a:t>Slide de referință. Nu de parcurs comandă cu comandă — util post-sesiune.
 Cele două folosite zilnic:
 • /clear — reset când se trece la task nou
-• Shift+Tab — ciclează prin permission modes (Normal → Auto-Accept → Plan)
+• Shift+Tab — </a:t>
+            </a:r>
+            <a:r>
+              <a:rPr lang="en-US" dirty="0" err="1"/>
+              <a:t>swtich</a:t>
+            </a:r>
+            <a:r>
+              <a:rPr lang="en-US" dirty="0"/>
+              <a:t> prin permission modes (Normal → Auto-Accept → Plan)
 Restul, când devin relevante:
 • /compact — rezumă history, păstrează firul
 • /memory — vede și editează memoria auto-salvată
@@ -904,7 +702,6 @@
 • `@file` — referință la un fișier în prompt (ex: „explică @src/auth.ts")
 Plain English funcționează singur. Astea sunt shortcut-uri pentru folosire frecventă.</a:t>
             </a:r>
-            <a:endParaRPr lang="en-US" dirty="0"/>
           </a:p>
         </p:txBody>
       </p:sp>
@@ -989,20 +786,58 @@
           <a:lstStyle/>
           <a:p>
             <a:r>
+              <a:rPr lang="en-US" dirty="0" err="1"/>
+              <a:t>Niciuna</a:t>
+            </a:r>
+            <a:r>
               <a:rPr lang="en-US" dirty="0"/>
-              <a:t>Închidere + discuție.
-Pași pentru cineva care începe azi:
-1. Instalare (docs.claude.com)
-2. Scrierea unui CLAUDE.md pentru proiectul principal — convenții, comenzi uzuale, pattern-uri
-3. Un task concret: explicare modul, fix la un bug, sau adăugare test
-Pentru echipă (follow-up):
-• Ce MCP servers se potrivesc cu workflow-ul nostru (GitHub, Jira)
-• Unde discutăm experiența (canal dedicat?)
-• Ce pattern-uri repetitive ar putea deveni Skills partajate
-Resurse oficiale: docs.claude.com/en/docs/claude-code. Changelog: /en/release-notes/claude-code. Exemple de skills: github.com/anthropics/skills.
-Întrebări.</a:t>
-            </a:r>
-            <a:endParaRPr lang="en-US" dirty="0"/>
+              <a:t> dintre limitări nu e deal-breaker; toate sunt gestionabile cu review atent.
+Context dropped — sesiuni lungi, fișiere mari, zeci de </a:t>
+            </a:r>
+            <a:r>
+              <a:rPr lang="en-US" dirty="0" err="1"/>
+              <a:t>tooluri</a:t>
+            </a:r>
+            <a:r>
+              <a:rPr lang="en-US" dirty="0"/>
+              <a:t> </a:t>
+            </a:r>
+            <a:r>
+              <a:rPr lang="en-US" dirty="0" err="1"/>
+              <a:t>apelate</a:t>
+            </a:r>
+            <a:r>
+              <a:rPr lang="en-US" dirty="0"/>
+              <a:t>. Claude poate uita o decizie luată la început. Mitigare: /clear, /compact, @file.
+Plausible but wrong — cel </a:t>
+            </a:r>
+            <a:r>
+              <a:rPr lang="en-US" dirty="0" err="1"/>
+              <a:t>mai</a:t>
+            </a:r>
+            <a:r>
+              <a:rPr lang="en-US" dirty="0"/>
+              <a:t> </a:t>
+            </a:r>
+            <a:r>
+              <a:rPr lang="en-US" dirty="0" err="1"/>
+              <a:t>dificil</a:t>
+            </a:r>
+            <a:r>
+              <a:rPr lang="en-US" dirty="0"/>
+              <a:t>/ </a:t>
+            </a:r>
+            <a:r>
+              <a:rPr lang="en-US" dirty="0" err="1"/>
+              <a:t>periculos</a:t>
+            </a:r>
+            <a:r>
+              <a:rPr lang="en-US" dirty="0"/>
+              <a:t>... Codul compilează, testele trec, dar comportamentul e greșit. Apare când API-ul real diferă de ce presupune. Mitigare: docs oficiale + rulări concrete, nu doar lint.
+Hidden state — variabile de mediu, feature flags, convenții ne-scrise, API-uri externe. Dacă task-ul depinde de ele, le spui explicit: „backend-ul așteaptă camelCase", „feature flag X e on în prod".
+Own the diff — regula de bază. Claude e contributor, nu owner. Read each hunk. Green CI ≠ corect.
+Alte limitări (matematică, rază, latență) sunt contextuale. Menționate la întrebări, dacă apar.</a:t>
+            </a:r>
           </a:p>
         </p:txBody>
       </p:sp>
@@ -1088,14 +923,18 @@
           <a:p>
             <a:r>
               <a:rPr lang="en-US" dirty="0"/>
-              <a:t>Slide de onestitate. Niciuna dintre limitări nu e blocantă; toate sunt gestionabile cu review atent.
-Context dropped — sesiuni lungi, fișiere mari, zeci de tool calls. Claude poate uita o decizie luată la început. Mitigare: /clear, /compact, @file.
-Plausible but wrong — cel mai insidios. Codul compilează, testele trec, dar comportamentul e greșit. Apare când API-ul real diferă de ce presupune. Mitigare: docs oficiale + rulări concrete, nu doar lint.
-Hidden state — variabile de mediu, feature flags, convenții ne-scrise, API-uri externe. Dacă task-ul depinde de ele, le spui explicit: „backend-ul așteaptă camelCase", „feature flag X e on în prod".
-Own the diff — regula de bază. Claude e contributor, nu owner. Read each hunk. Green CI ≠ corect.
-Alte limitări (matematică, rază, latență) sunt contextuale. Menționate la întrebări, dacă apar.</a:t>
-            </a:r>
-            <a:endParaRPr lang="en-US" dirty="0"/>
+              <a:t>Închidere + discuție.
+Pași pentru cineva care începe azi:
+1. Instalare (docs.claude.com)
+2. Scrierea unui CLAUDE.md pentru proiectul principal — convenții, comenzi uzuale, pattern-uri
+3. Un task concret: explicare modul, fix la un bug, sau adăugare test
+Pentru echipă (follow-up):
+• Ce MCP servers se potrivesc cu workflow-ul nostru (GitHub, Jira)
+• Unde discutăm experiența (canal dedicat?)
+• Ce pattern-uri repetitive ar putea deveni Skills partajate
+Resurse oficiale: docs.claude.com/en/docs/claude-code. Changelog: /en/release-notes/claude-code. Exemple de skills: github.com/anthropics/skills.
+Întrebări.</a:t>
+            </a:r>
           </a:p>
         </p:txBody>
       </p:sp>
@@ -1116,7 +955,7 @@
           <a:p>
             <a:fld id="{F7021451-1387-4CA6-816F-3879F97B5CBC}" type="slidenum">
               <a:rPr lang="en-US"/>
-              <a:t>4</a:t>
+              <a:t>15</a:t>
             </a:fld>
             <a:endParaRPr lang="en-US"/>
           </a:p>
@@ -1181,11 +1020,41 @@
           <a:p>
             <a:r>
               <a:rPr lang="en-US" dirty="0"/>
-              <a:t>Aici este un loop complet, de la prompt la diff verificat.
-Pe terminalul din dreapta: un singur prompt („adaugă paginare"), fișiere modificate, teste rulate, gata pentru commit. Ăsta e round-trip-ul — intenție → schimbare verificată. Asta înseamnă „agentic" (detalii pe slide 3).
-Binarul se cheamă `claude`. Produsul poartă numele modelului.</a:t>
-            </a:r>
-            <a:endParaRPr lang="en-US" dirty="0"/>
+              <a:t>Ce </a:t>
+            </a:r>
+            <a:r>
+              <a:rPr lang="en-US" dirty="0" err="1"/>
+              <a:t>este</a:t>
+            </a:r>
+            <a:r>
+              <a:rPr lang="en-US" dirty="0"/>
+              <a:t> Claude Code? - e un agentic coding assistant…
+Pe terminalul din </a:t>
+            </a:r>
+            <a:r>
+              <a:rPr lang="en-US" dirty="0" err="1"/>
+              <a:t>dreapta</a:t>
+            </a:r>
+            <a:r>
+              <a:rPr lang="en-US" dirty="0"/>
+              <a:t> </a:t>
+            </a:r>
+            <a:r>
+              <a:rPr lang="en-US" dirty="0" err="1"/>
+              <a:t>avem</a:t>
+            </a:r>
+            <a:r>
+              <a:rPr lang="en-US" dirty="0"/>
+              <a:t> un </a:t>
+            </a:r>
+            <a:r>
+              <a:rPr lang="en-US" dirty="0" err="1"/>
+              <a:t>exemplu</a:t>
+            </a:r>
+            <a:r>
+              <a:rPr lang="en-US" dirty="0"/>
+              <a:t>: un singur prompt („adaugă paginare"), fișiere modificate, teste rulate, gata pentru commit. Ăsta e round-trip-ul — intenție → schimbare verificată. Asta înseamnă „agentic" (detalii pe slide 3).</a:t>
+            </a:r>
           </a:p>
         </p:txBody>
       </p:sp>
@@ -1271,11 +1140,49 @@
           <a:p>
             <a:r>
               <a:rPr lang="en-US" dirty="0"/>
-              <a:t>Definiția simplă: agent = scop + tool-uri + autonomie să itereze.
-Cele patru etape (Understand → Plan → Act → Verify) sunt un model mental, nu taxonomie oficială. Pe task-uri reale, bucla se execută de mai multe ori — încearcă, vede că-i lipsește context, mai citește, re-planifică.
+              <a:t>
+Cele patru etape (Understand → Plan → Act → Verify) sunt un model mental care pe mine m-a </a:t>
+            </a:r>
+            <a:r>
+              <a:rPr lang="en-US" dirty="0" err="1"/>
+              <a:t>ajutat</a:t>
+            </a:r>
+            <a:r>
+              <a:rPr lang="en-US" dirty="0"/>
+              <a:t> </a:t>
+            </a:r>
+            <a:r>
+              <a:rPr lang="en-US" dirty="0" err="1"/>
+              <a:t>sa</a:t>
+            </a:r>
+            <a:r>
+              <a:rPr lang="en-US" dirty="0"/>
+              <a:t> </a:t>
+            </a:r>
+            <a:r>
+              <a:rPr lang="en-US" dirty="0" err="1"/>
+              <a:t>inteleg</a:t>
+            </a:r>
+            <a:r>
+              <a:rPr lang="en-US" dirty="0"/>
+              <a:t> </a:t>
+            </a:r>
+            <a:r>
+              <a:rPr lang="en-US" dirty="0" err="1"/>
+              <a:t>mai</a:t>
+            </a:r>
+            <a:r>
+              <a:rPr lang="en-US" dirty="0"/>
+              <a:t> bine. </a:t>
+            </a:r>
+            <a:br>
+              <a:rPr lang="en-US" dirty="0"/>
+            </a:br>
+            <a:r>
+              <a:rPr lang="en-US" dirty="0"/>
+              <a:t>Pe task-uri reale, bucla se execută de mai multe ori — încearcă, vede că-i lipsește context, mai citește, re-planifică.
 Permisiunile limitează autonomia: cere aprobare înainte de acțiuni semnificative (rulare comenzi, editări). Tu rămâi la butoane.</a:t>
             </a:r>
-            <a:endParaRPr lang="en-US" dirty="0"/>
           </a:p>
         </p:txBody>
       </p:sp>
@@ -1369,7 +1276,6 @@
 • Subagents — avansat, pentru izolat task-uri mari
 Prioritate: CLAUDE.md e primul de configurat într-un repo.</a:t>
             </a:r>
-            <a:endParaRPr lang="en-US" dirty="0"/>
           </a:p>
         </p:txBody>
       </p:sp>
@@ -1465,7 +1371,6 @@
 .claude/ conține skills/, agents/, rules/, settings.json. Auto memory (v2.1.59+) e accesibilă prin /memory.
 Comanda `/init` generează un CLAUDE.md de bază.</a:t>
             </a:r>
-            <a:endParaRPr lang="en-US" dirty="0"/>
           </a:p>
         </p:txBody>
       </p:sp>
@@ -1551,13 +1456,12 @@
           <a:p>
             <a:r>
               <a:rPr lang="en-US" dirty="0"/>
-              <a:t>MCP e standard deschis — nu specific Anthropic. Cursor, OpenAI și altele îl suportă. Un server definit o dată, folosit de mai mulți clienți.
+              <a:t>MCP e un open standard — nu specific Anthropic. Cursor, OpenAI și altele îl suportă. Un server definit o dată, folosit de mai mulți clienți.
 Server-ul expune tool-uri + acces la date dintr-un sistem extern. Claude le invocă în sesiune.
 Servere publice relevante: GitHub, Jira, Notion, Linear, Sentry, Datadog, AWS, Postgres. Registry oficial cu lista completă.
 Permisiuni: prima folosire într-o sesiune cere aprobare, restul rulează pe aceeași aprobare.
 Primul experiment util: GitHub sau Jira — câștig imediat („listează PR-urile mele", „ce ticket-uri am").</a:t>
             </a:r>
-            <a:endParaRPr lang="en-US" dirty="0"/>
           </a:p>
         </p:txBody>
       </p:sp>
@@ -1643,7 +1547,15 @@
           <a:p>
             <a:r>
               <a:rPr lang="en-US" dirty="0"/>
-              <a:t>Skills — spec deschis „Agent Skills", finalul lui 2025. Funcționează peste Claude.ai, Claude Code, API.
+              <a:t>Skills —</a:t>
+            </a:r>
+            <a:r>
+              <a:rPr lang="en-US" dirty="0" err="1"/>
+              <a:t>Funcționează</a:t>
+            </a:r>
+            <a:r>
+              <a:rPr lang="en-US" dirty="0"/>
+              <a:t> peste Claude.ai, Claude Code, API.
 Invocare automată: Claude citește descrierile la start, încarcă skill-ul când prompt-ul se potrivește cu description-ul. Formularea description-ului contează.
 Utile pentru proceduri recurente:
 • Checklist de creare PR
@@ -1655,7 +1567,6 @@
 • Skills — on-demand, doar când sunt relevante
 Locații: `.claude/skills/` (proiect, partajat) sau `~/.claude/skills/` (personal).</a:t>
             </a:r>
-            <a:endParaRPr lang="en-US" dirty="0"/>
           </a:p>
         </p:txBody>
       </p:sp>
@@ -1751,7 +1662,6 @@
 Paralelism: pot rula mai mulți simultan, coordonați de agentul principal.
 Ordinea practică de adoptare: CLAUDE.md → MCP → prompting bun → Skills → Subagents. Ultimele două sunt avansate.</a:t>
             </a:r>
-            <a:endParaRPr lang="en-US" dirty="0"/>
           </a:p>
         </p:txBody>
       </p:sp>
@@ -1846,7 +1756,6 @@
 • Git ops — verifică staged și mesajul de commit înainte să lași comanda să ruleze
 Refactor-ul multi-file e unde valoarea e cea mai vizibilă — ex: redenumirea unui concept consistent în tot codebase-ul.</a:t>
             </a:r>
-            <a:endParaRPr lang="en-US" dirty="0"/>
           </a:p>
         </p:txBody>
       </p:sp>
@@ -1919,6 +1828,11 @@
 <file path=ppt/slideMasters/slideMaster1.xml><?xml version="1.0" encoding="utf-8"?>
 <p:sldMaster xmlns:a="http://schemas.openxmlformats.org/drawingml/2006/main" xmlns:r="http://schemas.openxmlformats.org/officeDocument/2006/relationships" xmlns:p="http://schemas.openxmlformats.org/presentationml/2006/main">
   <p:cSld>
+    <p:bg>
+      <p:bgRef idx="1001">
+        <a:schemeClr val="bg1"/>
+      </p:bgRef>
+    </p:bg>
     <p:spTree>
       <p:nvGrpSpPr>
         <p:cNvPr id="1" name=""/>
@@ -2201,6 +2115,7 @@
         <a:solidFill>
           <a:srgbClr val="1A1B1F"/>
         </a:solidFill>
+        <a:effectLst/>
       </p:bgPr>
     </p:bg>
     <p:spTree>
@@ -2241,6 +2156,13 @@
             <a:prstDash val="solid"/>
           </a:ln>
         </p:spPr>
+        <p:txBody>
+          <a:bodyPr/>
+          <a:lstStyle/>
+          <a:p>
+            <a:endParaRPr lang="en-US"/>
+          </a:p>
+        </p:txBody>
       </p:sp>
       <p:sp>
         <p:nvSpPr>
@@ -2263,11 +2185,11 @@
           <a:bodyPr wrap="square" lIns="0" tIns="0" rIns="0" bIns="0" rtlCol="0" anchor="ctr"/>
           <a:lstStyle/>
           <a:p>
-            <a:pPr indent="0" marL="0">
-              <a:buNone/>
-            </a:pPr>
-            <a:r>
-              <a:rPr lang="en-US" sz="1100" b="1" spc="400" kern="0" dirty="0">
+            <a:pPr marL="0" indent="0">
+              <a:buNone/>
+            </a:pPr>
+            <a:r>
+              <a:rPr lang="en-US" sz="1100" b="1" kern="0" spc="400" dirty="0">
                 <a:solidFill>
                   <a:srgbClr val="A9A69E"/>
                 </a:solidFill>
@@ -2275,7 +2197,7 @@
                 <a:ea typeface="Calibri" pitchFamily="34" charset="-122"/>
                 <a:cs typeface="Calibri" pitchFamily="34" charset="-120"/>
               </a:rPr>
-              <a:t>TEAM BRIEF  —  CLAUDE CODE</a:t>
+              <a:t>CLAUDE CODE</a:t>
             </a:r>
             <a:endParaRPr lang="en-US" sz="1100" dirty="0"/>
           </a:p>
@@ -2302,7 +2224,7 @@
           <a:bodyPr wrap="square" lIns="0" tIns="0" rIns="0" bIns="0" rtlCol="0" anchor="ctr"/>
           <a:lstStyle/>
           <a:p>
-            <a:pPr indent="0" marL="0">
+            <a:pPr marL="0" indent="0">
               <a:buNone/>
             </a:pPr>
             <a:r>
@@ -2341,7 +2263,7 @@
           <a:bodyPr wrap="square" lIns="0" tIns="0" rIns="0" bIns="0" rtlCol="0" anchor="ctr"/>
           <a:lstStyle/>
           <a:p>
-            <a:pPr indent="0" marL="0">
+            <a:pPr marL="0" indent="0">
               <a:buNone/>
             </a:pPr>
             <a:r>
@@ -2380,7 +2302,7 @@
           <a:bodyPr wrap="square" lIns="0" tIns="0" rIns="0" bIns="0" rtlCol="0" anchor="ctr"/>
           <a:lstStyle/>
           <a:p>
-            <a:pPr indent="0" marL="0">
+            <a:pPr marL="0" indent="0">
               <a:buNone/>
             </a:pPr>
             <a:r>
@@ -2392,7 +2314,7 @@
                 <a:ea typeface="Calibri" pitchFamily="34" charset="-122"/>
                 <a:cs typeface="Calibri" pitchFamily="34" charset="-120"/>
               </a:rPr>
-              <a:t>A technical overview for the team — what Claude Code is, the key concepts (MCP, Skills, Subagents), what it does well, and the commands you'll actually use.</a:t>
+              <a:t>A technical overview — what Claude Code is, the key concepts (MCP, Skills, Subagents), what it does well, and the commands you'll actually use.</a:t>
             </a:r>
             <a:endParaRPr lang="en-US" sz="1400" dirty="0"/>
           </a:p>
@@ -2420,43 +2342,11 @@
             <a:prstDash val="solid"/>
           </a:ln>
         </p:spPr>
-      </p:sp>
-      <p:sp>
-        <p:nvSpPr>
-          <p:cNvPr id="8" name="Text 6"/>
-          <p:cNvSpPr/>
-          <p:nvPr/>
-        </p:nvSpPr>
-        <p:spPr>
-          <a:xfrm>
-            <a:off x="502920" y="4709160"/>
-            <a:ext cx="4572000" cy="274320"/>
-          </a:xfrm>
-          <a:prstGeom prst="rect">
-            <a:avLst/>
-          </a:prstGeom>
-          <a:noFill/>
-          <a:ln/>
-        </p:spPr>
-        <p:txBody>
-          <a:bodyPr wrap="square" lIns="0" tIns="0" rIns="0" bIns="0" rtlCol="0" anchor="ctr"/>
-          <a:lstStyle/>
-          <a:p>
-            <a:pPr indent="0" marL="0">
-              <a:buNone/>
-            </a:pPr>
-            <a:r>
-              <a:rPr lang="en-US" sz="1000" dirty="0">
-                <a:solidFill>
-                  <a:srgbClr val="A9A69E"/>
-                </a:solidFill>
-                <a:latin typeface="Calibri" pitchFamily="34" charset="0"/>
-                <a:ea typeface="Calibri" pitchFamily="34" charset="-122"/>
-                <a:cs typeface="Calibri" pitchFamily="34" charset="-120"/>
-              </a:rPr>
-              <a:t>For internal discussion</a:t>
-            </a:r>
-            <a:endParaRPr lang="en-US" sz="1000" dirty="0"/>
+        <p:txBody>
+          <a:bodyPr/>
+          <a:lstStyle/>
+          <a:p>
+            <a:endParaRPr lang="en-US"/>
           </a:p>
         </p:txBody>
       </p:sp>
@@ -2481,7 +2371,7 @@
           <a:bodyPr wrap="square" lIns="0" tIns="0" rIns="0" bIns="0" rtlCol="0" anchor="ctr"/>
           <a:lstStyle/>
           <a:p>
-            <a:pPr algn="r" indent="0" marL="0">
+            <a:pPr marL="0" indent="0" algn="r">
               <a:buNone/>
             </a:pPr>
             <a:r>
@@ -2515,6 +2405,7 @@
         <a:solidFill>
           <a:srgbClr val="F7F5F0"/>
         </a:solidFill>
+        <a:effectLst/>
       </p:bgPr>
     </p:bg>
     <p:spTree>
@@ -2552,11 +2443,11 @@
           <a:bodyPr wrap="square" lIns="0" tIns="0" rIns="0" bIns="0" rtlCol="0" anchor="ctr"/>
           <a:lstStyle/>
           <a:p>
-            <a:pPr indent="0" marL="0">
-              <a:buNone/>
-            </a:pPr>
-            <a:r>
-              <a:rPr lang="en-US" sz="1000" b="1" spc="400" kern="0" dirty="0">
+            <a:pPr marL="0" indent="0">
+              <a:buNone/>
+            </a:pPr>
+            <a:r>
+              <a:rPr lang="en-US" sz="1000" b="1" kern="0" spc="400" dirty="0">
                 <a:solidFill>
                   <a:srgbClr val="CC785C"/>
                 </a:solidFill>
@@ -2591,7 +2482,7 @@
           <a:bodyPr wrap="square" lIns="0" tIns="0" rIns="0" bIns="0" rtlCol="0" anchor="ctr"/>
           <a:lstStyle/>
           <a:p>
-            <a:pPr indent="0" marL="0">
+            <a:pPr marL="0" indent="0">
               <a:buNone/>
             </a:pPr>
             <a:r>
@@ -2630,7 +2521,7 @@
           <a:bodyPr wrap="square" lIns="0" tIns="0" rIns="0" bIns="0" rtlCol="0" anchor="ctr"/>
           <a:lstStyle/>
           <a:p>
-            <a:pPr indent="0" marL="0">
+            <a:pPr marL="0" indent="0">
               <a:buNone/>
             </a:pPr>
             <a:r>
@@ -2672,13 +2563,20 @@
             <a:prstDash val="solid"/>
           </a:ln>
           <a:effectLst>
-            <a:outerShdw sx="100000" sy="100000" kx="0" ky="0" algn="bl" rotWithShape="0" blurRad="127000" dist="25400" dir="5400000">
+            <a:outerShdw blurRad="127000" dist="25400" dir="5400000" algn="bl" rotWithShape="0">
               <a:srgbClr val="000000">
                 <a:alpha val="8000"/>
               </a:srgbClr>
             </a:outerShdw>
           </a:effectLst>
         </p:spPr>
+        <p:txBody>
+          <a:bodyPr/>
+          <a:lstStyle/>
+          <a:p>
+            <a:endParaRPr lang="en-US"/>
+          </a:p>
+        </p:txBody>
       </p:sp>
       <p:sp>
         <p:nvSpPr>
@@ -2704,6 +2602,13 @@
             <a:prstDash val="solid"/>
           </a:ln>
         </p:spPr>
+        <p:txBody>
+          <a:bodyPr/>
+          <a:lstStyle/>
+          <a:p>
+            <a:endParaRPr lang="en-US"/>
+          </a:p>
+        </p:txBody>
       </p:sp>
       <p:sp>
         <p:nvSpPr>
@@ -2726,7 +2631,7 @@
           <a:bodyPr wrap="square" lIns="0" tIns="0" rIns="0" bIns="0" rtlCol="0" anchor="ctr"/>
           <a:lstStyle/>
           <a:p>
-            <a:pPr algn="ctr" indent="0" marL="0">
+            <a:pPr marL="0" indent="0" algn="ctr">
               <a:buNone/>
             </a:pPr>
             <a:r>
@@ -2765,11 +2670,11 @@
           <a:bodyPr wrap="square" lIns="0" tIns="0" rIns="0" bIns="0" rtlCol="0" anchor="ctr"/>
           <a:lstStyle/>
           <a:p>
-            <a:pPr indent="0" marL="0">
-              <a:buNone/>
-            </a:pPr>
-            <a:r>
-              <a:rPr lang="en-US" sz="900" b="1" spc="300" kern="0" dirty="0">
+            <a:pPr marL="0" indent="0">
+              <a:buNone/>
+            </a:pPr>
+            <a:r>
+              <a:rPr lang="en-US" sz="900" b="1" kern="0" spc="300" dirty="0">
                 <a:solidFill>
                   <a:srgbClr val="CC785C"/>
                 </a:solidFill>
@@ -2804,7 +2709,7 @@
           <a:bodyPr wrap="square" lIns="0" tIns="0" rIns="0" bIns="0" rtlCol="0" anchor="ctr"/>
           <a:lstStyle/>
           <a:p>
-            <a:pPr indent="0" marL="0">
+            <a:pPr marL="0" indent="0">
               <a:buNone/>
             </a:pPr>
             <a:r>
@@ -2843,7 +2748,7 @@
           <a:bodyPr wrap="square" lIns="0" tIns="0" rIns="0" bIns="0" rtlCol="0" anchor="ctr"/>
           <a:lstStyle/>
           <a:p>
-            <a:pPr indent="0" marL="0">
+            <a:pPr marL="0" indent="0">
               <a:buNone/>
             </a:pPr>
             <a:r>
@@ -2885,13 +2790,20 @@
             <a:prstDash val="solid"/>
           </a:ln>
           <a:effectLst>
-            <a:outerShdw sx="100000" sy="100000" kx="0" ky="0" algn="bl" rotWithShape="0" blurRad="127000" dist="25400" dir="5400000">
+            <a:outerShdw blurRad="127000" dist="25400" dir="5400000" algn="bl" rotWithShape="0">
               <a:srgbClr val="000000">
                 <a:alpha val="8000"/>
               </a:srgbClr>
             </a:outerShdw>
           </a:effectLst>
         </p:spPr>
+        <p:txBody>
+          <a:bodyPr/>
+          <a:lstStyle/>
+          <a:p>
+            <a:endParaRPr lang="en-US"/>
+          </a:p>
+        </p:txBody>
       </p:sp>
       <p:sp>
         <p:nvSpPr>
@@ -2917,6 +2829,13 @@
             <a:prstDash val="solid"/>
           </a:ln>
         </p:spPr>
+        <p:txBody>
+          <a:bodyPr/>
+          <a:lstStyle/>
+          <a:p>
+            <a:endParaRPr lang="en-US"/>
+          </a:p>
+        </p:txBody>
       </p:sp>
       <p:sp>
         <p:nvSpPr>
@@ -2939,7 +2858,7 @@
           <a:bodyPr wrap="square" lIns="0" tIns="0" rIns="0" bIns="0" rtlCol="0" anchor="ctr"/>
           <a:lstStyle/>
           <a:p>
-            <a:pPr algn="ctr" indent="0" marL="0">
+            <a:pPr marL="0" indent="0" algn="ctr">
               <a:buNone/>
             </a:pPr>
             <a:r>
@@ -2978,11 +2897,11 @@
           <a:bodyPr wrap="square" lIns="0" tIns="0" rIns="0" bIns="0" rtlCol="0" anchor="ctr"/>
           <a:lstStyle/>
           <a:p>
-            <a:pPr indent="0" marL="0">
-              <a:buNone/>
-            </a:pPr>
-            <a:r>
-              <a:rPr lang="en-US" sz="900" b="1" spc="300" kern="0" dirty="0">
+            <a:pPr marL="0" indent="0">
+              <a:buNone/>
+            </a:pPr>
+            <a:r>
+              <a:rPr lang="en-US" sz="900" b="1" kern="0" spc="300" dirty="0">
                 <a:solidFill>
                   <a:srgbClr val="CC785C"/>
                 </a:solidFill>
@@ -3017,7 +2936,7 @@
           <a:bodyPr wrap="square" lIns="0" tIns="0" rIns="0" bIns="0" rtlCol="0" anchor="ctr"/>
           <a:lstStyle/>
           <a:p>
-            <a:pPr indent="0" marL="0">
+            <a:pPr marL="0" indent="0">
               <a:buNone/>
             </a:pPr>
             <a:r>
@@ -3056,7 +2975,7 @@
           <a:bodyPr wrap="square" lIns="0" tIns="0" rIns="0" bIns="0" rtlCol="0" anchor="ctr"/>
           <a:lstStyle/>
           <a:p>
-            <a:pPr indent="0" marL="0">
+            <a:pPr marL="0" indent="0">
               <a:buNone/>
             </a:pPr>
             <a:r>
@@ -3098,13 +3017,20 @@
             <a:prstDash val="solid"/>
           </a:ln>
           <a:effectLst>
-            <a:outerShdw sx="100000" sy="100000" kx="0" ky="0" algn="bl" rotWithShape="0" blurRad="127000" dist="25400" dir="5400000">
+            <a:outerShdw blurRad="127000" dist="25400" dir="5400000" algn="bl" rotWithShape="0">
               <a:srgbClr val="000000">
                 <a:alpha val="8000"/>
               </a:srgbClr>
             </a:outerShdw>
           </a:effectLst>
         </p:spPr>
+        <p:txBody>
+          <a:bodyPr/>
+          <a:lstStyle/>
+          <a:p>
+            <a:endParaRPr lang="en-US"/>
+          </a:p>
+        </p:txBody>
       </p:sp>
       <p:sp>
         <p:nvSpPr>
@@ -3130,6 +3056,13 @@
             <a:prstDash val="solid"/>
           </a:ln>
         </p:spPr>
+        <p:txBody>
+          <a:bodyPr/>
+          <a:lstStyle/>
+          <a:p>
+            <a:endParaRPr lang="en-US"/>
+          </a:p>
+        </p:txBody>
       </p:sp>
       <p:sp>
         <p:nvSpPr>
@@ -3152,7 +3085,7 @@
           <a:bodyPr wrap="square" lIns="0" tIns="0" rIns="0" bIns="0" rtlCol="0" anchor="ctr"/>
           <a:lstStyle/>
           <a:p>
-            <a:pPr algn="ctr" indent="0" marL="0">
+            <a:pPr marL="0" indent="0" algn="ctr">
               <a:buNone/>
             </a:pPr>
             <a:r>
@@ -3191,11 +3124,11 @@
           <a:bodyPr wrap="square" lIns="0" tIns="0" rIns="0" bIns="0" rtlCol="0" anchor="ctr"/>
           <a:lstStyle/>
           <a:p>
-            <a:pPr indent="0" marL="0">
-              <a:buNone/>
-            </a:pPr>
-            <a:r>
-              <a:rPr lang="en-US" sz="900" b="1" spc="300" kern="0" dirty="0">
+            <a:pPr marL="0" indent="0">
+              <a:buNone/>
+            </a:pPr>
+            <a:r>
+              <a:rPr lang="en-US" sz="900" b="1" kern="0" spc="300" dirty="0">
                 <a:solidFill>
                   <a:srgbClr val="CC785C"/>
                 </a:solidFill>
@@ -3230,7 +3163,7 @@
           <a:bodyPr wrap="square" lIns="0" tIns="0" rIns="0" bIns="0" rtlCol="0" anchor="ctr"/>
           <a:lstStyle/>
           <a:p>
-            <a:pPr indent="0" marL="0">
+            <a:pPr marL="0" indent="0">
               <a:buNone/>
             </a:pPr>
             <a:r>
@@ -3269,7 +3202,7 @@
           <a:bodyPr wrap="square" lIns="0" tIns="0" rIns="0" bIns="0" rtlCol="0" anchor="ctr"/>
           <a:lstStyle/>
           <a:p>
-            <a:pPr indent="0" marL="0">
+            <a:pPr marL="0" indent="0">
               <a:buNone/>
             </a:pPr>
             <a:r>
@@ -3311,13 +3244,20 @@
             <a:prstDash val="solid"/>
           </a:ln>
           <a:effectLst>
-            <a:outerShdw sx="100000" sy="100000" kx="0" ky="0" algn="bl" rotWithShape="0" blurRad="127000" dist="25400" dir="5400000">
+            <a:outerShdw blurRad="127000" dist="25400" dir="5400000" algn="bl" rotWithShape="0">
               <a:srgbClr val="000000">
                 <a:alpha val="8000"/>
               </a:srgbClr>
             </a:outerShdw>
           </a:effectLst>
         </p:spPr>
+        <p:txBody>
+          <a:bodyPr/>
+          <a:lstStyle/>
+          <a:p>
+            <a:endParaRPr lang="en-US"/>
+          </a:p>
+        </p:txBody>
       </p:sp>
       <p:sp>
         <p:nvSpPr>
@@ -3343,6 +3283,13 @@
             <a:prstDash val="solid"/>
           </a:ln>
         </p:spPr>
+        <p:txBody>
+          <a:bodyPr/>
+          <a:lstStyle/>
+          <a:p>
+            <a:endParaRPr lang="en-US"/>
+          </a:p>
+        </p:txBody>
       </p:sp>
       <p:sp>
         <p:nvSpPr>
@@ -3365,7 +3312,7 @@
           <a:bodyPr wrap="square" lIns="0" tIns="0" rIns="0" bIns="0" rtlCol="0" anchor="ctr"/>
           <a:lstStyle/>
           <a:p>
-            <a:pPr algn="ctr" indent="0" marL="0">
+            <a:pPr marL="0" indent="0" algn="ctr">
               <a:buNone/>
             </a:pPr>
             <a:r>
@@ -3404,11 +3351,11 @@
           <a:bodyPr wrap="square" lIns="0" tIns="0" rIns="0" bIns="0" rtlCol="0" anchor="ctr"/>
           <a:lstStyle/>
           <a:p>
-            <a:pPr indent="0" marL="0">
-              <a:buNone/>
-            </a:pPr>
-            <a:r>
-              <a:rPr lang="en-US" sz="900" b="1" spc="300" kern="0" dirty="0">
+            <a:pPr marL="0" indent="0">
+              <a:buNone/>
+            </a:pPr>
+            <a:r>
+              <a:rPr lang="en-US" sz="900" b="1" kern="0" spc="300" dirty="0">
                 <a:solidFill>
                   <a:srgbClr val="CC785C"/>
                 </a:solidFill>
@@ -3443,7 +3390,7 @@
           <a:bodyPr wrap="square" lIns="0" tIns="0" rIns="0" bIns="0" rtlCol="0" anchor="ctr"/>
           <a:lstStyle/>
           <a:p>
-            <a:pPr indent="0" marL="0">
+            <a:pPr marL="0" indent="0">
               <a:buNone/>
             </a:pPr>
             <a:r>
@@ -3482,7 +3429,7 @@
           <a:bodyPr wrap="square" lIns="0" tIns="0" rIns="0" bIns="0" rtlCol="0" anchor="ctr"/>
           <a:lstStyle/>
           <a:p>
-            <a:pPr indent="0" marL="0">
+            <a:pPr marL="0" indent="0">
               <a:buNone/>
             </a:pPr>
             <a:r>
@@ -3521,7 +3468,7 @@
           <a:bodyPr wrap="square" lIns="0" tIns="0" rIns="0" bIns="0" rtlCol="0" anchor="ctr"/>
           <a:lstStyle/>
           <a:p>
-            <a:pPr algn="r" indent="0" marL="0">
+            <a:pPr marL="0" indent="0" algn="r">
               <a:buNone/>
             </a:pPr>
             <a:r>
@@ -3555,6 +3502,7 @@
         <a:solidFill>
           <a:srgbClr val="F7F5F0"/>
         </a:solidFill>
+        <a:effectLst/>
       </p:bgPr>
     </p:bg>
     <p:spTree>
@@ -3592,11 +3540,11 @@
           <a:bodyPr wrap="square" lIns="0" tIns="0" rIns="0" bIns="0" rtlCol="0" anchor="ctr"/>
           <a:lstStyle/>
           <a:p>
-            <a:pPr indent="0" marL="0">
-              <a:buNone/>
-            </a:pPr>
-            <a:r>
-              <a:rPr lang="en-US" sz="1000" b="1" spc="400" kern="0" dirty="0">
+            <a:pPr marL="0" indent="0">
+              <a:buNone/>
+            </a:pPr>
+            <a:r>
+              <a:rPr lang="en-US" sz="1000" b="1" kern="0" spc="400" dirty="0">
                 <a:solidFill>
                   <a:srgbClr val="CC785C"/>
                 </a:solidFill>
@@ -3631,7 +3579,7 @@
           <a:bodyPr wrap="square" lIns="0" tIns="0" rIns="0" bIns="0" rtlCol="0" anchor="ctr"/>
           <a:lstStyle/>
           <a:p>
-            <a:pPr indent="0" marL="0">
+            <a:pPr marL="0" indent="0">
               <a:buNone/>
             </a:pPr>
             <a:r>
@@ -3670,7 +3618,7 @@
           <a:bodyPr wrap="square" lIns="0" tIns="0" rIns="0" bIns="0" rtlCol="0" anchor="ctr"/>
           <a:lstStyle/>
           <a:p>
-            <a:pPr indent="0" marL="0">
+            <a:pPr marL="0" indent="0">
               <a:buNone/>
             </a:pPr>
             <a:r>
@@ -3712,24 +3660,31 @@
             <a:prstDash val="solid"/>
           </a:ln>
           <a:effectLst>
-            <a:outerShdw sx="100000" sy="100000" kx="0" ky="0" algn="bl" rotWithShape="0" blurRad="127000" dist="25400" dir="5400000">
+            <a:outerShdw blurRad="127000" dist="25400" dir="5400000" algn="bl" rotWithShape="0">
               <a:srgbClr val="000000">
                 <a:alpha val="8000"/>
               </a:srgbClr>
             </a:outerShdw>
           </a:effectLst>
         </p:spPr>
+        <p:txBody>
+          <a:bodyPr/>
+          <a:lstStyle/>
+          <a:p>
+            <a:endParaRPr lang="en-US"/>
+          </a:p>
+        </p:txBody>
       </p:sp>
       <p:pic>
         <p:nvPicPr>
-          <p:cNvPr id="6" name="Image 0" descr="preencoded.png">    </p:cNvPr>
+          <p:cNvPr id="6" name="Image 0" descr="preencoded.png"/>
           <p:cNvPicPr>
             <a:picLocks noChangeAspect="1"/>
           </p:cNvPicPr>
           <p:nvPr/>
         </p:nvPicPr>
         <p:blipFill>
-          <a:blip r:embed="rId1"/>
+          <a:blip r:embed="rId3"/>
           <a:stretch>
             <a:fillRect/>
           </a:stretch>
@@ -3765,7 +3720,7 @@
           <a:bodyPr wrap="square" lIns="0" tIns="0" rIns="0" bIns="0" rtlCol="0" anchor="ctr"/>
           <a:lstStyle/>
           <a:p>
-            <a:pPr indent="0" marL="0">
+            <a:pPr marL="0" indent="0">
               <a:buNone/>
             </a:pPr>
             <a:r>
@@ -3804,7 +3759,7 @@
           <a:bodyPr wrap="square" lIns="0" tIns="0" rIns="0" bIns="0" rtlCol="0" anchor="ctr"/>
           <a:lstStyle/>
           <a:p>
-            <a:pPr indent="0" marL="0">
+            <a:pPr marL="0" indent="0">
               <a:buNone/>
             </a:pPr>
             <a:r>
@@ -3846,24 +3801,31 @@
             <a:prstDash val="solid"/>
           </a:ln>
           <a:effectLst>
-            <a:outerShdw sx="100000" sy="100000" kx="0" ky="0" algn="bl" rotWithShape="0" blurRad="127000" dist="25400" dir="5400000">
+            <a:outerShdw blurRad="127000" dist="25400" dir="5400000" algn="bl" rotWithShape="0">
               <a:srgbClr val="000000">
                 <a:alpha val="8000"/>
               </a:srgbClr>
             </a:outerShdw>
           </a:effectLst>
         </p:spPr>
+        <p:txBody>
+          <a:bodyPr/>
+          <a:lstStyle/>
+          <a:p>
+            <a:endParaRPr lang="en-US"/>
+          </a:p>
+        </p:txBody>
       </p:sp>
       <p:pic>
         <p:nvPicPr>
-          <p:cNvPr id="10" name="Image 1" descr="preencoded.png">    </p:cNvPr>
+          <p:cNvPr id="10" name="Image 1" descr="preencoded.png"/>
           <p:cNvPicPr>
             <a:picLocks noChangeAspect="1"/>
           </p:cNvPicPr>
           <p:nvPr/>
         </p:nvPicPr>
         <p:blipFill>
-          <a:blip r:embed="rId2"/>
+          <a:blip r:embed="rId4"/>
           <a:stretch>
             <a:fillRect/>
           </a:stretch>
@@ -3899,7 +3861,7 @@
           <a:bodyPr wrap="square" lIns="0" tIns="0" rIns="0" bIns="0" rtlCol="0" anchor="ctr"/>
           <a:lstStyle/>
           <a:p>
-            <a:pPr indent="0" marL="0">
+            <a:pPr marL="0" indent="0">
               <a:buNone/>
             </a:pPr>
             <a:r>
@@ -3938,7 +3900,7 @@
           <a:bodyPr wrap="square" lIns="0" tIns="0" rIns="0" bIns="0" rtlCol="0" anchor="ctr"/>
           <a:lstStyle/>
           <a:p>
-            <a:pPr indent="0" marL="0">
+            <a:pPr marL="0" indent="0">
               <a:buNone/>
             </a:pPr>
             <a:r>
@@ -3980,24 +3942,31 @@
             <a:prstDash val="solid"/>
           </a:ln>
           <a:effectLst>
-            <a:outerShdw sx="100000" sy="100000" kx="0" ky="0" algn="bl" rotWithShape="0" blurRad="127000" dist="25400" dir="5400000">
+            <a:outerShdw blurRad="127000" dist="25400" dir="5400000" algn="bl" rotWithShape="0">
               <a:srgbClr val="000000">
                 <a:alpha val="8000"/>
               </a:srgbClr>
             </a:outerShdw>
           </a:effectLst>
         </p:spPr>
+        <p:txBody>
+          <a:bodyPr/>
+          <a:lstStyle/>
+          <a:p>
+            <a:endParaRPr lang="en-US"/>
+          </a:p>
+        </p:txBody>
       </p:sp>
       <p:pic>
         <p:nvPicPr>
-          <p:cNvPr id="14" name="Image 2" descr="preencoded.png">    </p:cNvPr>
+          <p:cNvPr id="14" name="Image 2" descr="preencoded.png"/>
           <p:cNvPicPr>
             <a:picLocks noChangeAspect="1"/>
           </p:cNvPicPr>
           <p:nvPr/>
         </p:nvPicPr>
         <p:blipFill>
-          <a:blip r:embed="rId3"/>
+          <a:blip r:embed="rId5"/>
           <a:stretch>
             <a:fillRect/>
           </a:stretch>
@@ -4033,7 +4002,7 @@
           <a:bodyPr wrap="square" lIns="0" tIns="0" rIns="0" bIns="0" rtlCol="0" anchor="ctr"/>
           <a:lstStyle/>
           <a:p>
-            <a:pPr indent="0" marL="0">
+            <a:pPr marL="0" indent="0">
               <a:buNone/>
             </a:pPr>
             <a:r>
@@ -4072,7 +4041,7 @@
           <a:bodyPr wrap="square" lIns="0" tIns="0" rIns="0" bIns="0" rtlCol="0" anchor="ctr"/>
           <a:lstStyle/>
           <a:p>
-            <a:pPr indent="0" marL="0">
+            <a:pPr marL="0" indent="0">
               <a:buNone/>
             </a:pPr>
             <a:r>
@@ -4114,24 +4083,31 @@
             <a:prstDash val="solid"/>
           </a:ln>
           <a:effectLst>
-            <a:outerShdw sx="100000" sy="100000" kx="0" ky="0" algn="bl" rotWithShape="0" blurRad="127000" dist="25400" dir="5400000">
+            <a:outerShdw blurRad="127000" dist="25400" dir="5400000" algn="bl" rotWithShape="0">
               <a:srgbClr val="000000">
                 <a:alpha val="8000"/>
               </a:srgbClr>
             </a:outerShdw>
           </a:effectLst>
         </p:spPr>
+        <p:txBody>
+          <a:bodyPr/>
+          <a:lstStyle/>
+          <a:p>
+            <a:endParaRPr lang="en-US"/>
+          </a:p>
+        </p:txBody>
       </p:sp>
       <p:pic>
         <p:nvPicPr>
-          <p:cNvPr id="18" name="Image 3" descr="preencoded.png">    </p:cNvPr>
+          <p:cNvPr id="18" name="Image 3" descr="preencoded.png"/>
           <p:cNvPicPr>
             <a:picLocks noChangeAspect="1"/>
           </p:cNvPicPr>
           <p:nvPr/>
         </p:nvPicPr>
         <p:blipFill>
-          <a:blip r:embed="rId4"/>
+          <a:blip r:embed="rId6"/>
           <a:stretch>
             <a:fillRect/>
           </a:stretch>
@@ -4167,7 +4143,7 @@
           <a:bodyPr wrap="square" lIns="0" tIns="0" rIns="0" bIns="0" rtlCol="0" anchor="ctr"/>
           <a:lstStyle/>
           <a:p>
-            <a:pPr indent="0" marL="0">
+            <a:pPr marL="0" indent="0">
               <a:buNone/>
             </a:pPr>
             <a:r>
@@ -4206,7 +4182,7 @@
           <a:bodyPr wrap="square" lIns="0" tIns="0" rIns="0" bIns="0" rtlCol="0" anchor="ctr"/>
           <a:lstStyle/>
           <a:p>
-            <a:pPr indent="0" marL="0">
+            <a:pPr marL="0" indent="0">
               <a:buNone/>
             </a:pPr>
             <a:r>
@@ -4248,24 +4224,31 @@
             <a:prstDash val="solid"/>
           </a:ln>
           <a:effectLst>
-            <a:outerShdw sx="100000" sy="100000" kx="0" ky="0" algn="bl" rotWithShape="0" blurRad="127000" dist="25400" dir="5400000">
+            <a:outerShdw blurRad="127000" dist="25400" dir="5400000" algn="bl" rotWithShape="0">
               <a:srgbClr val="000000">
                 <a:alpha val="8000"/>
               </a:srgbClr>
             </a:outerShdw>
           </a:effectLst>
         </p:spPr>
+        <p:txBody>
+          <a:bodyPr/>
+          <a:lstStyle/>
+          <a:p>
+            <a:endParaRPr lang="en-US"/>
+          </a:p>
+        </p:txBody>
       </p:sp>
       <p:pic>
         <p:nvPicPr>
-          <p:cNvPr id="22" name="Image 4" descr="preencoded.png">    </p:cNvPr>
+          <p:cNvPr id="22" name="Image 4" descr="preencoded.png"/>
           <p:cNvPicPr>
             <a:picLocks noChangeAspect="1"/>
           </p:cNvPicPr>
           <p:nvPr/>
         </p:nvPicPr>
         <p:blipFill>
-          <a:blip r:embed="rId5"/>
+          <a:blip r:embed="rId7"/>
           <a:stretch>
             <a:fillRect/>
           </a:stretch>
@@ -4301,7 +4284,7 @@
           <a:bodyPr wrap="square" lIns="0" tIns="0" rIns="0" bIns="0" rtlCol="0" anchor="ctr"/>
           <a:lstStyle/>
           <a:p>
-            <a:pPr indent="0" marL="0">
+            <a:pPr marL="0" indent="0">
               <a:buNone/>
             </a:pPr>
             <a:r>
@@ -4340,7 +4323,7 @@
           <a:bodyPr wrap="square" lIns="0" tIns="0" rIns="0" bIns="0" rtlCol="0" anchor="ctr"/>
           <a:lstStyle/>
           <a:p>
-            <a:pPr indent="0" marL="0">
+            <a:pPr marL="0" indent="0">
               <a:buNone/>
             </a:pPr>
             <a:r>
@@ -4382,24 +4365,31 @@
             <a:prstDash val="solid"/>
           </a:ln>
           <a:effectLst>
-            <a:outerShdw sx="100000" sy="100000" kx="0" ky="0" algn="bl" rotWithShape="0" blurRad="127000" dist="25400" dir="5400000">
+            <a:outerShdw blurRad="127000" dist="25400" dir="5400000" algn="bl" rotWithShape="0">
               <a:srgbClr val="000000">
                 <a:alpha val="8000"/>
               </a:srgbClr>
             </a:outerShdw>
           </a:effectLst>
         </p:spPr>
+        <p:txBody>
+          <a:bodyPr/>
+          <a:lstStyle/>
+          <a:p>
+            <a:endParaRPr lang="en-US"/>
+          </a:p>
+        </p:txBody>
       </p:sp>
       <p:pic>
         <p:nvPicPr>
-          <p:cNvPr id="26" name="Image 5" descr="preencoded.png">    </p:cNvPr>
+          <p:cNvPr id="26" name="Image 5" descr="preencoded.png"/>
           <p:cNvPicPr>
             <a:picLocks noChangeAspect="1"/>
           </p:cNvPicPr>
           <p:nvPr/>
         </p:nvPicPr>
         <p:blipFill>
-          <a:blip r:embed="rId6"/>
+          <a:blip r:embed="rId8"/>
           <a:stretch>
             <a:fillRect/>
           </a:stretch>
@@ -4435,7 +4425,7 @@
           <a:bodyPr wrap="square" lIns="0" tIns="0" rIns="0" bIns="0" rtlCol="0" anchor="ctr"/>
           <a:lstStyle/>
           <a:p>
-            <a:pPr indent="0" marL="0">
+            <a:pPr marL="0" indent="0">
               <a:buNone/>
             </a:pPr>
             <a:r>
@@ -4474,7 +4464,7 @@
           <a:bodyPr wrap="square" lIns="0" tIns="0" rIns="0" bIns="0" rtlCol="0" anchor="ctr"/>
           <a:lstStyle/>
           <a:p>
-            <a:pPr indent="0" marL="0">
+            <a:pPr marL="0" indent="0">
               <a:buNone/>
             </a:pPr>
             <a:r>
@@ -4513,7 +4503,7 @@
           <a:bodyPr wrap="square" lIns="0" tIns="0" rIns="0" bIns="0" rtlCol="0" anchor="ctr"/>
           <a:lstStyle/>
           <a:p>
-            <a:pPr algn="r" indent="0" marL="0">
+            <a:pPr marL="0" indent="0" algn="r">
               <a:buNone/>
             </a:pPr>
             <a:r>
@@ -4547,6 +4537,7 @@
         <a:solidFill>
           <a:srgbClr val="F7F5F0"/>
         </a:solidFill>
+        <a:effectLst/>
       </p:bgPr>
     </p:bg>
     <p:spTree>
@@ -4584,11 +4575,11 @@
           <a:bodyPr wrap="square" lIns="0" tIns="0" rIns="0" bIns="0" rtlCol="0" anchor="ctr"/>
           <a:lstStyle/>
           <a:p>
-            <a:pPr indent="0" marL="0">
-              <a:buNone/>
-            </a:pPr>
-            <a:r>
-              <a:rPr lang="en-US" sz="1000" b="1" spc="400" kern="0" dirty="0">
+            <a:pPr marL="0" indent="0">
+              <a:buNone/>
+            </a:pPr>
+            <a:r>
+              <a:rPr lang="en-US" sz="1000" b="1" kern="0" spc="400" dirty="0">
                 <a:solidFill>
                   <a:srgbClr val="CC785C"/>
                 </a:solidFill>
@@ -4623,7 +4614,7 @@
           <a:bodyPr wrap="square" lIns="0" tIns="0" rIns="0" bIns="0" rtlCol="0" anchor="ctr"/>
           <a:lstStyle/>
           <a:p>
-            <a:pPr indent="0" marL="0">
+            <a:pPr marL="0" indent="0">
               <a:buNone/>
             </a:pPr>
             <a:r>
@@ -4665,13 +4656,20 @@
             <a:prstDash val="solid"/>
           </a:ln>
           <a:effectLst>
-            <a:outerShdw sx="100000" sy="100000" kx="0" ky="0" algn="bl" rotWithShape="0" blurRad="127000" dist="25400" dir="5400000">
+            <a:outerShdw blurRad="127000" dist="25400" dir="5400000" algn="bl" rotWithShape="0">
               <a:srgbClr val="000000">
                 <a:alpha val="8000"/>
               </a:srgbClr>
             </a:outerShdw>
           </a:effectLst>
         </p:spPr>
+        <p:txBody>
+          <a:bodyPr/>
+          <a:lstStyle/>
+          <a:p>
+            <a:endParaRPr lang="en-US"/>
+          </a:p>
+        </p:txBody>
       </p:sp>
       <p:sp>
         <p:nvSpPr>
@@ -4697,6 +4695,13 @@
             <a:prstDash val="solid"/>
           </a:ln>
         </p:spPr>
+        <p:txBody>
+          <a:bodyPr/>
+          <a:lstStyle/>
+          <a:p>
+            <a:endParaRPr lang="en-US"/>
+          </a:p>
+        </p:txBody>
       </p:sp>
       <p:sp>
         <p:nvSpPr>
@@ -4719,7 +4724,7 @@
           <a:bodyPr wrap="square" lIns="0" tIns="0" rIns="0" bIns="0" rtlCol="0" anchor="ctr"/>
           <a:lstStyle/>
           <a:p>
-            <a:pPr algn="ctr" indent="0" marL="0">
+            <a:pPr marL="0" indent="0" algn="ctr">
               <a:buNone/>
             </a:pPr>
             <a:r>
@@ -4758,7 +4763,7 @@
           <a:bodyPr wrap="square" lIns="0" tIns="0" rIns="0" bIns="0" rtlCol="0" anchor="ctr"/>
           <a:lstStyle/>
           <a:p>
-            <a:pPr indent="0" marL="0">
+            <a:pPr marL="0" indent="0">
               <a:buNone/>
             </a:pPr>
             <a:r>
@@ -4797,7 +4802,7 @@
           <a:bodyPr wrap="square" lIns="0" tIns="0" rIns="0" bIns="0" rtlCol="0" anchor="ctr"/>
           <a:lstStyle/>
           <a:p>
-            <a:pPr indent="0" marL="0">
+            <a:pPr marL="0" indent="0">
               <a:buNone/>
             </a:pPr>
             <a:r>
@@ -4836,7 +4841,7 @@
           <a:bodyPr wrap="square" lIns="0" tIns="0" rIns="0" bIns="0" rtlCol="0" anchor="ctr"/>
           <a:lstStyle/>
           <a:p>
-            <a:pPr indent="0" marL="0">
+            <a:pPr marL="0" indent="0">
               <a:buNone/>
             </a:pPr>
             <a:r>
@@ -4878,13 +4883,20 @@
             <a:prstDash val="solid"/>
           </a:ln>
           <a:effectLst>
-            <a:outerShdw sx="100000" sy="100000" kx="0" ky="0" algn="bl" rotWithShape="0" blurRad="127000" dist="25400" dir="5400000">
+            <a:outerShdw blurRad="127000" dist="25400" dir="5400000" algn="bl" rotWithShape="0">
               <a:srgbClr val="000000">
                 <a:alpha val="8000"/>
               </a:srgbClr>
             </a:outerShdw>
           </a:effectLst>
         </p:spPr>
+        <p:txBody>
+          <a:bodyPr/>
+          <a:lstStyle/>
+          <a:p>
+            <a:endParaRPr lang="en-US"/>
+          </a:p>
+        </p:txBody>
       </p:sp>
       <p:sp>
         <p:nvSpPr>
@@ -4910,6 +4922,13 @@
             <a:prstDash val="solid"/>
           </a:ln>
         </p:spPr>
+        <p:txBody>
+          <a:bodyPr/>
+          <a:lstStyle/>
+          <a:p>
+            <a:endParaRPr lang="en-US"/>
+          </a:p>
+        </p:txBody>
       </p:sp>
       <p:sp>
         <p:nvSpPr>
@@ -4932,7 +4951,7 @@
           <a:bodyPr wrap="square" lIns="0" tIns="0" rIns="0" bIns="0" rtlCol="0" anchor="ctr"/>
           <a:lstStyle/>
           <a:p>
-            <a:pPr algn="ctr" indent="0" marL="0">
+            <a:pPr marL="0" indent="0" algn="ctr">
               <a:buNone/>
             </a:pPr>
             <a:r>
@@ -4971,7 +4990,7 @@
           <a:bodyPr wrap="square" lIns="0" tIns="0" rIns="0" bIns="0" rtlCol="0" anchor="ctr"/>
           <a:lstStyle/>
           <a:p>
-            <a:pPr indent="0" marL="0">
+            <a:pPr marL="0" indent="0">
               <a:buNone/>
             </a:pPr>
             <a:r>
@@ -5010,7 +5029,7 @@
           <a:bodyPr wrap="square" lIns="0" tIns="0" rIns="0" bIns="0" rtlCol="0" anchor="ctr"/>
           <a:lstStyle/>
           <a:p>
-            <a:pPr indent="0" marL="0">
+            <a:pPr marL="0" indent="0">
               <a:buNone/>
             </a:pPr>
             <a:r>
@@ -5049,7 +5068,7 @@
           <a:bodyPr wrap="square" lIns="0" tIns="0" rIns="0" bIns="0" rtlCol="0" anchor="ctr"/>
           <a:lstStyle/>
           <a:p>
-            <a:pPr indent="0" marL="0">
+            <a:pPr marL="0" indent="0">
               <a:buNone/>
             </a:pPr>
             <a:r>
@@ -5091,13 +5110,20 @@
             <a:prstDash val="solid"/>
           </a:ln>
           <a:effectLst>
-            <a:outerShdw sx="100000" sy="100000" kx="0" ky="0" algn="bl" rotWithShape="0" blurRad="127000" dist="25400" dir="5400000">
+            <a:outerShdw blurRad="127000" dist="25400" dir="5400000" algn="bl" rotWithShape="0">
               <a:srgbClr val="000000">
                 <a:alpha val="8000"/>
               </a:srgbClr>
             </a:outerShdw>
           </a:effectLst>
         </p:spPr>
+        <p:txBody>
+          <a:bodyPr/>
+          <a:lstStyle/>
+          <a:p>
+            <a:endParaRPr lang="en-US"/>
+          </a:p>
+        </p:txBody>
       </p:sp>
       <p:sp>
         <p:nvSpPr>
@@ -5123,6 +5149,13 @@
             <a:prstDash val="solid"/>
           </a:ln>
         </p:spPr>
+        <p:txBody>
+          <a:bodyPr/>
+          <a:lstStyle/>
+          <a:p>
+            <a:endParaRPr lang="en-US"/>
+          </a:p>
+        </p:txBody>
       </p:sp>
       <p:sp>
         <p:nvSpPr>
@@ -5145,7 +5178,7 @@
           <a:bodyPr wrap="square" lIns="0" tIns="0" rIns="0" bIns="0" rtlCol="0" anchor="ctr"/>
           <a:lstStyle/>
           <a:p>
-            <a:pPr algn="ctr" indent="0" marL="0">
+            <a:pPr marL="0" indent="0" algn="ctr">
               <a:buNone/>
             </a:pPr>
             <a:r>
@@ -5184,7 +5217,7 @@
           <a:bodyPr wrap="square" lIns="0" tIns="0" rIns="0" bIns="0" rtlCol="0" anchor="ctr"/>
           <a:lstStyle/>
           <a:p>
-            <a:pPr indent="0" marL="0">
+            <a:pPr marL="0" indent="0">
               <a:buNone/>
             </a:pPr>
             <a:r>
@@ -5223,7 +5256,7 @@
           <a:bodyPr wrap="square" lIns="0" tIns="0" rIns="0" bIns="0" rtlCol="0" anchor="ctr"/>
           <a:lstStyle/>
           <a:p>
-            <a:pPr indent="0" marL="0">
+            <a:pPr marL="0" indent="0">
               <a:buNone/>
             </a:pPr>
             <a:r>
@@ -5262,7 +5295,7 @@
           <a:bodyPr wrap="square" lIns="0" tIns="0" rIns="0" bIns="0" rtlCol="0" anchor="ctr"/>
           <a:lstStyle/>
           <a:p>
-            <a:pPr indent="0" marL="0">
+            <a:pPr marL="0" indent="0">
               <a:buNone/>
             </a:pPr>
             <a:r>
@@ -5301,7 +5334,7 @@
           <a:bodyPr wrap="square" lIns="0" tIns="0" rIns="0" bIns="0" rtlCol="0" anchor="ctr"/>
           <a:lstStyle/>
           <a:p>
-            <a:pPr algn="r" indent="0" marL="0">
+            <a:pPr marL="0" indent="0" algn="r">
               <a:buNone/>
             </a:pPr>
             <a:r>
@@ -5335,6 +5368,7 @@
         <a:solidFill>
           <a:srgbClr val="F7F5F0"/>
         </a:solidFill>
+        <a:effectLst/>
       </p:bgPr>
     </p:bg>
     <p:spTree>
@@ -5372,11 +5406,11 @@
           <a:bodyPr wrap="square" lIns="0" tIns="0" rIns="0" bIns="0" rtlCol="0" anchor="ctr"/>
           <a:lstStyle/>
           <a:p>
-            <a:pPr indent="0" marL="0">
-              <a:buNone/>
-            </a:pPr>
-            <a:r>
-              <a:rPr lang="en-US" sz="1000" b="1" spc="400" kern="0" dirty="0">
+            <a:pPr marL="0" indent="0">
+              <a:buNone/>
+            </a:pPr>
+            <a:r>
+              <a:rPr lang="en-US" sz="1000" b="1" kern="0" spc="400" dirty="0">
                 <a:solidFill>
                   <a:srgbClr val="CC785C"/>
                 </a:solidFill>
@@ -5411,7 +5445,7 @@
           <a:bodyPr wrap="square" lIns="0" tIns="0" rIns="0" bIns="0" rtlCol="0" anchor="ctr"/>
           <a:lstStyle/>
           <a:p>
-            <a:pPr indent="0" marL="0">
+            <a:pPr marL="0" indent="0">
               <a:buNone/>
             </a:pPr>
             <a:r>
@@ -5450,7 +5484,7 @@
           <a:bodyPr wrap="square" lIns="0" tIns="0" rIns="0" bIns="0" rtlCol="0" anchor="ctr"/>
           <a:lstStyle/>
           <a:p>
-            <a:pPr indent="0" marL="0">
+            <a:pPr marL="0" indent="0">
               <a:buNone/>
             </a:pPr>
             <a:r>
@@ -5492,13 +5526,20 @@
             <a:prstDash val="solid"/>
           </a:ln>
           <a:effectLst>
-            <a:outerShdw sx="100000" sy="100000" kx="0" ky="0" algn="bl" rotWithShape="0" blurRad="127000" dist="25400" dir="5400000">
+            <a:outerShdw blurRad="127000" dist="25400" dir="5400000" algn="bl" rotWithShape="0">
               <a:srgbClr val="000000">
                 <a:alpha val="8000"/>
               </a:srgbClr>
             </a:outerShdw>
           </a:effectLst>
         </p:spPr>
+        <p:txBody>
+          <a:bodyPr/>
+          <a:lstStyle/>
+          <a:p>
+            <a:endParaRPr lang="en-US"/>
+          </a:p>
+        </p:txBody>
       </p:sp>
       <p:sp>
         <p:nvSpPr>
@@ -5524,6 +5565,13 @@
             <a:prstDash val="solid"/>
           </a:ln>
         </p:spPr>
+        <p:txBody>
+          <a:bodyPr/>
+          <a:lstStyle/>
+          <a:p>
+            <a:endParaRPr lang="en-US"/>
+          </a:p>
+        </p:txBody>
       </p:sp>
       <p:sp>
         <p:nvSpPr>
@@ -5546,11 +5594,11 @@
           <a:bodyPr wrap="square" lIns="0" tIns="0" rIns="0" bIns="0" rtlCol="0" anchor="ctr"/>
           <a:lstStyle/>
           <a:p>
-            <a:pPr indent="0" marL="0">
-              <a:buNone/>
-            </a:pPr>
-            <a:r>
-              <a:rPr lang="en-US" sz="900" b="1" spc="300" kern="0" dirty="0">
+            <a:pPr marL="0" indent="0">
+              <a:buNone/>
+            </a:pPr>
+            <a:r>
+              <a:rPr lang="en-US" sz="900" b="1" kern="0" spc="300" dirty="0">
                 <a:solidFill>
                   <a:srgbClr val="CC785C"/>
                 </a:solidFill>
@@ -5585,7 +5633,7 @@
           <a:bodyPr wrap="square" lIns="0" tIns="0" rIns="0" bIns="0" rtlCol="0" anchor="ctr"/>
           <a:lstStyle/>
           <a:p>
-            <a:pPr indent="0" marL="0">
+            <a:pPr marL="0" indent="0">
               <a:buNone/>
             </a:pPr>
             <a:r>
@@ -5624,7 +5672,7 @@
           <a:bodyPr wrap="square" lIns="0" tIns="0" rIns="0" bIns="0" rtlCol="0" anchor="ctr"/>
           <a:lstStyle/>
           <a:p>
-            <a:pPr indent="0" marL="0">
+            <a:pPr marL="0" indent="0">
               <a:buNone/>
             </a:pPr>
             <a:r>
@@ -5663,7 +5711,7 @@
           <a:bodyPr wrap="square" lIns="0" tIns="0" rIns="0" bIns="0" rtlCol="0" anchor="ctr"/>
           <a:lstStyle/>
           <a:p>
-            <a:pPr indent="0" marL="0">
+            <a:pPr marL="0" indent="0">
               <a:buNone/>
             </a:pPr>
             <a:r>
@@ -5702,7 +5750,7 @@
           <a:bodyPr wrap="square" lIns="0" tIns="0" rIns="0" bIns="0" rtlCol="0" anchor="ctr"/>
           <a:lstStyle/>
           <a:p>
-            <a:pPr indent="0" marL="0">
+            <a:pPr marL="0" indent="0">
               <a:buNone/>
             </a:pPr>
             <a:r>
@@ -5741,7 +5789,7 @@
           <a:bodyPr wrap="square" lIns="0" tIns="0" rIns="0" bIns="0" rtlCol="0" anchor="ctr"/>
           <a:lstStyle/>
           <a:p>
-            <a:pPr indent="0" marL="0">
+            <a:pPr marL="0" indent="0">
               <a:buNone/>
             </a:pPr>
             <a:r>
@@ -5780,7 +5828,7 @@
           <a:bodyPr wrap="square" lIns="0" tIns="0" rIns="0" bIns="0" rtlCol="0" anchor="ctr"/>
           <a:lstStyle/>
           <a:p>
-            <a:pPr indent="0" marL="0">
+            <a:pPr marL="0" indent="0">
               <a:buNone/>
             </a:pPr>
             <a:r>
@@ -5819,7 +5867,7 @@
           <a:bodyPr wrap="square" lIns="0" tIns="0" rIns="0" bIns="0" rtlCol="0" anchor="ctr"/>
           <a:lstStyle/>
           <a:p>
-            <a:pPr indent="0" marL="0">
+            <a:pPr marL="0" indent="0">
               <a:buNone/>
             </a:pPr>
             <a:r>
@@ -5858,7 +5906,7 @@
           <a:bodyPr wrap="square" lIns="0" tIns="0" rIns="0" bIns="0" rtlCol="0" anchor="ctr"/>
           <a:lstStyle/>
           <a:p>
-            <a:pPr indent="0" marL="0">
+            <a:pPr marL="0" indent="0">
               <a:buNone/>
             </a:pPr>
             <a:r>
@@ -5897,7 +5945,7 @@
           <a:bodyPr wrap="square" lIns="0" tIns="0" rIns="0" bIns="0" rtlCol="0" anchor="ctr"/>
           <a:lstStyle/>
           <a:p>
-            <a:pPr indent="0" marL="0">
+            <a:pPr marL="0" indent="0">
               <a:buNone/>
             </a:pPr>
             <a:r>
@@ -5936,7 +5984,7 @@
           <a:bodyPr wrap="square" lIns="0" tIns="0" rIns="0" bIns="0" rtlCol="0" anchor="ctr"/>
           <a:lstStyle/>
           <a:p>
-            <a:pPr indent="0" marL="0">
+            <a:pPr marL="0" indent="0">
               <a:buNone/>
             </a:pPr>
             <a:r>
@@ -5975,7 +6023,7 @@
           <a:bodyPr wrap="square" lIns="0" tIns="0" rIns="0" bIns="0" rtlCol="0" anchor="ctr"/>
           <a:lstStyle/>
           <a:p>
-            <a:pPr indent="0" marL="0">
+            <a:pPr marL="0" indent="0">
               <a:buNone/>
             </a:pPr>
             <a:r>
@@ -6017,13 +6065,20 @@
             <a:prstDash val="solid"/>
           </a:ln>
           <a:effectLst>
-            <a:outerShdw sx="100000" sy="100000" kx="0" ky="0" algn="bl" rotWithShape="0" blurRad="127000" dist="25400" dir="5400000">
+            <a:outerShdw blurRad="127000" dist="25400" dir="5400000" algn="bl" rotWithShape="0">
               <a:srgbClr val="000000">
                 <a:alpha val="8000"/>
               </a:srgbClr>
             </a:outerShdw>
           </a:effectLst>
         </p:spPr>
+        <p:txBody>
+          <a:bodyPr/>
+          <a:lstStyle/>
+          <a:p>
+            <a:endParaRPr lang="en-US"/>
+          </a:p>
+        </p:txBody>
       </p:sp>
       <p:sp>
         <p:nvSpPr>
@@ -6049,6 +6104,13 @@
             <a:prstDash val="solid"/>
           </a:ln>
         </p:spPr>
+        <p:txBody>
+          <a:bodyPr/>
+          <a:lstStyle/>
+          <a:p>
+            <a:endParaRPr lang="en-US"/>
+          </a:p>
+        </p:txBody>
       </p:sp>
       <p:sp>
         <p:nvSpPr>
@@ -6071,11 +6133,11 @@
           <a:bodyPr wrap="square" lIns="0" tIns="0" rIns="0" bIns="0" rtlCol="0" anchor="ctr"/>
           <a:lstStyle/>
           <a:p>
-            <a:pPr indent="0" marL="0">
-              <a:buNone/>
-            </a:pPr>
-            <a:r>
-              <a:rPr lang="en-US" sz="900" b="1" spc="300" kern="0" dirty="0">
+            <a:pPr marL="0" indent="0">
+              <a:buNone/>
+            </a:pPr>
+            <a:r>
+              <a:rPr lang="en-US" sz="900" b="1" kern="0" spc="300" dirty="0">
                 <a:solidFill>
                   <a:srgbClr val="CC785C"/>
                 </a:solidFill>
@@ -6110,7 +6172,7 @@
           <a:bodyPr wrap="square" lIns="0" tIns="0" rIns="0" bIns="0" rtlCol="0" anchor="ctr"/>
           <a:lstStyle/>
           <a:p>
-            <a:pPr indent="0" marL="0">
+            <a:pPr marL="0" indent="0">
               <a:buNone/>
             </a:pPr>
             <a:r>
@@ -6149,7 +6211,7 @@
           <a:bodyPr wrap="square" lIns="0" tIns="0" rIns="0" bIns="0" rtlCol="0" anchor="ctr"/>
           <a:lstStyle/>
           <a:p>
-            <a:pPr indent="0" marL="0">
+            <a:pPr marL="0" indent="0">
               <a:buNone/>
             </a:pPr>
             <a:r>
@@ -6188,7 +6250,7 @@
           <a:bodyPr wrap="square" lIns="0" tIns="0" rIns="0" bIns="0" rtlCol="0" anchor="ctr"/>
           <a:lstStyle/>
           <a:p>
-            <a:pPr indent="0" marL="0">
+            <a:pPr marL="0" indent="0">
               <a:buNone/>
             </a:pPr>
             <a:r>
@@ -6227,7 +6289,7 @@
           <a:bodyPr wrap="square" lIns="0" tIns="0" rIns="0" bIns="0" rtlCol="0" anchor="ctr"/>
           <a:lstStyle/>
           <a:p>
-            <a:pPr indent="0" marL="0">
+            <a:pPr marL="0" indent="0">
               <a:buNone/>
             </a:pPr>
             <a:r>
@@ -6266,7 +6328,7 @@
           <a:bodyPr wrap="square" lIns="0" tIns="0" rIns="0" bIns="0" rtlCol="0" anchor="ctr"/>
           <a:lstStyle/>
           <a:p>
-            <a:pPr indent="0" marL="0">
+            <a:pPr marL="0" indent="0">
               <a:buNone/>
             </a:pPr>
             <a:r>
@@ -6305,7 +6367,7 @@
           <a:bodyPr wrap="square" lIns="0" tIns="0" rIns="0" bIns="0" rtlCol="0" anchor="ctr"/>
           <a:lstStyle/>
           <a:p>
-            <a:pPr indent="0" marL="0">
+            <a:pPr marL="0" indent="0">
               <a:buNone/>
             </a:pPr>
             <a:r>
@@ -6344,7 +6406,7 @@
           <a:bodyPr wrap="square" lIns="0" tIns="0" rIns="0" bIns="0" rtlCol="0" anchor="ctr"/>
           <a:lstStyle/>
           <a:p>
-            <a:pPr indent="0" marL="0">
+            <a:pPr marL="0" indent="0">
               <a:buNone/>
             </a:pPr>
             <a:r>
@@ -6383,7 +6445,7 @@
           <a:bodyPr wrap="square" lIns="0" tIns="0" rIns="0" bIns="0" rtlCol="0" anchor="ctr"/>
           <a:lstStyle/>
           <a:p>
-            <a:pPr indent="0" marL="0">
+            <a:pPr marL="0" indent="0">
               <a:buNone/>
             </a:pPr>
             <a:r>
@@ -6422,7 +6484,7 @@
           <a:bodyPr wrap="square" lIns="0" tIns="0" rIns="0" bIns="0" rtlCol="0" anchor="ctr"/>
           <a:lstStyle/>
           <a:p>
-            <a:pPr indent="0" marL="0">
+            <a:pPr marL="0" indent="0">
               <a:buNone/>
             </a:pPr>
             <a:r>
@@ -6461,7 +6523,7 @@
           <a:bodyPr wrap="square" lIns="0" tIns="0" rIns="0" bIns="0" rtlCol="0" anchor="ctr"/>
           <a:lstStyle/>
           <a:p>
-            <a:pPr indent="0" marL="0">
+            <a:pPr marL="0" indent="0">
               <a:buNone/>
             </a:pPr>
             <a:r>
@@ -6500,7 +6562,7 @@
           <a:bodyPr wrap="square" lIns="0" tIns="0" rIns="0" bIns="0" rtlCol="0" anchor="ctr"/>
           <a:lstStyle/>
           <a:p>
-            <a:pPr indent="0" marL="0">
+            <a:pPr marL="0" indent="0">
               <a:buNone/>
             </a:pPr>
             <a:r>
@@ -6542,13 +6604,20 @@
             <a:prstDash val="solid"/>
           </a:ln>
           <a:effectLst>
-            <a:outerShdw sx="100000" sy="100000" kx="0" ky="0" algn="bl" rotWithShape="0" blurRad="127000" dist="25400" dir="5400000">
+            <a:outerShdw blurRad="127000" dist="25400" dir="5400000" algn="bl" rotWithShape="0">
               <a:srgbClr val="000000">
                 <a:alpha val="8000"/>
               </a:srgbClr>
             </a:outerShdw>
           </a:effectLst>
         </p:spPr>
+        <p:txBody>
+          <a:bodyPr/>
+          <a:lstStyle/>
+          <a:p>
+            <a:endParaRPr lang="en-US"/>
+          </a:p>
+        </p:txBody>
       </p:sp>
       <p:sp>
         <p:nvSpPr>
@@ -6574,6 +6643,13 @@
             <a:prstDash val="solid"/>
           </a:ln>
         </p:spPr>
+        <p:txBody>
+          <a:bodyPr/>
+          <a:lstStyle/>
+          <a:p>
+            <a:endParaRPr lang="en-US"/>
+          </a:p>
+        </p:txBody>
       </p:sp>
       <p:sp>
         <p:nvSpPr>
@@ -6596,11 +6672,11 @@
           <a:bodyPr wrap="square" lIns="0" tIns="0" rIns="0" bIns="0" rtlCol="0" anchor="ctr"/>
           <a:lstStyle/>
           <a:p>
-            <a:pPr indent="0" marL="0">
-              <a:buNone/>
-            </a:pPr>
-            <a:r>
-              <a:rPr lang="en-US" sz="900" b="1" spc="300" kern="0" dirty="0">
+            <a:pPr marL="0" indent="0">
+              <a:buNone/>
+            </a:pPr>
+            <a:r>
+              <a:rPr lang="en-US" sz="900" b="1" kern="0" spc="300" dirty="0">
                 <a:solidFill>
                   <a:srgbClr val="CC785C"/>
                 </a:solidFill>
@@ -6635,7 +6711,7 @@
           <a:bodyPr wrap="square" lIns="0" tIns="0" rIns="0" bIns="0" rtlCol="0" anchor="ctr"/>
           <a:lstStyle/>
           <a:p>
-            <a:pPr indent="0" marL="0">
+            <a:pPr marL="0" indent="0">
               <a:buNone/>
             </a:pPr>
             <a:r>
@@ -6674,7 +6750,7 @@
           <a:bodyPr wrap="square" lIns="0" tIns="0" rIns="0" bIns="0" rtlCol="0" anchor="ctr"/>
           <a:lstStyle/>
           <a:p>
-            <a:pPr indent="0" marL="0">
+            <a:pPr marL="0" indent="0">
               <a:buNone/>
             </a:pPr>
             <a:r>
@@ -6713,7 +6789,7 @@
           <a:bodyPr wrap="square" lIns="0" tIns="0" rIns="0" bIns="0" rtlCol="0" anchor="ctr"/>
           <a:lstStyle/>
           <a:p>
-            <a:pPr indent="0" marL="0">
+            <a:pPr marL="0" indent="0">
               <a:buNone/>
             </a:pPr>
             <a:r>
@@ -6752,7 +6828,7 @@
           <a:bodyPr wrap="square" lIns="0" tIns="0" rIns="0" bIns="0" rtlCol="0" anchor="ctr"/>
           <a:lstStyle/>
           <a:p>
-            <a:pPr indent="0" marL="0">
+            <a:pPr marL="0" indent="0">
               <a:buNone/>
             </a:pPr>
             <a:r>
@@ -6791,7 +6867,7 @@
           <a:bodyPr wrap="square" lIns="0" tIns="0" rIns="0" bIns="0" rtlCol="0" anchor="ctr"/>
           <a:lstStyle/>
           <a:p>
-            <a:pPr indent="0" marL="0">
+            <a:pPr marL="0" indent="0">
               <a:buNone/>
             </a:pPr>
             <a:r>
@@ -6830,7 +6906,7 @@
           <a:bodyPr wrap="square" lIns="0" tIns="0" rIns="0" bIns="0" rtlCol="0" anchor="ctr"/>
           <a:lstStyle/>
           <a:p>
-            <a:pPr indent="0" marL="0">
+            <a:pPr marL="0" indent="0">
               <a:buNone/>
             </a:pPr>
             <a:r>
@@ -6869,7 +6945,7 @@
           <a:bodyPr wrap="square" lIns="0" tIns="0" rIns="0" bIns="0" rtlCol="0" anchor="ctr"/>
           <a:lstStyle/>
           <a:p>
-            <a:pPr indent="0" marL="0">
+            <a:pPr marL="0" indent="0">
               <a:buNone/>
             </a:pPr>
             <a:r>
@@ -6908,7 +6984,7 @@
           <a:bodyPr wrap="square" lIns="0" tIns="0" rIns="0" bIns="0" rtlCol="0" anchor="ctr"/>
           <a:lstStyle/>
           <a:p>
-            <a:pPr indent="0" marL="0">
+            <a:pPr marL="0" indent="0">
               <a:buNone/>
             </a:pPr>
             <a:r>
@@ -6947,7 +7023,7 @@
           <a:bodyPr wrap="square" lIns="0" tIns="0" rIns="0" bIns="0" rtlCol="0" anchor="ctr"/>
           <a:lstStyle/>
           <a:p>
-            <a:pPr indent="0" marL="0">
+            <a:pPr marL="0" indent="0">
               <a:buNone/>
             </a:pPr>
             <a:r>
@@ -6986,7 +7062,7 @@
           <a:bodyPr wrap="square" lIns="0" tIns="0" rIns="0" bIns="0" rtlCol="0" anchor="ctr"/>
           <a:lstStyle/>
           <a:p>
-            <a:pPr indent="0" marL="0">
+            <a:pPr marL="0" indent="0">
               <a:buNone/>
             </a:pPr>
             <a:r>
@@ -7025,7 +7101,7 @@
           <a:bodyPr wrap="square" lIns="0" tIns="0" rIns="0" bIns="0" rtlCol="0" anchor="ctr"/>
           <a:lstStyle/>
           <a:p>
-            <a:pPr indent="0" marL="0">
+            <a:pPr marL="0" indent="0">
               <a:buNone/>
             </a:pPr>
             <a:r>
@@ -7064,7 +7140,7 @@
           <a:bodyPr wrap="square" lIns="0" tIns="0" rIns="0" bIns="0" rtlCol="0" anchor="ctr"/>
           <a:lstStyle/>
           <a:p>
-            <a:pPr indent="0" marL="0">
+            <a:pPr marL="0" indent="0">
               <a:buNone/>
             </a:pPr>
             <a:r>
@@ -7103,7 +7179,7 @@
           <a:bodyPr wrap="square" lIns="0" tIns="0" rIns="0" bIns="0" rtlCol="0" anchor="ctr"/>
           <a:lstStyle/>
           <a:p>
-            <a:pPr algn="r" indent="0" marL="0">
+            <a:pPr marL="0" indent="0" algn="r">
               <a:buNone/>
             </a:pPr>
             <a:r>
@@ -7131,12 +7207,13 @@
 
 <file path=ppt/slides/slide14.xml><?xml version="1.0" encoding="utf-8"?>
 <p:sld xmlns:a="http://schemas.openxmlformats.org/drawingml/2006/main" xmlns:r="http://schemas.openxmlformats.org/officeDocument/2006/relationships" xmlns:p="http://schemas.openxmlformats.org/presentationml/2006/main">
-  <p:cSld name="Slide 14">
+  <p:cSld name="Slide 15">
     <p:bg>
       <p:bgPr>
         <a:solidFill>
-          <a:srgbClr val="1A1B1F"/>
+          <a:srgbClr val="F7F5F0"/>
         </a:solidFill>
+        <a:effectLst/>
       </p:bgPr>
     </p:bg>
     <p:spTree>
@@ -7155,16 +7232,172 @@
       </p:grpSpPr>
       <p:sp>
         <p:nvSpPr>
-          <p:cNvPr id="2" name="Shape 0"/>
-          <p:cNvSpPr/>
-          <p:nvPr/>
-        </p:nvSpPr>
-        <p:spPr>
-          <a:xfrm>
-            <a:off x="502920" y="502920"/>
-            <a:ext cx="164592" cy="164592"/>
-          </a:xfrm>
-          <a:prstGeom prst="ellipse">
+          <p:cNvPr id="2" name="Text 0"/>
+          <p:cNvSpPr/>
+          <p:nvPr/>
+        </p:nvSpPr>
+        <p:spPr>
+          <a:xfrm>
+            <a:off x="502920" y="411480"/>
+            <a:ext cx="6400800" cy="274320"/>
+          </a:xfrm>
+          <a:prstGeom prst="rect">
+            <a:avLst/>
+          </a:prstGeom>
+          <a:noFill/>
+          <a:ln/>
+        </p:spPr>
+        <p:txBody>
+          <a:bodyPr wrap="square" lIns="0" tIns="0" rIns="0" bIns="0" rtlCol="0" anchor="ctr"/>
+          <a:lstStyle/>
+          <a:p>
+            <a:pPr marL="0" indent="0">
+              <a:buNone/>
+            </a:pPr>
+            <a:r>
+              <a:rPr lang="en-US" sz="1000" b="1" kern="0" spc="400" dirty="0">
+                <a:solidFill>
+                  <a:srgbClr val="CC785C"/>
+                </a:solidFill>
+                <a:latin typeface="Calibri" pitchFamily="34" charset="0"/>
+                <a:ea typeface="Calibri" pitchFamily="34" charset="-122"/>
+                <a:cs typeface="Calibri" pitchFamily="34" charset="-120"/>
+              </a:rPr>
+              <a:t>13  —  LIMITATIONS</a:t>
+            </a:r>
+            <a:endParaRPr lang="en-US" sz="1000" dirty="0"/>
+          </a:p>
+        </p:txBody>
+      </p:sp>
+      <p:sp>
+        <p:nvSpPr>
+          <p:cNvPr id="3" name="Text 1"/>
+          <p:cNvSpPr/>
+          <p:nvPr/>
+        </p:nvSpPr>
+        <p:spPr>
+          <a:xfrm>
+            <a:off x="502920" y="731520"/>
+            <a:ext cx="8229600" cy="685800"/>
+          </a:xfrm>
+          <a:prstGeom prst="rect">
+            <a:avLst/>
+          </a:prstGeom>
+          <a:noFill/>
+          <a:ln/>
+        </p:spPr>
+        <p:txBody>
+          <a:bodyPr wrap="square" lIns="0" tIns="0" rIns="0" bIns="0" rtlCol="0" anchor="ctr"/>
+          <a:lstStyle/>
+          <a:p>
+            <a:pPr marL="0" indent="0">
+              <a:buNone/>
+            </a:pPr>
+            <a:r>
+              <a:rPr lang="en-US" sz="3600" b="1" dirty="0">
+                <a:solidFill>
+                  <a:srgbClr val="1A1B1F"/>
+                </a:solidFill>
+                <a:latin typeface="Georgia" pitchFamily="34" charset="0"/>
+                <a:ea typeface="Georgia" pitchFamily="34" charset="-122"/>
+                <a:cs typeface="Georgia" pitchFamily="34" charset="-120"/>
+              </a:rPr>
+              <a:t>Where it falls short</a:t>
+            </a:r>
+            <a:endParaRPr lang="en-US" sz="3600" dirty="0"/>
+          </a:p>
+        </p:txBody>
+      </p:sp>
+      <p:sp>
+        <p:nvSpPr>
+          <p:cNvPr id="4" name="Text 2"/>
+          <p:cNvSpPr/>
+          <p:nvPr/>
+        </p:nvSpPr>
+        <p:spPr>
+          <a:xfrm>
+            <a:off x="502920" y="1417320"/>
+            <a:ext cx="8229600" cy="365760"/>
+          </a:xfrm>
+          <a:prstGeom prst="rect">
+            <a:avLst/>
+          </a:prstGeom>
+          <a:noFill/>
+          <a:ln/>
+        </p:spPr>
+        <p:txBody>
+          <a:bodyPr wrap="square" lIns="0" tIns="0" rIns="0" bIns="0" rtlCol="0" anchor="ctr"/>
+          <a:lstStyle/>
+          <a:p>
+            <a:pPr marL="0" indent="0">
+              <a:buNone/>
+            </a:pPr>
+            <a:r>
+              <a:rPr lang="en-US" sz="1300" i="1" dirty="0">
+                <a:solidFill>
+                  <a:srgbClr val="6B6A66"/>
+                </a:solidFill>
+                <a:latin typeface="Calibri" pitchFamily="34" charset="0"/>
+                <a:ea typeface="Calibri" pitchFamily="34" charset="-122"/>
+                <a:cs typeface="Calibri" pitchFamily="34" charset="-120"/>
+              </a:rPr>
+              <a:t>Knowing the failure modes makes you faster at catching them. Always read the diff.</a:t>
+            </a:r>
+            <a:endParaRPr lang="en-US" sz="1300" dirty="0"/>
+          </a:p>
+        </p:txBody>
+      </p:sp>
+      <p:sp>
+        <p:nvSpPr>
+          <p:cNvPr id="5" name="Shape 3"/>
+          <p:cNvSpPr/>
+          <p:nvPr/>
+        </p:nvSpPr>
+        <p:spPr>
+          <a:xfrm>
+            <a:off x="502920" y="1965960"/>
+            <a:ext cx="4023360" cy="1371600"/>
+          </a:xfrm>
+          <a:prstGeom prst="rect">
+            <a:avLst/>
+          </a:prstGeom>
+          <a:solidFill>
+            <a:srgbClr val="FFFFFF"/>
+          </a:solidFill>
+          <a:ln w="9525">
+            <a:solidFill>
+              <a:srgbClr val="E3DFD7"/>
+            </a:solidFill>
+            <a:prstDash val="solid"/>
+          </a:ln>
+          <a:effectLst>
+            <a:outerShdw blurRad="127000" dist="25400" dir="5400000" algn="bl" rotWithShape="0">
+              <a:srgbClr val="000000">
+                <a:alpha val="8000"/>
+              </a:srgbClr>
+            </a:outerShdw>
+          </a:effectLst>
+        </p:spPr>
+        <p:txBody>
+          <a:bodyPr/>
+          <a:lstStyle/>
+          <a:p>
+            <a:endParaRPr lang="en-US"/>
+          </a:p>
+        </p:txBody>
+      </p:sp>
+      <p:sp>
+        <p:nvSpPr>
+          <p:cNvPr id="6" name="Shape 4"/>
+          <p:cNvSpPr/>
+          <p:nvPr/>
+        </p:nvSpPr>
+        <p:spPr>
+          <a:xfrm>
+            <a:off x="502920" y="1965960"/>
+            <a:ext cx="64008" cy="1371600"/>
+          </a:xfrm>
+          <a:prstGeom prst="rect">
             <a:avLst/>
           </a:prstGeom>
           <a:solidFill>
@@ -7177,41 +7410,150 @@
             <a:prstDash val="solid"/>
           </a:ln>
         </p:spPr>
-      </p:sp>
-      <p:sp>
-        <p:nvSpPr>
-          <p:cNvPr id="3" name="Text 1"/>
-          <p:cNvSpPr/>
-          <p:nvPr/>
-        </p:nvSpPr>
-        <p:spPr>
-          <a:xfrm>
-            <a:off x="749808" y="457200"/>
-            <a:ext cx="4572000" cy="256032"/>
-          </a:xfrm>
-          <a:prstGeom prst="rect">
-            <a:avLst/>
-          </a:prstGeom>
-          <a:noFill/>
-          <a:ln/>
-        </p:spPr>
-        <p:txBody>
-          <a:bodyPr wrap="square" lIns="0" tIns="0" rIns="0" bIns="0" rtlCol="0" anchor="ctr"/>
-          <a:lstStyle/>
-          <a:p>
-            <a:pPr indent="0" marL="0">
-              <a:buNone/>
-            </a:pPr>
-            <a:r>
-              <a:rPr lang="en-US" sz="1100" b="1" spc="400" kern="0" dirty="0">
-                <a:solidFill>
-                  <a:srgbClr val="A9A69E"/>
+        <p:txBody>
+          <a:bodyPr/>
+          <a:lstStyle/>
+          <a:p>
+            <a:endParaRPr lang="en-US"/>
+          </a:p>
+        </p:txBody>
+      </p:sp>
+      <p:pic>
+        <p:nvPicPr>
+          <p:cNvPr id="7" name="Image 0" descr="preencoded.png"/>
+          <p:cNvPicPr>
+            <a:picLocks noChangeAspect="1"/>
+          </p:cNvPicPr>
+          <p:nvPr/>
+        </p:nvPicPr>
+        <p:blipFill>
+          <a:blip r:embed="rId3"/>
+          <a:stretch>
+            <a:fillRect/>
+          </a:stretch>
+        </p:blipFill>
+        <p:spPr>
+          <a:xfrm>
+            <a:off x="758952" y="2194560"/>
+            <a:ext cx="320040" cy="320040"/>
+          </a:xfrm>
+          <a:prstGeom prst="rect">
+            <a:avLst/>
+          </a:prstGeom>
+        </p:spPr>
+      </p:pic>
+      <p:sp>
+        <p:nvSpPr>
+          <p:cNvPr id="8" name="Text 5"/>
+          <p:cNvSpPr/>
+          <p:nvPr/>
+        </p:nvSpPr>
+        <p:spPr>
+          <a:xfrm>
+            <a:off x="1188720" y="2130552"/>
+            <a:ext cx="3200400" cy="320040"/>
+          </a:xfrm>
+          <a:prstGeom prst="rect">
+            <a:avLst/>
+          </a:prstGeom>
+          <a:noFill/>
+          <a:ln/>
+        </p:spPr>
+        <p:txBody>
+          <a:bodyPr wrap="square" lIns="0" tIns="0" rIns="0" bIns="0" rtlCol="0" anchor="ctr"/>
+          <a:lstStyle/>
+          <a:p>
+            <a:pPr marL="0" indent="0">
+              <a:buNone/>
+            </a:pPr>
+            <a:r>
+              <a:rPr lang="en-US" sz="1800" b="1" dirty="0">
+                <a:solidFill>
+                  <a:srgbClr val="1A1B1F"/>
+                </a:solidFill>
+                <a:latin typeface="Georgia" pitchFamily="34" charset="0"/>
+                <a:ea typeface="Georgia" pitchFamily="34" charset="-122"/>
+                <a:cs typeface="Georgia" pitchFamily="34" charset="-120"/>
+              </a:rPr>
+              <a:t>Context</a:t>
+            </a:r>
+            <a:endParaRPr lang="en-US" sz="1800" dirty="0"/>
+          </a:p>
+        </p:txBody>
+      </p:sp>
+      <p:sp>
+        <p:nvSpPr>
+          <p:cNvPr id="9" name="Text 6"/>
+          <p:cNvSpPr/>
+          <p:nvPr/>
+        </p:nvSpPr>
+        <p:spPr>
+          <a:xfrm>
+            <a:off x="1188720" y="2423160"/>
+            <a:ext cx="3200400" cy="219456"/>
+          </a:xfrm>
+          <a:prstGeom prst="rect">
+            <a:avLst/>
+          </a:prstGeom>
+          <a:noFill/>
+          <a:ln/>
+        </p:spPr>
+        <p:txBody>
+          <a:bodyPr wrap="square" lIns="0" tIns="0" rIns="0" bIns="0" rtlCol="0" anchor="ctr"/>
+          <a:lstStyle/>
+          <a:p>
+            <a:pPr marL="0" indent="0">
+              <a:buNone/>
+            </a:pPr>
+            <a:r>
+              <a:rPr lang="en-US" sz="1000" b="1" kern="0" spc="200" dirty="0">
+                <a:solidFill>
+                  <a:srgbClr val="CC785C"/>
                 </a:solidFill>
                 <a:latin typeface="Calibri" pitchFamily="34" charset="0"/>
                 <a:ea typeface="Calibri" pitchFamily="34" charset="-122"/>
                 <a:cs typeface="Calibri" pitchFamily="34" charset="-120"/>
               </a:rPr>
-              <a:t>END  —  NEXT STEPS</a:t>
+              <a:t>Dropped details</a:t>
+            </a:r>
+            <a:endParaRPr lang="en-US" sz="1000" dirty="0"/>
+          </a:p>
+        </p:txBody>
+      </p:sp>
+      <p:sp>
+        <p:nvSpPr>
+          <p:cNvPr id="10" name="Text 7"/>
+          <p:cNvSpPr/>
+          <p:nvPr/>
+        </p:nvSpPr>
+        <p:spPr>
+          <a:xfrm>
+            <a:off x="758952" y="2697480"/>
+            <a:ext cx="3611880" cy="594360"/>
+          </a:xfrm>
+          <a:prstGeom prst="rect">
+            <a:avLst/>
+          </a:prstGeom>
+          <a:noFill/>
+          <a:ln/>
+        </p:spPr>
+        <p:txBody>
+          <a:bodyPr wrap="square" lIns="0" tIns="0" rIns="0" bIns="0" rtlCol="0" anchor="ctr"/>
+          <a:lstStyle/>
+          <a:p>
+            <a:pPr marL="0" indent="0">
+              <a:buNone/>
+            </a:pPr>
+            <a:r>
+              <a:rPr lang="en-US" sz="1100" dirty="0">
+                <a:solidFill>
+                  <a:srgbClr val="6B6A66"/>
+                </a:solidFill>
+                <a:latin typeface="Calibri" pitchFamily="34" charset="0"/>
+                <a:ea typeface="Calibri" pitchFamily="34" charset="-122"/>
+                <a:cs typeface="Calibri" pitchFamily="34" charset="-120"/>
+              </a:rPr>
+              <a:t>Long sessions and huge files strain the context window; earlier details get dropped. Reset with /clear, trim with /compact, point with @.</a:t>
             </a:r>
             <a:endParaRPr lang="en-US" sz="1100" dirty="0"/>
           </a:p>
@@ -7219,295 +7561,596 @@
       </p:sp>
       <p:sp>
         <p:nvSpPr>
-          <p:cNvPr id="4" name="Text 2"/>
-          <p:cNvSpPr/>
-          <p:nvPr/>
-        </p:nvSpPr>
-        <p:spPr>
-          <a:xfrm>
-            <a:off x="502920" y="1691640"/>
-            <a:ext cx="8412480" cy="731520"/>
-          </a:xfrm>
-          <a:prstGeom prst="rect">
-            <a:avLst/>
-          </a:prstGeom>
-          <a:noFill/>
-          <a:ln/>
-        </p:spPr>
-        <p:txBody>
-          <a:bodyPr wrap="square" lIns="0" tIns="0" rIns="0" bIns="0" rtlCol="0" anchor="ctr"/>
-          <a:lstStyle/>
-          <a:p>
-            <a:pPr indent="0" marL="0">
-              <a:buNone/>
-            </a:pPr>
-            <a:r>
-              <a:rPr lang="en-US" sz="3400" b="1" dirty="0">
-                <a:solidFill>
-                  <a:srgbClr val="F7F5F0"/>
+          <p:cNvPr id="11" name="Shape 8"/>
+          <p:cNvSpPr/>
+          <p:nvPr/>
+        </p:nvSpPr>
+        <p:spPr>
+          <a:xfrm>
+            <a:off x="4617720" y="1965960"/>
+            <a:ext cx="4023360" cy="1371600"/>
+          </a:xfrm>
+          <a:prstGeom prst="rect">
+            <a:avLst/>
+          </a:prstGeom>
+          <a:solidFill>
+            <a:srgbClr val="FFFFFF"/>
+          </a:solidFill>
+          <a:ln w="9525">
+            <a:solidFill>
+              <a:srgbClr val="E3DFD7"/>
+            </a:solidFill>
+            <a:prstDash val="solid"/>
+          </a:ln>
+          <a:effectLst>
+            <a:outerShdw blurRad="127000" dist="25400" dir="5400000" algn="bl" rotWithShape="0">
+              <a:srgbClr val="000000">
+                <a:alpha val="8000"/>
+              </a:srgbClr>
+            </a:outerShdw>
+          </a:effectLst>
+        </p:spPr>
+        <p:txBody>
+          <a:bodyPr/>
+          <a:lstStyle/>
+          <a:p>
+            <a:endParaRPr lang="en-US"/>
+          </a:p>
+        </p:txBody>
+      </p:sp>
+      <p:sp>
+        <p:nvSpPr>
+          <p:cNvPr id="12" name="Shape 9"/>
+          <p:cNvSpPr/>
+          <p:nvPr/>
+        </p:nvSpPr>
+        <p:spPr>
+          <a:xfrm>
+            <a:off x="4617720" y="1965960"/>
+            <a:ext cx="64008" cy="1371600"/>
+          </a:xfrm>
+          <a:prstGeom prst="rect">
+            <a:avLst/>
+          </a:prstGeom>
+          <a:solidFill>
+            <a:srgbClr val="CC785C"/>
+          </a:solidFill>
+          <a:ln w="12700">
+            <a:solidFill>
+              <a:srgbClr val="CC785C"/>
+            </a:solidFill>
+            <a:prstDash val="solid"/>
+          </a:ln>
+        </p:spPr>
+        <p:txBody>
+          <a:bodyPr/>
+          <a:lstStyle/>
+          <a:p>
+            <a:endParaRPr lang="en-US"/>
+          </a:p>
+        </p:txBody>
+      </p:sp>
+      <p:pic>
+        <p:nvPicPr>
+          <p:cNvPr id="13" name="Image 1" descr="preencoded.png"/>
+          <p:cNvPicPr>
+            <a:picLocks noChangeAspect="1"/>
+          </p:cNvPicPr>
+          <p:nvPr/>
+        </p:nvPicPr>
+        <p:blipFill>
+          <a:blip r:embed="rId4"/>
+          <a:stretch>
+            <a:fillRect/>
+          </a:stretch>
+        </p:blipFill>
+        <p:spPr>
+          <a:xfrm>
+            <a:off x="4873752" y="2194560"/>
+            <a:ext cx="320040" cy="320040"/>
+          </a:xfrm>
+          <a:prstGeom prst="rect">
+            <a:avLst/>
+          </a:prstGeom>
+        </p:spPr>
+      </p:pic>
+      <p:sp>
+        <p:nvSpPr>
+          <p:cNvPr id="14" name="Text 10"/>
+          <p:cNvSpPr/>
+          <p:nvPr/>
+        </p:nvSpPr>
+        <p:spPr>
+          <a:xfrm>
+            <a:off x="5303520" y="2130552"/>
+            <a:ext cx="3200400" cy="320040"/>
+          </a:xfrm>
+          <a:prstGeom prst="rect">
+            <a:avLst/>
+          </a:prstGeom>
+          <a:noFill/>
+          <a:ln/>
+        </p:spPr>
+        <p:txBody>
+          <a:bodyPr wrap="square" lIns="0" tIns="0" rIns="0" bIns="0" rtlCol="0" anchor="ctr"/>
+          <a:lstStyle/>
+          <a:p>
+            <a:pPr marL="0" indent="0">
+              <a:buNone/>
+            </a:pPr>
+            <a:r>
+              <a:rPr lang="en-US" sz="1800" b="1" dirty="0">
+                <a:solidFill>
+                  <a:srgbClr val="1A1B1F"/>
                 </a:solidFill>
                 <a:latin typeface="Georgia" pitchFamily="34" charset="0"/>
                 <a:ea typeface="Georgia" pitchFamily="34" charset="-122"/>
                 <a:cs typeface="Georgia" pitchFamily="34" charset="-120"/>
               </a:rPr>
-              <a:t>That's the overview.</a:t>
-            </a:r>
-            <a:endParaRPr lang="en-US" sz="3400" dirty="0"/>
-          </a:p>
-        </p:txBody>
-      </p:sp>
-      <p:sp>
-        <p:nvSpPr>
-          <p:cNvPr id="5" name="Text 3"/>
-          <p:cNvSpPr/>
-          <p:nvPr/>
-        </p:nvSpPr>
-        <p:spPr>
-          <a:xfrm>
-            <a:off x="502920" y="2377440"/>
-            <a:ext cx="8412480" cy="731520"/>
-          </a:xfrm>
-          <a:prstGeom prst="rect">
-            <a:avLst/>
-          </a:prstGeom>
-          <a:noFill/>
-          <a:ln/>
-        </p:spPr>
-        <p:txBody>
-          <a:bodyPr wrap="square" lIns="0" tIns="0" rIns="0" bIns="0" rtlCol="0" anchor="ctr"/>
-          <a:lstStyle/>
-          <a:p>
-            <a:pPr indent="0" marL="0">
-              <a:buNone/>
-            </a:pPr>
-            <a:r>
-              <a:rPr lang="en-US" sz="3400" i="1" dirty="0">
+              <a:t>Hallucinations</a:t>
+            </a:r>
+            <a:endParaRPr lang="en-US" sz="1800" dirty="0"/>
+          </a:p>
+        </p:txBody>
+      </p:sp>
+      <p:sp>
+        <p:nvSpPr>
+          <p:cNvPr id="15" name="Text 11"/>
+          <p:cNvSpPr/>
+          <p:nvPr/>
+        </p:nvSpPr>
+        <p:spPr>
+          <a:xfrm>
+            <a:off x="5303520" y="2423160"/>
+            <a:ext cx="3200400" cy="219456"/>
+          </a:xfrm>
+          <a:prstGeom prst="rect">
+            <a:avLst/>
+          </a:prstGeom>
+          <a:noFill/>
+          <a:ln/>
+        </p:spPr>
+        <p:txBody>
+          <a:bodyPr wrap="square" lIns="0" tIns="0" rIns="0" bIns="0" rtlCol="0" anchor="ctr"/>
+          <a:lstStyle/>
+          <a:p>
+            <a:pPr marL="0" indent="0">
+              <a:buNone/>
+            </a:pPr>
+            <a:r>
+              <a:rPr lang="en-US" sz="1000" b="1" kern="0" spc="200" dirty="0">
                 <a:solidFill>
                   <a:srgbClr val="CC785C"/>
+                </a:solidFill>
+                <a:latin typeface="Calibri" pitchFamily="34" charset="0"/>
+                <a:ea typeface="Calibri" pitchFamily="34" charset="-122"/>
+                <a:cs typeface="Calibri" pitchFamily="34" charset="-120"/>
+              </a:rPr>
+              <a:t>Plausible but wrong</a:t>
+            </a:r>
+            <a:endParaRPr lang="en-US" sz="1000" dirty="0"/>
+          </a:p>
+        </p:txBody>
+      </p:sp>
+      <p:sp>
+        <p:nvSpPr>
+          <p:cNvPr id="16" name="Text 12"/>
+          <p:cNvSpPr/>
+          <p:nvPr/>
+        </p:nvSpPr>
+        <p:spPr>
+          <a:xfrm>
+            <a:off x="4873752" y="2697480"/>
+            <a:ext cx="3611880" cy="594360"/>
+          </a:xfrm>
+          <a:prstGeom prst="rect">
+            <a:avLst/>
+          </a:prstGeom>
+          <a:noFill/>
+          <a:ln/>
+        </p:spPr>
+        <p:txBody>
+          <a:bodyPr wrap="square" lIns="0" tIns="0" rIns="0" bIns="0" rtlCol="0" anchor="ctr"/>
+          <a:lstStyle/>
+          <a:p>
+            <a:pPr marL="0" indent="0">
+              <a:buNone/>
+            </a:pPr>
+            <a:r>
+              <a:rPr lang="en-US" sz="1100" dirty="0">
+                <a:solidFill>
+                  <a:srgbClr val="6B6A66"/>
+                </a:solidFill>
+                <a:latin typeface="Calibri" pitchFamily="34" charset="0"/>
+                <a:ea typeface="Calibri" pitchFamily="34" charset="-122"/>
+                <a:cs typeface="Calibri" pitchFamily="34" charset="-120"/>
+              </a:rPr>
+              <a:t>When evidence is thin, Claude still answers assertively. Verify behavior and APIs — not just that the code compiles.</a:t>
+            </a:r>
+            <a:endParaRPr lang="en-US" sz="1100" dirty="0"/>
+          </a:p>
+        </p:txBody>
+      </p:sp>
+      <p:sp>
+        <p:nvSpPr>
+          <p:cNvPr id="17" name="Shape 13"/>
+          <p:cNvSpPr/>
+          <p:nvPr/>
+        </p:nvSpPr>
+        <p:spPr>
+          <a:xfrm>
+            <a:off x="502920" y="3429000"/>
+            <a:ext cx="4023360" cy="1371600"/>
+          </a:xfrm>
+          <a:prstGeom prst="rect">
+            <a:avLst/>
+          </a:prstGeom>
+          <a:solidFill>
+            <a:srgbClr val="FFFFFF"/>
+          </a:solidFill>
+          <a:ln w="9525">
+            <a:solidFill>
+              <a:srgbClr val="E3DFD7"/>
+            </a:solidFill>
+            <a:prstDash val="solid"/>
+          </a:ln>
+          <a:effectLst>
+            <a:outerShdw blurRad="127000" dist="25400" dir="5400000" algn="bl" rotWithShape="0">
+              <a:srgbClr val="000000">
+                <a:alpha val="8000"/>
+              </a:srgbClr>
+            </a:outerShdw>
+          </a:effectLst>
+        </p:spPr>
+        <p:txBody>
+          <a:bodyPr/>
+          <a:lstStyle/>
+          <a:p>
+            <a:endParaRPr lang="en-US"/>
+          </a:p>
+        </p:txBody>
+      </p:sp>
+      <p:sp>
+        <p:nvSpPr>
+          <p:cNvPr id="18" name="Shape 14"/>
+          <p:cNvSpPr/>
+          <p:nvPr/>
+        </p:nvSpPr>
+        <p:spPr>
+          <a:xfrm>
+            <a:off x="502920" y="3429000"/>
+            <a:ext cx="64008" cy="1371600"/>
+          </a:xfrm>
+          <a:prstGeom prst="rect">
+            <a:avLst/>
+          </a:prstGeom>
+          <a:solidFill>
+            <a:srgbClr val="CC785C"/>
+          </a:solidFill>
+          <a:ln w="12700">
+            <a:solidFill>
+              <a:srgbClr val="CC785C"/>
+            </a:solidFill>
+            <a:prstDash val="solid"/>
+          </a:ln>
+        </p:spPr>
+        <p:txBody>
+          <a:bodyPr/>
+          <a:lstStyle/>
+          <a:p>
+            <a:endParaRPr lang="en-US"/>
+          </a:p>
+        </p:txBody>
+      </p:sp>
+      <p:pic>
+        <p:nvPicPr>
+          <p:cNvPr id="19" name="Image 2" descr="preencoded.png"/>
+          <p:cNvPicPr>
+            <a:picLocks noChangeAspect="1"/>
+          </p:cNvPicPr>
+          <p:nvPr/>
+        </p:nvPicPr>
+        <p:blipFill>
+          <a:blip r:embed="rId5"/>
+          <a:stretch>
+            <a:fillRect/>
+          </a:stretch>
+        </p:blipFill>
+        <p:spPr>
+          <a:xfrm>
+            <a:off x="758952" y="3657600"/>
+            <a:ext cx="320040" cy="320040"/>
+          </a:xfrm>
+          <a:prstGeom prst="rect">
+            <a:avLst/>
+          </a:prstGeom>
+        </p:spPr>
+      </p:pic>
+      <p:sp>
+        <p:nvSpPr>
+          <p:cNvPr id="20" name="Text 15"/>
+          <p:cNvSpPr/>
+          <p:nvPr/>
+        </p:nvSpPr>
+        <p:spPr>
+          <a:xfrm>
+            <a:off x="1188720" y="3593592"/>
+            <a:ext cx="3200400" cy="320040"/>
+          </a:xfrm>
+          <a:prstGeom prst="rect">
+            <a:avLst/>
+          </a:prstGeom>
+          <a:noFill/>
+          <a:ln/>
+        </p:spPr>
+        <p:txBody>
+          <a:bodyPr wrap="square" lIns="0" tIns="0" rIns="0" bIns="0" rtlCol="0" anchor="ctr"/>
+          <a:lstStyle/>
+          <a:p>
+            <a:pPr marL="0" indent="0">
+              <a:buNone/>
+            </a:pPr>
+            <a:r>
+              <a:rPr lang="en-US" sz="1800" b="1" dirty="0">
+                <a:solidFill>
+                  <a:srgbClr val="1A1B1F"/>
                 </a:solidFill>
                 <a:latin typeface="Georgia" pitchFamily="34" charset="0"/>
                 <a:ea typeface="Georgia" pitchFamily="34" charset="-122"/>
                 <a:cs typeface="Georgia" pitchFamily="34" charset="-120"/>
               </a:rPr>
-              <a:t>Questions and discussion.</a:t>
-            </a:r>
-            <a:endParaRPr lang="en-US" sz="3400" dirty="0"/>
-          </a:p>
-        </p:txBody>
-      </p:sp>
-      <p:sp>
-        <p:nvSpPr>
-          <p:cNvPr id="6" name="Text 4"/>
-          <p:cNvSpPr/>
-          <p:nvPr/>
-        </p:nvSpPr>
-        <p:spPr>
-          <a:xfrm>
-            <a:off x="502920" y="3703320"/>
-            <a:ext cx="2743200" cy="228600"/>
-          </a:xfrm>
-          <a:prstGeom prst="rect">
-            <a:avLst/>
-          </a:prstGeom>
-          <a:noFill/>
-          <a:ln/>
-        </p:spPr>
-        <p:txBody>
-          <a:bodyPr wrap="square" lIns="0" tIns="0" rIns="0" bIns="0" rtlCol="0" anchor="ctr"/>
-          <a:lstStyle/>
-          <a:p>
-            <a:pPr indent="0" marL="0">
-              <a:buNone/>
-            </a:pPr>
-            <a:r>
-              <a:rPr lang="en-US" sz="900" b="1" spc="300" kern="0" dirty="0">
-                <a:solidFill>
-                  <a:srgbClr val="A9A69E"/>
+              <a:t>Hidden state</a:t>
+            </a:r>
+            <a:endParaRPr lang="en-US" sz="1800" dirty="0"/>
+          </a:p>
+        </p:txBody>
+      </p:sp>
+      <p:sp>
+        <p:nvSpPr>
+          <p:cNvPr id="21" name="Text 16"/>
+          <p:cNvSpPr/>
+          <p:nvPr/>
+        </p:nvSpPr>
+        <p:spPr>
+          <a:xfrm>
+            <a:off x="1188720" y="3886200"/>
+            <a:ext cx="3200400" cy="219456"/>
+          </a:xfrm>
+          <a:prstGeom prst="rect">
+            <a:avLst/>
+          </a:prstGeom>
+          <a:noFill/>
+          <a:ln/>
+        </p:spPr>
+        <p:txBody>
+          <a:bodyPr wrap="square" lIns="0" tIns="0" rIns="0" bIns="0" rtlCol="0" anchor="ctr"/>
+          <a:lstStyle/>
+          <a:p>
+            <a:pPr marL="0" indent="0">
+              <a:buNone/>
+            </a:pPr>
+            <a:r>
+              <a:rPr lang="en-US" sz="1000" b="1" kern="0" spc="200" dirty="0">
+                <a:solidFill>
+                  <a:srgbClr val="CC785C"/>
                 </a:solidFill>
                 <a:latin typeface="Calibri" pitchFamily="34" charset="0"/>
                 <a:ea typeface="Calibri" pitchFamily="34" charset="-122"/>
                 <a:cs typeface="Calibri" pitchFamily="34" charset="-120"/>
               </a:rPr>
-              <a:t>DOCUMENTATION</a:t>
-            </a:r>
-            <a:endParaRPr lang="en-US" sz="900" dirty="0"/>
-          </a:p>
-        </p:txBody>
-      </p:sp>
-      <p:sp>
-        <p:nvSpPr>
-          <p:cNvPr id="7" name="Text 5"/>
-          <p:cNvSpPr/>
-          <p:nvPr/>
-        </p:nvSpPr>
-        <p:spPr>
-          <a:xfrm>
-            <a:off x="502920" y="3931920"/>
-            <a:ext cx="4572000" cy="320040"/>
-          </a:xfrm>
-          <a:prstGeom prst="rect">
-            <a:avLst/>
-          </a:prstGeom>
-          <a:noFill/>
-          <a:ln/>
-        </p:spPr>
-        <p:txBody>
-          <a:bodyPr wrap="square" lIns="0" tIns="0" rIns="0" bIns="0" rtlCol="0" anchor="ctr"/>
-          <a:lstStyle/>
-          <a:p>
-            <a:pPr indent="0" marL="0">
-              <a:buNone/>
-            </a:pPr>
-            <a:r>
-              <a:rPr lang="en-US" sz="1400" dirty="0">
-                <a:solidFill>
-                  <a:srgbClr val="F7F5F0"/>
-                </a:solidFill>
-                <a:latin typeface="Consolas" pitchFamily="34" charset="0"/>
-                <a:ea typeface="Consolas" pitchFamily="34" charset="-122"/>
-                <a:cs typeface="Consolas" pitchFamily="34" charset="-120"/>
-              </a:rPr>
-              <a:t>docs.claude.com/en/docs/claude-code</a:t>
-            </a:r>
-            <a:endParaRPr lang="en-US" sz="1400" dirty="0"/>
-          </a:p>
-        </p:txBody>
-      </p:sp>
-      <p:sp>
-        <p:nvSpPr>
-          <p:cNvPr id="8" name="Text 6"/>
-          <p:cNvSpPr/>
-          <p:nvPr/>
-        </p:nvSpPr>
-        <p:spPr>
-          <a:xfrm>
-            <a:off x="5303520" y="3703320"/>
-            <a:ext cx="2743200" cy="228600"/>
-          </a:xfrm>
-          <a:prstGeom prst="rect">
-            <a:avLst/>
-          </a:prstGeom>
-          <a:noFill/>
-          <a:ln/>
-        </p:spPr>
-        <p:txBody>
-          <a:bodyPr wrap="square" lIns="0" tIns="0" rIns="0" bIns="0" rtlCol="0" anchor="ctr"/>
-          <a:lstStyle/>
-          <a:p>
-            <a:pPr indent="0" marL="0">
-              <a:buNone/>
-            </a:pPr>
-            <a:r>
-              <a:rPr lang="en-US" sz="900" b="1" spc="300" kern="0" dirty="0">
-                <a:solidFill>
-                  <a:srgbClr val="A9A69E"/>
+              <a:t>Invisible to the code</a:t>
+            </a:r>
+            <a:endParaRPr lang="en-US" sz="1000" dirty="0"/>
+          </a:p>
+        </p:txBody>
+      </p:sp>
+      <p:sp>
+        <p:nvSpPr>
+          <p:cNvPr id="22" name="Text 17"/>
+          <p:cNvSpPr/>
+          <p:nvPr/>
+        </p:nvSpPr>
+        <p:spPr>
+          <a:xfrm>
+            <a:off x="758952" y="4160520"/>
+            <a:ext cx="3611880" cy="594360"/>
+          </a:xfrm>
+          <a:prstGeom prst="rect">
+            <a:avLst/>
+          </a:prstGeom>
+          <a:noFill/>
+          <a:ln/>
+        </p:spPr>
+        <p:txBody>
+          <a:bodyPr wrap="square" lIns="0" tIns="0" rIns="0" bIns="0" rtlCol="0" anchor="ctr"/>
+          <a:lstStyle/>
+          <a:p>
+            <a:pPr marL="0" indent="0">
+              <a:buNone/>
+            </a:pPr>
+            <a:r>
+              <a:rPr lang="en-US" sz="1100" dirty="0">
+                <a:solidFill>
+                  <a:srgbClr val="6B6A66"/>
                 </a:solidFill>
                 <a:latin typeface="Calibri" pitchFamily="34" charset="0"/>
                 <a:ea typeface="Calibri" pitchFamily="34" charset="-122"/>
                 <a:cs typeface="Calibri" pitchFamily="34" charset="-120"/>
               </a:rPr>
-              <a:t>CHANGELOG</a:t>
-            </a:r>
-            <a:endParaRPr lang="en-US" sz="900" dirty="0"/>
-          </a:p>
-        </p:txBody>
-      </p:sp>
-      <p:sp>
-        <p:nvSpPr>
-          <p:cNvPr id="9" name="Text 7"/>
-          <p:cNvSpPr/>
-          <p:nvPr/>
-        </p:nvSpPr>
-        <p:spPr>
-          <a:xfrm>
-            <a:off x="5303520" y="3931920"/>
-            <a:ext cx="3657600" cy="320040"/>
-          </a:xfrm>
-          <a:prstGeom prst="rect">
-            <a:avLst/>
-          </a:prstGeom>
-          <a:noFill/>
-          <a:ln/>
-        </p:spPr>
-        <p:txBody>
-          <a:bodyPr wrap="square" lIns="0" tIns="0" rIns="0" bIns="0" rtlCol="0" anchor="ctr"/>
-          <a:lstStyle/>
-          <a:p>
-            <a:pPr indent="0" marL="0">
-              <a:buNone/>
-            </a:pPr>
-            <a:r>
-              <a:rPr lang="en-US" sz="1400" dirty="0">
-                <a:solidFill>
-                  <a:srgbClr val="CC785C"/>
-                </a:solidFill>
-                <a:latin typeface="Consolas" pitchFamily="34" charset="0"/>
-                <a:ea typeface="Consolas" pitchFamily="34" charset="-122"/>
-                <a:cs typeface="Consolas" pitchFamily="34" charset="-120"/>
-              </a:rPr>
-              <a:t>docs.claude.com/en/release-notes</a:t>
-            </a:r>
-            <a:endParaRPr lang="en-US" sz="1400" dirty="0"/>
-          </a:p>
-        </p:txBody>
-      </p:sp>
-      <p:sp>
-        <p:nvSpPr>
-          <p:cNvPr id="10" name="Shape 8"/>
-          <p:cNvSpPr/>
-          <p:nvPr/>
-        </p:nvSpPr>
-        <p:spPr>
-          <a:xfrm>
-            <a:off x="502920" y="4617720"/>
-            <a:ext cx="8138160" cy="0"/>
-          </a:xfrm>
-          <a:prstGeom prst="line">
-            <a:avLst/>
-          </a:prstGeom>
-          <a:noFill/>
-          <a:ln w="12700">
+              <a:t>External APIs, runtime config, feature flags, and team conventions don't live in the code. Point Claude at them explicitly.</a:t>
+            </a:r>
+            <a:endParaRPr lang="en-US" sz="1100" dirty="0"/>
+          </a:p>
+        </p:txBody>
+      </p:sp>
+      <p:sp>
+        <p:nvSpPr>
+          <p:cNvPr id="23" name="Shape 18"/>
+          <p:cNvSpPr/>
+          <p:nvPr/>
+        </p:nvSpPr>
+        <p:spPr>
+          <a:xfrm>
+            <a:off x="4617720" y="3429000"/>
+            <a:ext cx="4023360" cy="1371600"/>
+          </a:xfrm>
+          <a:prstGeom prst="rect">
+            <a:avLst/>
+          </a:prstGeom>
+          <a:solidFill>
+            <a:srgbClr val="FFFFFF"/>
+          </a:solidFill>
+          <a:ln w="9525">
             <a:solidFill>
-              <a:srgbClr val="2A2B30"/>
+              <a:srgbClr val="E3DFD7"/>
             </a:solidFill>
             <a:prstDash val="solid"/>
           </a:ln>
-        </p:spPr>
-      </p:sp>
-      <p:sp>
-        <p:nvSpPr>
-          <p:cNvPr id="11" name="Text 9"/>
-          <p:cNvSpPr/>
-          <p:nvPr/>
-        </p:nvSpPr>
-        <p:spPr>
-          <a:xfrm>
-            <a:off x="502920" y="4709160"/>
-            <a:ext cx="4572000" cy="274320"/>
-          </a:xfrm>
-          <a:prstGeom prst="rect">
-            <a:avLst/>
-          </a:prstGeom>
-          <a:noFill/>
-          <a:ln/>
-        </p:spPr>
-        <p:txBody>
-          <a:bodyPr wrap="square" lIns="0" tIns="0" rIns="0" bIns="0" rtlCol="0" anchor="ctr"/>
-          <a:lstStyle/>
-          <a:p>
-            <a:pPr indent="0" marL="0">
-              <a:buNone/>
-            </a:pPr>
-            <a:r>
-              <a:rPr lang="en-US" sz="1000" dirty="0">
-                <a:solidFill>
-                  <a:srgbClr val="A9A69E"/>
+          <a:effectLst>
+            <a:outerShdw blurRad="127000" dist="25400" dir="5400000" algn="bl" rotWithShape="0">
+              <a:srgbClr val="000000">
+                <a:alpha val="8000"/>
+              </a:srgbClr>
+            </a:outerShdw>
+          </a:effectLst>
+        </p:spPr>
+        <p:txBody>
+          <a:bodyPr/>
+          <a:lstStyle/>
+          <a:p>
+            <a:endParaRPr lang="en-US"/>
+          </a:p>
+        </p:txBody>
+      </p:sp>
+      <p:sp>
+        <p:nvSpPr>
+          <p:cNvPr id="24" name="Shape 19"/>
+          <p:cNvSpPr/>
+          <p:nvPr/>
+        </p:nvSpPr>
+        <p:spPr>
+          <a:xfrm>
+            <a:off x="4617720" y="3429000"/>
+            <a:ext cx="64008" cy="1371600"/>
+          </a:xfrm>
+          <a:prstGeom prst="rect">
+            <a:avLst/>
+          </a:prstGeom>
+          <a:solidFill>
+            <a:srgbClr val="CC785C"/>
+          </a:solidFill>
+          <a:ln w="12700">
+            <a:solidFill>
+              <a:srgbClr val="CC785C"/>
+            </a:solidFill>
+            <a:prstDash val="solid"/>
+          </a:ln>
+        </p:spPr>
+        <p:txBody>
+          <a:bodyPr/>
+          <a:lstStyle/>
+          <a:p>
+            <a:endParaRPr lang="en-US"/>
+          </a:p>
+        </p:txBody>
+      </p:sp>
+      <p:pic>
+        <p:nvPicPr>
+          <p:cNvPr id="25" name="Image 3" descr="preencoded.png"/>
+          <p:cNvPicPr>
+            <a:picLocks noChangeAspect="1"/>
+          </p:cNvPicPr>
+          <p:nvPr/>
+        </p:nvPicPr>
+        <p:blipFill>
+          <a:blip r:embed="rId6"/>
+          <a:stretch>
+            <a:fillRect/>
+          </a:stretch>
+        </p:blipFill>
+        <p:spPr>
+          <a:xfrm>
+            <a:off x="4873752" y="3657600"/>
+            <a:ext cx="320040" cy="320040"/>
+          </a:xfrm>
+          <a:prstGeom prst="rect">
+            <a:avLst/>
+          </a:prstGeom>
+        </p:spPr>
+      </p:pic>
+      <p:sp>
+        <p:nvSpPr>
+          <p:cNvPr id="26" name="Text 20"/>
+          <p:cNvSpPr/>
+          <p:nvPr/>
+        </p:nvSpPr>
+        <p:spPr>
+          <a:xfrm>
+            <a:off x="5303520" y="3593592"/>
+            <a:ext cx="3200400" cy="320040"/>
+          </a:xfrm>
+          <a:prstGeom prst="rect">
+            <a:avLst/>
+          </a:prstGeom>
+          <a:noFill/>
+          <a:ln/>
+        </p:spPr>
+        <p:txBody>
+          <a:bodyPr wrap="square" lIns="0" tIns="0" rIns="0" bIns="0" rtlCol="0" anchor="ctr"/>
+          <a:lstStyle/>
+          <a:p>
+            <a:pPr marL="0" indent="0">
+              <a:buNone/>
+            </a:pPr>
+            <a:r>
+              <a:rPr lang="en-US" sz="1800" b="1" dirty="0">
+                <a:solidFill>
+                  <a:srgbClr val="1A1B1F"/>
+                </a:solidFill>
+                <a:latin typeface="Georgia" pitchFamily="34" charset="0"/>
+                <a:ea typeface="Georgia" pitchFamily="34" charset="-122"/>
+                <a:cs typeface="Georgia" pitchFamily="34" charset="-120"/>
+              </a:rPr>
+              <a:t>Review</a:t>
+            </a:r>
+            <a:endParaRPr lang="en-US" sz="1800" dirty="0"/>
+          </a:p>
+        </p:txBody>
+      </p:sp>
+      <p:sp>
+        <p:nvSpPr>
+          <p:cNvPr id="27" name="Text 21"/>
+          <p:cNvSpPr/>
+          <p:nvPr/>
+        </p:nvSpPr>
+        <p:spPr>
+          <a:xfrm>
+            <a:off x="5303520" y="3886200"/>
+            <a:ext cx="3200400" cy="219456"/>
+          </a:xfrm>
+          <a:prstGeom prst="rect">
+            <a:avLst/>
+          </a:prstGeom>
+          <a:noFill/>
+          <a:ln/>
+        </p:spPr>
+        <p:txBody>
+          <a:bodyPr wrap="square" lIns="0" tIns="0" rIns="0" bIns="0" rtlCol="0" anchor="ctr"/>
+          <a:lstStyle/>
+          <a:p>
+            <a:pPr marL="0" indent="0">
+              <a:buNone/>
+            </a:pPr>
+            <a:r>
+              <a:rPr lang="en-US" sz="1000" b="1" kern="0" spc="200" dirty="0">
+                <a:solidFill>
+                  <a:srgbClr val="CC785C"/>
                 </a:solidFill>
                 <a:latin typeface="Calibri" pitchFamily="34" charset="0"/>
                 <a:ea typeface="Calibri" pitchFamily="34" charset="-122"/>
                 <a:cs typeface="Calibri" pitchFamily="34" charset="-120"/>
               </a:rPr>
-              <a:t>Thank you</a:t>
+              <a:t>You own the diff</a:t>
             </a:r>
             <a:endParaRPr lang="en-US" sz="1000" dirty="0"/>
           </a:p>
@@ -7515,38 +8158,77 @@
       </p:sp>
       <p:sp>
         <p:nvSpPr>
-          <p:cNvPr id="12" name="Text 10"/>
-          <p:cNvSpPr/>
-          <p:nvPr/>
-        </p:nvSpPr>
-        <p:spPr>
-          <a:xfrm>
-            <a:off x="8321040" y="4709160"/>
-            <a:ext cx="365760" cy="228600"/>
-          </a:xfrm>
-          <a:prstGeom prst="rect">
-            <a:avLst/>
-          </a:prstGeom>
-          <a:noFill/>
-          <a:ln/>
-        </p:spPr>
-        <p:txBody>
-          <a:bodyPr wrap="square" lIns="0" tIns="0" rIns="0" bIns="0" rtlCol="0" anchor="ctr"/>
-          <a:lstStyle/>
-          <a:p>
-            <a:pPr algn="r" indent="0" marL="0">
-              <a:buNone/>
-            </a:pPr>
-            <a:r>
-              <a:rPr lang="en-US" sz="1000" dirty="0">
-                <a:solidFill>
-                  <a:srgbClr val="A9A69E"/>
+          <p:cNvPr id="28" name="Text 22"/>
+          <p:cNvSpPr/>
+          <p:nvPr/>
+        </p:nvSpPr>
+        <p:spPr>
+          <a:xfrm>
+            <a:off x="4873752" y="4160520"/>
+            <a:ext cx="3611880" cy="594360"/>
+          </a:xfrm>
+          <a:prstGeom prst="rect">
+            <a:avLst/>
+          </a:prstGeom>
+          <a:noFill/>
+          <a:ln/>
+        </p:spPr>
+        <p:txBody>
+          <a:bodyPr wrap="square" lIns="0" tIns="0" rIns="0" bIns="0" rtlCol="0" anchor="ctr"/>
+          <a:lstStyle/>
+          <a:p>
+            <a:pPr marL="0" indent="0">
+              <a:buNone/>
+            </a:pPr>
+            <a:r>
+              <a:rPr lang="en-US" sz="1100" dirty="0">
+                <a:solidFill>
+                  <a:srgbClr val="6B6A66"/>
                 </a:solidFill>
                 <a:latin typeface="Calibri" pitchFamily="34" charset="0"/>
                 <a:ea typeface="Calibri" pitchFamily="34" charset="-122"/>
                 <a:cs typeface="Calibri" pitchFamily="34" charset="-120"/>
               </a:rPr>
-              <a:t>15</a:t>
+              <a:t>Tests can pass on wrong code; commit messages can misstate intent. Read every hunk before merging — Claude is a contributor, not an owner.</a:t>
+            </a:r>
+            <a:endParaRPr lang="en-US" sz="1100" dirty="0"/>
+          </a:p>
+        </p:txBody>
+      </p:sp>
+      <p:sp>
+        <p:nvSpPr>
+          <p:cNvPr id="29" name="Text 23"/>
+          <p:cNvSpPr/>
+          <p:nvPr/>
+        </p:nvSpPr>
+        <p:spPr>
+          <a:xfrm>
+            <a:off x="8321040" y="4709160"/>
+            <a:ext cx="365760" cy="228600"/>
+          </a:xfrm>
+          <a:prstGeom prst="rect">
+            <a:avLst/>
+          </a:prstGeom>
+          <a:noFill/>
+          <a:ln/>
+        </p:spPr>
+        <p:txBody>
+          <a:bodyPr wrap="square" lIns="0" tIns="0" rIns="0" bIns="0" rtlCol="0" anchor="ctr"/>
+          <a:lstStyle/>
+          <a:p>
+            <a:pPr marL="0" indent="0" algn="r">
+              <a:buNone/>
+            </a:pPr>
+            <a:r>
+              <a:rPr lang="en-US" sz="1000" dirty="0">
+                <a:solidFill>
+                  <a:srgbClr val="6B6A66"/>
+                </a:solidFill>
+                <a:latin typeface="Calibri" pitchFamily="34" charset="0"/>
+                <a:ea typeface="Calibri" pitchFamily="34" charset="-122"/>
+                <a:cs typeface="Calibri" pitchFamily="34" charset="-120"/>
+              </a:rPr>
+              <a:t>14</a:t>
             </a:r>
             <a:endParaRPr lang="en-US" sz="1000" dirty="0"/>
           </a:p>
@@ -7562,12 +8244,13 @@
 
 <file path=ppt/slides/slide15.xml><?xml version="1.0" encoding="utf-8"?>
 <p:sld xmlns:a="http://schemas.openxmlformats.org/drawingml/2006/main" xmlns:r="http://schemas.openxmlformats.org/officeDocument/2006/relationships" xmlns:p="http://schemas.openxmlformats.org/presentationml/2006/main">
-  <p:cSld name="Slide 15">
+  <p:cSld name="Slide 14">
     <p:bg>
       <p:bgPr>
         <a:solidFill>
-          <a:srgbClr val="F7F5F0"/>
+          <a:srgbClr val="1A1B1F"/>
         </a:solidFill>
+        <a:effectLst/>
       </p:bgPr>
     </p:bg>
     <p:spTree>
@@ -7586,165 +8269,16 @@
       </p:grpSpPr>
       <p:sp>
         <p:nvSpPr>
-          <p:cNvPr id="2" name="Text 0"/>
-          <p:cNvSpPr/>
-          <p:nvPr/>
-        </p:nvSpPr>
-        <p:spPr>
-          <a:xfrm>
-            <a:off x="502920" y="411480"/>
-            <a:ext cx="6400800" cy="274320"/>
-          </a:xfrm>
-          <a:prstGeom prst="rect">
-            <a:avLst/>
-          </a:prstGeom>
-          <a:noFill/>
-          <a:ln/>
-        </p:spPr>
-        <p:txBody>
-          <a:bodyPr wrap="square" lIns="0" tIns="0" rIns="0" bIns="0" rtlCol="0" anchor="ctr"/>
-          <a:lstStyle/>
-          <a:p>
-            <a:pPr indent="0" marL="0">
-              <a:buNone/>
-            </a:pPr>
-            <a:r>
-              <a:rPr lang="en-US" sz="1000" b="1" spc="400" kern="0" dirty="0">
-                <a:solidFill>
-                  <a:srgbClr val="CC785C"/>
-                </a:solidFill>
-                <a:latin typeface="Calibri" pitchFamily="34" charset="0"/>
-                <a:ea typeface="Calibri" pitchFamily="34" charset="-122"/>
-                <a:cs typeface="Calibri" pitchFamily="34" charset="-120"/>
-              </a:rPr>
-              <a:t>13  —  LIMITATIONS</a:t>
-            </a:r>
-            <a:endParaRPr lang="en-US" sz="1000" dirty="0"/>
-          </a:p>
-        </p:txBody>
-      </p:sp>
-      <p:sp>
-        <p:nvSpPr>
-          <p:cNvPr id="3" name="Text 1"/>
-          <p:cNvSpPr/>
-          <p:nvPr/>
-        </p:nvSpPr>
-        <p:spPr>
-          <a:xfrm>
-            <a:off x="502920" y="731520"/>
-            <a:ext cx="8229600" cy="685800"/>
-          </a:xfrm>
-          <a:prstGeom prst="rect">
-            <a:avLst/>
-          </a:prstGeom>
-          <a:noFill/>
-          <a:ln/>
-        </p:spPr>
-        <p:txBody>
-          <a:bodyPr wrap="square" lIns="0" tIns="0" rIns="0" bIns="0" rtlCol="0" anchor="ctr"/>
-          <a:lstStyle/>
-          <a:p>
-            <a:pPr indent="0" marL="0">
-              <a:buNone/>
-            </a:pPr>
-            <a:r>
-              <a:rPr lang="en-US" sz="3600" b="1" dirty="0">
-                <a:solidFill>
-                  <a:srgbClr val="1A1B1F"/>
-                </a:solidFill>
-                <a:latin typeface="Georgia" pitchFamily="34" charset="0"/>
-                <a:ea typeface="Georgia" pitchFamily="34" charset="-122"/>
-                <a:cs typeface="Georgia" pitchFamily="34" charset="-120"/>
-              </a:rPr>
-              <a:t>Where it falls short</a:t>
-            </a:r>
-            <a:endParaRPr lang="en-US" sz="3600" dirty="0"/>
-          </a:p>
-        </p:txBody>
-      </p:sp>
-      <p:sp>
-        <p:nvSpPr>
-          <p:cNvPr id="4" name="Text 2"/>
-          <p:cNvSpPr/>
-          <p:nvPr/>
-        </p:nvSpPr>
-        <p:spPr>
-          <a:xfrm>
-            <a:off x="502920" y="1417320"/>
-            <a:ext cx="8229600" cy="365760"/>
-          </a:xfrm>
-          <a:prstGeom prst="rect">
-            <a:avLst/>
-          </a:prstGeom>
-          <a:noFill/>
-          <a:ln/>
-        </p:spPr>
-        <p:txBody>
-          <a:bodyPr wrap="square" lIns="0" tIns="0" rIns="0" bIns="0" rtlCol="0" anchor="ctr"/>
-          <a:lstStyle/>
-          <a:p>
-            <a:pPr indent="0" marL="0">
-              <a:buNone/>
-            </a:pPr>
-            <a:r>
-              <a:rPr lang="en-US" sz="1300" i="1" dirty="0">
-                <a:solidFill>
-                  <a:srgbClr val="6B6A66"/>
-                </a:solidFill>
-                <a:latin typeface="Calibri" pitchFamily="34" charset="0"/>
-                <a:ea typeface="Calibri" pitchFamily="34" charset="-122"/>
-                <a:cs typeface="Calibri" pitchFamily="34" charset="-120"/>
-              </a:rPr>
-              <a:t>Knowing the failure modes makes you faster at catching them. Always read the diff.</a:t>
-            </a:r>
-            <a:endParaRPr lang="en-US" sz="1300" dirty="0"/>
-          </a:p>
-        </p:txBody>
-      </p:sp>
-      <p:sp>
-        <p:nvSpPr>
-          <p:cNvPr id="5" name="Shape 3"/>
-          <p:cNvSpPr/>
-          <p:nvPr/>
-        </p:nvSpPr>
-        <p:spPr>
-          <a:xfrm>
-            <a:off x="502920" y="1965960"/>
-            <a:ext cx="4023360" cy="1371600"/>
-          </a:xfrm>
-          <a:prstGeom prst="rect">
-            <a:avLst/>
-          </a:prstGeom>
-          <a:solidFill>
-            <a:srgbClr val="FFFFFF"/>
-          </a:solidFill>
-          <a:ln w="9525">
-            <a:solidFill>
-              <a:srgbClr val="E3DFD7"/>
-            </a:solidFill>
-            <a:prstDash val="solid"/>
-          </a:ln>
-          <a:effectLst>
-            <a:outerShdw sx="100000" sy="100000" kx="0" ky="0" algn="bl" rotWithShape="0" blurRad="127000" dist="25400" dir="5400000">
-              <a:srgbClr val="000000">
-                <a:alpha val="8000"/>
-              </a:srgbClr>
-            </a:outerShdw>
-          </a:effectLst>
-        </p:spPr>
-      </p:sp>
-      <p:sp>
-        <p:nvSpPr>
-          <p:cNvPr id="6" name="Shape 4"/>
-          <p:cNvSpPr/>
-          <p:nvPr/>
-        </p:nvSpPr>
-        <p:spPr>
-          <a:xfrm>
-            <a:off x="502920" y="1965960"/>
-            <a:ext cx="64008" cy="1371600"/>
-          </a:xfrm>
-          <a:prstGeom prst="rect">
+          <p:cNvPr id="2" name="Shape 0"/>
+          <p:cNvSpPr/>
+          <p:nvPr/>
+        </p:nvSpPr>
+        <p:spPr>
+          <a:xfrm>
+            <a:off x="502920" y="502920"/>
+            <a:ext cx="164592" cy="164592"/>
+          </a:xfrm>
+          <a:prstGeom prst="ellipse">
             <a:avLst/>
           </a:prstGeom>
           <a:solidFill>
@@ -7757,302 +8291,351 @@
             <a:prstDash val="solid"/>
           </a:ln>
         </p:spPr>
-      </p:sp>
-      <p:pic>
-        <p:nvPicPr>
-          <p:cNvPr id="7" name="Image 0" descr="preencoded.png">    </p:cNvPr>
-          <p:cNvPicPr>
-            <a:picLocks noChangeAspect="1"/>
-          </p:cNvPicPr>
-          <p:nvPr/>
-        </p:nvPicPr>
-        <p:blipFill>
-          <a:blip r:embed="rId1"/>
-          <a:stretch>
-            <a:fillRect/>
-          </a:stretch>
-        </p:blipFill>
-        <p:spPr>
-          <a:xfrm>
-            <a:off x="758952" y="2194560"/>
-            <a:ext cx="320040" cy="320040"/>
-          </a:xfrm>
-          <a:prstGeom prst="rect">
-            <a:avLst/>
-          </a:prstGeom>
-        </p:spPr>
-      </p:pic>
-      <p:sp>
-        <p:nvSpPr>
-          <p:cNvPr id="8" name="Text 5"/>
-          <p:cNvSpPr/>
-          <p:nvPr/>
-        </p:nvSpPr>
-        <p:spPr>
-          <a:xfrm>
-            <a:off x="1188720" y="2130552"/>
-            <a:ext cx="3200400" cy="320040"/>
-          </a:xfrm>
-          <a:prstGeom prst="rect">
-            <a:avLst/>
-          </a:prstGeom>
-          <a:noFill/>
-          <a:ln/>
-        </p:spPr>
-        <p:txBody>
-          <a:bodyPr wrap="square" lIns="0" tIns="0" rIns="0" bIns="0" rtlCol="0" anchor="ctr"/>
-          <a:lstStyle/>
-          <a:p>
-            <a:pPr indent="0" marL="0">
-              <a:buNone/>
-            </a:pPr>
-            <a:r>
-              <a:rPr lang="en-US" sz="1800" b="1" dirty="0">
-                <a:solidFill>
-                  <a:srgbClr val="1A1B1F"/>
+        <p:txBody>
+          <a:bodyPr/>
+          <a:lstStyle/>
+          <a:p>
+            <a:endParaRPr lang="en-US"/>
+          </a:p>
+        </p:txBody>
+      </p:sp>
+      <p:sp>
+        <p:nvSpPr>
+          <p:cNvPr id="3" name="Text 1"/>
+          <p:cNvSpPr/>
+          <p:nvPr/>
+        </p:nvSpPr>
+        <p:spPr>
+          <a:xfrm>
+            <a:off x="749808" y="457200"/>
+            <a:ext cx="4572000" cy="256032"/>
+          </a:xfrm>
+          <a:prstGeom prst="rect">
+            <a:avLst/>
+          </a:prstGeom>
+          <a:noFill/>
+          <a:ln/>
+        </p:spPr>
+        <p:txBody>
+          <a:bodyPr wrap="square" lIns="0" tIns="0" rIns="0" bIns="0" rtlCol="0" anchor="ctr"/>
+          <a:lstStyle/>
+          <a:p>
+            <a:pPr marL="0" indent="0">
+              <a:buNone/>
+            </a:pPr>
+            <a:r>
+              <a:rPr lang="en-US" sz="1100" b="1" kern="0" spc="400" dirty="0">
+                <a:solidFill>
+                  <a:srgbClr val="A9A69E"/>
+                </a:solidFill>
+                <a:latin typeface="Calibri" pitchFamily="34" charset="0"/>
+                <a:ea typeface="Calibri" pitchFamily="34" charset="-122"/>
+                <a:cs typeface="Calibri" pitchFamily="34" charset="-120"/>
+              </a:rPr>
+              <a:t>END  —  NEXT STEPS</a:t>
+            </a:r>
+            <a:endParaRPr lang="en-US" sz="1100" dirty="0"/>
+          </a:p>
+        </p:txBody>
+      </p:sp>
+      <p:sp>
+        <p:nvSpPr>
+          <p:cNvPr id="4" name="Text 2"/>
+          <p:cNvSpPr/>
+          <p:nvPr/>
+        </p:nvSpPr>
+        <p:spPr>
+          <a:xfrm>
+            <a:off x="502920" y="1691640"/>
+            <a:ext cx="8412480" cy="731520"/>
+          </a:xfrm>
+          <a:prstGeom prst="rect">
+            <a:avLst/>
+          </a:prstGeom>
+          <a:noFill/>
+          <a:ln/>
+        </p:spPr>
+        <p:txBody>
+          <a:bodyPr wrap="square" lIns="0" tIns="0" rIns="0" bIns="0" rtlCol="0" anchor="ctr"/>
+          <a:lstStyle/>
+          <a:p>
+            <a:pPr marL="0" indent="0">
+              <a:buNone/>
+            </a:pPr>
+            <a:r>
+              <a:rPr lang="en-US" sz="3400" b="1" dirty="0">
+                <a:solidFill>
+                  <a:srgbClr val="F7F5F0"/>
                 </a:solidFill>
                 <a:latin typeface="Georgia" pitchFamily="34" charset="0"/>
                 <a:ea typeface="Georgia" pitchFamily="34" charset="-122"/>
                 <a:cs typeface="Georgia" pitchFamily="34" charset="-120"/>
               </a:rPr>
-              <a:t>Context</a:t>
-            </a:r>
-            <a:endParaRPr lang="en-US" sz="1800" dirty="0"/>
-          </a:p>
-        </p:txBody>
-      </p:sp>
-      <p:sp>
-        <p:nvSpPr>
-          <p:cNvPr id="9" name="Text 6"/>
-          <p:cNvSpPr/>
-          <p:nvPr/>
-        </p:nvSpPr>
-        <p:spPr>
-          <a:xfrm>
-            <a:off x="1188720" y="2423160"/>
-            <a:ext cx="3200400" cy="219456"/>
-          </a:xfrm>
-          <a:prstGeom prst="rect">
-            <a:avLst/>
-          </a:prstGeom>
-          <a:noFill/>
-          <a:ln/>
-        </p:spPr>
-        <p:txBody>
-          <a:bodyPr wrap="square" lIns="0" tIns="0" rIns="0" bIns="0" rtlCol="0" anchor="ctr"/>
-          <a:lstStyle/>
-          <a:p>
-            <a:pPr indent="0" marL="0">
-              <a:buNone/>
-            </a:pPr>
-            <a:r>
-              <a:rPr lang="en-US" sz="1000" b="1" spc="200" kern="0" dirty="0">
+              <a:t>That's the overview.</a:t>
+            </a:r>
+            <a:endParaRPr lang="en-US" sz="3400" dirty="0"/>
+          </a:p>
+        </p:txBody>
+      </p:sp>
+      <p:sp>
+        <p:nvSpPr>
+          <p:cNvPr id="5" name="Text 3"/>
+          <p:cNvSpPr/>
+          <p:nvPr/>
+        </p:nvSpPr>
+        <p:spPr>
+          <a:xfrm>
+            <a:off x="502920" y="2377440"/>
+            <a:ext cx="8412480" cy="731520"/>
+          </a:xfrm>
+          <a:prstGeom prst="rect">
+            <a:avLst/>
+          </a:prstGeom>
+          <a:noFill/>
+          <a:ln/>
+        </p:spPr>
+        <p:txBody>
+          <a:bodyPr wrap="square" lIns="0" tIns="0" rIns="0" bIns="0" rtlCol="0" anchor="ctr"/>
+          <a:lstStyle/>
+          <a:p>
+            <a:pPr marL="0" indent="0">
+              <a:buNone/>
+            </a:pPr>
+            <a:r>
+              <a:rPr lang="en-US" sz="3400" i="1" dirty="0">
                 <a:solidFill>
                   <a:srgbClr val="CC785C"/>
+                </a:solidFill>
+                <a:latin typeface="Georgia" pitchFamily="34" charset="0"/>
+                <a:ea typeface="Georgia" pitchFamily="34" charset="-122"/>
+                <a:cs typeface="Georgia" pitchFamily="34" charset="-120"/>
+              </a:rPr>
+              <a:t>Examples / Questions and discussion.</a:t>
+            </a:r>
+            <a:endParaRPr lang="en-US" sz="3400" dirty="0"/>
+          </a:p>
+        </p:txBody>
+      </p:sp>
+      <p:sp>
+        <p:nvSpPr>
+          <p:cNvPr id="6" name="Text 4"/>
+          <p:cNvSpPr/>
+          <p:nvPr/>
+        </p:nvSpPr>
+        <p:spPr>
+          <a:xfrm>
+            <a:off x="502920" y="3703320"/>
+            <a:ext cx="2743200" cy="228600"/>
+          </a:xfrm>
+          <a:prstGeom prst="rect">
+            <a:avLst/>
+          </a:prstGeom>
+          <a:noFill/>
+          <a:ln/>
+        </p:spPr>
+        <p:txBody>
+          <a:bodyPr wrap="square" lIns="0" tIns="0" rIns="0" bIns="0" rtlCol="0" anchor="ctr"/>
+          <a:lstStyle/>
+          <a:p>
+            <a:pPr marL="0" indent="0">
+              <a:buNone/>
+            </a:pPr>
+            <a:r>
+              <a:rPr lang="en-US" sz="900" b="1" kern="0" spc="300" dirty="0">
+                <a:solidFill>
+                  <a:srgbClr val="A9A69E"/>
                 </a:solidFill>
                 <a:latin typeface="Calibri" pitchFamily="34" charset="0"/>
                 <a:ea typeface="Calibri" pitchFamily="34" charset="-122"/>
                 <a:cs typeface="Calibri" pitchFamily="34" charset="-120"/>
               </a:rPr>
-              <a:t>Dropped details</a:t>
-            </a:r>
-            <a:endParaRPr lang="en-US" sz="1000" dirty="0"/>
-          </a:p>
-        </p:txBody>
-      </p:sp>
-      <p:sp>
-        <p:nvSpPr>
-          <p:cNvPr id="10" name="Text 7"/>
-          <p:cNvSpPr/>
-          <p:nvPr/>
-        </p:nvSpPr>
-        <p:spPr>
-          <a:xfrm>
-            <a:off x="758952" y="2697480"/>
-            <a:ext cx="3611880" cy="594360"/>
-          </a:xfrm>
-          <a:prstGeom prst="rect">
-            <a:avLst/>
-          </a:prstGeom>
-          <a:noFill/>
-          <a:ln/>
-        </p:spPr>
-        <p:txBody>
-          <a:bodyPr wrap="square" lIns="0" tIns="0" rIns="0" bIns="0" rtlCol="0" anchor="ctr"/>
-          <a:lstStyle/>
-          <a:p>
-            <a:pPr indent="0" marL="0">
-              <a:buNone/>
-            </a:pPr>
-            <a:r>
-              <a:rPr lang="en-US" sz="1100" dirty="0">
-                <a:solidFill>
-                  <a:srgbClr val="6B6A66"/>
+              <a:t>DOCUMENTATION</a:t>
+            </a:r>
+            <a:endParaRPr lang="en-US" sz="900" dirty="0"/>
+          </a:p>
+        </p:txBody>
+      </p:sp>
+      <p:sp>
+        <p:nvSpPr>
+          <p:cNvPr id="7" name="Text 5"/>
+          <p:cNvSpPr/>
+          <p:nvPr/>
+        </p:nvSpPr>
+        <p:spPr>
+          <a:xfrm>
+            <a:off x="502920" y="3931920"/>
+            <a:ext cx="4572000" cy="320040"/>
+          </a:xfrm>
+          <a:prstGeom prst="rect">
+            <a:avLst/>
+          </a:prstGeom>
+          <a:noFill/>
+          <a:ln/>
+        </p:spPr>
+        <p:txBody>
+          <a:bodyPr wrap="square" lIns="0" tIns="0" rIns="0" bIns="0" rtlCol="0" anchor="ctr"/>
+          <a:lstStyle/>
+          <a:p>
+            <a:pPr marL="0" indent="0">
+              <a:buNone/>
+            </a:pPr>
+            <a:r>
+              <a:rPr lang="en-US" sz="1400" dirty="0">
+                <a:solidFill>
+                  <a:srgbClr val="F7F5F0"/>
+                </a:solidFill>
+                <a:latin typeface="Consolas" pitchFamily="34" charset="0"/>
+                <a:ea typeface="Consolas" pitchFamily="34" charset="-122"/>
+                <a:cs typeface="Consolas" pitchFamily="34" charset="-120"/>
+              </a:rPr>
+              <a:t>docs.claude.com/en/docs/claude-code</a:t>
+            </a:r>
+            <a:endParaRPr lang="en-US" sz="1400" dirty="0"/>
+          </a:p>
+        </p:txBody>
+      </p:sp>
+      <p:sp>
+        <p:nvSpPr>
+          <p:cNvPr id="8" name="Text 6"/>
+          <p:cNvSpPr/>
+          <p:nvPr/>
+        </p:nvSpPr>
+        <p:spPr>
+          <a:xfrm>
+            <a:off x="5303520" y="3703320"/>
+            <a:ext cx="2743200" cy="228600"/>
+          </a:xfrm>
+          <a:prstGeom prst="rect">
+            <a:avLst/>
+          </a:prstGeom>
+          <a:noFill/>
+          <a:ln/>
+        </p:spPr>
+        <p:txBody>
+          <a:bodyPr wrap="square" lIns="0" tIns="0" rIns="0" bIns="0" rtlCol="0" anchor="ctr"/>
+          <a:lstStyle/>
+          <a:p>
+            <a:pPr marL="0" indent="0">
+              <a:buNone/>
+            </a:pPr>
+            <a:r>
+              <a:rPr lang="en-US" sz="900" b="1" kern="0" spc="300" dirty="0">
+                <a:solidFill>
+                  <a:srgbClr val="A9A69E"/>
                 </a:solidFill>
                 <a:latin typeface="Calibri" pitchFamily="34" charset="0"/>
                 <a:ea typeface="Calibri" pitchFamily="34" charset="-122"/>
                 <a:cs typeface="Calibri" pitchFamily="34" charset="-120"/>
               </a:rPr>
-              <a:t>Long sessions and huge files strain the context window; earlier details get dropped. Reset with /clear, trim with /compact, point with @.</a:t>
-            </a:r>
-            <a:endParaRPr lang="en-US" sz="1100" dirty="0"/>
-          </a:p>
-        </p:txBody>
-      </p:sp>
-      <p:sp>
-        <p:nvSpPr>
-          <p:cNvPr id="11" name="Shape 8"/>
-          <p:cNvSpPr/>
-          <p:nvPr/>
-        </p:nvSpPr>
-        <p:spPr>
-          <a:xfrm>
-            <a:off x="4617720" y="1965960"/>
-            <a:ext cx="4023360" cy="1371600"/>
-          </a:xfrm>
-          <a:prstGeom prst="rect">
-            <a:avLst/>
-          </a:prstGeom>
-          <a:solidFill>
-            <a:srgbClr val="FFFFFF"/>
-          </a:solidFill>
-          <a:ln w="9525">
+              <a:t>Thank you!</a:t>
+            </a:r>
+            <a:endParaRPr lang="en-US" sz="900" dirty="0"/>
+          </a:p>
+        </p:txBody>
+      </p:sp>
+      <p:sp>
+        <p:nvSpPr>
+          <p:cNvPr id="9" name="Text 7"/>
+          <p:cNvSpPr/>
+          <p:nvPr/>
+        </p:nvSpPr>
+        <p:spPr>
+          <a:xfrm>
+            <a:off x="5303520" y="3931920"/>
+            <a:ext cx="3657600" cy="320040"/>
+          </a:xfrm>
+          <a:prstGeom prst="rect">
+            <a:avLst/>
+          </a:prstGeom>
+          <a:noFill/>
+          <a:ln/>
+        </p:spPr>
+        <p:txBody>
+          <a:bodyPr wrap="square" lIns="0" tIns="0" rIns="0" bIns="0" rtlCol="0" anchor="ctr"/>
+          <a:lstStyle/>
+          <a:p>
+            <a:pPr marL="0" indent="0">
+              <a:buNone/>
+            </a:pPr>
+            <a:r>
+              <a:rPr lang="en-US" sz="1400" dirty="0">
+                <a:solidFill>
+                  <a:srgbClr val="CC785C"/>
+                </a:solidFill>
+                <a:latin typeface="Consolas" pitchFamily="34" charset="0"/>
+                <a:ea typeface="Consolas" pitchFamily="34" charset="-122"/>
+                <a:cs typeface="Consolas" pitchFamily="34" charset="-120"/>
+              </a:rPr>
+              <a:t>Radu</a:t>
+            </a:r>
+            <a:endParaRPr lang="en-US" sz="1400" dirty="0"/>
+          </a:p>
+        </p:txBody>
+      </p:sp>
+      <p:sp>
+        <p:nvSpPr>
+          <p:cNvPr id="10" name="Shape 8"/>
+          <p:cNvSpPr/>
+          <p:nvPr/>
+        </p:nvSpPr>
+        <p:spPr>
+          <a:xfrm>
+            <a:off x="502920" y="4617720"/>
+            <a:ext cx="8138160" cy="0"/>
+          </a:xfrm>
+          <a:prstGeom prst="line">
+            <a:avLst/>
+          </a:prstGeom>
+          <a:noFill/>
+          <a:ln w="12700">
             <a:solidFill>
-              <a:srgbClr val="E3DFD7"/>
+              <a:srgbClr val="2A2B30"/>
             </a:solidFill>
             <a:prstDash val="solid"/>
           </a:ln>
-          <a:effectLst>
-            <a:outerShdw sx="100000" sy="100000" kx="0" ky="0" algn="bl" rotWithShape="0" blurRad="127000" dist="25400" dir="5400000">
-              <a:srgbClr val="000000">
-                <a:alpha val="8000"/>
-              </a:srgbClr>
-            </a:outerShdw>
-          </a:effectLst>
-        </p:spPr>
-      </p:sp>
-      <p:sp>
-        <p:nvSpPr>
-          <p:cNvPr id="12" name="Shape 9"/>
-          <p:cNvSpPr/>
-          <p:nvPr/>
-        </p:nvSpPr>
-        <p:spPr>
-          <a:xfrm>
-            <a:off x="4617720" y="1965960"/>
-            <a:ext cx="64008" cy="1371600"/>
-          </a:xfrm>
-          <a:prstGeom prst="rect">
-            <a:avLst/>
-          </a:prstGeom>
-          <a:solidFill>
-            <a:srgbClr val="CC785C"/>
-          </a:solidFill>
-          <a:ln w="12700">
-            <a:solidFill>
-              <a:srgbClr val="CC785C"/>
-            </a:solidFill>
-            <a:prstDash val="solid"/>
-          </a:ln>
-        </p:spPr>
-      </p:sp>
-      <p:pic>
-        <p:nvPicPr>
-          <p:cNvPr id="13" name="Image 1" descr="preencoded.png">    </p:cNvPr>
-          <p:cNvPicPr>
-            <a:picLocks noChangeAspect="1"/>
-          </p:cNvPicPr>
-          <p:nvPr/>
-        </p:nvPicPr>
-        <p:blipFill>
-          <a:blip r:embed="rId2"/>
-          <a:stretch>
-            <a:fillRect/>
-          </a:stretch>
-        </p:blipFill>
-        <p:spPr>
-          <a:xfrm>
-            <a:off x="4873752" y="2194560"/>
-            <a:ext cx="320040" cy="320040"/>
-          </a:xfrm>
-          <a:prstGeom prst="rect">
-            <a:avLst/>
-          </a:prstGeom>
-        </p:spPr>
-      </p:pic>
-      <p:sp>
-        <p:nvSpPr>
-          <p:cNvPr id="14" name="Text 10"/>
-          <p:cNvSpPr/>
-          <p:nvPr/>
-        </p:nvSpPr>
-        <p:spPr>
-          <a:xfrm>
-            <a:off x="5303520" y="2130552"/>
-            <a:ext cx="3200400" cy="320040"/>
-          </a:xfrm>
-          <a:prstGeom prst="rect">
-            <a:avLst/>
-          </a:prstGeom>
-          <a:noFill/>
-          <a:ln/>
-        </p:spPr>
-        <p:txBody>
-          <a:bodyPr wrap="square" lIns="0" tIns="0" rIns="0" bIns="0" rtlCol="0" anchor="ctr"/>
-          <a:lstStyle/>
-          <a:p>
-            <a:pPr indent="0" marL="0">
-              <a:buNone/>
-            </a:pPr>
-            <a:r>
-              <a:rPr lang="en-US" sz="1800" b="1" dirty="0">
-                <a:solidFill>
-                  <a:srgbClr val="1A1B1F"/>
-                </a:solidFill>
-                <a:latin typeface="Georgia" pitchFamily="34" charset="0"/>
-                <a:ea typeface="Georgia" pitchFamily="34" charset="-122"/>
-                <a:cs typeface="Georgia" pitchFamily="34" charset="-120"/>
-              </a:rPr>
-              <a:t>Hallucinations</a:t>
-            </a:r>
-            <a:endParaRPr lang="en-US" sz="1800" dirty="0"/>
-          </a:p>
-        </p:txBody>
-      </p:sp>
-      <p:sp>
-        <p:nvSpPr>
-          <p:cNvPr id="15" name="Text 11"/>
-          <p:cNvSpPr/>
-          <p:nvPr/>
-        </p:nvSpPr>
-        <p:spPr>
-          <a:xfrm>
-            <a:off x="5303520" y="2423160"/>
-            <a:ext cx="3200400" cy="219456"/>
-          </a:xfrm>
-          <a:prstGeom prst="rect">
-            <a:avLst/>
-          </a:prstGeom>
-          <a:noFill/>
-          <a:ln/>
-        </p:spPr>
-        <p:txBody>
-          <a:bodyPr wrap="square" lIns="0" tIns="0" rIns="0" bIns="0" rtlCol="0" anchor="ctr"/>
-          <a:lstStyle/>
-          <a:p>
-            <a:pPr indent="0" marL="0">
-              <a:buNone/>
-            </a:pPr>
-            <a:r>
-              <a:rPr lang="en-US" sz="1000" b="1" spc="200" kern="0" dirty="0">
-                <a:solidFill>
-                  <a:srgbClr val="CC785C"/>
+        </p:spPr>
+        <p:txBody>
+          <a:bodyPr/>
+          <a:lstStyle/>
+          <a:p>
+            <a:endParaRPr lang="en-US"/>
+          </a:p>
+        </p:txBody>
+      </p:sp>
+      <p:sp>
+        <p:nvSpPr>
+          <p:cNvPr id="11" name="Text 9"/>
+          <p:cNvSpPr/>
+          <p:nvPr/>
+        </p:nvSpPr>
+        <p:spPr>
+          <a:xfrm>
+            <a:off x="502920" y="4709160"/>
+            <a:ext cx="4572000" cy="274320"/>
+          </a:xfrm>
+          <a:prstGeom prst="rect">
+            <a:avLst/>
+          </a:prstGeom>
+          <a:noFill/>
+          <a:ln/>
+        </p:spPr>
+        <p:txBody>
+          <a:bodyPr wrap="square" lIns="0" tIns="0" rIns="0" bIns="0" rtlCol="0" anchor="ctr"/>
+          <a:lstStyle/>
+          <a:p>
+            <a:pPr marL="0" indent="0">
+              <a:buNone/>
+            </a:pPr>
+            <a:r>
+              <a:rPr lang="en-US" sz="1000" dirty="0">
+                <a:solidFill>
+                  <a:srgbClr val="A9A69E"/>
                 </a:solidFill>
                 <a:latin typeface="Calibri" pitchFamily="34" charset="0"/>
                 <a:ea typeface="Calibri" pitchFamily="34" charset="-122"/>
                 <a:cs typeface="Calibri" pitchFamily="34" charset="-120"/>
               </a:rPr>
-              <a:t>Plausible but wrong</a:t>
+              <a:t>SAP</a:t>
             </a:r>
             <a:endParaRPr lang="en-US" sz="1000" dirty="0"/>
           </a:p>
@@ -8060,473 +8643,38 @@
       </p:sp>
       <p:sp>
         <p:nvSpPr>
-          <p:cNvPr id="16" name="Text 12"/>
-          <p:cNvSpPr/>
-          <p:nvPr/>
-        </p:nvSpPr>
-        <p:spPr>
-          <a:xfrm>
-            <a:off x="4873752" y="2697480"/>
-            <a:ext cx="3611880" cy="594360"/>
-          </a:xfrm>
-          <a:prstGeom prst="rect">
-            <a:avLst/>
-          </a:prstGeom>
-          <a:noFill/>
-          <a:ln/>
-        </p:spPr>
-        <p:txBody>
-          <a:bodyPr wrap="square" lIns="0" tIns="0" rIns="0" bIns="0" rtlCol="0" anchor="ctr"/>
-          <a:lstStyle/>
-          <a:p>
-            <a:pPr indent="0" marL="0">
-              <a:buNone/>
-            </a:pPr>
-            <a:r>
-              <a:rPr lang="en-US" sz="1100" dirty="0">
-                <a:solidFill>
-                  <a:srgbClr val="6B6A66"/>
+          <p:cNvPr id="12" name="Text 10"/>
+          <p:cNvSpPr/>
+          <p:nvPr/>
+        </p:nvSpPr>
+        <p:spPr>
+          <a:xfrm>
+            <a:off x="8321040" y="4709160"/>
+            <a:ext cx="365760" cy="228600"/>
+          </a:xfrm>
+          <a:prstGeom prst="rect">
+            <a:avLst/>
+          </a:prstGeom>
+          <a:noFill/>
+          <a:ln/>
+        </p:spPr>
+        <p:txBody>
+          <a:bodyPr wrap="square" lIns="0" tIns="0" rIns="0" bIns="0" rtlCol="0" anchor="ctr"/>
+          <a:lstStyle/>
+          <a:p>
+            <a:pPr marL="0" indent="0" algn="r">
+              <a:buNone/>
+            </a:pPr>
+            <a:r>
+              <a:rPr lang="en-US" sz="1000" dirty="0">
+                <a:solidFill>
+                  <a:srgbClr val="A9A69E"/>
                 </a:solidFill>
                 <a:latin typeface="Calibri" pitchFamily="34" charset="0"/>
                 <a:ea typeface="Calibri" pitchFamily="34" charset="-122"/>
                 <a:cs typeface="Calibri" pitchFamily="34" charset="-120"/>
               </a:rPr>
-              <a:t>When evidence is thin, Claude still answers assertively. Verify behavior and APIs — not just that the code compiles.</a:t>
-            </a:r>
-            <a:endParaRPr lang="en-US" sz="1100" dirty="0"/>
-          </a:p>
-        </p:txBody>
-      </p:sp>
-      <p:sp>
-        <p:nvSpPr>
-          <p:cNvPr id="17" name="Shape 13"/>
-          <p:cNvSpPr/>
-          <p:nvPr/>
-        </p:nvSpPr>
-        <p:spPr>
-          <a:xfrm>
-            <a:off x="502920" y="3429000"/>
-            <a:ext cx="4023360" cy="1371600"/>
-          </a:xfrm>
-          <a:prstGeom prst="rect">
-            <a:avLst/>
-          </a:prstGeom>
-          <a:solidFill>
-            <a:srgbClr val="FFFFFF"/>
-          </a:solidFill>
-          <a:ln w="9525">
-            <a:solidFill>
-              <a:srgbClr val="E3DFD7"/>
-            </a:solidFill>
-            <a:prstDash val="solid"/>
-          </a:ln>
-          <a:effectLst>
-            <a:outerShdw sx="100000" sy="100000" kx="0" ky="0" algn="bl" rotWithShape="0" blurRad="127000" dist="25400" dir="5400000">
-              <a:srgbClr val="000000">
-                <a:alpha val="8000"/>
-              </a:srgbClr>
-            </a:outerShdw>
-          </a:effectLst>
-        </p:spPr>
-      </p:sp>
-      <p:sp>
-        <p:nvSpPr>
-          <p:cNvPr id="18" name="Shape 14"/>
-          <p:cNvSpPr/>
-          <p:nvPr/>
-        </p:nvSpPr>
-        <p:spPr>
-          <a:xfrm>
-            <a:off x="502920" y="3429000"/>
-            <a:ext cx="64008" cy="1371600"/>
-          </a:xfrm>
-          <a:prstGeom prst="rect">
-            <a:avLst/>
-          </a:prstGeom>
-          <a:solidFill>
-            <a:srgbClr val="CC785C"/>
-          </a:solidFill>
-          <a:ln w="12700">
-            <a:solidFill>
-              <a:srgbClr val="CC785C"/>
-            </a:solidFill>
-            <a:prstDash val="solid"/>
-          </a:ln>
-        </p:spPr>
-      </p:sp>
-      <p:pic>
-        <p:nvPicPr>
-          <p:cNvPr id="19" name="Image 2" descr="preencoded.png">    </p:cNvPr>
-          <p:cNvPicPr>
-            <a:picLocks noChangeAspect="1"/>
-          </p:cNvPicPr>
-          <p:nvPr/>
-        </p:nvPicPr>
-        <p:blipFill>
-          <a:blip r:embed="rId3"/>
-          <a:stretch>
-            <a:fillRect/>
-          </a:stretch>
-        </p:blipFill>
-        <p:spPr>
-          <a:xfrm>
-            <a:off x="758952" y="3657600"/>
-            <a:ext cx="320040" cy="320040"/>
-          </a:xfrm>
-          <a:prstGeom prst="rect">
-            <a:avLst/>
-          </a:prstGeom>
-        </p:spPr>
-      </p:pic>
-      <p:sp>
-        <p:nvSpPr>
-          <p:cNvPr id="20" name="Text 15"/>
-          <p:cNvSpPr/>
-          <p:nvPr/>
-        </p:nvSpPr>
-        <p:spPr>
-          <a:xfrm>
-            <a:off x="1188720" y="3593592"/>
-            <a:ext cx="3200400" cy="320040"/>
-          </a:xfrm>
-          <a:prstGeom prst="rect">
-            <a:avLst/>
-          </a:prstGeom>
-          <a:noFill/>
-          <a:ln/>
-        </p:spPr>
-        <p:txBody>
-          <a:bodyPr wrap="square" lIns="0" tIns="0" rIns="0" bIns="0" rtlCol="0" anchor="ctr"/>
-          <a:lstStyle/>
-          <a:p>
-            <a:pPr indent="0" marL="0">
-              <a:buNone/>
-            </a:pPr>
-            <a:r>
-              <a:rPr lang="en-US" sz="1800" b="1" dirty="0">
-                <a:solidFill>
-                  <a:srgbClr val="1A1B1F"/>
-                </a:solidFill>
-                <a:latin typeface="Georgia" pitchFamily="34" charset="0"/>
-                <a:ea typeface="Georgia" pitchFamily="34" charset="-122"/>
-                <a:cs typeface="Georgia" pitchFamily="34" charset="-120"/>
-              </a:rPr>
-              <a:t>Hidden state</a:t>
-            </a:r>
-            <a:endParaRPr lang="en-US" sz="1800" dirty="0"/>
-          </a:p>
-        </p:txBody>
-      </p:sp>
-      <p:sp>
-        <p:nvSpPr>
-          <p:cNvPr id="21" name="Text 16"/>
-          <p:cNvSpPr/>
-          <p:nvPr/>
-        </p:nvSpPr>
-        <p:spPr>
-          <a:xfrm>
-            <a:off x="1188720" y="3886200"/>
-            <a:ext cx="3200400" cy="219456"/>
-          </a:xfrm>
-          <a:prstGeom prst="rect">
-            <a:avLst/>
-          </a:prstGeom>
-          <a:noFill/>
-          <a:ln/>
-        </p:spPr>
-        <p:txBody>
-          <a:bodyPr wrap="square" lIns="0" tIns="0" rIns="0" bIns="0" rtlCol="0" anchor="ctr"/>
-          <a:lstStyle/>
-          <a:p>
-            <a:pPr indent="0" marL="0">
-              <a:buNone/>
-            </a:pPr>
-            <a:r>
-              <a:rPr lang="en-US" sz="1000" b="1" spc="200" kern="0" dirty="0">
-                <a:solidFill>
-                  <a:srgbClr val="CC785C"/>
-                </a:solidFill>
-                <a:latin typeface="Calibri" pitchFamily="34" charset="0"/>
-                <a:ea typeface="Calibri" pitchFamily="34" charset="-122"/>
-                <a:cs typeface="Calibri" pitchFamily="34" charset="-120"/>
-              </a:rPr>
-              <a:t>Invisible to the code</a:t>
-            </a:r>
-            <a:endParaRPr lang="en-US" sz="1000" dirty="0"/>
-          </a:p>
-        </p:txBody>
-      </p:sp>
-      <p:sp>
-        <p:nvSpPr>
-          <p:cNvPr id="22" name="Text 17"/>
-          <p:cNvSpPr/>
-          <p:nvPr/>
-        </p:nvSpPr>
-        <p:spPr>
-          <a:xfrm>
-            <a:off x="758952" y="4160520"/>
-            <a:ext cx="3611880" cy="594360"/>
-          </a:xfrm>
-          <a:prstGeom prst="rect">
-            <a:avLst/>
-          </a:prstGeom>
-          <a:noFill/>
-          <a:ln/>
-        </p:spPr>
-        <p:txBody>
-          <a:bodyPr wrap="square" lIns="0" tIns="0" rIns="0" bIns="0" rtlCol="0" anchor="ctr"/>
-          <a:lstStyle/>
-          <a:p>
-            <a:pPr indent="0" marL="0">
-              <a:buNone/>
-            </a:pPr>
-            <a:r>
-              <a:rPr lang="en-US" sz="1100" dirty="0">
-                <a:solidFill>
-                  <a:srgbClr val="6B6A66"/>
-                </a:solidFill>
-                <a:latin typeface="Calibri" pitchFamily="34" charset="0"/>
-                <a:ea typeface="Calibri" pitchFamily="34" charset="-122"/>
-                <a:cs typeface="Calibri" pitchFamily="34" charset="-120"/>
-              </a:rPr>
-              <a:t>External APIs, runtime config, feature flags, and team conventions don't live in the code. Point Claude at them explicitly.</a:t>
-            </a:r>
-            <a:endParaRPr lang="en-US" sz="1100" dirty="0"/>
-          </a:p>
-        </p:txBody>
-      </p:sp>
-      <p:sp>
-        <p:nvSpPr>
-          <p:cNvPr id="23" name="Shape 18"/>
-          <p:cNvSpPr/>
-          <p:nvPr/>
-        </p:nvSpPr>
-        <p:spPr>
-          <a:xfrm>
-            <a:off x="4617720" y="3429000"/>
-            <a:ext cx="4023360" cy="1371600"/>
-          </a:xfrm>
-          <a:prstGeom prst="rect">
-            <a:avLst/>
-          </a:prstGeom>
-          <a:solidFill>
-            <a:srgbClr val="FFFFFF"/>
-          </a:solidFill>
-          <a:ln w="9525">
-            <a:solidFill>
-              <a:srgbClr val="E3DFD7"/>
-            </a:solidFill>
-            <a:prstDash val="solid"/>
-          </a:ln>
-          <a:effectLst>
-            <a:outerShdw sx="100000" sy="100000" kx="0" ky="0" algn="bl" rotWithShape="0" blurRad="127000" dist="25400" dir="5400000">
-              <a:srgbClr val="000000">
-                <a:alpha val="8000"/>
-              </a:srgbClr>
-            </a:outerShdw>
-          </a:effectLst>
-        </p:spPr>
-      </p:sp>
-      <p:sp>
-        <p:nvSpPr>
-          <p:cNvPr id="24" name="Shape 19"/>
-          <p:cNvSpPr/>
-          <p:nvPr/>
-        </p:nvSpPr>
-        <p:spPr>
-          <a:xfrm>
-            <a:off x="4617720" y="3429000"/>
-            <a:ext cx="64008" cy="1371600"/>
-          </a:xfrm>
-          <a:prstGeom prst="rect">
-            <a:avLst/>
-          </a:prstGeom>
-          <a:solidFill>
-            <a:srgbClr val="CC785C"/>
-          </a:solidFill>
-          <a:ln w="12700">
-            <a:solidFill>
-              <a:srgbClr val="CC785C"/>
-            </a:solidFill>
-            <a:prstDash val="solid"/>
-          </a:ln>
-        </p:spPr>
-      </p:sp>
-      <p:pic>
-        <p:nvPicPr>
-          <p:cNvPr id="25" name="Image 3" descr="preencoded.png">    </p:cNvPr>
-          <p:cNvPicPr>
-            <a:picLocks noChangeAspect="1"/>
-          </p:cNvPicPr>
-          <p:nvPr/>
-        </p:nvPicPr>
-        <p:blipFill>
-          <a:blip r:embed="rId4"/>
-          <a:stretch>
-            <a:fillRect/>
-          </a:stretch>
-        </p:blipFill>
-        <p:spPr>
-          <a:xfrm>
-            <a:off x="4873752" y="3657600"/>
-            <a:ext cx="320040" cy="320040"/>
-          </a:xfrm>
-          <a:prstGeom prst="rect">
-            <a:avLst/>
-          </a:prstGeom>
-        </p:spPr>
-      </p:pic>
-      <p:sp>
-        <p:nvSpPr>
-          <p:cNvPr id="26" name="Text 20"/>
-          <p:cNvSpPr/>
-          <p:nvPr/>
-        </p:nvSpPr>
-        <p:spPr>
-          <a:xfrm>
-            <a:off x="5303520" y="3593592"/>
-            <a:ext cx="3200400" cy="320040"/>
-          </a:xfrm>
-          <a:prstGeom prst="rect">
-            <a:avLst/>
-          </a:prstGeom>
-          <a:noFill/>
-          <a:ln/>
-        </p:spPr>
-        <p:txBody>
-          <a:bodyPr wrap="square" lIns="0" tIns="0" rIns="0" bIns="0" rtlCol="0" anchor="ctr"/>
-          <a:lstStyle/>
-          <a:p>
-            <a:pPr indent="0" marL="0">
-              <a:buNone/>
-            </a:pPr>
-            <a:r>
-              <a:rPr lang="en-US" sz="1800" b="1" dirty="0">
-                <a:solidFill>
-                  <a:srgbClr val="1A1B1F"/>
-                </a:solidFill>
-                <a:latin typeface="Georgia" pitchFamily="34" charset="0"/>
-                <a:ea typeface="Georgia" pitchFamily="34" charset="-122"/>
-                <a:cs typeface="Georgia" pitchFamily="34" charset="-120"/>
-              </a:rPr>
-              <a:t>Review</a:t>
-            </a:r>
-            <a:endParaRPr lang="en-US" sz="1800" dirty="0"/>
-          </a:p>
-        </p:txBody>
-      </p:sp>
-      <p:sp>
-        <p:nvSpPr>
-          <p:cNvPr id="27" name="Text 21"/>
-          <p:cNvSpPr/>
-          <p:nvPr/>
-        </p:nvSpPr>
-        <p:spPr>
-          <a:xfrm>
-            <a:off x="5303520" y="3886200"/>
-            <a:ext cx="3200400" cy="219456"/>
-          </a:xfrm>
-          <a:prstGeom prst="rect">
-            <a:avLst/>
-          </a:prstGeom>
-          <a:noFill/>
-          <a:ln/>
-        </p:spPr>
-        <p:txBody>
-          <a:bodyPr wrap="square" lIns="0" tIns="0" rIns="0" bIns="0" rtlCol="0" anchor="ctr"/>
-          <a:lstStyle/>
-          <a:p>
-            <a:pPr indent="0" marL="0">
-              <a:buNone/>
-            </a:pPr>
-            <a:r>
-              <a:rPr lang="en-US" sz="1000" b="1" spc="200" kern="0" dirty="0">
-                <a:solidFill>
-                  <a:srgbClr val="CC785C"/>
-                </a:solidFill>
-                <a:latin typeface="Calibri" pitchFamily="34" charset="0"/>
-                <a:ea typeface="Calibri" pitchFamily="34" charset="-122"/>
-                <a:cs typeface="Calibri" pitchFamily="34" charset="-120"/>
-              </a:rPr>
-              <a:t>You own the diff</a:t>
-            </a:r>
-            <a:endParaRPr lang="en-US" sz="1000" dirty="0"/>
-          </a:p>
-        </p:txBody>
-      </p:sp>
-      <p:sp>
-        <p:nvSpPr>
-          <p:cNvPr id="28" name="Text 22"/>
-          <p:cNvSpPr/>
-          <p:nvPr/>
-        </p:nvSpPr>
-        <p:spPr>
-          <a:xfrm>
-            <a:off x="4873752" y="4160520"/>
-            <a:ext cx="3611880" cy="594360"/>
-          </a:xfrm>
-          <a:prstGeom prst="rect">
-            <a:avLst/>
-          </a:prstGeom>
-          <a:noFill/>
-          <a:ln/>
-        </p:spPr>
-        <p:txBody>
-          <a:bodyPr wrap="square" lIns="0" tIns="0" rIns="0" bIns="0" rtlCol="0" anchor="ctr"/>
-          <a:lstStyle/>
-          <a:p>
-            <a:pPr indent="0" marL="0">
-              <a:buNone/>
-            </a:pPr>
-            <a:r>
-              <a:rPr lang="en-US" sz="1100" dirty="0">
-                <a:solidFill>
-                  <a:srgbClr val="6B6A66"/>
-                </a:solidFill>
-                <a:latin typeface="Calibri" pitchFamily="34" charset="0"/>
-                <a:ea typeface="Calibri" pitchFamily="34" charset="-122"/>
-                <a:cs typeface="Calibri" pitchFamily="34" charset="-120"/>
-              </a:rPr>
-              <a:t>Tests can pass on wrong code; commit messages can misstate intent. Read every hunk before merging — Claude is a contributor, not an owner.</a:t>
-            </a:r>
-            <a:endParaRPr lang="en-US" sz="1100" dirty="0"/>
-          </a:p>
-        </p:txBody>
-      </p:sp>
-      <p:sp>
-        <p:nvSpPr>
-          <p:cNvPr id="29" name="Text 23"/>
-          <p:cNvSpPr/>
-          <p:nvPr/>
-        </p:nvSpPr>
-        <p:spPr>
-          <a:xfrm>
-            <a:off x="8321040" y="4709160"/>
-            <a:ext cx="365760" cy="228600"/>
-          </a:xfrm>
-          <a:prstGeom prst="rect">
-            <a:avLst/>
-          </a:prstGeom>
-          <a:noFill/>
-          <a:ln/>
-        </p:spPr>
-        <p:txBody>
-          <a:bodyPr wrap="square" lIns="0" tIns="0" rIns="0" bIns="0" rtlCol="0" anchor="ctr"/>
-          <a:lstStyle/>
-          <a:p>
-            <a:pPr algn="r" indent="0" marL="0">
-              <a:buNone/>
-            </a:pPr>
-            <a:r>
-              <a:rPr lang="en-US" sz="1000" dirty="0">
-                <a:solidFill>
-                  <a:srgbClr val="6B6A66"/>
-                </a:solidFill>
-                <a:latin typeface="Calibri" pitchFamily="34" charset="0"/>
-                <a:ea typeface="Calibri" pitchFamily="34" charset="-122"/>
-                <a:cs typeface="Calibri" pitchFamily="34" charset="-120"/>
-              </a:rPr>
-              <a:t>14</a:t>
+              <a:t>15</a:t>
             </a:r>
             <a:endParaRPr lang="en-US" sz="1000" dirty="0"/>
           </a:p>
@@ -8548,6 +8696,7 @@
         <a:solidFill>
           <a:srgbClr val="F7F5F0"/>
         </a:solidFill>
+        <a:effectLst/>
       </p:bgPr>
     </p:bg>
     <p:spTree>
@@ -8585,11 +8734,11 @@
           <a:bodyPr wrap="square" lIns="0" tIns="0" rIns="0" bIns="0" rtlCol="0" anchor="ctr"/>
           <a:lstStyle/>
           <a:p>
-            <a:pPr indent="0" marL="0">
-              <a:buNone/>
-            </a:pPr>
-            <a:r>
-              <a:rPr lang="en-US" sz="1000" b="1" spc="400" kern="0" dirty="0">
+            <a:pPr marL="0" indent="0">
+              <a:buNone/>
+            </a:pPr>
+            <a:r>
+              <a:rPr lang="en-US" sz="1000" b="1" kern="0" spc="400" dirty="0">
                 <a:solidFill>
                   <a:srgbClr val="CC785C"/>
                 </a:solidFill>
@@ -8624,7 +8773,7 @@
           <a:bodyPr wrap="square" lIns="0" tIns="0" rIns="0" bIns="0" rtlCol="0" anchor="ctr"/>
           <a:lstStyle/>
           <a:p>
-            <a:pPr indent="0" marL="0">
+            <a:pPr marL="0" indent="0">
               <a:buNone/>
             </a:pPr>
             <a:r>
@@ -8663,7 +8812,7 @@
           <a:bodyPr wrap="square" lIns="0" tIns="0" rIns="0" bIns="0" rtlCol="0" anchor="ctr"/>
           <a:lstStyle/>
           <a:p>
-            <a:pPr indent="0" marL="0">
+            <a:pPr marL="0" indent="0">
               <a:buNone/>
             </a:pPr>
             <a:r>
@@ -8702,7 +8851,7 @@
           <a:bodyPr wrap="square" lIns="0" tIns="0" rIns="0" bIns="0" rtlCol="0" anchor="ctr"/>
           <a:lstStyle/>
           <a:p>
-            <a:pPr indent="0" marL="0">
+            <a:pPr marL="0" indent="0">
               <a:buNone/>
             </a:pPr>
             <a:r>
@@ -8744,13 +8893,20 @@
             <a:prstDash val="solid"/>
           </a:ln>
           <a:effectLst>
-            <a:outerShdw sx="100000" sy="100000" kx="0" ky="0" algn="bl" rotWithShape="0" blurRad="127000" dist="25400" dir="5400000">
+            <a:outerShdw blurRad="127000" dist="25400" dir="5400000" algn="bl" rotWithShape="0">
               <a:srgbClr val="000000">
                 <a:alpha val="8000"/>
               </a:srgbClr>
             </a:outerShdw>
           </a:effectLst>
         </p:spPr>
+        <p:txBody>
+          <a:bodyPr/>
+          <a:lstStyle/>
+          <a:p>
+            <a:endParaRPr lang="en-US"/>
+          </a:p>
+        </p:txBody>
       </p:sp>
       <p:sp>
         <p:nvSpPr>
@@ -8776,6 +8932,13 @@
             <a:prstDash val="solid"/>
           </a:ln>
         </p:spPr>
+        <p:txBody>
+          <a:bodyPr/>
+          <a:lstStyle/>
+          <a:p>
+            <a:endParaRPr lang="en-US"/>
+          </a:p>
+        </p:txBody>
       </p:sp>
       <p:sp>
         <p:nvSpPr>
@@ -8801,6 +8964,13 @@
             <a:prstDash val="solid"/>
           </a:ln>
         </p:spPr>
+        <p:txBody>
+          <a:bodyPr/>
+          <a:lstStyle/>
+          <a:p>
+            <a:endParaRPr lang="en-US"/>
+          </a:p>
+        </p:txBody>
       </p:sp>
       <p:sp>
         <p:nvSpPr>
@@ -8826,6 +8996,13 @@
             <a:prstDash val="solid"/>
           </a:ln>
         </p:spPr>
+        <p:txBody>
+          <a:bodyPr/>
+          <a:lstStyle/>
+          <a:p>
+            <a:endParaRPr lang="en-US"/>
+          </a:p>
+        </p:txBody>
       </p:sp>
       <p:sp>
         <p:nvSpPr>
@@ -8851,6 +9028,13 @@
             <a:prstDash val="solid"/>
           </a:ln>
         </p:spPr>
+        <p:txBody>
+          <a:bodyPr/>
+          <a:lstStyle/>
+          <a:p>
+            <a:endParaRPr lang="en-US"/>
+          </a:p>
+        </p:txBody>
       </p:sp>
       <p:sp>
         <p:nvSpPr>
@@ -8873,7 +9057,7 @@
           <a:bodyPr wrap="square" lIns="0" tIns="0" rIns="0" bIns="0" rtlCol="0" anchor="ctr"/>
           <a:lstStyle/>
           <a:p>
-            <a:pPr algn="ctr" indent="0" marL="0">
+            <a:pPr marL="0" indent="0" algn="ctr">
               <a:buNone/>
             </a:pPr>
             <a:r>
@@ -8912,7 +9096,7 @@
           <a:bodyPr wrap="square" lIns="0" tIns="0" rIns="0" bIns="0" rtlCol="0" anchor="t"/>
           <a:lstStyle/>
           <a:p>
-            <a:pPr indent="0" marL="0">
+            <a:pPr marL="0" indent="0">
               <a:spcAft>
                 <a:spcPts val="200"/>
               </a:spcAft>
@@ -8932,7 +9116,7 @@
             <a:endParaRPr lang="en-US" sz="1050" dirty="0"/>
           </a:p>
           <a:p>
-            <a:pPr indent="0" marL="0">
+            <a:pPr marL="0" indent="0">
               <a:spcAft>
                 <a:spcPts val="200"/>
               </a:spcAft>
@@ -8952,7 +9136,7 @@
             <a:endParaRPr lang="en-US" sz="1050" dirty="0"/>
           </a:p>
           <a:p>
-            <a:pPr indent="0" marL="0">
+            <a:pPr marL="0" indent="0">
               <a:spcAft>
                 <a:spcPts val="200"/>
               </a:spcAft>
@@ -8961,7 +9145,7 @@
             <a:endParaRPr lang="en-US" sz="1050" dirty="0"/>
           </a:p>
           <a:p>
-            <a:pPr indent="0" marL="0">
+            <a:pPr marL="0" indent="0">
               <a:spcAft>
                 <a:spcPts val="200"/>
               </a:spcAft>
@@ -8981,7 +9165,7 @@
             <a:endParaRPr lang="en-US" sz="1050" dirty="0"/>
           </a:p>
           <a:p>
-            <a:pPr indent="0" marL="0">
+            <a:pPr marL="0" indent="0">
               <a:spcAft>
                 <a:spcPts val="200"/>
               </a:spcAft>
@@ -9001,7 +9185,7 @@
             <a:endParaRPr lang="en-US" sz="1050" dirty="0"/>
           </a:p>
           <a:p>
-            <a:pPr indent="0" marL="0">
+            <a:pPr marL="0" indent="0">
               <a:spcAft>
                 <a:spcPts val="200"/>
               </a:spcAft>
@@ -9021,7 +9205,7 @@
             <a:endParaRPr lang="en-US" sz="1050" dirty="0"/>
           </a:p>
           <a:p>
-            <a:pPr indent="0" marL="0">
+            <a:pPr marL="0" indent="0">
               <a:spcAft>
                 <a:spcPts val="200"/>
               </a:spcAft>
@@ -9030,7 +9214,7 @@
             <a:endParaRPr lang="en-US" sz="1050" dirty="0"/>
           </a:p>
           <a:p>
-            <a:pPr indent="0" marL="0">
+            <a:pPr marL="0" indent="0">
               <a:spcAft>
                 <a:spcPts val="200"/>
               </a:spcAft>
@@ -9072,7 +9256,7 @@
           <a:bodyPr wrap="square" lIns="0" tIns="0" rIns="0" bIns="0" rtlCol="0" anchor="ctr"/>
           <a:lstStyle/>
           <a:p>
-            <a:pPr algn="r" indent="0" marL="0">
+            <a:pPr marL="0" indent="0" algn="r">
               <a:buNone/>
             </a:pPr>
             <a:r>
@@ -9106,6 +9290,7 @@
         <a:solidFill>
           <a:srgbClr val="F7F5F0"/>
         </a:solidFill>
+        <a:effectLst/>
       </p:bgPr>
     </p:bg>
     <p:spTree>
@@ -9143,11 +9328,11 @@
           <a:bodyPr wrap="square" lIns="0" tIns="0" rIns="0" bIns="0" rtlCol="0" anchor="ctr"/>
           <a:lstStyle/>
           <a:p>
-            <a:pPr indent="0" marL="0">
-              <a:buNone/>
-            </a:pPr>
-            <a:r>
-              <a:rPr lang="en-US" sz="1000" b="1" spc="400" kern="0" dirty="0">
+            <a:pPr marL="0" indent="0">
+              <a:buNone/>
+            </a:pPr>
+            <a:r>
+              <a:rPr lang="en-US" sz="1000" b="1" kern="0" spc="400" dirty="0">
                 <a:solidFill>
                   <a:srgbClr val="CC785C"/>
                 </a:solidFill>
@@ -9182,7 +9367,7 @@
           <a:bodyPr wrap="square" lIns="0" tIns="0" rIns="0" bIns="0" rtlCol="0" anchor="ctr"/>
           <a:lstStyle/>
           <a:p>
-            <a:pPr indent="0" marL="0">
+            <a:pPr marL="0" indent="0">
               <a:buNone/>
             </a:pPr>
             <a:r>
@@ -9221,7 +9406,7 @@
           <a:bodyPr wrap="square" lIns="0" tIns="0" rIns="0" bIns="0" rtlCol="0" anchor="ctr"/>
           <a:lstStyle/>
           <a:p>
-            <a:pPr indent="0" marL="0">
+            <a:pPr marL="0" indent="0">
               <a:buNone/>
             </a:pPr>
             <a:r>
@@ -9262,6 +9447,13 @@
             <a:tailEnd type="triangle"/>
           </a:ln>
         </p:spPr>
+        <p:txBody>
+          <a:bodyPr/>
+          <a:lstStyle/>
+          <a:p>
+            <a:endParaRPr lang="en-US"/>
+          </a:p>
+        </p:txBody>
       </p:sp>
       <p:sp>
         <p:nvSpPr>
@@ -9286,6 +9478,13 @@
             <a:tailEnd type="triangle"/>
           </a:ln>
         </p:spPr>
+        <p:txBody>
+          <a:bodyPr/>
+          <a:lstStyle/>
+          <a:p>
+            <a:endParaRPr lang="en-US"/>
+          </a:p>
+        </p:txBody>
       </p:sp>
       <p:sp>
         <p:nvSpPr>
@@ -9310,6 +9509,13 @@
             <a:tailEnd type="triangle"/>
           </a:ln>
         </p:spPr>
+        <p:txBody>
+          <a:bodyPr/>
+          <a:lstStyle/>
+          <a:p>
+            <a:endParaRPr lang="en-US"/>
+          </a:p>
+        </p:txBody>
       </p:sp>
       <p:sp>
         <p:nvSpPr>
@@ -9335,24 +9541,31 @@
             <a:prstDash val="solid"/>
           </a:ln>
           <a:effectLst>
-            <a:outerShdw sx="100000" sy="100000" kx="0" ky="0" algn="bl" rotWithShape="0" blurRad="127000" dist="25400" dir="5400000">
+            <a:outerShdw blurRad="127000" dist="25400" dir="5400000" algn="bl" rotWithShape="0">
               <a:srgbClr val="000000">
                 <a:alpha val="8000"/>
               </a:srgbClr>
             </a:outerShdw>
           </a:effectLst>
         </p:spPr>
+        <p:txBody>
+          <a:bodyPr/>
+          <a:lstStyle/>
+          <a:p>
+            <a:endParaRPr lang="en-US"/>
+          </a:p>
+        </p:txBody>
       </p:sp>
       <p:pic>
         <p:nvPicPr>
-          <p:cNvPr id="9" name="Image 0" descr="preencoded.png">    </p:cNvPr>
+          <p:cNvPr id="9" name="Image 0" descr="preencoded.png"/>
           <p:cNvPicPr>
             <a:picLocks noChangeAspect="1"/>
           </p:cNvPicPr>
           <p:nvPr/>
         </p:nvPicPr>
         <p:blipFill>
-          <a:blip r:embed="rId1"/>
+          <a:blip r:embed="rId3"/>
           <a:stretch>
             <a:fillRect/>
           </a:stretch>
@@ -9388,11 +9601,11 @@
           <a:bodyPr wrap="square" lIns="0" tIns="0" rIns="0" bIns="0" rtlCol="0" anchor="ctr"/>
           <a:lstStyle/>
           <a:p>
-            <a:pPr algn="ctr" indent="0" marL="0">
-              <a:buNone/>
-            </a:pPr>
-            <a:r>
-              <a:rPr lang="en-US" sz="1000" b="1" spc="200" kern="0" dirty="0">
+            <a:pPr marL="0" indent="0" algn="ctr">
+              <a:buNone/>
+            </a:pPr>
+            <a:r>
+              <a:rPr lang="en-US" sz="1000" b="1" kern="0" spc="200" dirty="0">
                 <a:solidFill>
                   <a:srgbClr val="CC785C"/>
                 </a:solidFill>
@@ -9427,7 +9640,7 @@
           <a:bodyPr wrap="square" lIns="0" tIns="0" rIns="0" bIns="0" rtlCol="0" anchor="ctr"/>
           <a:lstStyle/>
           <a:p>
-            <a:pPr algn="ctr" indent="0" marL="0">
+            <a:pPr marL="0" indent="0" algn="ctr">
               <a:buNone/>
             </a:pPr>
             <a:r>
@@ -9466,7 +9679,7 @@
           <a:bodyPr wrap="square" lIns="0" tIns="0" rIns="0" bIns="0" rtlCol="0" anchor="ctr"/>
           <a:lstStyle/>
           <a:p>
-            <a:pPr algn="ctr" indent="0" marL="0">
+            <a:pPr marL="0" indent="0" algn="ctr">
               <a:buNone/>
             </a:pPr>
             <a:r>
@@ -9508,24 +9721,31 @@
             <a:prstDash val="solid"/>
           </a:ln>
           <a:effectLst>
-            <a:outerShdw sx="100000" sy="100000" kx="0" ky="0" algn="bl" rotWithShape="0" blurRad="127000" dist="25400" dir="5400000">
+            <a:outerShdw blurRad="127000" dist="25400" dir="5400000" algn="bl" rotWithShape="0">
               <a:srgbClr val="000000">
                 <a:alpha val="8000"/>
               </a:srgbClr>
             </a:outerShdw>
           </a:effectLst>
         </p:spPr>
+        <p:txBody>
+          <a:bodyPr/>
+          <a:lstStyle/>
+          <a:p>
+            <a:endParaRPr lang="en-US"/>
+          </a:p>
+        </p:txBody>
       </p:sp>
       <p:pic>
         <p:nvPicPr>
-          <p:cNvPr id="14" name="Image 1" descr="preencoded.png">    </p:cNvPr>
+          <p:cNvPr id="14" name="Image 1" descr="preencoded.png"/>
           <p:cNvPicPr>
             <a:picLocks noChangeAspect="1"/>
           </p:cNvPicPr>
           <p:nvPr/>
         </p:nvPicPr>
         <p:blipFill>
-          <a:blip r:embed="rId2"/>
+          <a:blip r:embed="rId4"/>
           <a:stretch>
             <a:fillRect/>
           </a:stretch>
@@ -9561,11 +9781,11 @@
           <a:bodyPr wrap="square" lIns="0" tIns="0" rIns="0" bIns="0" rtlCol="0" anchor="ctr"/>
           <a:lstStyle/>
           <a:p>
-            <a:pPr algn="ctr" indent="0" marL="0">
-              <a:buNone/>
-            </a:pPr>
-            <a:r>
-              <a:rPr lang="en-US" sz="1000" b="1" spc="200" kern="0" dirty="0">
+            <a:pPr marL="0" indent="0" algn="ctr">
+              <a:buNone/>
+            </a:pPr>
+            <a:r>
+              <a:rPr lang="en-US" sz="1000" b="1" kern="0" spc="200" dirty="0">
                 <a:solidFill>
                   <a:srgbClr val="CC785C"/>
                 </a:solidFill>
@@ -9600,7 +9820,7 @@
           <a:bodyPr wrap="square" lIns="0" tIns="0" rIns="0" bIns="0" rtlCol="0" anchor="ctr"/>
           <a:lstStyle/>
           <a:p>
-            <a:pPr algn="ctr" indent="0" marL="0">
+            <a:pPr marL="0" indent="0" algn="ctr">
               <a:buNone/>
             </a:pPr>
             <a:r>
@@ -9639,7 +9859,7 @@
           <a:bodyPr wrap="square" lIns="0" tIns="0" rIns="0" bIns="0" rtlCol="0" anchor="ctr"/>
           <a:lstStyle/>
           <a:p>
-            <a:pPr algn="ctr" indent="0" marL="0">
+            <a:pPr marL="0" indent="0" algn="ctr">
               <a:buNone/>
             </a:pPr>
             <a:r>
@@ -9681,24 +9901,31 @@
             <a:prstDash val="solid"/>
           </a:ln>
           <a:effectLst>
-            <a:outerShdw sx="100000" sy="100000" kx="0" ky="0" algn="bl" rotWithShape="0" blurRad="127000" dist="25400" dir="5400000">
+            <a:outerShdw blurRad="127000" dist="25400" dir="5400000" algn="bl" rotWithShape="0">
               <a:srgbClr val="000000">
                 <a:alpha val="8000"/>
               </a:srgbClr>
             </a:outerShdw>
           </a:effectLst>
         </p:spPr>
+        <p:txBody>
+          <a:bodyPr/>
+          <a:lstStyle/>
+          <a:p>
+            <a:endParaRPr lang="en-US"/>
+          </a:p>
+        </p:txBody>
       </p:sp>
       <p:pic>
         <p:nvPicPr>
-          <p:cNvPr id="19" name="Image 2" descr="preencoded.png">    </p:cNvPr>
+          <p:cNvPr id="19" name="Image 2" descr="preencoded.png"/>
           <p:cNvPicPr>
             <a:picLocks noChangeAspect="1"/>
           </p:cNvPicPr>
           <p:nvPr/>
         </p:nvPicPr>
         <p:blipFill>
-          <a:blip r:embed="rId3"/>
+          <a:blip r:embed="rId5"/>
           <a:stretch>
             <a:fillRect/>
           </a:stretch>
@@ -9734,11 +9961,11 @@
           <a:bodyPr wrap="square" lIns="0" tIns="0" rIns="0" bIns="0" rtlCol="0" anchor="ctr"/>
           <a:lstStyle/>
           <a:p>
-            <a:pPr algn="ctr" indent="0" marL="0">
-              <a:buNone/>
-            </a:pPr>
-            <a:r>
-              <a:rPr lang="en-US" sz="1000" b="1" spc="200" kern="0" dirty="0">
+            <a:pPr marL="0" indent="0" algn="ctr">
+              <a:buNone/>
+            </a:pPr>
+            <a:r>
+              <a:rPr lang="en-US" sz="1000" b="1" kern="0" spc="200" dirty="0">
                 <a:solidFill>
                   <a:srgbClr val="CC785C"/>
                 </a:solidFill>
@@ -9773,7 +10000,7 @@
           <a:bodyPr wrap="square" lIns="0" tIns="0" rIns="0" bIns="0" rtlCol="0" anchor="ctr"/>
           <a:lstStyle/>
           <a:p>
-            <a:pPr algn="ctr" indent="0" marL="0">
+            <a:pPr marL="0" indent="0" algn="ctr">
               <a:buNone/>
             </a:pPr>
             <a:r>
@@ -9812,7 +10039,7 @@
           <a:bodyPr wrap="square" lIns="0" tIns="0" rIns="0" bIns="0" rtlCol="0" anchor="ctr"/>
           <a:lstStyle/>
           <a:p>
-            <a:pPr algn="ctr" indent="0" marL="0">
+            <a:pPr marL="0" indent="0" algn="ctr">
               <a:buNone/>
             </a:pPr>
             <a:r>
@@ -9854,24 +10081,31 @@
             <a:prstDash val="solid"/>
           </a:ln>
           <a:effectLst>
-            <a:outerShdw sx="100000" sy="100000" kx="0" ky="0" algn="bl" rotWithShape="0" blurRad="127000" dist="25400" dir="5400000">
+            <a:outerShdw blurRad="127000" dist="25400" dir="5400000" algn="bl" rotWithShape="0">
               <a:srgbClr val="000000">
                 <a:alpha val="8000"/>
               </a:srgbClr>
             </a:outerShdw>
           </a:effectLst>
         </p:spPr>
+        <p:txBody>
+          <a:bodyPr/>
+          <a:lstStyle/>
+          <a:p>
+            <a:endParaRPr lang="en-US"/>
+          </a:p>
+        </p:txBody>
       </p:sp>
       <p:pic>
         <p:nvPicPr>
-          <p:cNvPr id="24" name="Image 3" descr="preencoded.png">    </p:cNvPr>
+          <p:cNvPr id="24" name="Image 3" descr="preencoded.png"/>
           <p:cNvPicPr>
             <a:picLocks noChangeAspect="1"/>
           </p:cNvPicPr>
           <p:nvPr/>
         </p:nvPicPr>
         <p:blipFill>
-          <a:blip r:embed="rId4"/>
+          <a:blip r:embed="rId6"/>
           <a:stretch>
             <a:fillRect/>
           </a:stretch>
@@ -9907,11 +10141,11 @@
           <a:bodyPr wrap="square" lIns="0" tIns="0" rIns="0" bIns="0" rtlCol="0" anchor="ctr"/>
           <a:lstStyle/>
           <a:p>
-            <a:pPr algn="ctr" indent="0" marL="0">
-              <a:buNone/>
-            </a:pPr>
-            <a:r>
-              <a:rPr lang="en-US" sz="1000" b="1" spc="200" kern="0" dirty="0">
+            <a:pPr marL="0" indent="0" algn="ctr">
+              <a:buNone/>
+            </a:pPr>
+            <a:r>
+              <a:rPr lang="en-US" sz="1000" b="1" kern="0" spc="200" dirty="0">
                 <a:solidFill>
                   <a:srgbClr val="CC785C"/>
                 </a:solidFill>
@@ -9946,7 +10180,7 @@
           <a:bodyPr wrap="square" lIns="0" tIns="0" rIns="0" bIns="0" rtlCol="0" anchor="ctr"/>
           <a:lstStyle/>
           <a:p>
-            <a:pPr algn="ctr" indent="0" marL="0">
+            <a:pPr marL="0" indent="0" algn="ctr">
               <a:buNone/>
             </a:pPr>
             <a:r>
@@ -9985,7 +10219,7 @@
           <a:bodyPr wrap="square" lIns="0" tIns="0" rIns="0" bIns="0" rtlCol="0" anchor="ctr"/>
           <a:lstStyle/>
           <a:p>
-            <a:pPr algn="ctr" indent="0" marL="0">
+            <a:pPr marL="0" indent="0" algn="ctr">
               <a:buNone/>
             </a:pPr>
             <a:r>
@@ -10024,7 +10258,7 @@
           <a:bodyPr wrap="square" lIns="0" tIns="0" rIns="0" bIns="0" rtlCol="0" anchor="ctr"/>
           <a:lstStyle/>
           <a:p>
-            <a:pPr algn="ctr" indent="0" marL="0">
+            <a:pPr marL="0" indent="0" algn="ctr">
               <a:buNone/>
             </a:pPr>
             <a:r>
@@ -10063,7 +10297,7 @@
           <a:bodyPr wrap="square" lIns="0" tIns="0" rIns="0" bIns="0" rtlCol="0" anchor="ctr"/>
           <a:lstStyle/>
           <a:p>
-            <a:pPr algn="r" indent="0" marL="0">
+            <a:pPr marL="0" indent="0" algn="r">
               <a:buNone/>
             </a:pPr>
             <a:r>
@@ -10097,6 +10331,7 @@
         <a:solidFill>
           <a:srgbClr val="F7F5F0"/>
         </a:solidFill>
+        <a:effectLst/>
       </p:bgPr>
     </p:bg>
     <p:spTree>
@@ -10134,11 +10369,11 @@
           <a:bodyPr wrap="square" lIns="0" tIns="0" rIns="0" bIns="0" rtlCol="0" anchor="ctr"/>
           <a:lstStyle/>
           <a:p>
-            <a:pPr indent="0" marL="0">
-              <a:buNone/>
-            </a:pPr>
-            <a:r>
-              <a:rPr lang="en-US" sz="1000" b="1" spc="400" kern="0" dirty="0">
+            <a:pPr marL="0" indent="0">
+              <a:buNone/>
+            </a:pPr>
+            <a:r>
+              <a:rPr lang="en-US" sz="1000" b="1" kern="0" spc="400" dirty="0">
                 <a:solidFill>
                   <a:srgbClr val="CC785C"/>
                 </a:solidFill>
@@ -10173,7 +10408,7 @@
           <a:bodyPr wrap="square" lIns="0" tIns="0" rIns="0" bIns="0" rtlCol="0" anchor="ctr"/>
           <a:lstStyle/>
           <a:p>
-            <a:pPr indent="0" marL="0">
+            <a:pPr marL="0" indent="0">
               <a:buNone/>
             </a:pPr>
             <a:r>
@@ -10212,7 +10447,7 @@
           <a:bodyPr wrap="square" lIns="0" tIns="0" rIns="0" bIns="0" rtlCol="0" anchor="ctr"/>
           <a:lstStyle/>
           <a:p>
-            <a:pPr indent="0" marL="0">
+            <a:pPr marL="0" indent="0">
               <a:buNone/>
             </a:pPr>
             <a:r>
@@ -10254,13 +10489,20 @@
             <a:prstDash val="solid"/>
           </a:ln>
           <a:effectLst>
-            <a:outerShdw sx="100000" sy="100000" kx="0" ky="0" algn="bl" rotWithShape="0" blurRad="127000" dist="25400" dir="5400000">
+            <a:outerShdw blurRad="127000" dist="25400" dir="5400000" algn="bl" rotWithShape="0">
               <a:srgbClr val="000000">
                 <a:alpha val="8000"/>
               </a:srgbClr>
             </a:outerShdw>
           </a:effectLst>
         </p:spPr>
+        <p:txBody>
+          <a:bodyPr/>
+          <a:lstStyle/>
+          <a:p>
+            <a:endParaRPr lang="en-US"/>
+          </a:p>
+        </p:txBody>
       </p:sp>
       <p:sp>
         <p:nvSpPr>
@@ -10286,17 +10528,24 @@
             <a:prstDash val="solid"/>
           </a:ln>
         </p:spPr>
+        <p:txBody>
+          <a:bodyPr/>
+          <a:lstStyle/>
+          <a:p>
+            <a:endParaRPr lang="en-US"/>
+          </a:p>
+        </p:txBody>
       </p:sp>
       <p:pic>
         <p:nvPicPr>
-          <p:cNvPr id="7" name="Image 0" descr="preencoded.png">    </p:cNvPr>
+          <p:cNvPr id="7" name="Image 0" descr="preencoded.png"/>
           <p:cNvPicPr>
             <a:picLocks noChangeAspect="1"/>
           </p:cNvPicPr>
           <p:nvPr/>
         </p:nvPicPr>
         <p:blipFill>
-          <a:blip r:embed="rId1"/>
+          <a:blip r:embed="rId3"/>
           <a:stretch>
             <a:fillRect/>
           </a:stretch>
@@ -10332,7 +10581,7 @@
           <a:bodyPr wrap="square" lIns="0" tIns="0" rIns="0" bIns="0" rtlCol="0" anchor="ctr"/>
           <a:lstStyle/>
           <a:p>
-            <a:pPr indent="0" marL="0">
+            <a:pPr marL="0" indent="0">
               <a:buNone/>
             </a:pPr>
             <a:r>
@@ -10371,11 +10620,11 @@
           <a:bodyPr wrap="square" lIns="0" tIns="0" rIns="0" bIns="0" rtlCol="0" anchor="ctr"/>
           <a:lstStyle/>
           <a:p>
-            <a:pPr indent="0" marL="0">
-              <a:buNone/>
-            </a:pPr>
-            <a:r>
-              <a:rPr lang="en-US" sz="1000" b="1" spc="200" kern="0" dirty="0">
+            <a:pPr marL="0" indent="0">
+              <a:buNone/>
+            </a:pPr>
+            <a:r>
+              <a:rPr lang="en-US" sz="1000" b="1" kern="0" spc="200" dirty="0">
                 <a:solidFill>
                   <a:srgbClr val="CC785C"/>
                 </a:solidFill>
@@ -10410,7 +10659,7 @@
           <a:bodyPr wrap="square" lIns="0" tIns="0" rIns="0" bIns="0" rtlCol="0" anchor="ctr"/>
           <a:lstStyle/>
           <a:p>
-            <a:pPr indent="0" marL="0">
+            <a:pPr marL="0" indent="0">
               <a:buNone/>
             </a:pPr>
             <a:r>
@@ -10436,7 +10685,7 @@
         </p:nvSpPr>
         <p:spPr>
           <a:xfrm>
-            <a:off x="4617720" y="1965960"/>
+            <a:off x="4617720" y="1973580"/>
             <a:ext cx="4023360" cy="1371600"/>
           </a:xfrm>
           <a:prstGeom prst="rect">
@@ -10452,13 +10701,20 @@
             <a:prstDash val="solid"/>
           </a:ln>
           <a:effectLst>
-            <a:outerShdw sx="100000" sy="100000" kx="0" ky="0" algn="bl" rotWithShape="0" blurRad="127000" dist="25400" dir="5400000">
+            <a:outerShdw blurRad="127000" dist="25400" dir="5400000" algn="bl" rotWithShape="0">
               <a:srgbClr val="000000">
                 <a:alpha val="8000"/>
               </a:srgbClr>
             </a:outerShdw>
           </a:effectLst>
         </p:spPr>
+        <p:txBody>
+          <a:bodyPr/>
+          <a:lstStyle/>
+          <a:p>
+            <a:endParaRPr lang="en-US"/>
+          </a:p>
+        </p:txBody>
       </p:sp>
       <p:sp>
         <p:nvSpPr>
@@ -10484,17 +10740,24 @@
             <a:prstDash val="solid"/>
           </a:ln>
         </p:spPr>
+        <p:txBody>
+          <a:bodyPr/>
+          <a:lstStyle/>
+          <a:p>
+            <a:endParaRPr lang="en-US"/>
+          </a:p>
+        </p:txBody>
       </p:sp>
       <p:pic>
         <p:nvPicPr>
-          <p:cNvPr id="13" name="Image 1" descr="preencoded.png">    </p:cNvPr>
+          <p:cNvPr id="13" name="Image 1" descr="preencoded.png"/>
           <p:cNvPicPr>
             <a:picLocks noChangeAspect="1"/>
           </p:cNvPicPr>
           <p:nvPr/>
         </p:nvPicPr>
         <p:blipFill>
-          <a:blip r:embed="rId2"/>
+          <a:blip r:embed="rId4"/>
           <a:stretch>
             <a:fillRect/>
           </a:stretch>
@@ -10530,7 +10793,7 @@
           <a:bodyPr wrap="square" lIns="0" tIns="0" rIns="0" bIns="0" rtlCol="0" anchor="ctr"/>
           <a:lstStyle/>
           <a:p>
-            <a:pPr indent="0" marL="0">
+            <a:pPr marL="0" indent="0">
               <a:buNone/>
             </a:pPr>
             <a:r>
@@ -10569,11 +10832,11 @@
           <a:bodyPr wrap="square" lIns="0" tIns="0" rIns="0" bIns="0" rtlCol="0" anchor="ctr"/>
           <a:lstStyle/>
           <a:p>
-            <a:pPr indent="0" marL="0">
-              <a:buNone/>
-            </a:pPr>
-            <a:r>
-              <a:rPr lang="en-US" sz="1000" b="1" spc="200" kern="0" dirty="0">
+            <a:pPr marL="0" indent="0">
+              <a:buNone/>
+            </a:pPr>
+            <a:r>
+              <a:rPr lang="en-US" sz="1000" b="1" kern="0" spc="200" dirty="0">
                 <a:solidFill>
                   <a:srgbClr val="CC785C"/>
                 </a:solidFill>
@@ -10608,7 +10871,7 @@
           <a:bodyPr wrap="square" lIns="0" tIns="0" rIns="0" bIns="0" rtlCol="0" anchor="ctr"/>
           <a:lstStyle/>
           <a:p>
-            <a:pPr indent="0" marL="0">
+            <a:pPr marL="0" indent="0">
               <a:buNone/>
             </a:pPr>
             <a:r>
@@ -10620,7 +10883,7 @@
                 <a:ea typeface="Calibri" pitchFamily="34" charset="-122"/>
                 <a:cs typeface="Calibri" pitchFamily="34" charset="-120"/>
               </a:rPr>
-              <a:t>Reusable packets of expertise. A folder with a SKILL.md file teaches Claude how to do a specific task. Claude auto-loads them when relevant.</a:t>
+              <a:t>Reusable packages of expertise. A folder with a SKILL.md file teaches Claude how to do a specific task. Claude auto-loads them when relevant.</a:t>
             </a:r>
             <a:endParaRPr lang="en-US" sz="1100" dirty="0"/>
           </a:p>
@@ -10650,13 +10913,20 @@
             <a:prstDash val="solid"/>
           </a:ln>
           <a:effectLst>
-            <a:outerShdw sx="100000" sy="100000" kx="0" ky="0" algn="bl" rotWithShape="0" blurRad="127000" dist="25400" dir="5400000">
+            <a:outerShdw blurRad="127000" dist="25400" dir="5400000" algn="bl" rotWithShape="0">
               <a:srgbClr val="000000">
                 <a:alpha val="8000"/>
               </a:srgbClr>
             </a:outerShdw>
           </a:effectLst>
         </p:spPr>
+        <p:txBody>
+          <a:bodyPr/>
+          <a:lstStyle/>
+          <a:p>
+            <a:endParaRPr lang="en-US"/>
+          </a:p>
+        </p:txBody>
       </p:sp>
       <p:sp>
         <p:nvSpPr>
@@ -10682,17 +10952,24 @@
             <a:prstDash val="solid"/>
           </a:ln>
         </p:spPr>
+        <p:txBody>
+          <a:bodyPr/>
+          <a:lstStyle/>
+          <a:p>
+            <a:endParaRPr lang="en-US"/>
+          </a:p>
+        </p:txBody>
       </p:sp>
       <p:pic>
         <p:nvPicPr>
-          <p:cNvPr id="19" name="Image 2" descr="preencoded.png">    </p:cNvPr>
+          <p:cNvPr id="19" name="Image 2" descr="preencoded.png"/>
           <p:cNvPicPr>
             <a:picLocks noChangeAspect="1"/>
           </p:cNvPicPr>
           <p:nvPr/>
         </p:nvPicPr>
         <p:blipFill>
-          <a:blip r:embed="rId3"/>
+          <a:blip r:embed="rId5"/>
           <a:stretch>
             <a:fillRect/>
           </a:stretch>
@@ -10728,7 +11005,7 @@
           <a:bodyPr wrap="square" lIns="0" tIns="0" rIns="0" bIns="0" rtlCol="0" anchor="ctr"/>
           <a:lstStyle/>
           <a:p>
-            <a:pPr indent="0" marL="0">
+            <a:pPr marL="0" indent="0">
               <a:buNone/>
             </a:pPr>
             <a:r>
@@ -10767,11 +11044,11 @@
           <a:bodyPr wrap="square" lIns="0" tIns="0" rIns="0" bIns="0" rtlCol="0" anchor="ctr"/>
           <a:lstStyle/>
           <a:p>
-            <a:pPr indent="0" marL="0">
-              <a:buNone/>
-            </a:pPr>
-            <a:r>
-              <a:rPr lang="en-US" sz="1000" b="1" spc="200" kern="0" dirty="0">
+            <a:pPr marL="0" indent="0">
+              <a:buNone/>
+            </a:pPr>
+            <a:r>
+              <a:rPr lang="en-US" sz="1000" b="1" kern="0" spc="200" dirty="0">
                 <a:solidFill>
                   <a:srgbClr val="CC785C"/>
                 </a:solidFill>
@@ -10806,7 +11083,7 @@
           <a:bodyPr wrap="square" lIns="0" tIns="0" rIns="0" bIns="0" rtlCol="0" anchor="ctr"/>
           <a:lstStyle/>
           <a:p>
-            <a:pPr indent="0" marL="0">
+            <a:pPr marL="0" indent="0">
               <a:buNone/>
             </a:pPr>
             <a:r>
@@ -10848,13 +11125,20 @@
             <a:prstDash val="solid"/>
           </a:ln>
           <a:effectLst>
-            <a:outerShdw sx="100000" sy="100000" kx="0" ky="0" algn="bl" rotWithShape="0" blurRad="127000" dist="25400" dir="5400000">
+            <a:outerShdw blurRad="127000" dist="25400" dir="5400000" algn="bl" rotWithShape="0">
               <a:srgbClr val="000000">
                 <a:alpha val="8000"/>
               </a:srgbClr>
             </a:outerShdw>
           </a:effectLst>
         </p:spPr>
+        <p:txBody>
+          <a:bodyPr/>
+          <a:lstStyle/>
+          <a:p>
+            <a:endParaRPr lang="en-US"/>
+          </a:p>
+        </p:txBody>
       </p:sp>
       <p:sp>
         <p:nvSpPr>
@@ -10880,17 +11164,24 @@
             <a:prstDash val="solid"/>
           </a:ln>
         </p:spPr>
+        <p:txBody>
+          <a:bodyPr/>
+          <a:lstStyle/>
+          <a:p>
+            <a:endParaRPr lang="en-US"/>
+          </a:p>
+        </p:txBody>
       </p:sp>
       <p:pic>
         <p:nvPicPr>
-          <p:cNvPr id="25" name="Image 3" descr="preencoded.png">    </p:cNvPr>
+          <p:cNvPr id="25" name="Image 3" descr="preencoded.png"/>
           <p:cNvPicPr>
             <a:picLocks noChangeAspect="1"/>
           </p:cNvPicPr>
           <p:nvPr/>
         </p:nvPicPr>
         <p:blipFill>
-          <a:blip r:embed="rId4"/>
+          <a:blip r:embed="rId6"/>
           <a:stretch>
             <a:fillRect/>
           </a:stretch>
@@ -10926,7 +11217,7 @@
           <a:bodyPr wrap="square" lIns="0" tIns="0" rIns="0" bIns="0" rtlCol="0" anchor="ctr"/>
           <a:lstStyle/>
           <a:p>
-            <a:pPr indent="0" marL="0">
+            <a:pPr marL="0" indent="0">
               <a:buNone/>
             </a:pPr>
             <a:r>
@@ -10965,11 +11256,11 @@
           <a:bodyPr wrap="square" lIns="0" tIns="0" rIns="0" bIns="0" rtlCol="0" anchor="ctr"/>
           <a:lstStyle/>
           <a:p>
-            <a:pPr indent="0" marL="0">
-              <a:buNone/>
-            </a:pPr>
-            <a:r>
-              <a:rPr lang="en-US" sz="1000" b="1" spc="200" kern="0" dirty="0">
+            <a:pPr marL="0" indent="0">
+              <a:buNone/>
+            </a:pPr>
+            <a:r>
+              <a:rPr lang="en-US" sz="1000" b="1" kern="0" spc="200" dirty="0">
                 <a:solidFill>
                   <a:srgbClr val="CC785C"/>
                 </a:solidFill>
@@ -11004,7 +11295,7 @@
           <a:bodyPr wrap="square" lIns="0" tIns="0" rIns="0" bIns="0" rtlCol="0" anchor="ctr"/>
           <a:lstStyle/>
           <a:p>
-            <a:pPr indent="0" marL="0">
+            <a:pPr marL="0" indent="0">
               <a:buNone/>
             </a:pPr>
             <a:r>
@@ -11043,7 +11334,7 @@
           <a:bodyPr wrap="square" lIns="0" tIns="0" rIns="0" bIns="0" rtlCol="0" anchor="ctr"/>
           <a:lstStyle/>
           <a:p>
-            <a:pPr algn="r" indent="0" marL="0">
+            <a:pPr marL="0" indent="0" algn="r">
               <a:buNone/>
             </a:pPr>
             <a:r>
@@ -11077,6 +11368,7 @@
         <a:solidFill>
           <a:srgbClr val="F7F5F0"/>
         </a:solidFill>
+        <a:effectLst/>
       </p:bgPr>
     </p:bg>
     <p:spTree>
@@ -11114,11 +11406,11 @@
           <a:bodyPr wrap="square" lIns="0" tIns="0" rIns="0" bIns="0" rtlCol="0" anchor="ctr"/>
           <a:lstStyle/>
           <a:p>
-            <a:pPr indent="0" marL="0">
-              <a:buNone/>
-            </a:pPr>
-            <a:r>
-              <a:rPr lang="en-US" sz="1000" b="1" spc="400" kern="0" dirty="0">
+            <a:pPr marL="0" indent="0">
+              <a:buNone/>
+            </a:pPr>
+            <a:r>
+              <a:rPr lang="en-US" sz="1000" b="1" kern="0" spc="400" dirty="0">
                 <a:solidFill>
                   <a:srgbClr val="CC785C"/>
                 </a:solidFill>
@@ -11153,7 +11445,7 @@
           <a:bodyPr wrap="square" lIns="0" tIns="0" rIns="0" bIns="0" rtlCol="0" anchor="ctr"/>
           <a:lstStyle/>
           <a:p>
-            <a:pPr indent="0" marL="0">
+            <a:pPr marL="0" indent="0">
               <a:buNone/>
             </a:pPr>
             <a:r>
@@ -11192,7 +11484,7 @@
           <a:bodyPr wrap="square" lIns="0" tIns="0" rIns="0" bIns="0" rtlCol="0" anchor="ctr"/>
           <a:lstStyle/>
           <a:p>
-            <a:pPr indent="0" marL="0">
+            <a:pPr marL="0" indent="0">
               <a:buNone/>
             </a:pPr>
             <a:r>
@@ -11234,17 +11526,24 @@
             <a:prstDash val="solid"/>
           </a:ln>
         </p:spPr>
+        <p:txBody>
+          <a:bodyPr/>
+          <a:lstStyle/>
+          <a:p>
+            <a:endParaRPr lang="en-US"/>
+          </a:p>
+        </p:txBody>
       </p:sp>
       <p:pic>
         <p:nvPicPr>
-          <p:cNvPr id="6" name="Image 0" descr="preencoded.png">    </p:cNvPr>
+          <p:cNvPr id="6" name="Image 0" descr="preencoded.png"/>
           <p:cNvPicPr>
             <a:picLocks noChangeAspect="1"/>
           </p:cNvPicPr>
           <p:nvPr/>
         </p:nvPicPr>
         <p:blipFill>
-          <a:blip r:embed="rId1"/>
+          <a:blip r:embed="rId3"/>
           <a:stretch>
             <a:fillRect/>
           </a:stretch>
@@ -11280,7 +11579,7 @@
           <a:bodyPr wrap="square" lIns="0" tIns="0" rIns="0" bIns="0" rtlCol="0" anchor="ctr"/>
           <a:lstStyle/>
           <a:p>
-            <a:pPr indent="0" marL="0">
+            <a:pPr marL="0" indent="0">
               <a:buNone/>
             </a:pPr>
             <a:r>
@@ -11319,11 +11618,11 @@
           <a:bodyPr wrap="square" lIns="0" tIns="0" rIns="0" bIns="0" rtlCol="0" anchor="ctr"/>
           <a:lstStyle/>
           <a:p>
-            <a:pPr indent="0" marL="0">
-              <a:buNone/>
-            </a:pPr>
-            <a:r>
-              <a:rPr lang="en-US" sz="850" b="1" spc="100" kern="0" dirty="0">
+            <a:pPr marL="0" indent="0">
+              <a:buNone/>
+            </a:pPr>
+            <a:r>
+              <a:rPr lang="en-US" sz="850" b="1" kern="0" spc="100" dirty="0">
                 <a:solidFill>
                   <a:srgbClr val="CC785C"/>
                 </a:solidFill>
@@ -11358,7 +11657,7 @@
           <a:bodyPr wrap="square" lIns="0" tIns="0" rIns="0" bIns="0" rtlCol="0" anchor="ctr"/>
           <a:lstStyle/>
           <a:p>
-            <a:pPr indent="0" marL="0">
+            <a:pPr marL="0" indent="0">
               <a:buNone/>
             </a:pPr>
             <a:r>
@@ -11400,17 +11699,24 @@
             <a:prstDash val="solid"/>
           </a:ln>
         </p:spPr>
+        <p:txBody>
+          <a:bodyPr/>
+          <a:lstStyle/>
+          <a:p>
+            <a:endParaRPr lang="en-US"/>
+          </a:p>
+        </p:txBody>
       </p:sp>
       <p:pic>
         <p:nvPicPr>
-          <p:cNvPr id="11" name="Image 1" descr="preencoded.png">    </p:cNvPr>
+          <p:cNvPr id="11" name="Image 1" descr="preencoded.png"/>
           <p:cNvPicPr>
             <a:picLocks noChangeAspect="1"/>
           </p:cNvPicPr>
           <p:nvPr/>
         </p:nvPicPr>
         <p:blipFill>
-          <a:blip r:embed="rId2"/>
+          <a:blip r:embed="rId4"/>
           <a:stretch>
             <a:fillRect/>
           </a:stretch>
@@ -11446,7 +11752,7 @@
           <a:bodyPr wrap="square" lIns="0" tIns="0" rIns="0" bIns="0" rtlCol="0" anchor="ctr"/>
           <a:lstStyle/>
           <a:p>
-            <a:pPr indent="0" marL="0">
+            <a:pPr marL="0" indent="0">
               <a:buNone/>
             </a:pPr>
             <a:r>
@@ -11485,11 +11791,11 @@
           <a:bodyPr wrap="square" lIns="0" tIns="0" rIns="0" bIns="0" rtlCol="0" anchor="ctr"/>
           <a:lstStyle/>
           <a:p>
-            <a:pPr indent="0" marL="0">
-              <a:buNone/>
-            </a:pPr>
-            <a:r>
-              <a:rPr lang="en-US" sz="850" b="1" spc="100" kern="0" dirty="0">
+            <a:pPr marL="0" indent="0">
+              <a:buNone/>
+            </a:pPr>
+            <a:r>
+              <a:rPr lang="en-US" sz="850" b="1" kern="0" spc="100" dirty="0">
                 <a:solidFill>
                   <a:srgbClr val="CC785C"/>
                 </a:solidFill>
@@ -11524,7 +11830,7 @@
           <a:bodyPr wrap="square" lIns="0" tIns="0" rIns="0" bIns="0" rtlCol="0" anchor="ctr"/>
           <a:lstStyle/>
           <a:p>
-            <a:pPr indent="0" marL="0">
+            <a:pPr marL="0" indent="0">
               <a:buNone/>
             </a:pPr>
             <a:r>
@@ -11566,17 +11872,24 @@
             <a:prstDash val="solid"/>
           </a:ln>
         </p:spPr>
+        <p:txBody>
+          <a:bodyPr/>
+          <a:lstStyle/>
+          <a:p>
+            <a:endParaRPr lang="en-US"/>
+          </a:p>
+        </p:txBody>
       </p:sp>
       <p:pic>
         <p:nvPicPr>
-          <p:cNvPr id="16" name="Image 2" descr="preencoded.png">    </p:cNvPr>
+          <p:cNvPr id="16" name="Image 2" descr="preencoded.png"/>
           <p:cNvPicPr>
             <a:picLocks noChangeAspect="1"/>
           </p:cNvPicPr>
           <p:nvPr/>
         </p:nvPicPr>
         <p:blipFill>
-          <a:blip r:embed="rId3"/>
+          <a:blip r:embed="rId5"/>
           <a:stretch>
             <a:fillRect/>
           </a:stretch>
@@ -11612,7 +11925,7 @@
           <a:bodyPr wrap="square" lIns="0" tIns="0" rIns="0" bIns="0" rtlCol="0" anchor="ctr"/>
           <a:lstStyle/>
           <a:p>
-            <a:pPr indent="0" marL="0">
+            <a:pPr marL="0" indent="0">
               <a:buNone/>
             </a:pPr>
             <a:r>
@@ -11651,11 +11964,11 @@
           <a:bodyPr wrap="square" lIns="0" tIns="0" rIns="0" bIns="0" rtlCol="0" anchor="ctr"/>
           <a:lstStyle/>
           <a:p>
-            <a:pPr indent="0" marL="0">
-              <a:buNone/>
-            </a:pPr>
-            <a:r>
-              <a:rPr lang="en-US" sz="850" b="1" spc="100" kern="0" dirty="0">
+            <a:pPr marL="0" indent="0">
+              <a:buNone/>
+            </a:pPr>
+            <a:r>
+              <a:rPr lang="en-US" sz="850" b="1" kern="0" spc="100" dirty="0">
                 <a:solidFill>
                   <a:srgbClr val="CC785C"/>
                 </a:solidFill>
@@ -11690,7 +12003,7 @@
           <a:bodyPr wrap="square" lIns="0" tIns="0" rIns="0" bIns="0" rtlCol="0" anchor="ctr"/>
           <a:lstStyle/>
           <a:p>
-            <a:pPr indent="0" marL="0">
+            <a:pPr marL="0" indent="0">
               <a:buNone/>
             </a:pPr>
             <a:r>
@@ -11732,17 +12045,24 @@
             <a:prstDash val="solid"/>
           </a:ln>
         </p:spPr>
+        <p:txBody>
+          <a:bodyPr/>
+          <a:lstStyle/>
+          <a:p>
+            <a:endParaRPr lang="en-US"/>
+          </a:p>
+        </p:txBody>
       </p:sp>
       <p:pic>
         <p:nvPicPr>
-          <p:cNvPr id="21" name="Image 3" descr="preencoded.png">    </p:cNvPr>
+          <p:cNvPr id="21" name="Image 3" descr="preencoded.png"/>
           <p:cNvPicPr>
             <a:picLocks noChangeAspect="1"/>
           </p:cNvPicPr>
           <p:nvPr/>
         </p:nvPicPr>
         <p:blipFill>
-          <a:blip r:embed="rId4"/>
+          <a:blip r:embed="rId6"/>
           <a:stretch>
             <a:fillRect/>
           </a:stretch>
@@ -11778,7 +12098,7 @@
           <a:bodyPr wrap="square" lIns="0" tIns="0" rIns="0" bIns="0" rtlCol="0" anchor="ctr"/>
           <a:lstStyle/>
           <a:p>
-            <a:pPr indent="0" marL="0">
+            <a:pPr marL="0" indent="0">
               <a:buNone/>
             </a:pPr>
             <a:r>
@@ -11817,11 +12137,11 @@
           <a:bodyPr wrap="square" lIns="0" tIns="0" rIns="0" bIns="0" rtlCol="0" anchor="ctr"/>
           <a:lstStyle/>
           <a:p>
-            <a:pPr indent="0" marL="0">
-              <a:buNone/>
-            </a:pPr>
-            <a:r>
-              <a:rPr lang="en-US" sz="850" b="1" spc="100" kern="0" dirty="0">
+            <a:pPr marL="0" indent="0">
+              <a:buNone/>
+            </a:pPr>
+            <a:r>
+              <a:rPr lang="en-US" sz="850" b="1" kern="0" spc="100" dirty="0">
                 <a:solidFill>
                   <a:srgbClr val="CC785C"/>
                 </a:solidFill>
@@ -11856,7 +12176,7 @@
           <a:bodyPr wrap="square" lIns="0" tIns="0" rIns="0" bIns="0" rtlCol="0" anchor="ctr"/>
           <a:lstStyle/>
           <a:p>
-            <a:pPr indent="0" marL="0">
+            <a:pPr marL="0" indent="0">
               <a:buNone/>
             </a:pPr>
             <a:r>
@@ -11898,13 +12218,20 @@
             <a:prstDash val="solid"/>
           </a:ln>
           <a:effectLst>
-            <a:outerShdw sx="100000" sy="100000" kx="0" ky="0" algn="bl" rotWithShape="0" blurRad="127000" dist="25400" dir="5400000">
+            <a:outerShdw blurRad="127000" dist="25400" dir="5400000" algn="bl" rotWithShape="0">
               <a:srgbClr val="000000">
                 <a:alpha val="8000"/>
               </a:srgbClr>
             </a:outerShdw>
           </a:effectLst>
         </p:spPr>
+        <p:txBody>
+          <a:bodyPr/>
+          <a:lstStyle/>
+          <a:p>
+            <a:endParaRPr lang="en-US"/>
+          </a:p>
+        </p:txBody>
       </p:sp>
       <p:sp>
         <p:nvSpPr>
@@ -11930,6 +12257,13 @@
             <a:prstDash val="solid"/>
           </a:ln>
         </p:spPr>
+        <p:txBody>
+          <a:bodyPr/>
+          <a:lstStyle/>
+          <a:p>
+            <a:endParaRPr lang="en-US"/>
+          </a:p>
+        </p:txBody>
       </p:sp>
       <p:sp>
         <p:nvSpPr>
@@ -11952,7 +12286,7 @@
           <a:bodyPr wrap="square" lIns="0" tIns="0" rIns="0" bIns="0" rtlCol="0" anchor="ctr"/>
           <a:lstStyle/>
           <a:p>
-            <a:pPr indent="0" marL="0">
+            <a:pPr marL="0" indent="0">
               <a:buNone/>
             </a:pPr>
             <a:r>
@@ -11991,7 +12325,7 @@
           <a:bodyPr wrap="square" lIns="0" tIns="0" rIns="0" bIns="0" rtlCol="0" anchor="t"/>
           <a:lstStyle/>
           <a:p>
-            <a:pPr indent="0" marL="0">
+            <a:pPr marL="0" indent="0">
               <a:spcAft>
                 <a:spcPts val="100"/>
               </a:spcAft>
@@ -12011,7 +12345,7 @@
             <a:endParaRPr lang="en-US" sz="950" dirty="0"/>
           </a:p>
           <a:p>
-            <a:pPr indent="0" marL="0">
+            <a:pPr marL="0" indent="0">
               <a:spcAft>
                 <a:spcPts val="100"/>
               </a:spcAft>
@@ -12028,7 +12362,21 @@
               </a:rPr>
               <a:t>├── CLAUDE.md</a:t>
             </a:r>
-            <a:pPr indent="0" marL="0">
+            <a:r>
+              <a:rPr lang="en-US" sz="950" dirty="0">
+                <a:solidFill>
+                  <a:srgbClr val="A9A69E"/>
+                </a:solidFill>
+                <a:latin typeface="Consolas" pitchFamily="34" charset="0"/>
+                <a:ea typeface="Consolas" pitchFamily="34" charset="-122"/>
+                <a:cs typeface="Consolas" pitchFamily="34" charset="-120"/>
+              </a:rPr>
+              <a:t>           main memory</a:t>
+            </a:r>
+            <a:endParaRPr lang="en-US" sz="950" dirty="0"/>
+          </a:p>
+          <a:p>
+            <a:pPr marL="0" indent="0">
               <a:spcAft>
                 <a:spcPts val="100"/>
               </a:spcAft>
@@ -12037,18 +12385,29 @@
             <a:r>
               <a:rPr lang="en-US" sz="950" dirty="0">
                 <a:solidFill>
-                  <a:srgbClr val="A9A69E"/>
+                  <a:srgbClr val="F7F5F0"/>
                 </a:solidFill>
                 <a:latin typeface="Consolas" pitchFamily="34" charset="0"/>
                 <a:ea typeface="Consolas" pitchFamily="34" charset="-122"/>
                 <a:cs typeface="Consolas" pitchFamily="34" charset="-120"/>
               </a:rPr>
-              <a:t>           main memory</a:t>
+              <a:t>├── CLAUDE.local.md</a:t>
+            </a:r>
+            <a:r>
+              <a:rPr lang="en-US" sz="950" dirty="0">
+                <a:solidFill>
+                  <a:srgbClr val="A9A69E"/>
+                </a:solidFill>
+                <a:latin typeface="Consolas" pitchFamily="34" charset="0"/>
+                <a:ea typeface="Consolas" pitchFamily="34" charset="-122"/>
+                <a:cs typeface="Consolas" pitchFamily="34" charset="-120"/>
+              </a:rPr>
+              <a:t>     personal</a:t>
             </a:r>
             <a:endParaRPr lang="en-US" sz="950" dirty="0"/>
           </a:p>
           <a:p>
-            <a:pPr indent="0" marL="0">
+            <a:pPr marL="0" indent="0">
               <a:spcAft>
                 <a:spcPts val="100"/>
               </a:spcAft>
@@ -12063,9 +12422,23 @@
                 <a:ea typeface="Consolas" pitchFamily="34" charset="-122"/>
                 <a:cs typeface="Consolas" pitchFamily="34" charset="-120"/>
               </a:rPr>
-              <a:t>├── CLAUDE.local.md</a:t>
-            </a:r>
-            <a:pPr indent="0" marL="0">
+              <a:t>├── AGENTS.md</a:t>
+            </a:r>
+            <a:r>
+              <a:rPr lang="en-US" sz="950" dirty="0">
+                <a:solidFill>
+                  <a:srgbClr val="A9A69E"/>
+                </a:solidFill>
+                <a:latin typeface="Consolas" pitchFamily="34" charset="0"/>
+                <a:ea typeface="Consolas" pitchFamily="34" charset="-122"/>
+                <a:cs typeface="Consolas" pitchFamily="34" charset="-120"/>
+              </a:rPr>
+              <a:t>           not read (import it)</a:t>
+            </a:r>
+            <a:endParaRPr lang="en-US" sz="950" dirty="0"/>
+          </a:p>
+          <a:p>
+            <a:pPr marL="0" indent="0">
               <a:spcAft>
                 <a:spcPts val="100"/>
               </a:spcAft>
@@ -12074,18 +12447,18 @@
             <a:r>
               <a:rPr lang="en-US" sz="950" dirty="0">
                 <a:solidFill>
-                  <a:srgbClr val="A9A69E"/>
+                  <a:srgbClr val="F7F5F0"/>
                 </a:solidFill>
                 <a:latin typeface="Consolas" pitchFamily="34" charset="0"/>
                 <a:ea typeface="Consolas" pitchFamily="34" charset="-122"/>
                 <a:cs typeface="Consolas" pitchFamily="34" charset="-120"/>
               </a:rPr>
-              <a:t>     personal</a:t>
+              <a:t>└── .claude/</a:t>
             </a:r>
             <a:endParaRPr lang="en-US" sz="950" dirty="0"/>
           </a:p>
           <a:p>
-            <a:pPr indent="0" marL="0">
+            <a:pPr marL="0" indent="0">
               <a:spcAft>
                 <a:spcPts val="100"/>
               </a:spcAft>
@@ -12100,9 +12473,23 @@
                 <a:ea typeface="Consolas" pitchFamily="34" charset="-122"/>
                 <a:cs typeface="Consolas" pitchFamily="34" charset="-120"/>
               </a:rPr>
-              <a:t>├── AGENTS.md</a:t>
-            </a:r>
-            <a:pPr indent="0" marL="0">
+              <a:t>    ├── skills/</a:t>
+            </a:r>
+            <a:r>
+              <a:rPr lang="en-US" sz="950" dirty="0">
+                <a:solidFill>
+                  <a:srgbClr val="A9A69E"/>
+                </a:solidFill>
+                <a:latin typeface="Consolas" pitchFamily="34" charset="0"/>
+                <a:ea typeface="Consolas" pitchFamily="34" charset="-122"/>
+                <a:cs typeface="Consolas" pitchFamily="34" charset="-120"/>
+              </a:rPr>
+              <a:t>       custom skills</a:t>
+            </a:r>
+            <a:endParaRPr lang="en-US" sz="950" dirty="0"/>
+          </a:p>
+          <a:p>
+            <a:pPr marL="0" indent="0">
               <a:spcAft>
                 <a:spcPts val="100"/>
               </a:spcAft>
@@ -12111,18 +12498,29 @@
             <a:r>
               <a:rPr lang="en-US" sz="950" dirty="0">
                 <a:solidFill>
-                  <a:srgbClr val="A9A69E"/>
+                  <a:srgbClr val="F7F5F0"/>
                 </a:solidFill>
                 <a:latin typeface="Consolas" pitchFamily="34" charset="0"/>
                 <a:ea typeface="Consolas" pitchFamily="34" charset="-122"/>
                 <a:cs typeface="Consolas" pitchFamily="34" charset="-120"/>
               </a:rPr>
-              <a:t>           not read (import it)</a:t>
+              <a:t>    ├── agents/</a:t>
+            </a:r>
+            <a:r>
+              <a:rPr lang="en-US" sz="950" dirty="0">
+                <a:solidFill>
+                  <a:srgbClr val="A9A69E"/>
+                </a:solidFill>
+                <a:latin typeface="Consolas" pitchFamily="34" charset="0"/>
+                <a:ea typeface="Consolas" pitchFamily="34" charset="-122"/>
+                <a:cs typeface="Consolas" pitchFamily="34" charset="-120"/>
+              </a:rPr>
+              <a:t>       subagents</a:t>
             </a:r>
             <a:endParaRPr lang="en-US" sz="950" dirty="0"/>
           </a:p>
           <a:p>
-            <a:pPr indent="0" marL="0">
+            <a:pPr marL="0" indent="0">
               <a:spcAft>
                 <a:spcPts val="100"/>
               </a:spcAft>
@@ -12137,12 +12535,23 @@
                 <a:ea typeface="Consolas" pitchFamily="34" charset="-122"/>
                 <a:cs typeface="Consolas" pitchFamily="34" charset="-120"/>
               </a:rPr>
-              <a:t>└── .claude/</a:t>
+              <a:t>    ├── rules/</a:t>
+            </a:r>
+            <a:r>
+              <a:rPr lang="en-US" sz="950" dirty="0">
+                <a:solidFill>
+                  <a:srgbClr val="A9A69E"/>
+                </a:solidFill>
+                <a:latin typeface="Consolas" pitchFamily="34" charset="0"/>
+                <a:ea typeface="Consolas" pitchFamily="34" charset="-122"/>
+                <a:cs typeface="Consolas" pitchFamily="34" charset="-120"/>
+              </a:rPr>
+              <a:t>        path-scoped</a:t>
             </a:r>
             <a:endParaRPr lang="en-US" sz="950" dirty="0"/>
           </a:p>
           <a:p>
-            <a:pPr indent="0" marL="0">
+            <a:pPr marL="0" indent="0">
               <a:spcAft>
                 <a:spcPts val="100"/>
               </a:spcAft>
@@ -12157,180 +12566,57 @@
                 <a:ea typeface="Consolas" pitchFamily="34" charset="-122"/>
                 <a:cs typeface="Consolas" pitchFamily="34" charset="-120"/>
               </a:rPr>
-              <a:t>    ├── skills/</a:t>
-            </a:r>
-            <a:pPr indent="0" marL="0">
+              <a:t>    └── settings.json</a:t>
+            </a:r>
+            <a:r>
+              <a:rPr lang="en-US" sz="950" dirty="0">
+                <a:solidFill>
+                  <a:srgbClr val="A9A69E"/>
+                </a:solidFill>
+                <a:latin typeface="Consolas" pitchFamily="34" charset="0"/>
+                <a:ea typeface="Consolas" pitchFamily="34" charset="-122"/>
+                <a:cs typeface="Consolas" pitchFamily="34" charset="-120"/>
+              </a:rPr>
+              <a:t>  perms, hooks</a:t>
+            </a:r>
+            <a:endParaRPr lang="en-US" sz="950" dirty="0"/>
+          </a:p>
+          <a:p>
+            <a:pPr marL="0" indent="0">
               <a:spcAft>
                 <a:spcPts val="100"/>
               </a:spcAft>
               <a:buNone/>
             </a:pPr>
-            <a:r>
-              <a:rPr lang="en-US" sz="950" dirty="0">
-                <a:solidFill>
-                  <a:srgbClr val="A9A69E"/>
+            <a:endParaRPr lang="en-US" sz="950" dirty="0"/>
+          </a:p>
+          <a:p>
+            <a:pPr marL="0" indent="0">
+              <a:spcAft>
+                <a:spcPts val="100"/>
+              </a:spcAft>
+              <a:buNone/>
+            </a:pPr>
+            <a:r>
+              <a:rPr lang="en-US" sz="950" b="1" dirty="0">
+                <a:solidFill>
+                  <a:srgbClr val="CC785C"/>
                 </a:solidFill>
                 <a:latin typeface="Consolas" pitchFamily="34" charset="0"/>
                 <a:ea typeface="Consolas" pitchFamily="34" charset="-122"/>
                 <a:cs typeface="Consolas" pitchFamily="34" charset="-120"/>
               </a:rPr>
-              <a:t>       custom skills</a:t>
-            </a:r>
-            <a:endParaRPr lang="en-US" sz="950" dirty="0"/>
-          </a:p>
-          <a:p>
-            <a:pPr indent="0" marL="0">
-              <a:spcAft>
-                <a:spcPts val="100"/>
-              </a:spcAft>
-              <a:buNone/>
-            </a:pPr>
+              <a:t>~/.claude/CLAUDE.md</a:t>
+            </a:r>
             <a:r>
               <a:rPr lang="en-US" sz="950" dirty="0">
                 <a:solidFill>
-                  <a:srgbClr val="F7F5F0"/>
+                  <a:srgbClr val="A9A69E"/>
                 </a:solidFill>
                 <a:latin typeface="Consolas" pitchFamily="34" charset="0"/>
                 <a:ea typeface="Consolas" pitchFamily="34" charset="-122"/>
                 <a:cs typeface="Consolas" pitchFamily="34" charset="-120"/>
               </a:rPr>
-              <a:t>    ├── agents/</a:t>
-            </a:r>
-            <a:pPr indent="0" marL="0">
-              <a:spcAft>
-                <a:spcPts val="100"/>
-              </a:spcAft>
-              <a:buNone/>
-            </a:pPr>
-            <a:r>
-              <a:rPr lang="en-US" sz="950" dirty="0">
-                <a:solidFill>
-                  <a:srgbClr val="A9A69E"/>
-                </a:solidFill>
-                <a:latin typeface="Consolas" pitchFamily="34" charset="0"/>
-                <a:ea typeface="Consolas" pitchFamily="34" charset="-122"/>
-                <a:cs typeface="Consolas" pitchFamily="34" charset="-120"/>
-              </a:rPr>
-              <a:t>       subagents</a:t>
-            </a:r>
-            <a:endParaRPr lang="en-US" sz="950" dirty="0"/>
-          </a:p>
-          <a:p>
-            <a:pPr indent="0" marL="0">
-              <a:spcAft>
-                <a:spcPts val="100"/>
-              </a:spcAft>
-              <a:buNone/>
-            </a:pPr>
-            <a:r>
-              <a:rPr lang="en-US" sz="950" dirty="0">
-                <a:solidFill>
-                  <a:srgbClr val="F7F5F0"/>
-                </a:solidFill>
-                <a:latin typeface="Consolas" pitchFamily="34" charset="0"/>
-                <a:ea typeface="Consolas" pitchFamily="34" charset="-122"/>
-                <a:cs typeface="Consolas" pitchFamily="34" charset="-120"/>
-              </a:rPr>
-              <a:t>    ├── rules/</a:t>
-            </a:r>
-            <a:pPr indent="0" marL="0">
-              <a:spcAft>
-                <a:spcPts val="100"/>
-              </a:spcAft>
-              <a:buNone/>
-            </a:pPr>
-            <a:r>
-              <a:rPr lang="en-US" sz="950" dirty="0">
-                <a:solidFill>
-                  <a:srgbClr val="A9A69E"/>
-                </a:solidFill>
-                <a:latin typeface="Consolas" pitchFamily="34" charset="0"/>
-                <a:ea typeface="Consolas" pitchFamily="34" charset="-122"/>
-                <a:cs typeface="Consolas" pitchFamily="34" charset="-120"/>
-              </a:rPr>
-              <a:t>        path-scoped</a:t>
-            </a:r>
-            <a:endParaRPr lang="en-US" sz="950" dirty="0"/>
-          </a:p>
-          <a:p>
-            <a:pPr indent="0" marL="0">
-              <a:spcAft>
-                <a:spcPts val="100"/>
-              </a:spcAft>
-              <a:buNone/>
-            </a:pPr>
-            <a:r>
-              <a:rPr lang="en-US" sz="950" dirty="0">
-                <a:solidFill>
-                  <a:srgbClr val="F7F5F0"/>
-                </a:solidFill>
-                <a:latin typeface="Consolas" pitchFamily="34" charset="0"/>
-                <a:ea typeface="Consolas" pitchFamily="34" charset="-122"/>
-                <a:cs typeface="Consolas" pitchFamily="34" charset="-120"/>
-              </a:rPr>
-              <a:t>    └── settings.json</a:t>
-            </a:r>
-            <a:pPr indent="0" marL="0">
-              <a:spcAft>
-                <a:spcPts val="100"/>
-              </a:spcAft>
-              <a:buNone/>
-            </a:pPr>
-            <a:r>
-              <a:rPr lang="en-US" sz="950" dirty="0">
-                <a:solidFill>
-                  <a:srgbClr val="A9A69E"/>
-                </a:solidFill>
-                <a:latin typeface="Consolas" pitchFamily="34" charset="0"/>
-                <a:ea typeface="Consolas" pitchFamily="34" charset="-122"/>
-                <a:cs typeface="Consolas" pitchFamily="34" charset="-120"/>
-              </a:rPr>
-              <a:t>  perms, hooks</a:t>
-            </a:r>
-            <a:endParaRPr lang="en-US" sz="950" dirty="0"/>
-          </a:p>
-          <a:p>
-            <a:pPr indent="0" marL="0">
-              <a:spcAft>
-                <a:spcPts val="100"/>
-              </a:spcAft>
-              <a:buNone/>
-            </a:pPr>
-            <a:endParaRPr lang="en-US" sz="950" dirty="0"/>
-          </a:p>
-          <a:p>
-            <a:pPr indent="0" marL="0">
-              <a:spcAft>
-                <a:spcPts val="100"/>
-              </a:spcAft>
-              <a:buNone/>
-            </a:pPr>
-            <a:r>
-              <a:rPr lang="en-US" sz="950" b="1" dirty="0">
-                <a:solidFill>
-                  <a:srgbClr val="CC785C"/>
-                </a:solidFill>
-                <a:latin typeface="Consolas" pitchFamily="34" charset="0"/>
-                <a:ea typeface="Consolas" pitchFamily="34" charset="-122"/>
-                <a:cs typeface="Consolas" pitchFamily="34" charset="-120"/>
-              </a:rPr>
-              <a:t>~/.claude/CLAUDE.md</a:t>
-            </a:r>
-            <a:pPr indent="0" marL="0">
-              <a:spcAft>
-                <a:spcPts val="100"/>
-              </a:spcAft>
-              <a:buNone/>
-            </a:pPr>
-            <a:r>
-              <a:rPr lang="en-US" sz="950" dirty="0">
-                <a:solidFill>
-                  <a:srgbClr val="A9A69E"/>
-                </a:solidFill>
-                <a:latin typeface="Consolas" pitchFamily="34" charset="0"/>
-                <a:ea typeface="Consolas" pitchFamily="34" charset="-122"/>
-                <a:cs typeface="Consolas" pitchFamily="34" charset="-120"/>
-              </a:rPr>
               <a:t>   global</a:t>
             </a:r>
             <a:endParaRPr lang="en-US" sz="950" dirty="0"/>
@@ -12358,7 +12644,7 @@
           <a:bodyPr wrap="square" lIns="0" tIns="0" rIns="0" bIns="0" rtlCol="0" anchor="ctr"/>
           <a:lstStyle/>
           <a:p>
-            <a:pPr indent="0" marL="0">
+            <a:pPr marL="0" indent="0">
               <a:buNone/>
             </a:pPr>
             <a:r>
@@ -12397,7 +12683,7 @@
           <a:bodyPr wrap="square" lIns="0" tIns="0" rIns="0" bIns="0" rtlCol="0" anchor="ctr"/>
           <a:lstStyle/>
           <a:p>
-            <a:pPr algn="r" indent="0" marL="0">
+            <a:pPr marL="0" indent="0" algn="r">
               <a:buNone/>
             </a:pPr>
             <a:r>
@@ -12431,6 +12717,7 @@
         <a:solidFill>
           <a:srgbClr val="F7F5F0"/>
         </a:solidFill>
+        <a:effectLst/>
       </p:bgPr>
     </p:bg>
     <p:spTree>
@@ -12468,11 +12755,11 @@
           <a:bodyPr wrap="square" lIns="0" tIns="0" rIns="0" bIns="0" rtlCol="0" anchor="ctr"/>
           <a:lstStyle/>
           <a:p>
-            <a:pPr indent="0" marL="0">
-              <a:buNone/>
-            </a:pPr>
-            <a:r>
-              <a:rPr lang="en-US" sz="1000" b="1" spc="400" kern="0" dirty="0">
+            <a:pPr marL="0" indent="0">
+              <a:buNone/>
+            </a:pPr>
+            <a:r>
+              <a:rPr lang="en-US" sz="1000" b="1" kern="0" spc="400" dirty="0">
                 <a:solidFill>
                   <a:srgbClr val="CC785C"/>
                 </a:solidFill>
@@ -12507,7 +12794,7 @@
           <a:bodyPr wrap="square" lIns="0" tIns="0" rIns="0" bIns="0" rtlCol="0" anchor="ctr"/>
           <a:lstStyle/>
           <a:p>
-            <a:pPr indent="0" marL="0">
+            <a:pPr marL="0" indent="0">
               <a:buNone/>
             </a:pPr>
             <a:r>
@@ -12546,7 +12833,7 @@
           <a:bodyPr wrap="square" lIns="0" tIns="0" rIns="0" bIns="0" rtlCol="0" anchor="ctr"/>
           <a:lstStyle/>
           <a:p>
-            <a:pPr indent="0" marL="0">
+            <a:pPr marL="0" indent="0">
               <a:buNone/>
             </a:pPr>
             <a:r>
@@ -12585,7 +12872,7 @@
           <a:bodyPr wrap="square" lIns="0" tIns="0" rIns="0" bIns="0" rtlCol="0" anchor="ctr"/>
           <a:lstStyle/>
           <a:p>
-            <a:pPr indent="0" marL="0">
+            <a:pPr marL="0" indent="0">
               <a:buNone/>
             </a:pPr>
             <a:r>
@@ -12605,211 +12892,7 @@
       </p:sp>
       <p:pic>
         <p:nvPicPr>
-          <p:cNvPr id="6" name="Image 0" descr="preencoded.png">    </p:cNvPr>
-          <p:cNvPicPr>
-            <a:picLocks noChangeAspect="1"/>
-          </p:cNvPicPr>
-          <p:nvPr/>
-        </p:nvPicPr>
-        <p:blipFill>
-          <a:blip r:embed="rId1"/>
-          <a:stretch>
-            <a:fillRect/>
-          </a:stretch>
-        </p:blipFill>
-        <p:spPr>
-          <a:xfrm>
-            <a:off x="548640" y="2916936"/>
-            <a:ext cx="219456" cy="219456"/>
-          </a:xfrm>
-          <a:prstGeom prst="rect">
-            <a:avLst/>
-          </a:prstGeom>
-        </p:spPr>
-      </p:pic>
-      <p:sp>
-        <p:nvSpPr>
-          <p:cNvPr id="7" name="Text 4"/>
-          <p:cNvSpPr/>
-          <p:nvPr/>
-        </p:nvSpPr>
-        <p:spPr>
-          <a:xfrm>
-            <a:off x="868680" y="2880360"/>
-            <a:ext cx="1280160" cy="292608"/>
-          </a:xfrm>
-          <a:prstGeom prst="rect">
-            <a:avLst/>
-          </a:prstGeom>
-          <a:noFill/>
-          <a:ln/>
-        </p:spPr>
-        <p:txBody>
-          <a:bodyPr wrap="square" lIns="0" tIns="0" rIns="0" bIns="0" rtlCol="0" anchor="ctr"/>
-          <a:lstStyle/>
-          <a:p>
-            <a:pPr indent="0" marL="0">
-              <a:buNone/>
-            </a:pPr>
-            <a:r>
-              <a:rPr lang="en-US" sz="1200" b="1" dirty="0">
-                <a:solidFill>
-                  <a:srgbClr val="1A1B1F"/>
-                </a:solidFill>
-                <a:latin typeface="Calibri" pitchFamily="34" charset="0"/>
-                <a:ea typeface="Calibri" pitchFamily="34" charset="-122"/>
-                <a:cs typeface="Calibri" pitchFamily="34" charset="-120"/>
-              </a:rPr>
-              <a:t>Google Drive</a:t>
-            </a:r>
-            <a:endParaRPr lang="en-US" sz="1200" dirty="0"/>
-          </a:p>
-        </p:txBody>
-      </p:sp>
-      <p:sp>
-        <p:nvSpPr>
-          <p:cNvPr id="8" name="Text 5"/>
-          <p:cNvSpPr/>
-          <p:nvPr/>
-        </p:nvSpPr>
-        <p:spPr>
-          <a:xfrm>
-            <a:off x="2148840" y="2880360"/>
-            <a:ext cx="2468880" cy="292608"/>
-          </a:xfrm>
-          <a:prstGeom prst="rect">
-            <a:avLst/>
-          </a:prstGeom>
-          <a:noFill/>
-          <a:ln/>
-        </p:spPr>
-        <p:txBody>
-          <a:bodyPr wrap="square" lIns="0" tIns="0" rIns="0" bIns="0" rtlCol="0" anchor="ctr"/>
-          <a:lstStyle/>
-          <a:p>
-            <a:pPr indent="0" marL="0">
-              <a:buNone/>
-            </a:pPr>
-            <a:r>
-              <a:rPr lang="en-US" sz="1100" dirty="0">
-                <a:solidFill>
-                  <a:srgbClr val="6B6A66"/>
-                </a:solidFill>
-                <a:latin typeface="Calibri" pitchFamily="34" charset="0"/>
-                <a:ea typeface="Calibri" pitchFamily="34" charset="-122"/>
-                <a:cs typeface="Calibri" pitchFamily="34" charset="-120"/>
-              </a:rPr>
-              <a:t>Read design docs and notes</a:t>
-            </a:r>
-            <a:endParaRPr lang="en-US" sz="1100" dirty="0"/>
-          </a:p>
-        </p:txBody>
-      </p:sp>
-      <p:pic>
-        <p:nvPicPr>
-          <p:cNvPr id="9" name="Image 1" descr="preencoded.png">    </p:cNvPr>
-          <p:cNvPicPr>
-            <a:picLocks noChangeAspect="1"/>
-          </p:cNvPicPr>
-          <p:nvPr/>
-        </p:nvPicPr>
-        <p:blipFill>
-          <a:blip r:embed="rId2"/>
-          <a:stretch>
-            <a:fillRect/>
-          </a:stretch>
-        </p:blipFill>
-        <p:spPr>
-          <a:xfrm>
-            <a:off x="548640" y="3300984"/>
-            <a:ext cx="219456" cy="219456"/>
-          </a:xfrm>
-          <a:prstGeom prst="rect">
-            <a:avLst/>
-          </a:prstGeom>
-        </p:spPr>
-      </p:pic>
-      <p:sp>
-        <p:nvSpPr>
-          <p:cNvPr id="10" name="Text 6"/>
-          <p:cNvSpPr/>
-          <p:nvPr/>
-        </p:nvSpPr>
-        <p:spPr>
-          <a:xfrm>
-            <a:off x="868680" y="3264408"/>
-            <a:ext cx="1280160" cy="292608"/>
-          </a:xfrm>
-          <a:prstGeom prst="rect">
-            <a:avLst/>
-          </a:prstGeom>
-          <a:noFill/>
-          <a:ln/>
-        </p:spPr>
-        <p:txBody>
-          <a:bodyPr wrap="square" lIns="0" tIns="0" rIns="0" bIns="0" rtlCol="0" anchor="ctr"/>
-          <a:lstStyle/>
-          <a:p>
-            <a:pPr indent="0" marL="0">
-              <a:buNone/>
-            </a:pPr>
-            <a:r>
-              <a:rPr lang="en-US" sz="1200" b="1" dirty="0">
-                <a:solidFill>
-                  <a:srgbClr val="1A1B1F"/>
-                </a:solidFill>
-                <a:latin typeface="Calibri" pitchFamily="34" charset="0"/>
-                <a:ea typeface="Calibri" pitchFamily="34" charset="-122"/>
-                <a:cs typeface="Calibri" pitchFamily="34" charset="-120"/>
-              </a:rPr>
-              <a:t>Slack</a:t>
-            </a:r>
-            <a:endParaRPr lang="en-US" sz="1200" dirty="0"/>
-          </a:p>
-        </p:txBody>
-      </p:sp>
-      <p:sp>
-        <p:nvSpPr>
-          <p:cNvPr id="11" name="Text 7"/>
-          <p:cNvSpPr/>
-          <p:nvPr/>
-        </p:nvSpPr>
-        <p:spPr>
-          <a:xfrm>
-            <a:off x="2148840" y="3264408"/>
-            <a:ext cx="2468880" cy="292608"/>
-          </a:xfrm>
-          <a:prstGeom prst="rect">
-            <a:avLst/>
-          </a:prstGeom>
-          <a:noFill/>
-          <a:ln/>
-        </p:spPr>
-        <p:txBody>
-          <a:bodyPr wrap="square" lIns="0" tIns="0" rIns="0" bIns="0" rtlCol="0" anchor="ctr"/>
-          <a:lstStyle/>
-          <a:p>
-            <a:pPr indent="0" marL="0">
-              <a:buNone/>
-            </a:pPr>
-            <a:r>
-              <a:rPr lang="en-US" sz="1100" dirty="0">
-                <a:solidFill>
-                  <a:srgbClr val="6B6A66"/>
-                </a:solidFill>
-                <a:latin typeface="Calibri" pitchFamily="34" charset="0"/>
-                <a:ea typeface="Calibri" pitchFamily="34" charset="-122"/>
-                <a:cs typeface="Calibri" pitchFamily="34" charset="-120"/>
-              </a:rPr>
-              <a:t>Pull messages and threads</a:t>
-            </a:r>
-            <a:endParaRPr lang="en-US" sz="1100" dirty="0"/>
-          </a:p>
-        </p:txBody>
-      </p:sp>
-      <p:pic>
-        <p:nvPicPr>
-          <p:cNvPr id="12" name="Image 2" descr="preencoded.png">    </p:cNvPr>
+          <p:cNvPr id="6" name="Image 0" descr="preencoded.png"/>
           <p:cNvPicPr>
             <a:picLocks noChangeAspect="1"/>
           </p:cNvPicPr>
@@ -12823,7 +12906,7 @@
         </p:blipFill>
         <p:spPr>
           <a:xfrm>
-            <a:off x="548640" y="3685032"/>
+            <a:off x="548640" y="2916936"/>
             <a:ext cx="219456" cy="219456"/>
           </a:xfrm>
           <a:prstGeom prst="rect">
@@ -12833,13 +12916,13 @@
       </p:pic>
       <p:sp>
         <p:nvSpPr>
-          <p:cNvPr id="13" name="Text 8"/>
-          <p:cNvSpPr/>
-          <p:nvPr/>
-        </p:nvSpPr>
-        <p:spPr>
-          <a:xfrm>
-            <a:off x="868680" y="3648456"/>
+          <p:cNvPr id="7" name="Text 4"/>
+          <p:cNvSpPr/>
+          <p:nvPr/>
+        </p:nvSpPr>
+        <p:spPr>
+          <a:xfrm>
+            <a:off x="868680" y="2880360"/>
             <a:ext cx="1280160" cy="292608"/>
           </a:xfrm>
           <a:prstGeom prst="rect">
@@ -12852,7 +12935,7 @@
           <a:bodyPr wrap="square" lIns="0" tIns="0" rIns="0" bIns="0" rtlCol="0" anchor="ctr"/>
           <a:lstStyle/>
           <a:p>
-            <a:pPr indent="0" marL="0">
+            <a:pPr marL="0" indent="0">
               <a:buNone/>
             </a:pPr>
             <a:r>
@@ -12864,7 +12947,7 @@
                 <a:ea typeface="Calibri" pitchFamily="34" charset="-122"/>
                 <a:cs typeface="Calibri" pitchFamily="34" charset="-120"/>
               </a:rPr>
-              <a:t>Jira</a:t>
+              <a:t>Google Drive</a:t>
             </a:r>
             <a:endParaRPr lang="en-US" sz="1200" dirty="0"/>
           </a:p>
@@ -12872,13 +12955,13 @@
       </p:sp>
       <p:sp>
         <p:nvSpPr>
-          <p:cNvPr id="14" name="Text 9"/>
-          <p:cNvSpPr/>
-          <p:nvPr/>
-        </p:nvSpPr>
-        <p:spPr>
-          <a:xfrm>
-            <a:off x="2148840" y="3648456"/>
+          <p:cNvPr id="8" name="Text 5"/>
+          <p:cNvSpPr/>
+          <p:nvPr/>
+        </p:nvSpPr>
+        <p:spPr>
+          <a:xfrm>
+            <a:off x="2148840" y="2880360"/>
             <a:ext cx="2468880" cy="292608"/>
           </a:xfrm>
           <a:prstGeom prst="rect">
@@ -12891,7 +12974,7 @@
           <a:bodyPr wrap="square" lIns="0" tIns="0" rIns="0" bIns="0" rtlCol="0" anchor="ctr"/>
           <a:lstStyle/>
           <a:p>
-            <a:pPr indent="0" marL="0">
+            <a:pPr marL="0" indent="0">
               <a:buNone/>
             </a:pPr>
             <a:r>
@@ -12903,7 +12986,7 @@
                 <a:ea typeface="Calibri" pitchFamily="34" charset="-122"/>
                 <a:cs typeface="Calibri" pitchFamily="34" charset="-120"/>
               </a:rPr>
-              <a:t>Read and update tickets</a:t>
+              <a:t>Read design docs and notes</a:t>
             </a:r>
             <a:endParaRPr lang="en-US" sz="1100" dirty="0"/>
           </a:p>
@@ -12911,7 +12994,7 @@
       </p:sp>
       <p:pic>
         <p:nvPicPr>
-          <p:cNvPr id="15" name="Image 3" descr="preencoded.png">    </p:cNvPr>
+          <p:cNvPr id="9" name="Image 1" descr="preencoded.png"/>
           <p:cNvPicPr>
             <a:picLocks noChangeAspect="1"/>
           </p:cNvPicPr>
@@ -12925,7 +13008,7 @@
         </p:blipFill>
         <p:spPr>
           <a:xfrm>
-            <a:off x="548640" y="4069080"/>
+            <a:off x="548640" y="3300984"/>
             <a:ext cx="219456" cy="219456"/>
           </a:xfrm>
           <a:prstGeom prst="rect">
@@ -12935,13 +13018,13 @@
       </p:pic>
       <p:sp>
         <p:nvSpPr>
-          <p:cNvPr id="16" name="Text 10"/>
-          <p:cNvSpPr/>
-          <p:nvPr/>
-        </p:nvSpPr>
-        <p:spPr>
-          <a:xfrm>
-            <a:off x="868680" y="4032504"/>
+          <p:cNvPr id="10" name="Text 6"/>
+          <p:cNvSpPr/>
+          <p:nvPr/>
+        </p:nvSpPr>
+        <p:spPr>
+          <a:xfrm>
+            <a:off x="868680" y="3264408"/>
             <a:ext cx="1280160" cy="292608"/>
           </a:xfrm>
           <a:prstGeom prst="rect">
@@ -12954,7 +13037,7 @@
           <a:bodyPr wrap="square" lIns="0" tIns="0" rIns="0" bIns="0" rtlCol="0" anchor="ctr"/>
           <a:lstStyle/>
           <a:p>
-            <a:pPr indent="0" marL="0">
+            <a:pPr marL="0" indent="0">
               <a:buNone/>
             </a:pPr>
             <a:r>
@@ -12966,6 +13049,210 @@
                 <a:ea typeface="Calibri" pitchFamily="34" charset="-122"/>
                 <a:cs typeface="Calibri" pitchFamily="34" charset="-120"/>
               </a:rPr>
+              <a:t>Slack</a:t>
+            </a:r>
+            <a:endParaRPr lang="en-US" sz="1200" dirty="0"/>
+          </a:p>
+        </p:txBody>
+      </p:sp>
+      <p:sp>
+        <p:nvSpPr>
+          <p:cNvPr id="11" name="Text 7"/>
+          <p:cNvSpPr/>
+          <p:nvPr/>
+        </p:nvSpPr>
+        <p:spPr>
+          <a:xfrm>
+            <a:off x="2148840" y="3264408"/>
+            <a:ext cx="2468880" cy="292608"/>
+          </a:xfrm>
+          <a:prstGeom prst="rect">
+            <a:avLst/>
+          </a:prstGeom>
+          <a:noFill/>
+          <a:ln/>
+        </p:spPr>
+        <p:txBody>
+          <a:bodyPr wrap="square" lIns="0" tIns="0" rIns="0" bIns="0" rtlCol="0" anchor="ctr"/>
+          <a:lstStyle/>
+          <a:p>
+            <a:pPr marL="0" indent="0">
+              <a:buNone/>
+            </a:pPr>
+            <a:r>
+              <a:rPr lang="en-US" sz="1100" dirty="0">
+                <a:solidFill>
+                  <a:srgbClr val="6B6A66"/>
+                </a:solidFill>
+                <a:latin typeface="Calibri" pitchFamily="34" charset="0"/>
+                <a:ea typeface="Calibri" pitchFamily="34" charset="-122"/>
+                <a:cs typeface="Calibri" pitchFamily="34" charset="-120"/>
+              </a:rPr>
+              <a:t>Pull messages and threads</a:t>
+            </a:r>
+            <a:endParaRPr lang="en-US" sz="1100" dirty="0"/>
+          </a:p>
+        </p:txBody>
+      </p:sp>
+      <p:pic>
+        <p:nvPicPr>
+          <p:cNvPr id="12" name="Image 2" descr="preencoded.png"/>
+          <p:cNvPicPr>
+            <a:picLocks noChangeAspect="1"/>
+          </p:cNvPicPr>
+          <p:nvPr/>
+        </p:nvPicPr>
+        <p:blipFill>
+          <a:blip r:embed="rId5"/>
+          <a:stretch>
+            <a:fillRect/>
+          </a:stretch>
+        </p:blipFill>
+        <p:spPr>
+          <a:xfrm>
+            <a:off x="548640" y="3685032"/>
+            <a:ext cx="219456" cy="219456"/>
+          </a:xfrm>
+          <a:prstGeom prst="rect">
+            <a:avLst/>
+          </a:prstGeom>
+        </p:spPr>
+      </p:pic>
+      <p:sp>
+        <p:nvSpPr>
+          <p:cNvPr id="13" name="Text 8"/>
+          <p:cNvSpPr/>
+          <p:nvPr/>
+        </p:nvSpPr>
+        <p:spPr>
+          <a:xfrm>
+            <a:off x="868680" y="3648456"/>
+            <a:ext cx="1280160" cy="292608"/>
+          </a:xfrm>
+          <a:prstGeom prst="rect">
+            <a:avLst/>
+          </a:prstGeom>
+          <a:noFill/>
+          <a:ln/>
+        </p:spPr>
+        <p:txBody>
+          <a:bodyPr wrap="square" lIns="0" tIns="0" rIns="0" bIns="0" rtlCol="0" anchor="ctr"/>
+          <a:lstStyle/>
+          <a:p>
+            <a:pPr marL="0" indent="0">
+              <a:buNone/>
+            </a:pPr>
+            <a:r>
+              <a:rPr lang="en-US" sz="1200" b="1" dirty="0">
+                <a:solidFill>
+                  <a:srgbClr val="1A1B1F"/>
+                </a:solidFill>
+                <a:latin typeface="Calibri" pitchFamily="34" charset="0"/>
+                <a:ea typeface="Calibri" pitchFamily="34" charset="-122"/>
+                <a:cs typeface="Calibri" pitchFamily="34" charset="-120"/>
+              </a:rPr>
+              <a:t>Jira</a:t>
+            </a:r>
+            <a:endParaRPr lang="en-US" sz="1200" dirty="0"/>
+          </a:p>
+        </p:txBody>
+      </p:sp>
+      <p:sp>
+        <p:nvSpPr>
+          <p:cNvPr id="14" name="Text 9"/>
+          <p:cNvSpPr/>
+          <p:nvPr/>
+        </p:nvSpPr>
+        <p:spPr>
+          <a:xfrm>
+            <a:off x="2148840" y="3648456"/>
+            <a:ext cx="2468880" cy="292608"/>
+          </a:xfrm>
+          <a:prstGeom prst="rect">
+            <a:avLst/>
+          </a:prstGeom>
+          <a:noFill/>
+          <a:ln/>
+        </p:spPr>
+        <p:txBody>
+          <a:bodyPr wrap="square" lIns="0" tIns="0" rIns="0" bIns="0" rtlCol="0" anchor="ctr"/>
+          <a:lstStyle/>
+          <a:p>
+            <a:pPr marL="0" indent="0">
+              <a:buNone/>
+            </a:pPr>
+            <a:r>
+              <a:rPr lang="en-US" sz="1100" dirty="0">
+                <a:solidFill>
+                  <a:srgbClr val="6B6A66"/>
+                </a:solidFill>
+                <a:latin typeface="Calibri" pitchFamily="34" charset="0"/>
+                <a:ea typeface="Calibri" pitchFamily="34" charset="-122"/>
+                <a:cs typeface="Calibri" pitchFamily="34" charset="-120"/>
+              </a:rPr>
+              <a:t>Read and update tickets</a:t>
+            </a:r>
+            <a:endParaRPr lang="en-US" sz="1100" dirty="0"/>
+          </a:p>
+        </p:txBody>
+      </p:sp>
+      <p:pic>
+        <p:nvPicPr>
+          <p:cNvPr id="15" name="Image 3" descr="preencoded.png"/>
+          <p:cNvPicPr>
+            <a:picLocks noChangeAspect="1"/>
+          </p:cNvPicPr>
+          <p:nvPr/>
+        </p:nvPicPr>
+        <p:blipFill>
+          <a:blip r:embed="rId6"/>
+          <a:stretch>
+            <a:fillRect/>
+          </a:stretch>
+        </p:blipFill>
+        <p:spPr>
+          <a:xfrm>
+            <a:off x="548640" y="4069080"/>
+            <a:ext cx="219456" cy="219456"/>
+          </a:xfrm>
+          <a:prstGeom prst="rect">
+            <a:avLst/>
+          </a:prstGeom>
+        </p:spPr>
+      </p:pic>
+      <p:sp>
+        <p:nvSpPr>
+          <p:cNvPr id="16" name="Text 10"/>
+          <p:cNvSpPr/>
+          <p:nvPr/>
+        </p:nvSpPr>
+        <p:spPr>
+          <a:xfrm>
+            <a:off x="868680" y="4032504"/>
+            <a:ext cx="1280160" cy="292608"/>
+          </a:xfrm>
+          <a:prstGeom prst="rect">
+            <a:avLst/>
+          </a:prstGeom>
+          <a:noFill/>
+          <a:ln/>
+        </p:spPr>
+        <p:txBody>
+          <a:bodyPr wrap="square" lIns="0" tIns="0" rIns="0" bIns="0" rtlCol="0" anchor="ctr"/>
+          <a:lstStyle/>
+          <a:p>
+            <a:pPr marL="0" indent="0">
+              <a:buNone/>
+            </a:pPr>
+            <a:r>
+              <a:rPr lang="en-US" sz="1200" b="1" dirty="0">
+                <a:solidFill>
+                  <a:srgbClr val="1A1B1F"/>
+                </a:solidFill>
+                <a:latin typeface="Calibri" pitchFamily="34" charset="0"/>
+                <a:ea typeface="Calibri" pitchFamily="34" charset="-122"/>
+                <a:cs typeface="Calibri" pitchFamily="34" charset="-120"/>
+              </a:rPr>
               <a:t>Postgres</a:t>
             </a:r>
             <a:endParaRPr lang="en-US" sz="1200" dirty="0"/>
@@ -12993,7 +13280,7 @@
           <a:bodyPr wrap="square" lIns="0" tIns="0" rIns="0" bIns="0" rtlCol="0" anchor="ctr"/>
           <a:lstStyle/>
           <a:p>
-            <a:pPr indent="0" marL="0">
+            <a:pPr marL="0" indent="0">
               <a:buNone/>
             </a:pPr>
             <a:r>
@@ -13035,13 +13322,20 @@
             <a:prstDash val="solid"/>
           </a:ln>
           <a:effectLst>
-            <a:outerShdw sx="100000" sy="100000" kx="0" ky="0" algn="bl" rotWithShape="0" blurRad="127000" dist="25400" dir="5400000">
+            <a:outerShdw blurRad="127000" dist="25400" dir="5400000" algn="bl" rotWithShape="0">
               <a:srgbClr val="000000">
                 <a:alpha val="8000"/>
               </a:srgbClr>
             </a:outerShdw>
           </a:effectLst>
         </p:spPr>
+        <p:txBody>
+          <a:bodyPr/>
+          <a:lstStyle/>
+          <a:p>
+            <a:endParaRPr lang="en-US"/>
+          </a:p>
+        </p:txBody>
       </p:sp>
       <p:sp>
         <p:nvSpPr>
@@ -13067,6 +13361,13 @@
             <a:prstDash val="solid"/>
           </a:ln>
         </p:spPr>
+        <p:txBody>
+          <a:bodyPr/>
+          <a:lstStyle/>
+          <a:p>
+            <a:endParaRPr lang="en-US"/>
+          </a:p>
+        </p:txBody>
       </p:sp>
       <p:sp>
         <p:nvSpPr>
@@ -13092,6 +13393,13 @@
             <a:prstDash val="solid"/>
           </a:ln>
         </p:spPr>
+        <p:txBody>
+          <a:bodyPr/>
+          <a:lstStyle/>
+          <a:p>
+            <a:endParaRPr lang="en-US"/>
+          </a:p>
+        </p:txBody>
       </p:sp>
       <p:sp>
         <p:nvSpPr>
@@ -13117,6 +13425,13 @@
             <a:prstDash val="solid"/>
           </a:ln>
         </p:spPr>
+        <p:txBody>
+          <a:bodyPr/>
+          <a:lstStyle/>
+          <a:p>
+            <a:endParaRPr lang="en-US"/>
+          </a:p>
+        </p:txBody>
       </p:sp>
       <p:sp>
         <p:nvSpPr>
@@ -13142,6 +13457,13 @@
             <a:prstDash val="solid"/>
           </a:ln>
         </p:spPr>
+        <p:txBody>
+          <a:bodyPr/>
+          <a:lstStyle/>
+          <a:p>
+            <a:endParaRPr lang="en-US"/>
+          </a:p>
+        </p:txBody>
       </p:sp>
       <p:sp>
         <p:nvSpPr>
@@ -13164,7 +13486,7 @@
           <a:bodyPr wrap="square" lIns="0" tIns="0" rIns="0" bIns="0" rtlCol="0" anchor="ctr"/>
           <a:lstStyle/>
           <a:p>
-            <a:pPr algn="ctr" indent="0" marL="0">
+            <a:pPr marL="0" indent="0" algn="ctr">
               <a:buNone/>
             </a:pPr>
             <a:r>
@@ -13203,7 +13525,7 @@
           <a:bodyPr wrap="square" lIns="0" tIns="0" rIns="0" bIns="0" rtlCol="0" anchor="t"/>
           <a:lstStyle/>
           <a:p>
-            <a:pPr indent="0" marL="0">
+            <a:pPr marL="0" indent="0">
               <a:spcAft>
                 <a:spcPts val="200"/>
               </a:spcAft>
@@ -13223,7 +13545,7 @@
             <a:endParaRPr lang="en-US" sz="1000" dirty="0"/>
           </a:p>
           <a:p>
-            <a:pPr indent="0" marL="0">
+            <a:pPr marL="0" indent="0">
               <a:spcAft>
                 <a:spcPts val="200"/>
               </a:spcAft>
@@ -13243,7 +13565,7 @@
             <a:endParaRPr lang="en-US" sz="1000" dirty="0"/>
           </a:p>
           <a:p>
-            <a:pPr indent="0" marL="0">
+            <a:pPr marL="0" indent="0">
               <a:spcAft>
                 <a:spcPts val="200"/>
               </a:spcAft>
@@ -13252,7 +13574,7 @@
             <a:endParaRPr lang="en-US" sz="1000" dirty="0"/>
           </a:p>
           <a:p>
-            <a:pPr indent="0" marL="0">
+            <a:pPr marL="0" indent="0">
               <a:spcAft>
                 <a:spcPts val="200"/>
               </a:spcAft>
@@ -13272,7 +13594,7 @@
             <a:endParaRPr lang="en-US" sz="1000" dirty="0"/>
           </a:p>
           <a:p>
-            <a:pPr indent="0" marL="0">
+            <a:pPr marL="0" indent="0">
               <a:spcAft>
                 <a:spcPts val="200"/>
               </a:spcAft>
@@ -13292,7 +13614,7 @@
             <a:endParaRPr lang="en-US" sz="1000" dirty="0"/>
           </a:p>
           <a:p>
-            <a:pPr indent="0" marL="0">
+            <a:pPr marL="0" indent="0">
               <a:spcAft>
                 <a:spcPts val="200"/>
               </a:spcAft>
@@ -13301,7 +13623,7 @@
             <a:endParaRPr lang="en-US" sz="1000" dirty="0"/>
           </a:p>
           <a:p>
-            <a:pPr indent="0" marL="0">
+            <a:pPr marL="0" indent="0">
               <a:spcAft>
                 <a:spcPts val="200"/>
               </a:spcAft>
@@ -13321,7 +13643,7 @@
             <a:endParaRPr lang="en-US" sz="1000" dirty="0"/>
           </a:p>
           <a:p>
-            <a:pPr indent="0" marL="0">
+            <a:pPr marL="0" indent="0">
               <a:spcAft>
                 <a:spcPts val="200"/>
               </a:spcAft>
@@ -13363,7 +13685,7 @@
           <a:bodyPr wrap="square" lIns="0" tIns="0" rIns="0" bIns="0" rtlCol="0" anchor="ctr"/>
           <a:lstStyle/>
           <a:p>
-            <a:pPr algn="r" indent="0" marL="0">
+            <a:pPr marL="0" indent="0" algn="r">
               <a:buNone/>
             </a:pPr>
             <a:r>
@@ -13397,6 +13719,7 @@
         <a:solidFill>
           <a:srgbClr val="F7F5F0"/>
         </a:solidFill>
+        <a:effectLst/>
       </p:bgPr>
     </p:bg>
     <p:spTree>
@@ -13434,11 +13757,11 @@
           <a:bodyPr wrap="square" lIns="0" tIns="0" rIns="0" bIns="0" rtlCol="0" anchor="ctr"/>
           <a:lstStyle/>
           <a:p>
-            <a:pPr indent="0" marL="0">
-              <a:buNone/>
-            </a:pPr>
-            <a:r>
-              <a:rPr lang="en-US" sz="1000" b="1" spc="400" kern="0" dirty="0">
+            <a:pPr marL="0" indent="0">
+              <a:buNone/>
+            </a:pPr>
+            <a:r>
+              <a:rPr lang="en-US" sz="1000" b="1" kern="0" spc="400" dirty="0">
                 <a:solidFill>
                   <a:srgbClr val="CC785C"/>
                 </a:solidFill>
@@ -13473,7 +13796,7 @@
           <a:bodyPr wrap="square" lIns="0" tIns="0" rIns="0" bIns="0" rtlCol="0" anchor="ctr"/>
           <a:lstStyle/>
           <a:p>
-            <a:pPr indent="0" marL="0">
+            <a:pPr marL="0" indent="0">
               <a:buNone/>
             </a:pPr>
             <a:r>
@@ -13512,7 +13835,7 @@
           <a:bodyPr wrap="square" lIns="0" tIns="0" rIns="0" bIns="0" rtlCol="0" anchor="ctr"/>
           <a:lstStyle/>
           <a:p>
-            <a:pPr indent="0" marL="0">
+            <a:pPr marL="0" indent="0">
               <a:buNone/>
             </a:pPr>
             <a:r>
@@ -13554,6 +13877,13 @@
             <a:prstDash val="solid"/>
           </a:ln>
         </p:spPr>
+        <p:txBody>
+          <a:bodyPr/>
+          <a:lstStyle/>
+          <a:p>
+            <a:endParaRPr lang="en-US"/>
+          </a:p>
+        </p:txBody>
       </p:sp>
       <p:sp>
         <p:nvSpPr>
@@ -13576,7 +13906,7 @@
           <a:bodyPr wrap="square" lIns="0" tIns="0" rIns="0" bIns="0" rtlCol="0" anchor="ctr"/>
           <a:lstStyle/>
           <a:p>
-            <a:pPr algn="ctr" indent="0" marL="0">
+            <a:pPr marL="0" indent="0" algn="ctr">
               <a:buNone/>
             </a:pPr>
             <a:r>
@@ -13615,7 +13945,7 @@
           <a:bodyPr wrap="square" lIns="0" tIns="0" rIns="0" bIns="0" rtlCol="0" anchor="ctr"/>
           <a:lstStyle/>
           <a:p>
-            <a:pPr indent="0" marL="0">
+            <a:pPr marL="0" indent="0">
               <a:buNone/>
             </a:pPr>
             <a:r>
@@ -13654,7 +13984,7 @@
           <a:bodyPr wrap="square" lIns="0" tIns="0" rIns="0" bIns="0" rtlCol="0" anchor="ctr"/>
           <a:lstStyle/>
           <a:p>
-            <a:pPr indent="0" marL="0">
+            <a:pPr marL="0" indent="0">
               <a:buNone/>
             </a:pPr>
             <a:r>
@@ -13696,6 +14026,13 @@
             <a:prstDash val="solid"/>
           </a:ln>
         </p:spPr>
+        <p:txBody>
+          <a:bodyPr/>
+          <a:lstStyle/>
+          <a:p>
+            <a:endParaRPr lang="en-US"/>
+          </a:p>
+        </p:txBody>
       </p:sp>
       <p:sp>
         <p:nvSpPr>
@@ -13718,7 +14055,7 @@
           <a:bodyPr wrap="square" lIns="0" tIns="0" rIns="0" bIns="0" rtlCol="0" anchor="ctr"/>
           <a:lstStyle/>
           <a:p>
-            <a:pPr algn="ctr" indent="0" marL="0">
+            <a:pPr marL="0" indent="0" algn="ctr">
               <a:buNone/>
             </a:pPr>
             <a:r>
@@ -13757,7 +14094,7 @@
           <a:bodyPr wrap="square" lIns="0" tIns="0" rIns="0" bIns="0" rtlCol="0" anchor="ctr"/>
           <a:lstStyle/>
           <a:p>
-            <a:pPr indent="0" marL="0">
+            <a:pPr marL="0" indent="0">
               <a:buNone/>
             </a:pPr>
             <a:r>
@@ -13796,7 +14133,7 @@
           <a:bodyPr wrap="square" lIns="0" tIns="0" rIns="0" bIns="0" rtlCol="0" anchor="ctr"/>
           <a:lstStyle/>
           <a:p>
-            <a:pPr indent="0" marL="0">
+            <a:pPr marL="0" indent="0">
               <a:buNone/>
             </a:pPr>
             <a:r>
@@ -13838,6 +14175,13 @@
             <a:prstDash val="solid"/>
           </a:ln>
         </p:spPr>
+        <p:txBody>
+          <a:bodyPr/>
+          <a:lstStyle/>
+          <a:p>
+            <a:endParaRPr lang="en-US"/>
+          </a:p>
+        </p:txBody>
       </p:sp>
       <p:sp>
         <p:nvSpPr>
@@ -13860,7 +14204,7 @@
           <a:bodyPr wrap="square" lIns="0" tIns="0" rIns="0" bIns="0" rtlCol="0" anchor="ctr"/>
           <a:lstStyle/>
           <a:p>
-            <a:pPr algn="ctr" indent="0" marL="0">
+            <a:pPr marL="0" indent="0" algn="ctr">
               <a:buNone/>
             </a:pPr>
             <a:r>
@@ -13899,7 +14243,7 @@
           <a:bodyPr wrap="square" lIns="0" tIns="0" rIns="0" bIns="0" rtlCol="0" anchor="ctr"/>
           <a:lstStyle/>
           <a:p>
-            <a:pPr indent="0" marL="0">
+            <a:pPr marL="0" indent="0">
               <a:buNone/>
             </a:pPr>
             <a:r>
@@ -13938,7 +14282,7 @@
           <a:bodyPr wrap="square" lIns="0" tIns="0" rIns="0" bIns="0" rtlCol="0" anchor="ctr"/>
           <a:lstStyle/>
           <a:p>
-            <a:pPr indent="0" marL="0">
+            <a:pPr marL="0" indent="0">
               <a:buNone/>
             </a:pPr>
             <a:r>
@@ -13980,13 +14324,20 @@
             <a:prstDash val="solid"/>
           </a:ln>
           <a:effectLst>
-            <a:outerShdw sx="100000" sy="100000" kx="0" ky="0" algn="bl" rotWithShape="0" blurRad="127000" dist="25400" dir="5400000">
+            <a:outerShdw blurRad="127000" dist="25400" dir="5400000" algn="bl" rotWithShape="0">
               <a:srgbClr val="000000">
                 <a:alpha val="8000"/>
               </a:srgbClr>
             </a:outerShdw>
           </a:effectLst>
         </p:spPr>
+        <p:txBody>
+          <a:bodyPr/>
+          <a:lstStyle/>
+          <a:p>
+            <a:endParaRPr lang="en-US"/>
+          </a:p>
+        </p:txBody>
       </p:sp>
       <p:sp>
         <p:nvSpPr>
@@ -14012,6 +14363,13 @@
             <a:prstDash val="solid"/>
           </a:ln>
         </p:spPr>
+        <p:txBody>
+          <a:bodyPr/>
+          <a:lstStyle/>
+          <a:p>
+            <a:endParaRPr lang="en-US"/>
+          </a:p>
+        </p:txBody>
       </p:sp>
       <p:sp>
         <p:nvSpPr>
@@ -14034,7 +14392,7 @@
           <a:bodyPr wrap="square" lIns="0" tIns="0" rIns="0" bIns="0" rtlCol="0" anchor="ctr"/>
           <a:lstStyle/>
           <a:p>
-            <a:pPr indent="0" marL="0">
+            <a:pPr marL="0" indent="0">
               <a:buNone/>
             </a:pPr>
             <a:r>
@@ -14073,7 +14431,7 @@
           <a:bodyPr wrap="square" lIns="0" tIns="0" rIns="0" bIns="0" rtlCol="0" anchor="t"/>
           <a:lstStyle/>
           <a:p>
-            <a:pPr indent="0" marL="0">
+            <a:pPr marL="0" indent="0">
               <a:spcAft>
                 <a:spcPts val="200"/>
               </a:spcAft>
@@ -14093,7 +14451,7 @@
             <a:endParaRPr lang="en-US" sz="1000" dirty="0"/>
           </a:p>
           <a:p>
-            <a:pPr indent="0" marL="0">
+            <a:pPr marL="0" indent="0">
               <a:spcAft>
                 <a:spcPts val="200"/>
               </a:spcAft>
@@ -14113,7 +14471,7 @@
             <a:endParaRPr lang="en-US" sz="1000" dirty="0"/>
           </a:p>
           <a:p>
-            <a:pPr indent="0" marL="0">
+            <a:pPr marL="0" indent="0">
               <a:spcAft>
                 <a:spcPts val="200"/>
               </a:spcAft>
@@ -14133,7 +14491,7 @@
             <a:endParaRPr lang="en-US" sz="1000" dirty="0"/>
           </a:p>
           <a:p>
-            <a:pPr indent="0" marL="0">
+            <a:pPr marL="0" indent="0">
               <a:spcAft>
                 <a:spcPts val="200"/>
               </a:spcAft>
@@ -14153,7 +14511,7 @@
             <a:endParaRPr lang="en-US" sz="1000" dirty="0"/>
           </a:p>
           <a:p>
-            <a:pPr indent="0" marL="0">
+            <a:pPr marL="0" indent="0">
               <a:spcAft>
                 <a:spcPts val="200"/>
               </a:spcAft>
@@ -14173,7 +14531,7 @@
             <a:endParaRPr lang="en-US" sz="1000" dirty="0"/>
           </a:p>
           <a:p>
-            <a:pPr indent="0" marL="0">
+            <a:pPr marL="0" indent="0">
               <a:spcAft>
                 <a:spcPts val="200"/>
               </a:spcAft>
@@ -14193,7 +14551,7 @@
             <a:endParaRPr lang="en-US" sz="1000" dirty="0"/>
           </a:p>
           <a:p>
-            <a:pPr indent="0" marL="0">
+            <a:pPr marL="0" indent="0">
               <a:spcAft>
                 <a:spcPts val="200"/>
               </a:spcAft>
@@ -14202,7 +14560,7 @@
             <a:endParaRPr lang="en-US" sz="1000" dirty="0"/>
           </a:p>
           <a:p>
-            <a:pPr indent="0" marL="0">
+            <a:pPr marL="0" indent="0">
               <a:spcAft>
                 <a:spcPts val="200"/>
               </a:spcAft>
@@ -14222,7 +14580,7 @@
             <a:endParaRPr lang="en-US" sz="1000" dirty="0"/>
           </a:p>
           <a:p>
-            <a:pPr indent="0" marL="0">
+            <a:pPr marL="0" indent="0">
               <a:spcAft>
                 <a:spcPts val="200"/>
               </a:spcAft>
@@ -14231,7 +14589,7 @@
             <a:endParaRPr lang="en-US" sz="1000" dirty="0"/>
           </a:p>
           <a:p>
-            <a:pPr indent="0" marL="0">
+            <a:pPr marL="0" indent="0">
               <a:spcAft>
                 <a:spcPts val="200"/>
               </a:spcAft>
@@ -14251,7 +14609,7 @@
             <a:endParaRPr lang="en-US" sz="1000" dirty="0"/>
           </a:p>
           <a:p>
-            <a:pPr indent="0" marL="0">
+            <a:pPr marL="0" indent="0">
               <a:spcAft>
                 <a:spcPts val="200"/>
               </a:spcAft>
@@ -14293,7 +14651,7 @@
           <a:bodyPr wrap="square" lIns="0" tIns="0" rIns="0" bIns="0" rtlCol="0" anchor="ctr"/>
           <a:lstStyle/>
           <a:p>
-            <a:pPr algn="r" indent="0" marL="0">
+            <a:pPr marL="0" indent="0" algn="r">
               <a:buNone/>
             </a:pPr>
             <a:r>
@@ -14327,6 +14685,7 @@
         <a:solidFill>
           <a:srgbClr val="F7F5F0"/>
         </a:solidFill>
+        <a:effectLst/>
       </p:bgPr>
     </p:bg>
     <p:spTree>
@@ -14364,11 +14723,11 @@
           <a:bodyPr wrap="square" lIns="0" tIns="0" rIns="0" bIns="0" rtlCol="0" anchor="ctr"/>
           <a:lstStyle/>
           <a:p>
-            <a:pPr indent="0" marL="0">
-              <a:buNone/>
-            </a:pPr>
-            <a:r>
-              <a:rPr lang="en-US" sz="1000" b="1" spc="400" kern="0" dirty="0">
+            <a:pPr marL="0" indent="0">
+              <a:buNone/>
+            </a:pPr>
+            <a:r>
+              <a:rPr lang="en-US" sz="1000" b="1" kern="0" spc="400" dirty="0">
                 <a:solidFill>
                   <a:srgbClr val="CC785C"/>
                 </a:solidFill>
@@ -14403,7 +14762,7 @@
           <a:bodyPr wrap="square" lIns="0" tIns="0" rIns="0" bIns="0" rtlCol="0" anchor="ctr"/>
           <a:lstStyle/>
           <a:p>
-            <a:pPr indent="0" marL="0">
+            <a:pPr marL="0" indent="0">
               <a:buNone/>
             </a:pPr>
             <a:r>
@@ -14442,7 +14801,7 @@
           <a:bodyPr wrap="square" lIns="0" tIns="0" rIns="0" bIns="0" rtlCol="0" anchor="ctr"/>
           <a:lstStyle/>
           <a:p>
-            <a:pPr indent="0" marL="0">
+            <a:pPr marL="0" indent="0">
               <a:buNone/>
             </a:pPr>
             <a:r>
@@ -14484,6 +14843,13 @@
             <a:prstDash val="solid"/>
           </a:ln>
         </p:spPr>
+        <p:txBody>
+          <a:bodyPr/>
+          <a:lstStyle/>
+          <a:p>
+            <a:endParaRPr lang="en-US"/>
+          </a:p>
+        </p:txBody>
       </p:sp>
       <p:sp>
         <p:nvSpPr>
@@ -14506,7 +14872,7 @@
           <a:bodyPr wrap="square" lIns="0" tIns="0" rIns="0" bIns="0" rtlCol="0" anchor="ctr"/>
           <a:lstStyle/>
           <a:p>
-            <a:pPr indent="0" marL="0">
+            <a:pPr marL="0" indent="0">
               <a:buNone/>
             </a:pPr>
             <a:r>
@@ -14545,7 +14911,7 @@
           <a:bodyPr wrap="square" lIns="0" tIns="0" rIns="0" bIns="0" rtlCol="0" anchor="ctr"/>
           <a:lstStyle/>
           <a:p>
-            <a:pPr indent="0" marL="0">
+            <a:pPr marL="0" indent="0">
               <a:buNone/>
             </a:pPr>
             <a:r>
@@ -14587,6 +14953,13 @@
             <a:prstDash val="solid"/>
           </a:ln>
         </p:spPr>
+        <p:txBody>
+          <a:bodyPr/>
+          <a:lstStyle/>
+          <a:p>
+            <a:endParaRPr lang="en-US"/>
+          </a:p>
+        </p:txBody>
       </p:sp>
       <p:sp>
         <p:nvSpPr>
@@ -14609,7 +14982,7 @@
           <a:bodyPr wrap="square" lIns="0" tIns="0" rIns="0" bIns="0" rtlCol="0" anchor="ctr"/>
           <a:lstStyle/>
           <a:p>
-            <a:pPr indent="0" marL="0">
+            <a:pPr marL="0" indent="0">
               <a:buNone/>
             </a:pPr>
             <a:r>
@@ -14648,7 +15021,7 @@
           <a:bodyPr wrap="square" lIns="0" tIns="0" rIns="0" bIns="0" rtlCol="0" anchor="ctr"/>
           <a:lstStyle/>
           <a:p>
-            <a:pPr indent="0" marL="0">
+            <a:pPr marL="0" indent="0">
               <a:buNone/>
             </a:pPr>
             <a:r>
@@ -14690,6 +15063,13 @@
             <a:prstDash val="solid"/>
           </a:ln>
         </p:spPr>
+        <p:txBody>
+          <a:bodyPr/>
+          <a:lstStyle/>
+          <a:p>
+            <a:endParaRPr lang="en-US"/>
+          </a:p>
+        </p:txBody>
       </p:sp>
       <p:sp>
         <p:nvSpPr>
@@ -14712,7 +15092,7 @@
           <a:bodyPr wrap="square" lIns="0" tIns="0" rIns="0" bIns="0" rtlCol="0" anchor="ctr"/>
           <a:lstStyle/>
           <a:p>
-            <a:pPr indent="0" marL="0">
+            <a:pPr marL="0" indent="0">
               <a:buNone/>
             </a:pPr>
             <a:r>
@@ -14751,7 +15131,7 @@
           <a:bodyPr wrap="square" lIns="0" tIns="0" rIns="0" bIns="0" rtlCol="0" anchor="ctr"/>
           <a:lstStyle/>
           <a:p>
-            <a:pPr indent="0" marL="0">
+            <a:pPr marL="0" indent="0">
               <a:buNone/>
             </a:pPr>
             <a:r>
@@ -14793,24 +15173,31 @@
             <a:prstDash val="solid"/>
           </a:ln>
           <a:effectLst>
-            <a:outerShdw sx="100000" sy="100000" kx="0" ky="0" algn="bl" rotWithShape="0" blurRad="127000" dist="25400" dir="5400000">
+            <a:outerShdw blurRad="127000" dist="25400" dir="5400000" algn="bl" rotWithShape="0">
               <a:srgbClr val="000000">
                 <a:alpha val="8000"/>
               </a:srgbClr>
             </a:outerShdw>
           </a:effectLst>
         </p:spPr>
+        <p:txBody>
+          <a:bodyPr/>
+          <a:lstStyle/>
+          <a:p>
+            <a:endParaRPr lang="en-US"/>
+          </a:p>
+        </p:txBody>
       </p:sp>
       <p:pic>
         <p:nvPicPr>
-          <p:cNvPr id="15" name="Image 0" descr="preencoded.png">    </p:cNvPr>
+          <p:cNvPr id="15" name="Image 0" descr="preencoded.png"/>
           <p:cNvPicPr>
             <a:picLocks noChangeAspect="1"/>
           </p:cNvPicPr>
           <p:nvPr/>
         </p:nvPicPr>
         <p:blipFill>
-          <a:blip r:embed="rId1"/>
+          <a:blip r:embed="rId3"/>
           <a:stretch>
             <a:fillRect/>
           </a:stretch>
@@ -14846,7 +15233,7 @@
           <a:bodyPr wrap="square" lIns="0" tIns="0" rIns="0" bIns="0" rtlCol="0" anchor="ctr"/>
           <a:lstStyle/>
           <a:p>
-            <a:pPr indent="0" marL="0">
+            <a:pPr marL="0" indent="0">
               <a:buNone/>
             </a:pPr>
             <a:r>
@@ -14885,7 +15272,7 @@
           <a:bodyPr wrap="square" lIns="0" tIns="0" rIns="0" bIns="0" rtlCol="0" anchor="ctr"/>
           <a:lstStyle/>
           <a:p>
-            <a:pPr indent="0" marL="0">
+            <a:pPr marL="0" indent="0">
               <a:buNone/>
             </a:pPr>
             <a:r>
@@ -14925,6 +15312,13 @@
             <a:prstDash val="solid"/>
           </a:ln>
         </p:spPr>
+        <p:txBody>
+          <a:bodyPr/>
+          <a:lstStyle/>
+          <a:p>
+            <a:endParaRPr lang="en-US"/>
+          </a:p>
+        </p:txBody>
       </p:sp>
       <p:sp>
         <p:nvSpPr>
@@ -14948,6 +15342,13 @@
             <a:prstDash val="solid"/>
           </a:ln>
         </p:spPr>
+        <p:txBody>
+          <a:bodyPr/>
+          <a:lstStyle/>
+          <a:p>
+            <a:endParaRPr lang="en-US"/>
+          </a:p>
+        </p:txBody>
       </p:sp>
       <p:sp>
         <p:nvSpPr>
@@ -14971,6 +15372,13 @@
             <a:prstDash val="solid"/>
           </a:ln>
         </p:spPr>
+        <p:txBody>
+          <a:bodyPr/>
+          <a:lstStyle/>
+          <a:p>
+            <a:endParaRPr lang="en-US"/>
+          </a:p>
+        </p:txBody>
       </p:sp>
       <p:sp>
         <p:nvSpPr>
@@ -14994,6 +15402,13 @@
             <a:prstDash val="solid"/>
           </a:ln>
         </p:spPr>
+        <p:txBody>
+          <a:bodyPr/>
+          <a:lstStyle/>
+          <a:p>
+            <a:endParaRPr lang="en-US"/>
+          </a:p>
+        </p:txBody>
       </p:sp>
       <p:sp>
         <p:nvSpPr>
@@ -15017,6 +15432,13 @@
             <a:prstDash val="solid"/>
           </a:ln>
         </p:spPr>
+        <p:txBody>
+          <a:bodyPr/>
+          <a:lstStyle/>
+          <a:p>
+            <a:endParaRPr lang="en-US"/>
+          </a:p>
+        </p:txBody>
       </p:sp>
       <p:sp>
         <p:nvSpPr>
@@ -15042,13 +15464,20 @@
             <a:prstDash val="solid"/>
           </a:ln>
           <a:effectLst>
-            <a:outerShdw sx="100000" sy="100000" kx="0" ky="0" algn="bl" rotWithShape="0" blurRad="127000" dist="25400" dir="5400000">
+            <a:outerShdw blurRad="127000" dist="25400" dir="5400000" algn="bl" rotWithShape="0">
               <a:srgbClr val="000000">
                 <a:alpha val="8000"/>
               </a:srgbClr>
             </a:outerShdw>
           </a:effectLst>
         </p:spPr>
+        <p:txBody>
+          <a:bodyPr/>
+          <a:lstStyle/>
+          <a:p>
+            <a:endParaRPr lang="en-US"/>
+          </a:p>
+        </p:txBody>
       </p:sp>
       <p:sp>
         <p:nvSpPr>
@@ -15074,6 +15503,13 @@
             <a:prstDash val="solid"/>
           </a:ln>
         </p:spPr>
+        <p:txBody>
+          <a:bodyPr/>
+          <a:lstStyle/>
+          <a:p>
+            <a:endParaRPr lang="en-US"/>
+          </a:p>
+        </p:txBody>
       </p:sp>
       <p:sp>
         <p:nvSpPr>
@@ -15096,7 +15532,7 @@
           <a:bodyPr wrap="square" lIns="0" tIns="0" rIns="0" bIns="0" rtlCol="0" anchor="ctr"/>
           <a:lstStyle/>
           <a:p>
-            <a:pPr indent="0" marL="0">
+            <a:pPr marL="0" indent="0">
               <a:buNone/>
             </a:pPr>
             <a:r>
@@ -15135,7 +15571,7 @@
           <a:bodyPr wrap="square" lIns="0" tIns="0" rIns="0" bIns="0" rtlCol="0" anchor="ctr"/>
           <a:lstStyle/>
           <a:p>
-            <a:pPr indent="0" marL="0">
+            <a:pPr marL="0" indent="0">
               <a:buNone/>
             </a:pPr>
             <a:r>
@@ -15177,13 +15613,20 @@
             <a:prstDash val="solid"/>
           </a:ln>
           <a:effectLst>
-            <a:outerShdw sx="100000" sy="100000" kx="0" ky="0" algn="bl" rotWithShape="0" blurRad="127000" dist="25400" dir="5400000">
+            <a:outerShdw blurRad="127000" dist="25400" dir="5400000" algn="bl" rotWithShape="0">
               <a:srgbClr val="000000">
                 <a:alpha val="8000"/>
               </a:srgbClr>
             </a:outerShdw>
           </a:effectLst>
         </p:spPr>
+        <p:txBody>
+          <a:bodyPr/>
+          <a:lstStyle/>
+          <a:p>
+            <a:endParaRPr lang="en-US"/>
+          </a:p>
+        </p:txBody>
       </p:sp>
       <p:sp>
         <p:nvSpPr>
@@ -15209,6 +15652,13 @@
             <a:prstDash val="solid"/>
           </a:ln>
         </p:spPr>
+        <p:txBody>
+          <a:bodyPr/>
+          <a:lstStyle/>
+          <a:p>
+            <a:endParaRPr lang="en-US"/>
+          </a:p>
+        </p:txBody>
       </p:sp>
       <p:sp>
         <p:nvSpPr>
@@ -15231,7 +15681,7 @@
           <a:bodyPr wrap="square" lIns="0" tIns="0" rIns="0" bIns="0" rtlCol="0" anchor="ctr"/>
           <a:lstStyle/>
           <a:p>
-            <a:pPr indent="0" marL="0">
+            <a:pPr marL="0" indent="0">
               <a:buNone/>
             </a:pPr>
             <a:r>
@@ -15270,7 +15720,7 @@
           <a:bodyPr wrap="square" lIns="0" tIns="0" rIns="0" bIns="0" rtlCol="0" anchor="ctr"/>
           <a:lstStyle/>
           <a:p>
-            <a:pPr indent="0" marL="0">
+            <a:pPr marL="0" indent="0">
               <a:buNone/>
             </a:pPr>
             <a:r>
@@ -15312,13 +15762,20 @@
             <a:prstDash val="solid"/>
           </a:ln>
           <a:effectLst>
-            <a:outerShdw sx="100000" sy="100000" kx="0" ky="0" algn="bl" rotWithShape="0" blurRad="127000" dist="25400" dir="5400000">
+            <a:outerShdw blurRad="127000" dist="25400" dir="5400000" algn="bl" rotWithShape="0">
               <a:srgbClr val="000000">
                 <a:alpha val="8000"/>
               </a:srgbClr>
             </a:outerShdw>
           </a:effectLst>
         </p:spPr>
+        <p:txBody>
+          <a:bodyPr/>
+          <a:lstStyle/>
+          <a:p>
+            <a:endParaRPr lang="en-US"/>
+          </a:p>
+        </p:txBody>
       </p:sp>
       <p:sp>
         <p:nvSpPr>
@@ -15344,6 +15801,13 @@
             <a:prstDash val="solid"/>
           </a:ln>
         </p:spPr>
+        <p:txBody>
+          <a:bodyPr/>
+          <a:lstStyle/>
+          <a:p>
+            <a:endParaRPr lang="en-US"/>
+          </a:p>
+        </p:txBody>
       </p:sp>
       <p:sp>
         <p:nvSpPr>
@@ -15366,7 +15830,7 @@
           <a:bodyPr wrap="square" lIns="0" tIns="0" rIns="0" bIns="0" rtlCol="0" anchor="ctr"/>
           <a:lstStyle/>
           <a:p>
-            <a:pPr indent="0" marL="0">
+            <a:pPr marL="0" indent="0">
               <a:buNone/>
             </a:pPr>
             <a:r>
@@ -15405,7 +15869,7 @@
           <a:bodyPr wrap="square" lIns="0" tIns="0" rIns="0" bIns="0" rtlCol="0" anchor="ctr"/>
           <a:lstStyle/>
           <a:p>
-            <a:pPr indent="0" marL="0">
+            <a:pPr marL="0" indent="0">
               <a:buNone/>
             </a:pPr>
             <a:r>
@@ -15444,7 +15908,7 @@
           <a:bodyPr wrap="square" lIns="0" tIns="0" rIns="0" bIns="0" rtlCol="0" anchor="ctr"/>
           <a:lstStyle/>
           <a:p>
-            <a:pPr algn="r" indent="0" marL="0">
+            <a:pPr marL="0" indent="0" algn="r">
               <a:buNone/>
             </a:pPr>
             <a:r>
@@ -15478,6 +15942,7 @@
         <a:solidFill>
           <a:srgbClr val="F7F5F0"/>
         </a:solidFill>
+        <a:effectLst/>
       </p:bgPr>
     </p:bg>
     <p:spTree>
@@ -15515,11 +15980,11 @@
           <a:bodyPr wrap="square" lIns="0" tIns="0" rIns="0" bIns="0" rtlCol="0" anchor="ctr"/>
           <a:lstStyle/>
           <a:p>
-            <a:pPr indent="0" marL="0">
-              <a:buNone/>
-            </a:pPr>
-            <a:r>
-              <a:rPr lang="en-US" sz="1000" b="1" spc="400" kern="0" dirty="0">
+            <a:pPr marL="0" indent="0">
+              <a:buNone/>
+            </a:pPr>
+            <a:r>
+              <a:rPr lang="en-US" sz="1000" b="1" kern="0" spc="400" dirty="0">
                 <a:solidFill>
                   <a:srgbClr val="CC785C"/>
                 </a:solidFill>
@@ -15554,7 +16019,7 @@
           <a:bodyPr wrap="square" lIns="0" tIns="0" rIns="0" bIns="0" rtlCol="0" anchor="ctr"/>
           <a:lstStyle/>
           <a:p>
-            <a:pPr indent="0" marL="0">
+            <a:pPr marL="0" indent="0">
               <a:buNone/>
             </a:pPr>
             <a:r>
@@ -15593,7 +16058,7 @@
           <a:bodyPr wrap="square" lIns="0" tIns="0" rIns="0" bIns="0" rtlCol="0" anchor="ctr"/>
           <a:lstStyle/>
           <a:p>
-            <a:pPr indent="0" marL="0">
+            <a:pPr marL="0" indent="0">
               <a:buNone/>
             </a:pPr>
             <a:r>
@@ -15635,13 +16100,20 @@
             <a:prstDash val="solid"/>
           </a:ln>
           <a:effectLst>
-            <a:outerShdw sx="100000" sy="100000" kx="0" ky="0" algn="bl" rotWithShape="0" blurRad="127000" dist="25400" dir="5400000">
+            <a:outerShdw blurRad="127000" dist="25400" dir="5400000" algn="bl" rotWithShape="0">
               <a:srgbClr val="000000">
                 <a:alpha val="8000"/>
               </a:srgbClr>
             </a:outerShdw>
           </a:effectLst>
         </p:spPr>
+        <p:txBody>
+          <a:bodyPr/>
+          <a:lstStyle/>
+          <a:p>
+            <a:endParaRPr lang="en-US"/>
+          </a:p>
+        </p:txBody>
       </p:sp>
       <p:sp>
         <p:nvSpPr>
@@ -15667,17 +16139,24 @@
             <a:prstDash val="solid"/>
           </a:ln>
         </p:spPr>
+        <p:txBody>
+          <a:bodyPr/>
+          <a:lstStyle/>
+          <a:p>
+            <a:endParaRPr lang="en-US"/>
+          </a:p>
+        </p:txBody>
       </p:sp>
       <p:pic>
         <p:nvPicPr>
-          <p:cNvPr id="7" name="Image 0" descr="preencoded.png">    </p:cNvPr>
+          <p:cNvPr id="7" name="Image 0" descr="preencoded.png"/>
           <p:cNvPicPr>
             <a:picLocks noChangeAspect="1"/>
           </p:cNvPicPr>
           <p:nvPr/>
         </p:nvPicPr>
         <p:blipFill>
-          <a:blip r:embed="rId1"/>
+          <a:blip r:embed="rId3"/>
           <a:stretch>
             <a:fillRect/>
           </a:stretch>
@@ -15713,7 +16192,7 @@
           <a:bodyPr wrap="square" lIns="0" tIns="0" rIns="0" bIns="0" rtlCol="0" anchor="ctr"/>
           <a:lstStyle/>
           <a:p>
-            <a:pPr indent="0" marL="0">
+            <a:pPr marL="0" indent="0">
               <a:buNone/>
             </a:pPr>
             <a:r>
@@ -15752,7 +16231,7 @@
           <a:bodyPr wrap="square" lIns="0" tIns="0" rIns="0" bIns="0" rtlCol="0" anchor="ctr"/>
           <a:lstStyle/>
           <a:p>
-            <a:pPr indent="0" marL="0">
+            <a:pPr marL="0" indent="0">
               <a:buNone/>
             </a:pPr>
             <a:r>
@@ -15794,13 +16273,20 @@
             <a:prstDash val="solid"/>
           </a:ln>
           <a:effectLst>
-            <a:outerShdw sx="100000" sy="100000" kx="0" ky="0" algn="bl" rotWithShape="0" blurRad="127000" dist="25400" dir="5400000">
+            <a:outerShdw blurRad="127000" dist="25400" dir="5400000" algn="bl" rotWithShape="0">
               <a:srgbClr val="000000">
                 <a:alpha val="8000"/>
               </a:srgbClr>
             </a:outerShdw>
           </a:effectLst>
         </p:spPr>
+        <p:txBody>
+          <a:bodyPr/>
+          <a:lstStyle/>
+          <a:p>
+            <a:endParaRPr lang="en-US"/>
+          </a:p>
+        </p:txBody>
       </p:sp>
       <p:sp>
         <p:nvSpPr>
@@ -15826,17 +16312,24 @@
             <a:prstDash val="solid"/>
           </a:ln>
         </p:spPr>
+        <p:txBody>
+          <a:bodyPr/>
+          <a:lstStyle/>
+          <a:p>
+            <a:endParaRPr lang="en-US"/>
+          </a:p>
+        </p:txBody>
       </p:sp>
       <p:pic>
         <p:nvPicPr>
-          <p:cNvPr id="12" name="Image 1" descr="preencoded.png">    </p:cNvPr>
+          <p:cNvPr id="12" name="Image 1" descr="preencoded.png"/>
           <p:cNvPicPr>
             <a:picLocks noChangeAspect="1"/>
           </p:cNvPicPr>
           <p:nvPr/>
         </p:nvPicPr>
         <p:blipFill>
-          <a:blip r:embed="rId2"/>
+          <a:blip r:embed="rId4"/>
           <a:stretch>
             <a:fillRect/>
           </a:stretch>
@@ -15872,7 +16365,7 @@
           <a:bodyPr wrap="square" lIns="0" tIns="0" rIns="0" bIns="0" rtlCol="0" anchor="ctr"/>
           <a:lstStyle/>
           <a:p>
-            <a:pPr indent="0" marL="0">
+            <a:pPr marL="0" indent="0">
               <a:buNone/>
             </a:pPr>
             <a:r>
@@ -15911,7 +16404,7 @@
           <a:bodyPr wrap="square" lIns="0" tIns="0" rIns="0" bIns="0" rtlCol="0" anchor="ctr"/>
           <a:lstStyle/>
           <a:p>
-            <a:pPr indent="0" marL="0">
+            <a:pPr marL="0" indent="0">
               <a:buNone/>
             </a:pPr>
             <a:r>
@@ -15953,13 +16446,20 @@
             <a:prstDash val="solid"/>
           </a:ln>
           <a:effectLst>
-            <a:outerShdw sx="100000" sy="100000" kx="0" ky="0" algn="bl" rotWithShape="0" blurRad="127000" dist="25400" dir="5400000">
+            <a:outerShdw blurRad="127000" dist="25400" dir="5400000" algn="bl" rotWithShape="0">
               <a:srgbClr val="000000">
                 <a:alpha val="8000"/>
               </a:srgbClr>
             </a:outerShdw>
           </a:effectLst>
         </p:spPr>
+        <p:txBody>
+          <a:bodyPr/>
+          <a:lstStyle/>
+          <a:p>
+            <a:endParaRPr lang="en-US"/>
+          </a:p>
+        </p:txBody>
       </p:sp>
       <p:sp>
         <p:nvSpPr>
@@ -15985,17 +16485,24 @@
             <a:prstDash val="solid"/>
           </a:ln>
         </p:spPr>
+        <p:txBody>
+          <a:bodyPr/>
+          <a:lstStyle/>
+          <a:p>
+            <a:endParaRPr lang="en-US"/>
+          </a:p>
+        </p:txBody>
       </p:sp>
       <p:pic>
         <p:nvPicPr>
-          <p:cNvPr id="17" name="Image 2" descr="preencoded.png">    </p:cNvPr>
+          <p:cNvPr id="17" name="Image 2" descr="preencoded.png"/>
           <p:cNvPicPr>
             <a:picLocks noChangeAspect="1"/>
           </p:cNvPicPr>
           <p:nvPr/>
         </p:nvPicPr>
         <p:blipFill>
-          <a:blip r:embed="rId3"/>
+          <a:blip r:embed="rId5"/>
           <a:stretch>
             <a:fillRect/>
           </a:stretch>
@@ -16031,7 +16538,7 @@
           <a:bodyPr wrap="square" lIns="0" tIns="0" rIns="0" bIns="0" rtlCol="0" anchor="ctr"/>
           <a:lstStyle/>
           <a:p>
-            <a:pPr indent="0" marL="0">
+            <a:pPr marL="0" indent="0">
               <a:buNone/>
             </a:pPr>
             <a:r>
@@ -16070,7 +16577,7 @@
           <a:bodyPr wrap="square" lIns="0" tIns="0" rIns="0" bIns="0" rtlCol="0" anchor="ctr"/>
           <a:lstStyle/>
           <a:p>
-            <a:pPr indent="0" marL="0">
+            <a:pPr marL="0" indent="0">
               <a:buNone/>
             </a:pPr>
             <a:r>
@@ -16112,13 +16619,20 @@
             <a:prstDash val="solid"/>
           </a:ln>
           <a:effectLst>
-            <a:outerShdw sx="100000" sy="100000" kx="0" ky="0" algn="bl" rotWithShape="0" blurRad="127000" dist="25400" dir="5400000">
+            <a:outerShdw blurRad="127000" dist="25400" dir="5400000" algn="bl" rotWithShape="0">
               <a:srgbClr val="000000">
                 <a:alpha val="8000"/>
               </a:srgbClr>
             </a:outerShdw>
           </a:effectLst>
         </p:spPr>
+        <p:txBody>
+          <a:bodyPr/>
+          <a:lstStyle/>
+          <a:p>
+            <a:endParaRPr lang="en-US"/>
+          </a:p>
+        </p:txBody>
       </p:sp>
       <p:sp>
         <p:nvSpPr>
@@ -16144,17 +16658,24 @@
             <a:prstDash val="solid"/>
           </a:ln>
         </p:spPr>
+        <p:txBody>
+          <a:bodyPr/>
+          <a:lstStyle/>
+          <a:p>
+            <a:endParaRPr lang="en-US"/>
+          </a:p>
+        </p:txBody>
       </p:sp>
       <p:pic>
         <p:nvPicPr>
-          <p:cNvPr id="22" name="Image 3" descr="preencoded.png">    </p:cNvPr>
+          <p:cNvPr id="22" name="Image 3" descr="preencoded.png"/>
           <p:cNvPicPr>
             <a:picLocks noChangeAspect="1"/>
           </p:cNvPicPr>
           <p:nvPr/>
         </p:nvPicPr>
         <p:blipFill>
-          <a:blip r:embed="rId4"/>
+          <a:blip r:embed="rId6"/>
           <a:stretch>
             <a:fillRect/>
           </a:stretch>
@@ -16190,7 +16711,7 @@
           <a:bodyPr wrap="square" lIns="0" tIns="0" rIns="0" bIns="0" rtlCol="0" anchor="ctr"/>
           <a:lstStyle/>
           <a:p>
-            <a:pPr indent="0" marL="0">
+            <a:pPr marL="0" indent="0">
               <a:buNone/>
             </a:pPr>
             <a:r>
@@ -16229,7 +16750,7 @@
           <a:bodyPr wrap="square" lIns="0" tIns="0" rIns="0" bIns="0" rtlCol="0" anchor="ctr"/>
           <a:lstStyle/>
           <a:p>
-            <a:pPr indent="0" marL="0">
+            <a:pPr marL="0" indent="0">
               <a:buNone/>
             </a:pPr>
             <a:r>
@@ -16271,13 +16792,20 @@
             <a:prstDash val="solid"/>
           </a:ln>
           <a:effectLst>
-            <a:outerShdw sx="100000" sy="100000" kx="0" ky="0" algn="bl" rotWithShape="0" blurRad="127000" dist="25400" dir="5400000">
+            <a:outerShdw blurRad="127000" dist="25400" dir="5400000" algn="bl" rotWithShape="0">
               <a:srgbClr val="000000">
                 <a:alpha val="8000"/>
               </a:srgbClr>
             </a:outerShdw>
           </a:effectLst>
         </p:spPr>
+        <p:txBody>
+          <a:bodyPr/>
+          <a:lstStyle/>
+          <a:p>
+            <a:endParaRPr lang="en-US"/>
+          </a:p>
+        </p:txBody>
       </p:sp>
       <p:sp>
         <p:nvSpPr>
@@ -16303,17 +16831,24 @@
             <a:prstDash val="solid"/>
           </a:ln>
         </p:spPr>
+        <p:txBody>
+          <a:bodyPr/>
+          <a:lstStyle/>
+          <a:p>
+            <a:endParaRPr lang="en-US"/>
+          </a:p>
+        </p:txBody>
       </p:sp>
       <p:pic>
         <p:nvPicPr>
-          <p:cNvPr id="27" name="Image 4" descr="preencoded.png">    </p:cNvPr>
+          <p:cNvPr id="27" name="Image 4" descr="preencoded.png"/>
           <p:cNvPicPr>
             <a:picLocks noChangeAspect="1"/>
           </p:cNvPicPr>
           <p:nvPr/>
         </p:nvPicPr>
         <p:blipFill>
-          <a:blip r:embed="rId5"/>
+          <a:blip r:embed="rId7"/>
           <a:stretch>
             <a:fillRect/>
           </a:stretch>
@@ -16349,7 +16884,7 @@
           <a:bodyPr wrap="square" lIns="0" tIns="0" rIns="0" bIns="0" rtlCol="0" anchor="ctr"/>
           <a:lstStyle/>
           <a:p>
-            <a:pPr indent="0" marL="0">
+            <a:pPr marL="0" indent="0">
               <a:buNone/>
             </a:pPr>
             <a:r>
@@ -16388,7 +16923,7 @@
           <a:bodyPr wrap="square" lIns="0" tIns="0" rIns="0" bIns="0" rtlCol="0" anchor="ctr"/>
           <a:lstStyle/>
           <a:p>
-            <a:pPr indent="0" marL="0">
+            <a:pPr marL="0" indent="0">
               <a:buNone/>
             </a:pPr>
             <a:r>
@@ -16430,13 +16965,20 @@
             <a:prstDash val="solid"/>
           </a:ln>
           <a:effectLst>
-            <a:outerShdw sx="100000" sy="100000" kx="0" ky="0" algn="bl" rotWithShape="0" blurRad="127000" dist="25400" dir="5400000">
+            <a:outerShdw blurRad="127000" dist="25400" dir="5400000" algn="bl" rotWithShape="0">
               <a:srgbClr val="000000">
                 <a:alpha val="8000"/>
               </a:srgbClr>
             </a:outerShdw>
           </a:effectLst>
         </p:spPr>
+        <p:txBody>
+          <a:bodyPr/>
+          <a:lstStyle/>
+          <a:p>
+            <a:endParaRPr lang="en-US"/>
+          </a:p>
+        </p:txBody>
       </p:sp>
       <p:sp>
         <p:nvSpPr>
@@ -16462,17 +17004,24 @@
             <a:prstDash val="solid"/>
           </a:ln>
         </p:spPr>
+        <p:txBody>
+          <a:bodyPr/>
+          <a:lstStyle/>
+          <a:p>
+            <a:endParaRPr lang="en-US"/>
+          </a:p>
+        </p:txBody>
       </p:sp>
       <p:pic>
         <p:nvPicPr>
-          <p:cNvPr id="32" name="Image 5" descr="preencoded.png">    </p:cNvPr>
+          <p:cNvPr id="32" name="Image 5" descr="preencoded.png"/>
           <p:cNvPicPr>
             <a:picLocks noChangeAspect="1"/>
           </p:cNvPicPr>
           <p:nvPr/>
         </p:nvPicPr>
         <p:blipFill>
-          <a:blip r:embed="rId6"/>
+          <a:blip r:embed="rId8"/>
           <a:stretch>
             <a:fillRect/>
           </a:stretch>
@@ -16508,7 +17057,7 @@
           <a:bodyPr wrap="square" lIns="0" tIns="0" rIns="0" bIns="0" rtlCol="0" anchor="ctr"/>
           <a:lstStyle/>
           <a:p>
-            <a:pPr indent="0" marL="0">
+            <a:pPr marL="0" indent="0">
               <a:buNone/>
             </a:pPr>
             <a:r>
@@ -16547,7 +17096,7 @@
           <a:bodyPr wrap="square" lIns="0" tIns="0" rIns="0" bIns="0" rtlCol="0" anchor="ctr"/>
           <a:lstStyle/>
           <a:p>
-            <a:pPr indent="0" marL="0">
+            <a:pPr marL="0" indent="0">
               <a:buNone/>
             </a:pPr>
             <a:r>
@@ -16586,7 +17135,7 @@
           <a:bodyPr wrap="square" lIns="0" tIns="0" rIns="0" bIns="0" rtlCol="0" anchor="ctr"/>
           <a:lstStyle/>
           <a:p>
-            <a:pPr algn="r" indent="0" marL="0">
+            <a:pPr marL="0" indent="0" algn="r">
               <a:buNone/>
             </a:pPr>
             <a:r>
@@ -16905,4 +17454,325 @@
     </a:ext>
   </a:extLst>
 </a:theme>
+</file>
+
+<file path=ppt/theme/theme2.xml><?xml version="1.0" encoding="utf-8"?>
+<a:theme xmlns:a="http://schemas.openxmlformats.org/drawingml/2006/main" name="Office Theme">
+  <a:themeElements>
+    <a:clrScheme name="Office">
+      <a:dk1>
+        <a:sysClr val="windowText" lastClr="000000"/>
+      </a:dk1>
+      <a:lt1>
+        <a:sysClr val="window" lastClr="FFFFFF"/>
+      </a:lt1>
+      <a:dk2>
+        <a:srgbClr val="0E2841"/>
+      </a:dk2>
+      <a:lt2>
+        <a:srgbClr val="E8E8E8"/>
+      </a:lt2>
+      <a:accent1>
+        <a:srgbClr val="156082"/>
+      </a:accent1>
+      <a:accent2>
+        <a:srgbClr val="E97132"/>
+      </a:accent2>
+      <a:accent3>
+        <a:srgbClr val="196B24"/>
+      </a:accent3>
+      <a:accent4>
+        <a:srgbClr val="0F9ED5"/>
+      </a:accent4>
+      <a:accent5>
+        <a:srgbClr val="A02B93"/>
+      </a:accent5>
+      <a:accent6>
+        <a:srgbClr val="4EA72E"/>
+      </a:accent6>
+      <a:hlink>
+        <a:srgbClr val="467886"/>
+      </a:hlink>
+      <a:folHlink>
+        <a:srgbClr val="96607D"/>
+      </a:folHlink>
+    </a:clrScheme>
+    <a:fontScheme name="Office">
+      <a:majorFont>
+        <a:latin typeface="Aptos Display" panose="02110004020202020204"/>
+        <a:ea typeface=""/>
+        <a:cs typeface=""/>
+        <a:font script="Jpan" typeface="游ゴシック Light"/>
+        <a:font script="Hang" typeface="맑은 고딕"/>
+        <a:font script="Hans" typeface="等线 Light"/>
+        <a:font script="Hant" typeface="新細明體"/>
+        <a:font script="Arab" typeface="Times New Roman"/>
+        <a:font script="Hebr" typeface="Times New Roman"/>
+        <a:font script="Thai" typeface="Angsana New"/>
+        <a:font script="Ethi" typeface="Nyala"/>
+        <a:font script="Beng" typeface="Vrinda"/>
+        <a:font script="Gujr" typeface="Shruti"/>
+        <a:font script="Khmr" typeface="MoolBoran"/>
+        <a:font script="Knda" typeface="Tunga"/>
+        <a:font script="Guru" typeface="Raavi"/>
+        <a:font script="Cans" typeface="Euphemia"/>
+        <a:font script="Cher" typeface="Plantagenet Cherokee"/>
+        <a:font script="Yiii" typeface="Microsoft Yi Baiti"/>
+        <a:font script="Tibt" typeface="Microsoft Himalaya"/>
+        <a:font script="Thaa" typeface="MV Boli"/>
+        <a:font script="Deva" typeface="Mangal"/>
+        <a:font script="Telu" typeface="Gautami"/>
+        <a:font script="Taml" typeface="Latha"/>
+        <a:font script="Syrc" typeface="Estrangelo Edessa"/>
+        <a:font script="Orya" typeface="Kalinga"/>
+        <a:font script="Mlym" typeface="Kartika"/>
+        <a:font script="Laoo" typeface="DokChampa"/>
+        <a:font script="Sinh" typeface="Iskoola Pota"/>
+        <a:font script="Mong" typeface="Mongolian Baiti"/>
+        <a:font script="Viet" typeface="Times New Roman"/>
+        <a:font script="Uigh" typeface="Microsoft Uighur"/>
+        <a:font script="Geor" typeface="Sylfaen"/>
+        <a:font script="Armn" typeface="Arial"/>
+        <a:font script="Bugi" typeface="Leelawadee UI"/>
+        <a:font script="Bopo" typeface="Microsoft JhengHei"/>
+        <a:font script="Java" typeface="Javanese Text"/>
+        <a:font script="Lisu" typeface="Segoe UI"/>
+        <a:font script="Mymr" typeface="Myanmar Text"/>
+        <a:font script="Nkoo" typeface="Ebrima"/>
+        <a:font script="Olck" typeface="Nirmala UI"/>
+        <a:font script="Osma" typeface="Ebrima"/>
+        <a:font script="Phag" typeface="Phagspa"/>
+        <a:font script="Syrn" typeface="Estrangelo Edessa"/>
+        <a:font script="Syrj" typeface="Estrangelo Edessa"/>
+        <a:font script="Syre" typeface="Estrangelo Edessa"/>
+        <a:font script="Sora" typeface="Nirmala UI"/>
+        <a:font script="Tale" typeface="Microsoft Tai Le"/>
+        <a:font script="Talu" typeface="Microsoft New Tai Lue"/>
+        <a:font script="Tfng" typeface="Ebrima"/>
+      </a:majorFont>
+      <a:minorFont>
+        <a:latin typeface="Aptos" panose="02110004020202020204"/>
+        <a:ea typeface=""/>
+        <a:cs typeface=""/>
+        <a:font script="Jpan" typeface="游ゴシック"/>
+        <a:font script="Hang" typeface="맑은 고딕"/>
+        <a:font script="Hans" typeface="等线"/>
+        <a:font script="Hant" typeface="新細明體"/>
+        <a:font script="Arab" typeface="Arial"/>
+        <a:font script="Hebr" typeface="Arial"/>
+        <a:font script="Thai" typeface="Cordia New"/>
+        <a:font script="Ethi" typeface="Nyala"/>
+        <a:font script="Beng" typeface="Vrinda"/>
+        <a:font script="Gujr" typeface="Shruti"/>
+        <a:font script="Khmr" typeface="DaunPenh"/>
+        <a:font script="Knda" typeface="Tunga"/>
+        <a:font script="Guru" typeface="Raavi"/>
+        <a:font script="Cans" typeface="Euphemia"/>
+        <a:font script="Cher" typeface="Plantagenet Cherokee"/>
+        <a:font script="Yiii" typeface="Microsoft Yi Baiti"/>
+        <a:font script="Tibt" typeface="Microsoft Himalaya"/>
+        <a:font script="Thaa" typeface="MV Boli"/>
+        <a:font script="Deva" typeface="Mangal"/>
+        <a:font script="Telu" typeface="Gautami"/>
+        <a:font script="Taml" typeface="Latha"/>
+        <a:font script="Syrc" typeface="Estrangelo Edessa"/>
+        <a:font script="Orya" typeface="Kalinga"/>
+        <a:font script="Mlym" typeface="Kartika"/>
+        <a:font script="Laoo" typeface="DokChampa"/>
+        <a:font script="Sinh" typeface="Iskoola Pota"/>
+        <a:font script="Mong" typeface="Mongolian Baiti"/>
+        <a:font script="Viet" typeface="Arial"/>
+        <a:font script="Uigh" typeface="Microsoft Uighur"/>
+        <a:font script="Geor" typeface="Sylfaen"/>
+        <a:font script="Armn" typeface="Arial"/>
+        <a:font script="Bugi" typeface="Leelawadee UI"/>
+        <a:font script="Bopo" typeface="Microsoft JhengHei"/>
+        <a:font script="Java" typeface="Javanese Text"/>
+        <a:font script="Lisu" typeface="Segoe UI"/>
+        <a:font script="Mymr" typeface="Myanmar Text"/>
+        <a:font script="Nkoo" typeface="Ebrima"/>
+        <a:font script="Olck" typeface="Nirmala UI"/>
+        <a:font script="Osma" typeface="Ebrima"/>
+        <a:font script="Phag" typeface="Phagspa"/>
+        <a:font script="Syrn" typeface="Estrangelo Edessa"/>
+        <a:font script="Syrj" typeface="Estrangelo Edessa"/>
+        <a:font script="Syre" typeface="Estrangelo Edessa"/>
+        <a:font script="Sora" typeface="Nirmala UI"/>
+        <a:font script="Tale" typeface="Microsoft Tai Le"/>
+        <a:font script="Talu" typeface="Microsoft New Tai Lue"/>
+        <a:font script="Tfng" typeface="Ebrima"/>
+      </a:minorFont>
+    </a:fontScheme>
+    <a:fmtScheme name="Office">
+      <a:fillStyleLst>
+        <a:solidFill>
+          <a:schemeClr val="phClr"/>
+        </a:solidFill>
+        <a:gradFill rotWithShape="1">
+          <a:gsLst>
+            <a:gs pos="0">
+              <a:schemeClr val="phClr">
+                <a:lumMod val="110000"/>
+                <a:satMod val="105000"/>
+                <a:tint val="67000"/>
+              </a:schemeClr>
+            </a:gs>
+            <a:gs pos="50000">
+              <a:schemeClr val="phClr">
+                <a:lumMod val="105000"/>
+                <a:satMod val="103000"/>
+                <a:tint val="73000"/>
+              </a:schemeClr>
+            </a:gs>
+            <a:gs pos="100000">
+              <a:schemeClr val="phClr">
+                <a:lumMod val="105000"/>
+                <a:satMod val="109000"/>
+                <a:tint val="81000"/>
+              </a:schemeClr>
+            </a:gs>
+          </a:gsLst>
+          <a:lin ang="5400000" scaled="0"/>
+        </a:gradFill>
+        <a:gradFill rotWithShape="1">
+          <a:gsLst>
+            <a:gs pos="0">
+              <a:schemeClr val="phClr">
+                <a:satMod val="103000"/>
+                <a:lumMod val="102000"/>
+                <a:tint val="94000"/>
+              </a:schemeClr>
+            </a:gs>
+            <a:gs pos="50000">
+              <a:schemeClr val="phClr">
+                <a:satMod val="110000"/>
+                <a:lumMod val="100000"/>
+                <a:shade val="100000"/>
+              </a:schemeClr>
+            </a:gs>
+            <a:gs pos="100000">
+              <a:schemeClr val="phClr">
+                <a:lumMod val="99000"/>
+                <a:satMod val="120000"/>
+                <a:shade val="78000"/>
+              </a:schemeClr>
+            </a:gs>
+          </a:gsLst>
+          <a:lin ang="5400000" scaled="0"/>
+        </a:gradFill>
+      </a:fillStyleLst>
+      <a:lnStyleLst>
+        <a:ln w="12700" cap="flat" cmpd="sng" algn="ctr">
+          <a:solidFill>
+            <a:schemeClr val="phClr"/>
+          </a:solidFill>
+          <a:prstDash val="solid"/>
+          <a:miter lim="800000"/>
+        </a:ln>
+        <a:ln w="19050" cap="flat" cmpd="sng" algn="ctr">
+          <a:solidFill>
+            <a:schemeClr val="phClr"/>
+          </a:solidFill>
+          <a:prstDash val="solid"/>
+          <a:miter lim="800000"/>
+        </a:ln>
+        <a:ln w="25400" cap="flat" cmpd="sng" algn="ctr">
+          <a:solidFill>
+            <a:schemeClr val="phClr"/>
+          </a:solidFill>
+          <a:prstDash val="solid"/>
+          <a:miter lim="800000"/>
+        </a:ln>
+      </a:lnStyleLst>
+      <a:effectStyleLst>
+        <a:effectStyle>
+          <a:effectLst/>
+        </a:effectStyle>
+        <a:effectStyle>
+          <a:effectLst/>
+        </a:effectStyle>
+        <a:effectStyle>
+          <a:effectLst>
+            <a:outerShdw blurRad="57150" dist="19050" dir="5400000" algn="ctr" rotWithShape="0">
+              <a:srgbClr val="000000">
+                <a:alpha val="63000"/>
+              </a:srgbClr>
+            </a:outerShdw>
+          </a:effectLst>
+        </a:effectStyle>
+      </a:effectStyleLst>
+      <a:bgFillStyleLst>
+        <a:solidFill>
+          <a:schemeClr val="phClr"/>
+        </a:solidFill>
+        <a:solidFill>
+          <a:schemeClr val="phClr">
+            <a:tint val="95000"/>
+            <a:satMod val="170000"/>
+          </a:schemeClr>
+        </a:solidFill>
+        <a:gradFill rotWithShape="1">
+          <a:gsLst>
+            <a:gs pos="0">
+              <a:schemeClr val="phClr">
+                <a:tint val="93000"/>
+                <a:satMod val="150000"/>
+                <a:shade val="98000"/>
+                <a:lumMod val="102000"/>
+              </a:schemeClr>
+            </a:gs>
+            <a:gs pos="50000">
+              <a:schemeClr val="phClr">
+                <a:tint val="98000"/>
+                <a:satMod val="130000"/>
+                <a:shade val="90000"/>
+                <a:lumMod val="103000"/>
+              </a:schemeClr>
+            </a:gs>
+            <a:gs pos="100000">
+              <a:schemeClr val="phClr">
+                <a:shade val="63000"/>
+                <a:satMod val="120000"/>
+              </a:schemeClr>
+            </a:gs>
+          </a:gsLst>
+          <a:lin ang="5400000" scaled="0"/>
+        </a:gradFill>
+      </a:bgFillStyleLst>
+    </a:fmtScheme>
+  </a:themeElements>
+  <a:objectDefaults>
+    <a:lnDef>
+      <a:spPr/>
+      <a:bodyPr/>
+      <a:lstStyle/>
+      <a:style>
+        <a:lnRef idx="2">
+          <a:schemeClr val="accent1"/>
+        </a:lnRef>
+        <a:fillRef idx="0">
+          <a:schemeClr val="accent1"/>
+        </a:fillRef>
+        <a:effectRef idx="1">
+          <a:schemeClr val="accent1"/>
+        </a:effectRef>
+        <a:fontRef idx="minor">
+          <a:schemeClr val="tx1"/>
+        </a:fontRef>
+      </a:style>
+    </a:lnDef>
+  </a:objectDefaults>
+  <a:extraClrSchemeLst/>
+  <a:extLst>
+    <a:ext uri="{05A4C25C-085E-4340-85A3-A5531E510DB2}">
+      <thm15:themeFamily xmlns:thm15="http://schemas.microsoft.com/office/thememl/2012/main" name="Office Theme" id="{2E142A2C-CD16-42D6-873A-C26D2A0506FA}" vid="{1BDDFF52-6CD6-40A5-AB3C-68EB2F1E4D0A}"/>
+    </a:ext>
+  </a:extLst>
+</a:theme>
+</file>
+
+<file path=docMetadata/LabelInfo.xml><?xml version="1.0" encoding="utf-8"?>
+<clbl:labelList xmlns:clbl="http://schemas.microsoft.com/office/2020/mipLabelMetadata">
+  <clbl:label id="{0cf7ac0a-4681-4823-ab0b-04ef02c5f873}" enabled="1" method="Standard" siteId="{42f7676c-f455-423c-82f6-dc2d99791af7}" contentBits="0" removed="0"/>
+</clbl:labelList>
 </file>